--- a/examples/ai-2030-slides/ai2030_talk.pptx
+++ b/examples/ai-2030-slides/ai2030_talk.pptx
@@ -2648,9 +2648,33 @@
           <a:chExt cx="0" cy="0"/>
         </a:xfrm>
       </p:grpSpPr>
-      <p:sp>
-        <p:nvSpPr>
-          <p:cNvPr id="2" name="Shape 0"/>
+      <p:pic>
+        <p:nvPicPr>
+          <p:cNvPr id="2" name="Image 0" descr="assets/bg_grid.png">    </p:cNvPr>
+          <p:cNvPicPr>
+            <a:picLocks noChangeAspect="1"/>
+          </p:cNvPicPr>
+          <p:nvPr/>
+        </p:nvPicPr>
+        <p:blipFill>
+          <a:blip r:embed="rId1"/>
+          <a:stretch>
+            <a:fillRect/>
+          </a:stretch>
+        </p:blipFill>
+        <p:spPr>
+          <a:xfrm>
+            <a:off x="0" y="0"/>
+            <a:ext cx="12188952" cy="6858000"/>
+          </a:xfrm>
+          <a:prstGeom prst="rect">
+            <a:avLst/>
+          </a:prstGeom>
+        </p:spPr>
+      </p:pic>
+      <p:sp>
+        <p:nvSpPr>
+          <p:cNvPr id="3" name="Shape 0"/>
           <p:cNvSpPr/>
           <p:nvPr/>
         </p:nvSpPr>
@@ -2670,7 +2694,7 @@
       </p:sp>
       <p:sp>
         <p:nvSpPr>
-          <p:cNvPr id="3" name="Text 1"/>
+          <p:cNvPr id="4" name="Text 1"/>
           <p:cNvSpPr/>
           <p:nvPr/>
         </p:nvSpPr>
@@ -2709,7 +2733,7 @@
       </p:sp>
       <p:sp>
         <p:nvSpPr>
-          <p:cNvPr id="4" name="Text 2"/>
+          <p:cNvPr id="5" name="Text 2"/>
           <p:cNvSpPr/>
           <p:nvPr/>
         </p:nvSpPr>
@@ -2748,7 +2772,7 @@
       </p:sp>
       <p:sp>
         <p:nvSpPr>
-          <p:cNvPr id="5" name="Text 3"/>
+          <p:cNvPr id="6" name="Text 3"/>
           <p:cNvSpPr/>
           <p:nvPr/>
         </p:nvSpPr>
@@ -2815,7 +2839,7 @@
       </p:sp>
       <p:sp>
         <p:nvSpPr>
-          <p:cNvPr id="6" name="Text 4"/>
+          <p:cNvPr id="7" name="Text 4"/>
           <p:cNvSpPr/>
           <p:nvPr/>
         </p:nvSpPr>
@@ -2854,7 +2878,7 @@
       </p:sp>
       <p:sp>
         <p:nvSpPr>
-          <p:cNvPr id="7" name="Text 5"/>
+          <p:cNvPr id="8" name="Text 5"/>
           <p:cNvSpPr/>
           <p:nvPr/>
         </p:nvSpPr>
@@ -2935,7 +2959,7 @@
       </p:sp>
       <p:sp>
         <p:nvSpPr>
-          <p:cNvPr id="8" name="Text 6"/>
+          <p:cNvPr id="9" name="Text 6"/>
           <p:cNvSpPr/>
           <p:nvPr/>
         </p:nvSpPr>
@@ -3031,7 +3055,7 @@
       </p:sp>
       <p:sp>
         <p:nvSpPr>
-          <p:cNvPr id="9" name="Shape 7"/>
+          <p:cNvPr id="10" name="Shape 7"/>
           <p:cNvSpPr/>
           <p:nvPr/>
         </p:nvSpPr>
@@ -3051,7 +3075,7 @@
       </p:sp>
       <p:sp>
         <p:nvSpPr>
-          <p:cNvPr id="10" name="Text 8"/>
+          <p:cNvPr id="11" name="Text 8"/>
           <p:cNvSpPr/>
           <p:nvPr/>
         </p:nvSpPr>
@@ -3090,7 +3114,7 @@
       </p:sp>
       <p:sp>
         <p:nvSpPr>
-          <p:cNvPr id="11" name="Shape 9"/>
+          <p:cNvPr id="12" name="Shape 9"/>
           <p:cNvSpPr/>
           <p:nvPr/>
         </p:nvSpPr>
@@ -3110,7 +3134,7 @@
       </p:sp>
       <p:sp>
         <p:nvSpPr>
-          <p:cNvPr id="12" name="Text 10"/>
+          <p:cNvPr id="13" name="Text 10"/>
           <p:cNvSpPr/>
           <p:nvPr/>
         </p:nvSpPr>
@@ -3149,7 +3173,7 @@
       </p:sp>
       <p:sp>
         <p:nvSpPr>
-          <p:cNvPr id="13" name="Text 11"/>
+          <p:cNvPr id="14" name="Text 11"/>
           <p:cNvSpPr/>
           <p:nvPr/>
         </p:nvSpPr>
@@ -13861,9 +13885,33 @@
           <a:chExt cx="0" cy="0"/>
         </a:xfrm>
       </p:grpSpPr>
-      <p:sp>
-        <p:nvSpPr>
-          <p:cNvPr id="2" name="Text 0"/>
+      <p:pic>
+        <p:nvPicPr>
+          <p:cNvPr id="2" name="Image 0" descr="assets/bg_grid.png">    </p:cNvPr>
+          <p:cNvPicPr>
+            <a:picLocks noChangeAspect="1"/>
+          </p:cNvPicPr>
+          <p:nvPr/>
+        </p:nvPicPr>
+        <p:blipFill>
+          <a:blip r:embed="rId1"/>
+          <a:stretch>
+            <a:fillRect/>
+          </a:stretch>
+        </p:blipFill>
+        <p:spPr>
+          <a:xfrm>
+            <a:off x="0" y="0"/>
+            <a:ext cx="12188952" cy="6858000"/>
+          </a:xfrm>
+          <a:prstGeom prst="rect">
+            <a:avLst/>
+          </a:prstGeom>
+        </p:spPr>
+      </p:pic>
+      <p:sp>
+        <p:nvSpPr>
+          <p:cNvPr id="3" name="Text 0"/>
           <p:cNvSpPr/>
           <p:nvPr/>
         </p:nvSpPr>
@@ -13930,7 +13978,7 @@
       </p:sp>
       <p:sp>
         <p:nvSpPr>
-          <p:cNvPr id="3" name="Shape 1"/>
+          <p:cNvPr id="4" name="Shape 1"/>
           <p:cNvSpPr/>
           <p:nvPr/>
         </p:nvSpPr>
@@ -13950,7 +13998,7 @@
       </p:sp>
       <p:sp>
         <p:nvSpPr>
-          <p:cNvPr id="4" name="Shape 2"/>
+          <p:cNvPr id="5" name="Shape 2"/>
           <p:cNvSpPr/>
           <p:nvPr/>
         </p:nvSpPr>
@@ -13970,7 +14018,7 @@
       </p:sp>
       <p:sp>
         <p:nvSpPr>
-          <p:cNvPr id="5" name="Text 3"/>
+          <p:cNvPr id="6" name="Text 3"/>
           <p:cNvSpPr/>
           <p:nvPr/>
         </p:nvSpPr>
@@ -14009,7 +14057,7 @@
       </p:sp>
       <p:sp>
         <p:nvSpPr>
-          <p:cNvPr id="6" name="Text 4"/>
+          <p:cNvPr id="7" name="Text 4"/>
           <p:cNvSpPr/>
           <p:nvPr/>
         </p:nvSpPr>
@@ -14048,7 +14096,7 @@
       </p:sp>
       <p:sp>
         <p:nvSpPr>
-          <p:cNvPr id="7" name="Text 5"/>
+          <p:cNvPr id="8" name="Text 5"/>
           <p:cNvSpPr/>
           <p:nvPr/>
         </p:nvSpPr>
@@ -14087,7 +14135,7 @@
       </p:sp>
       <p:sp>
         <p:nvSpPr>
-          <p:cNvPr id="8" name="Text 6"/>
+          <p:cNvPr id="9" name="Text 6"/>
           <p:cNvSpPr/>
           <p:nvPr/>
         </p:nvSpPr>
@@ -14140,7 +14188,7 @@
       </p:sp>
       <p:sp>
         <p:nvSpPr>
-          <p:cNvPr id="9" name="Text 7"/>
+          <p:cNvPr id="10" name="Text 7"/>
           <p:cNvSpPr/>
           <p:nvPr/>
         </p:nvSpPr>
@@ -14179,7 +14227,7 @@
       </p:sp>
       <p:sp>
         <p:nvSpPr>
-          <p:cNvPr id="10" name="Shape 8"/>
+          <p:cNvPr id="11" name="Shape 8"/>
           <p:cNvSpPr/>
           <p:nvPr/>
         </p:nvSpPr>
@@ -14199,7 +14247,7 @@
       </p:sp>
       <p:sp>
         <p:nvSpPr>
-          <p:cNvPr id="11" name="Text 9"/>
+          <p:cNvPr id="12" name="Text 9"/>
           <p:cNvSpPr/>
           <p:nvPr/>
         </p:nvSpPr>
@@ -14238,7 +14286,7 @@
       </p:sp>
       <p:sp>
         <p:nvSpPr>
-          <p:cNvPr id="12" name="Text 10"/>
+          <p:cNvPr id="13" name="Text 10"/>
           <p:cNvSpPr/>
           <p:nvPr/>
         </p:nvSpPr>
@@ -14277,7 +14325,7 @@
       </p:sp>
       <p:sp>
         <p:nvSpPr>
-          <p:cNvPr id="13" name="Text 11"/>
+          <p:cNvPr id="14" name="Text 11"/>
           <p:cNvSpPr/>
           <p:nvPr/>
         </p:nvSpPr>
@@ -14316,7 +14364,7 @@
       </p:sp>
       <p:sp>
         <p:nvSpPr>
-          <p:cNvPr id="14" name="Shape 12"/>
+          <p:cNvPr id="15" name="Shape 12"/>
           <p:cNvSpPr/>
           <p:nvPr/>
         </p:nvSpPr>
@@ -14336,7 +14384,7 @@
       </p:sp>
       <p:sp>
         <p:nvSpPr>
-          <p:cNvPr id="15" name="Text 13"/>
+          <p:cNvPr id="16" name="Text 13"/>
           <p:cNvSpPr/>
           <p:nvPr/>
         </p:nvSpPr>
@@ -14445,7 +14493,7 @@
       </p:sp>
       <p:sp>
         <p:nvSpPr>
-          <p:cNvPr id="16" name="Text 14"/>
+          <p:cNvPr id="17" name="Text 14"/>
           <p:cNvSpPr/>
           <p:nvPr/>
         </p:nvSpPr>
@@ -14510,9 +14558,33 @@
           <a:chExt cx="0" cy="0"/>
         </a:xfrm>
       </p:grpSpPr>
-      <p:sp>
-        <p:nvSpPr>
-          <p:cNvPr id="2" name="Text 0"/>
+      <p:pic>
+        <p:nvPicPr>
+          <p:cNvPr id="2" name="Image 0" descr="assets/bg_grid.png">    </p:cNvPr>
+          <p:cNvPicPr>
+            <a:picLocks noChangeAspect="1"/>
+          </p:cNvPicPr>
+          <p:nvPr/>
+        </p:nvPicPr>
+        <p:blipFill>
+          <a:blip r:embed="rId1"/>
+          <a:stretch>
+            <a:fillRect/>
+          </a:stretch>
+        </p:blipFill>
+        <p:spPr>
+          <a:xfrm>
+            <a:off x="0" y="0"/>
+            <a:ext cx="12188952" cy="6858000"/>
+          </a:xfrm>
+          <a:prstGeom prst="rect">
+            <a:avLst/>
+          </a:prstGeom>
+        </p:spPr>
+      </p:pic>
+      <p:sp>
+        <p:nvSpPr>
+          <p:cNvPr id="3" name="Text 0"/>
           <p:cNvSpPr/>
           <p:nvPr/>
         </p:nvSpPr>
@@ -14554,7 +14626,7 @@
       </p:sp>
       <p:sp>
         <p:nvSpPr>
-          <p:cNvPr id="3" name="Shape 1"/>
+          <p:cNvPr id="4" name="Shape 1"/>
           <p:cNvSpPr/>
           <p:nvPr/>
         </p:nvSpPr>
@@ -14574,7 +14646,7 @@
       </p:sp>
       <p:sp>
         <p:nvSpPr>
-          <p:cNvPr id="4" name="Text 2"/>
+          <p:cNvPr id="5" name="Text 2"/>
           <p:cNvSpPr/>
           <p:nvPr/>
         </p:nvSpPr>
@@ -14616,7 +14688,7 @@
       </p:sp>
       <p:sp>
         <p:nvSpPr>
-          <p:cNvPr id="5" name="Shape 3"/>
+          <p:cNvPr id="6" name="Shape 3"/>
           <p:cNvSpPr/>
           <p:nvPr/>
         </p:nvSpPr>
@@ -14636,7 +14708,7 @@
       </p:sp>
       <p:sp>
         <p:nvSpPr>
-          <p:cNvPr id="6" name="Shape 4"/>
+          <p:cNvPr id="7" name="Shape 4"/>
           <p:cNvSpPr/>
           <p:nvPr/>
         </p:nvSpPr>
@@ -14656,7 +14728,7 @@
       </p:sp>
       <p:sp>
         <p:nvSpPr>
-          <p:cNvPr id="7" name="Shape 5"/>
+          <p:cNvPr id="8" name="Shape 5"/>
           <p:cNvSpPr/>
           <p:nvPr/>
         </p:nvSpPr>
@@ -14676,7 +14748,7 @@
       </p:sp>
       <p:sp>
         <p:nvSpPr>
-          <p:cNvPr id="8" name="Text 6"/>
+          <p:cNvPr id="9" name="Text 6"/>
           <p:cNvSpPr/>
           <p:nvPr/>
         </p:nvSpPr>
@@ -14715,7 +14787,7 @@
       </p:sp>
       <p:sp>
         <p:nvSpPr>
-          <p:cNvPr id="9" name="Text 7"/>
+          <p:cNvPr id="10" name="Text 7"/>
           <p:cNvSpPr/>
           <p:nvPr/>
         </p:nvSpPr>
@@ -14754,7 +14826,7 @@
       </p:sp>
       <p:sp>
         <p:nvSpPr>
-          <p:cNvPr id="10" name="Text 8"/>
+          <p:cNvPr id="11" name="Text 8"/>
           <p:cNvSpPr/>
           <p:nvPr/>
         </p:nvSpPr>
@@ -14793,7 +14865,7 @@
       </p:sp>
       <p:sp>
         <p:nvSpPr>
-          <p:cNvPr id="11" name="Text 9"/>
+          <p:cNvPr id="12" name="Text 9"/>
           <p:cNvSpPr/>
           <p:nvPr/>
         </p:nvSpPr>
@@ -14832,7 +14904,7 @@
       </p:sp>
       <p:sp>
         <p:nvSpPr>
-          <p:cNvPr id="12" name="Shape 10"/>
+          <p:cNvPr id="13" name="Shape 10"/>
           <p:cNvSpPr/>
           <p:nvPr/>
         </p:nvSpPr>

--- a/examples/ai-2030-slides/ai2030_talk.pptx
+++ b/examples/ai-2030-slides/ai2030_talk.pptx
@@ -2687,7 +2687,7 @@
             <a:avLst/>
           </a:prstGeom>
           <a:solidFill>
-            <a:srgbClr val="1F3A5F"/>
+            <a:srgbClr val="7A3A1D"/>
           </a:solidFill>
           <a:ln/>
         </p:spPr>
@@ -2758,7 +2758,7 @@
             <a:r>
               <a:rPr lang="en-US" sz="1100" spc="100" kern="0" dirty="0">
                 <a:solidFill>
-                  <a:srgbClr val="AFC4DD"/>
+                  <a:srgbClr val="EFC7AE"/>
                 </a:solidFill>
                 <a:latin typeface="Microsoft YaHei" pitchFamily="34" charset="0"/>
                 <a:ea typeface="Microsoft YaHei" pitchFamily="34" charset="-122"/>
@@ -2864,7 +2864,7 @@
             <a:r>
               <a:rPr lang="en-US" sz="1100" spc="100" kern="0" dirty="0">
                 <a:solidFill>
-                  <a:srgbClr val="AFC4DD"/>
+                  <a:srgbClr val="EFC7AE"/>
                 </a:solidFill>
                 <a:latin typeface="Microsoft YaHei" pitchFamily="34" charset="0"/>
                 <a:ea typeface="Microsoft YaHei" pitchFamily="34" charset="-122"/>
@@ -2987,7 +2987,7 @@
             <a:r>
               <a:rPr lang="en-US" sz="4200" b="1" dirty="0">
                 <a:solidFill>
-                  <a:srgbClr val="1F3A5F"/>
+                  <a:srgbClr val="7A3A1D"/>
                 </a:solidFill>
                 <a:latin typeface="Microsoft YaHei" pitchFamily="34" charset="0"/>
                 <a:ea typeface="Microsoft YaHei" pitchFamily="34" charset="-122"/>
@@ -3004,7 +3004,7 @@
             <a:r>
               <a:rPr lang="en-US" sz="4200" b="1" dirty="0">
                 <a:solidFill>
-                  <a:srgbClr val="1F3A5F"/>
+                  <a:srgbClr val="7A3A1D"/>
                 </a:solidFill>
                 <a:latin typeface="Arial" pitchFamily="34" charset="0"/>
                 <a:ea typeface="Arial" pitchFamily="34" charset="-122"/>
@@ -3021,7 +3021,7 @@
             <a:r>
               <a:rPr lang="en-US" sz="4200" b="1" dirty="0">
                 <a:solidFill>
-                  <a:srgbClr val="1F3A5F"/>
+                  <a:srgbClr val="7A3A1D"/>
                 </a:solidFill>
                 <a:latin typeface="Microsoft YaHei" pitchFamily="34" charset="0"/>
                 <a:ea typeface="Microsoft YaHei" pitchFamily="34" charset="-122"/>
@@ -3041,7 +3041,7 @@
             <a:r>
               <a:rPr lang="en-US" sz="4200" b="1" dirty="0">
                 <a:solidFill>
-                  <a:srgbClr val="1F3A5F"/>
+                  <a:srgbClr val="7A3A1D"/>
                 </a:solidFill>
                 <a:latin typeface="Microsoft YaHei" pitchFamily="34" charset="0"/>
                 <a:ea typeface="Microsoft YaHei" pitchFamily="34" charset="-122"/>
@@ -3068,7 +3068,7 @@
             <a:avLst/>
           </a:prstGeom>
           <a:solidFill>
-            <a:srgbClr val="1F3A5F"/>
+            <a:srgbClr val="7A3A1D"/>
           </a:solidFill>
           <a:ln/>
         </p:spPr>
@@ -3100,7 +3100,7 @@
             <a:r>
               <a:rPr lang="en-US" sz="1600" dirty="0">
                 <a:solidFill>
-                  <a:srgbClr val="6E7681"/>
+                  <a:srgbClr val="6B635A"/>
                 </a:solidFill>
                 <a:latin typeface="Microsoft YaHei" pitchFamily="34" charset="0"/>
                 <a:ea typeface="Microsoft YaHei" pitchFamily="34" charset="-122"/>
@@ -3127,7 +3127,7 @@
             <a:avLst/>
           </a:prstGeom>
           <a:solidFill>
-            <a:srgbClr val="D9DEE6"/>
+            <a:srgbClr val="E4E0D3"/>
           </a:solidFill>
           <a:ln/>
         </p:spPr>
@@ -3159,7 +3159,7 @@
             <a:r>
               <a:rPr lang="en-US" sz="1100" spc="100" kern="0" dirty="0">
                 <a:solidFill>
-                  <a:srgbClr val="6E7681"/>
+                  <a:srgbClr val="6B635A"/>
                 </a:solidFill>
                 <a:latin typeface="Microsoft YaHei" pitchFamily="34" charset="0"/>
                 <a:ea typeface="Microsoft YaHei" pitchFamily="34" charset="-122"/>
@@ -3198,7 +3198,7 @@
             <a:r>
               <a:rPr lang="en-US" sz="1400" dirty="0">
                 <a:solidFill>
-                  <a:srgbClr val="23272E"/>
+                  <a:srgbClr val="2B2823"/>
                 </a:solidFill>
                 <a:latin typeface="Microsoft YaHei" pitchFamily="34" charset="0"/>
                 <a:ea typeface="Microsoft YaHei" pitchFamily="34" charset="-122"/>
@@ -3265,7 +3265,7 @@
             <a:r>
               <a:rPr lang="en-US" sz="1200" b="1" spc="240" kern="0" dirty="0">
                 <a:solidFill>
-                  <a:srgbClr val="2F6FAE"/>
+                  <a:srgbClr val="A8492A"/>
                 </a:solidFill>
                 <a:latin typeface="Microsoft YaHei" pitchFamily="34" charset="0"/>
                 <a:ea typeface="Microsoft YaHei" pitchFamily="34" charset="-122"/>
@@ -3307,7 +3307,7 @@
             <a:r>
               <a:rPr lang="en-US" sz="2500" b="1" dirty="0">
                 <a:solidFill>
-                  <a:srgbClr val="1F3A5F"/>
+                  <a:srgbClr val="7A3A1D"/>
                 </a:solidFill>
                 <a:latin typeface="Microsoft YaHei" pitchFamily="34" charset="0"/>
                 <a:ea typeface="Microsoft YaHei" pitchFamily="34" charset="-122"/>
@@ -3349,7 +3349,7 @@
             <a:r>
               <a:rPr lang="en-US" sz="1200" dirty="0">
                 <a:solidFill>
-                  <a:srgbClr val="6E7681"/>
+                  <a:srgbClr val="6B635A"/>
                 </a:solidFill>
                 <a:latin typeface="Arial" pitchFamily="34" charset="0"/>
                 <a:ea typeface="Arial" pitchFamily="34" charset="-122"/>
@@ -3412,7 +3412,7 @@
             <a:r>
               <a:rPr lang="en-US" sz="1150" dirty="0">
                 <a:solidFill>
-                  <a:srgbClr val="6E7681"/>
+                  <a:srgbClr val="6B635A"/>
                 </a:solidFill>
                 <a:latin typeface="Microsoft YaHei" pitchFamily="34" charset="0"/>
                 <a:ea typeface="Microsoft YaHei" pitchFamily="34" charset="-122"/>
@@ -3426,7 +3426,7 @@
             <a:r>
               <a:rPr lang="en-US" sz="1150" dirty="0">
                 <a:solidFill>
-                  <a:srgbClr val="6E7681"/>
+                  <a:srgbClr val="6B635A"/>
                 </a:solidFill>
                 <a:latin typeface="Arial" pitchFamily="34" charset="0"/>
                 <a:ea typeface="Arial" pitchFamily="34" charset="-122"/>
@@ -3440,7 +3440,7 @@
             <a:r>
               <a:rPr lang="en-US" sz="1150" dirty="0">
                 <a:solidFill>
-                  <a:srgbClr val="6E7681"/>
+                  <a:srgbClr val="6B635A"/>
                 </a:solidFill>
                 <a:latin typeface="Microsoft YaHei" pitchFamily="34" charset="0"/>
                 <a:ea typeface="Microsoft YaHei" pitchFamily="34" charset="-122"/>
@@ -3454,7 +3454,7 @@
             <a:r>
               <a:rPr lang="en-US" sz="1150" dirty="0">
                 <a:solidFill>
-                  <a:srgbClr val="6E7681"/>
+                  <a:srgbClr val="6B635A"/>
                 </a:solidFill>
                 <a:latin typeface="Arial" pitchFamily="34" charset="0"/>
                 <a:ea typeface="Arial" pitchFamily="34" charset="-122"/>
@@ -3468,7 +3468,7 @@
             <a:r>
               <a:rPr lang="en-US" sz="1150" dirty="0">
                 <a:solidFill>
-                  <a:srgbClr val="6E7681"/>
+                  <a:srgbClr val="6B635A"/>
                 </a:solidFill>
                 <a:latin typeface="Microsoft YaHei" pitchFamily="34" charset="0"/>
                 <a:ea typeface="Microsoft YaHei" pitchFamily="34" charset="-122"/>
@@ -3510,7 +3510,7 @@
             <a:r>
               <a:rPr lang="en-US" sz="1350" b="1" dirty="0">
                 <a:solidFill>
-                  <a:srgbClr val="23272E"/>
+                  <a:srgbClr val="2B2823"/>
                 </a:solidFill>
                 <a:latin typeface="Microsoft YaHei" pitchFamily="34" charset="0"/>
                 <a:ea typeface="Microsoft YaHei" pitchFamily="34" charset="-122"/>
@@ -3527,7 +3527,7 @@
             <a:r>
               <a:rPr lang="en-US" sz="1350" dirty="0">
                 <a:solidFill>
-                  <a:srgbClr val="23272E"/>
+                  <a:srgbClr val="2B2823"/>
                 </a:solidFill>
                 <a:latin typeface="Arial" pitchFamily="34" charset="0"/>
                 <a:ea typeface="Arial" pitchFamily="34" charset="-122"/>
@@ -3544,7 +3544,7 @@
             <a:r>
               <a:rPr lang="en-US" sz="1350" dirty="0">
                 <a:solidFill>
-                  <a:srgbClr val="23272E"/>
+                  <a:srgbClr val="2B2823"/>
                 </a:solidFill>
                 <a:latin typeface="Microsoft YaHei" pitchFamily="34" charset="0"/>
                 <a:ea typeface="Microsoft YaHei" pitchFamily="34" charset="-122"/>
@@ -3561,7 +3561,7 @@
             <a:r>
               <a:rPr lang="en-US" sz="1350" dirty="0">
                 <a:solidFill>
-                  <a:srgbClr val="23272E"/>
+                  <a:srgbClr val="2B2823"/>
                 </a:solidFill>
                 <a:latin typeface="Arial" pitchFamily="34" charset="0"/>
                 <a:ea typeface="Arial" pitchFamily="34" charset="-122"/>
@@ -3578,7 +3578,7 @@
             <a:r>
               <a:rPr lang="en-US" sz="1350" dirty="0">
                 <a:solidFill>
-                  <a:srgbClr val="23272E"/>
+                  <a:srgbClr val="2B2823"/>
                 </a:solidFill>
                 <a:latin typeface="Microsoft YaHei" pitchFamily="34" charset="0"/>
                 <a:ea typeface="Microsoft YaHei" pitchFamily="34" charset="-122"/>
@@ -3595,7 +3595,7 @@
             <a:r>
               <a:rPr lang="en-US" sz="1350" dirty="0">
                 <a:solidFill>
-                  <a:srgbClr val="23272E"/>
+                  <a:srgbClr val="2B2823"/>
                 </a:solidFill>
                 <a:latin typeface="Arial" pitchFamily="34" charset="0"/>
                 <a:ea typeface="Arial" pitchFamily="34" charset="-122"/>
@@ -3612,7 +3612,7 @@
             <a:r>
               <a:rPr lang="en-US" sz="1350" dirty="0">
                 <a:solidFill>
-                  <a:srgbClr val="23272E"/>
+                  <a:srgbClr val="2B2823"/>
                 </a:solidFill>
                 <a:latin typeface="Microsoft YaHei" pitchFamily="34" charset="0"/>
                 <a:ea typeface="Microsoft YaHei" pitchFamily="34" charset="-122"/>
@@ -3629,7 +3629,7 @@
             <a:r>
               <a:rPr lang="en-US" sz="1350" dirty="0">
                 <a:solidFill>
-                  <a:srgbClr val="23272E"/>
+                  <a:srgbClr val="2B2823"/>
                 </a:solidFill>
                 <a:latin typeface="Arial" pitchFamily="34" charset="0"/>
                 <a:ea typeface="Arial" pitchFamily="34" charset="-122"/>
@@ -3646,7 +3646,7 @@
             <a:r>
               <a:rPr lang="en-US" sz="1350" dirty="0">
                 <a:solidFill>
-                  <a:srgbClr val="23272E"/>
+                  <a:srgbClr val="2B2823"/>
                 </a:solidFill>
                 <a:latin typeface="Microsoft YaHei" pitchFamily="34" charset="0"/>
                 <a:ea typeface="Microsoft YaHei" pitchFamily="34" charset="-122"/>
@@ -3663,7 +3663,7 @@
             <a:r>
               <a:rPr lang="en-US" sz="1350" dirty="0">
                 <a:solidFill>
-                  <a:srgbClr val="23272E"/>
+                  <a:srgbClr val="2B2823"/>
                 </a:solidFill>
                 <a:latin typeface="Arial" pitchFamily="34" charset="0"/>
                 <a:ea typeface="Arial" pitchFamily="34" charset="-122"/>
@@ -3680,7 +3680,7 @@
             <a:r>
               <a:rPr lang="en-US" sz="1350" dirty="0">
                 <a:solidFill>
-                  <a:srgbClr val="23272E"/>
+                  <a:srgbClr val="2B2823"/>
                 </a:solidFill>
                 <a:latin typeface="Microsoft YaHei" pitchFamily="34" charset="0"/>
                 <a:ea typeface="Microsoft YaHei" pitchFamily="34" charset="-122"/>
@@ -3719,7 +3719,7 @@
             <a:r>
               <a:rPr lang="en-US" sz="950" dirty="0">
                 <a:solidFill>
-                  <a:srgbClr val="9AA1AB"/>
+                  <a:srgbClr val="A79E93"/>
                 </a:solidFill>
                 <a:latin typeface="Arial" pitchFamily="34" charset="0"/>
                 <a:ea typeface="Arial" pitchFamily="34" charset="-122"/>
@@ -3733,7 +3733,7 @@
             <a:r>
               <a:rPr lang="en-US" sz="950" dirty="0">
                 <a:solidFill>
-                  <a:srgbClr val="9AA1AB"/>
+                  <a:srgbClr val="A79E93"/>
                 </a:solidFill>
                 <a:latin typeface="Microsoft YaHei" pitchFamily="34" charset="0"/>
                 <a:ea typeface="Microsoft YaHei" pitchFamily="34" charset="-122"/>
@@ -3747,7 +3747,7 @@
             <a:r>
               <a:rPr lang="en-US" sz="950" dirty="0">
                 <a:solidFill>
-                  <a:srgbClr val="9AA1AB"/>
+                  <a:srgbClr val="A79E93"/>
                 </a:solidFill>
                 <a:latin typeface="Arial" pitchFamily="34" charset="0"/>
                 <a:ea typeface="Arial" pitchFamily="34" charset="-122"/>
@@ -3761,7 +3761,7 @@
             <a:r>
               <a:rPr lang="en-US" sz="950" dirty="0">
                 <a:solidFill>
-                  <a:srgbClr val="9AA1AB"/>
+                  <a:srgbClr val="A79E93"/>
                 </a:solidFill>
                 <a:latin typeface="Microsoft YaHei" pitchFamily="34" charset="0"/>
                 <a:ea typeface="Microsoft YaHei" pitchFamily="34" charset="-122"/>
@@ -3775,7 +3775,7 @@
             <a:r>
               <a:rPr lang="en-US" sz="950" dirty="0">
                 <a:solidFill>
-                  <a:srgbClr val="9AA1AB"/>
+                  <a:srgbClr val="A79E93"/>
                 </a:solidFill>
                 <a:latin typeface="Arial" pitchFamily="34" charset="0"/>
                 <a:ea typeface="Arial" pitchFamily="34" charset="-122"/>
@@ -3789,7 +3789,7 @@
             <a:r>
               <a:rPr lang="en-US" sz="950" dirty="0">
                 <a:solidFill>
-                  <a:srgbClr val="9AA1AB"/>
+                  <a:srgbClr val="A79E93"/>
                 </a:solidFill>
                 <a:latin typeface="Microsoft YaHei" pitchFamily="34" charset="0"/>
                 <a:ea typeface="Microsoft YaHei" pitchFamily="34" charset="-122"/>
@@ -3828,7 +3828,7 @@
             <a:r>
               <a:rPr lang="en-US" sz="950" dirty="0">
                 <a:solidFill>
-                  <a:srgbClr val="9AA1AB"/>
+                  <a:srgbClr val="A79E93"/>
                 </a:solidFill>
                 <a:latin typeface="Arial" pitchFamily="34" charset="0"/>
                 <a:ea typeface="Arial" pitchFamily="34" charset="-122"/>
@@ -3895,7 +3895,7 @@
             <a:r>
               <a:rPr lang="en-US" sz="1200" b="1" spc="240" kern="0" dirty="0">
                 <a:solidFill>
-                  <a:srgbClr val="2F6FAE"/>
+                  <a:srgbClr val="A8492A"/>
                 </a:solidFill>
                 <a:latin typeface="Microsoft YaHei" pitchFamily="34" charset="0"/>
                 <a:ea typeface="Microsoft YaHei" pitchFamily="34" charset="-122"/>
@@ -3937,7 +3937,7 @@
             <a:r>
               <a:rPr lang="en-US" sz="2500" b="1" dirty="0">
                 <a:solidFill>
-                  <a:srgbClr val="1F3A5F"/>
+                  <a:srgbClr val="7A3A1D"/>
                 </a:solidFill>
                 <a:latin typeface="Microsoft YaHei" pitchFamily="34" charset="0"/>
                 <a:ea typeface="Microsoft YaHei" pitchFamily="34" charset="-122"/>
@@ -3979,7 +3979,7 @@
             <a:r>
               <a:rPr lang="en-US" sz="1200" dirty="0">
                 <a:solidFill>
-                  <a:srgbClr val="6E7681"/>
+                  <a:srgbClr val="6B635A"/>
                 </a:solidFill>
                 <a:latin typeface="Arial" pitchFamily="34" charset="0"/>
                 <a:ea typeface="Arial" pitchFamily="34" charset="-122"/>
@@ -4030,7 +4030,7 @@
                       <a:r>
                         <a:rPr lang="en-US" sz="1300" b="1" dirty="0">
                           <a:solidFill>
-                            <a:srgbClr val="1F3A5F"/>
+                            <a:srgbClr val="7A3A1D"/>
                           </a:solidFill>
                           <a:latin typeface="Microsoft YaHei" pitchFamily="34" charset="0"/>
                           <a:ea typeface="Microsoft YaHei" pitchFamily="34" charset="-122"/>
@@ -4054,7 +4054,7 @@
                     </a:lnR>
                     <a:lnT w="19050" cap="flat" cmpd="sng" algn="ctr">
                       <a:solidFill>
-                        <a:srgbClr val="1F3A5F"/>
+                        <a:srgbClr val="7A3A1D"/>
                       </a:solidFill>
                       <a:prstDash val="solid"/>
                       <a:round/>
@@ -4063,7 +4063,7 @@
                     </a:lnT>
                     <a:lnB w="9525" cap="flat" cmpd="sng" algn="ctr">
                       <a:solidFill>
-                        <a:srgbClr val="6E7681"/>
+                        <a:srgbClr val="6B635A"/>
                       </a:solidFill>
                       <a:prstDash val="solid"/>
                       <a:round/>
@@ -4083,7 +4083,7 @@
                       <a:r>
                         <a:rPr lang="en-US" sz="1300" b="1" dirty="0">
                           <a:solidFill>
-                            <a:srgbClr val="1F3A5F"/>
+                            <a:srgbClr val="7A3A1D"/>
                           </a:solidFill>
                           <a:latin typeface="Microsoft YaHei" pitchFamily="34" charset="0"/>
                           <a:ea typeface="Microsoft YaHei" pitchFamily="34" charset="-122"/>
@@ -4107,7 +4107,7 @@
                     </a:lnR>
                     <a:lnT w="19050" cap="flat" cmpd="sng" algn="ctr">
                       <a:solidFill>
-                        <a:srgbClr val="1F3A5F"/>
+                        <a:srgbClr val="7A3A1D"/>
                       </a:solidFill>
                       <a:prstDash val="solid"/>
                       <a:round/>
@@ -4116,7 +4116,7 @@
                     </a:lnT>
                     <a:lnB w="9525" cap="flat" cmpd="sng" algn="ctr">
                       <a:solidFill>
-                        <a:srgbClr val="6E7681"/>
+                        <a:srgbClr val="6B635A"/>
                       </a:solidFill>
                       <a:prstDash val="solid"/>
                       <a:round/>
@@ -4136,7 +4136,7 @@
                       <a:r>
                         <a:rPr lang="en-US" sz="1300" b="1" dirty="0">
                           <a:solidFill>
-                            <a:srgbClr val="1F3A5F"/>
+                            <a:srgbClr val="7A3A1D"/>
                           </a:solidFill>
                           <a:latin typeface="Microsoft YaHei" pitchFamily="34" charset="0"/>
                           <a:ea typeface="Microsoft YaHei" pitchFamily="34" charset="-122"/>
@@ -4150,7 +4150,7 @@
                       <a:r>
                         <a:rPr lang="en-US" sz="1300" b="1" dirty="0">
                           <a:solidFill>
-                            <a:srgbClr val="1F3A5F"/>
+                            <a:srgbClr val="7A3A1D"/>
                           </a:solidFill>
                           <a:latin typeface="Arial" pitchFamily="34" charset="0"/>
                           <a:ea typeface="Arial" pitchFamily="34" charset="-122"/>
@@ -4174,7 +4174,7 @@
                     </a:lnR>
                     <a:lnT w="19050" cap="flat" cmpd="sng" algn="ctr">
                       <a:solidFill>
-                        <a:srgbClr val="1F3A5F"/>
+                        <a:srgbClr val="7A3A1D"/>
                       </a:solidFill>
                       <a:prstDash val="solid"/>
                       <a:round/>
@@ -4183,7 +4183,7 @@
                     </a:lnT>
                     <a:lnB w="9525" cap="flat" cmpd="sng" algn="ctr">
                       <a:solidFill>
-                        <a:srgbClr val="6E7681"/>
+                        <a:srgbClr val="6B635A"/>
                       </a:solidFill>
                       <a:prstDash val="solid"/>
                       <a:round/>
@@ -4205,7 +4205,7 @@
                       <a:r>
                         <a:rPr lang="en-US" sz="1300" dirty="0">
                           <a:solidFill>
-                            <a:srgbClr val="23272E"/>
+                            <a:srgbClr val="2B2823"/>
                           </a:solidFill>
                           <a:latin typeface="Microsoft YaHei" pitchFamily="34" charset="0"/>
                           <a:ea typeface="Microsoft YaHei" pitchFamily="34" charset="-122"/>
@@ -4232,7 +4232,7 @@
                     </a:lnT>
                     <a:lnB w="3175" cap="flat" cmpd="sng" algn="ctr">
                       <a:solidFill>
-                        <a:srgbClr val="D9DEE6"/>
+                        <a:srgbClr val="E4E0D3"/>
                       </a:solidFill>
                       <a:prstDash val="solid"/>
                       <a:round/>
@@ -4252,7 +4252,7 @@
                       <a:r>
                         <a:rPr lang="en-US" sz="1300" dirty="0">
                           <a:solidFill>
-                            <a:srgbClr val="23272E"/>
+                            <a:srgbClr val="2B2823"/>
                           </a:solidFill>
                           <a:latin typeface="Arial" pitchFamily="34" charset="0"/>
                           <a:ea typeface="Arial" pitchFamily="34" charset="-122"/>
@@ -4266,7 +4266,7 @@
                       <a:r>
                         <a:rPr lang="en-US" sz="1300" dirty="0">
                           <a:solidFill>
-                            <a:srgbClr val="23272E"/>
+                            <a:srgbClr val="2B2823"/>
                           </a:solidFill>
                           <a:latin typeface="Microsoft YaHei" pitchFamily="34" charset="0"/>
                           <a:ea typeface="Microsoft YaHei" pitchFamily="34" charset="-122"/>
@@ -4280,7 +4280,7 @@
                       <a:r>
                         <a:rPr lang="en-US" sz="1300" dirty="0">
                           <a:solidFill>
-                            <a:srgbClr val="23272E"/>
+                            <a:srgbClr val="2B2823"/>
                           </a:solidFill>
                           <a:latin typeface="Arial" pitchFamily="34" charset="0"/>
                           <a:ea typeface="Arial" pitchFamily="34" charset="-122"/>
@@ -4307,7 +4307,7 @@
                     </a:lnT>
                     <a:lnB w="3175" cap="flat" cmpd="sng" algn="ctr">
                       <a:solidFill>
-                        <a:srgbClr val="D9DEE6"/>
+                        <a:srgbClr val="E4E0D3"/>
                       </a:solidFill>
                       <a:prstDash val="solid"/>
                       <a:round/>
@@ -4327,7 +4327,7 @@
                       <a:r>
                         <a:rPr lang="en-US" sz="1300" dirty="0">
                           <a:solidFill>
-                            <a:srgbClr val="23272E"/>
+                            <a:srgbClr val="2B2823"/>
                           </a:solidFill>
                           <a:latin typeface="Arial" pitchFamily="34" charset="0"/>
                           <a:ea typeface="Arial" pitchFamily="34" charset="-122"/>
@@ -4341,7 +4341,7 @@
                       <a:r>
                         <a:rPr lang="en-US" sz="1300" dirty="0">
                           <a:solidFill>
-                            <a:srgbClr val="23272E"/>
+                            <a:srgbClr val="2B2823"/>
                           </a:solidFill>
                           <a:latin typeface="Microsoft YaHei" pitchFamily="34" charset="0"/>
                           <a:ea typeface="Microsoft YaHei" pitchFamily="34" charset="-122"/>
@@ -4355,7 +4355,7 @@
                       <a:r>
                         <a:rPr lang="en-US" sz="1300" dirty="0">
                           <a:solidFill>
-                            <a:srgbClr val="23272E"/>
+                            <a:srgbClr val="2B2823"/>
                           </a:solidFill>
                           <a:latin typeface="Arial" pitchFamily="34" charset="0"/>
                           <a:ea typeface="Arial" pitchFamily="34" charset="-122"/>
@@ -4382,7 +4382,7 @@
                     </a:lnT>
                     <a:lnB w="3175" cap="flat" cmpd="sng" algn="ctr">
                       <a:solidFill>
-                        <a:srgbClr val="D9DEE6"/>
+                        <a:srgbClr val="E4E0D3"/>
                       </a:solidFill>
                       <a:prstDash val="solid"/>
                       <a:round/>
@@ -4404,7 +4404,7 @@
                       <a:r>
                         <a:rPr lang="en-US" sz="1300" dirty="0">
                           <a:solidFill>
-                            <a:srgbClr val="23272E"/>
+                            <a:srgbClr val="2B2823"/>
                           </a:solidFill>
                           <a:latin typeface="Microsoft YaHei" pitchFamily="34" charset="0"/>
                           <a:ea typeface="Microsoft YaHei" pitchFamily="34" charset="-122"/>
@@ -4431,7 +4431,7 @@
                     </a:lnT>
                     <a:lnB w="3175" cap="flat" cmpd="sng" algn="ctr">
                       <a:solidFill>
-                        <a:srgbClr val="D9DEE6"/>
+                        <a:srgbClr val="E4E0D3"/>
                       </a:solidFill>
                       <a:prstDash val="solid"/>
                       <a:round/>
@@ -4451,7 +4451,7 @@
                       <a:r>
                         <a:rPr lang="en-US" sz="1300" dirty="0">
                           <a:solidFill>
-                            <a:srgbClr val="23272E"/>
+                            <a:srgbClr val="2B2823"/>
                           </a:solidFill>
                           <a:latin typeface="Arial" pitchFamily="34" charset="0"/>
                           <a:ea typeface="Arial" pitchFamily="34" charset="-122"/>
@@ -4465,7 +4465,7 @@
                       <a:r>
                         <a:rPr lang="en-US" sz="1300" dirty="0">
                           <a:solidFill>
-                            <a:srgbClr val="23272E"/>
+                            <a:srgbClr val="2B2823"/>
                           </a:solidFill>
                           <a:latin typeface="Microsoft YaHei" pitchFamily="34" charset="0"/>
                           <a:ea typeface="Microsoft YaHei" pitchFamily="34" charset="-122"/>
@@ -4479,7 +4479,7 @@
                       <a:r>
                         <a:rPr lang="en-US" sz="1300" dirty="0">
                           <a:solidFill>
-                            <a:srgbClr val="23272E"/>
+                            <a:srgbClr val="2B2823"/>
                           </a:solidFill>
                           <a:latin typeface="Arial" pitchFamily="34" charset="0"/>
                           <a:ea typeface="Arial" pitchFamily="34" charset="-122"/>
@@ -4506,7 +4506,7 @@
                     </a:lnT>
                     <a:lnB w="3175" cap="flat" cmpd="sng" algn="ctr">
                       <a:solidFill>
-                        <a:srgbClr val="D9DEE6"/>
+                        <a:srgbClr val="E4E0D3"/>
                       </a:solidFill>
                       <a:prstDash val="solid"/>
                       <a:round/>
@@ -4526,7 +4526,7 @@
                       <a:r>
                         <a:rPr lang="en-US" sz="1300" dirty="0">
                           <a:solidFill>
-                            <a:srgbClr val="23272E"/>
+                            <a:srgbClr val="2B2823"/>
                           </a:solidFill>
                           <a:latin typeface="Arial" pitchFamily="34" charset="0"/>
                           <a:ea typeface="Arial" pitchFamily="34" charset="-122"/>
@@ -4540,7 +4540,7 @@
                       <a:r>
                         <a:rPr lang="en-US" sz="1300" dirty="0">
                           <a:solidFill>
-                            <a:srgbClr val="23272E"/>
+                            <a:srgbClr val="2B2823"/>
                           </a:solidFill>
                           <a:latin typeface="Microsoft YaHei" pitchFamily="34" charset="0"/>
                           <a:ea typeface="Microsoft YaHei" pitchFamily="34" charset="-122"/>
@@ -4554,7 +4554,7 @@
                       <a:r>
                         <a:rPr lang="en-US" sz="1300" dirty="0">
                           <a:solidFill>
-                            <a:srgbClr val="23272E"/>
+                            <a:srgbClr val="2B2823"/>
                           </a:solidFill>
                           <a:latin typeface="Arial" pitchFamily="34" charset="0"/>
                           <a:ea typeface="Arial" pitchFamily="34" charset="-122"/>
@@ -4581,7 +4581,7 @@
                     </a:lnT>
                     <a:lnB w="3175" cap="flat" cmpd="sng" algn="ctr">
                       <a:solidFill>
-                        <a:srgbClr val="D9DEE6"/>
+                        <a:srgbClr val="E4E0D3"/>
                       </a:solidFill>
                       <a:prstDash val="solid"/>
                       <a:round/>
@@ -4603,7 +4603,7 @@
                       <a:r>
                         <a:rPr lang="en-US" sz="1300" dirty="0">
                           <a:solidFill>
-                            <a:srgbClr val="23272E"/>
+                            <a:srgbClr val="2B2823"/>
                           </a:solidFill>
                           <a:latin typeface="Microsoft YaHei" pitchFamily="34" charset="0"/>
                           <a:ea typeface="Microsoft YaHei" pitchFamily="34" charset="-122"/>
@@ -4630,7 +4630,7 @@
                     </a:lnT>
                     <a:lnB w="3175" cap="flat" cmpd="sng" algn="ctr">
                       <a:solidFill>
-                        <a:srgbClr val="D9DEE6"/>
+                        <a:srgbClr val="E4E0D3"/>
                       </a:solidFill>
                       <a:prstDash val="solid"/>
                       <a:round/>
@@ -4650,7 +4650,7 @@
                       <a:r>
                         <a:rPr lang="en-US" sz="1300" dirty="0">
                           <a:solidFill>
-                            <a:srgbClr val="23272E"/>
+                            <a:srgbClr val="2B2823"/>
                           </a:solidFill>
                           <a:latin typeface="Arial" pitchFamily="34" charset="0"/>
                           <a:ea typeface="Arial" pitchFamily="34" charset="-122"/>
@@ -4664,7 +4664,7 @@
                       <a:r>
                         <a:rPr lang="en-US" sz="1300" dirty="0">
                           <a:solidFill>
-                            <a:srgbClr val="23272E"/>
+                            <a:srgbClr val="2B2823"/>
                           </a:solidFill>
                           <a:latin typeface="Microsoft YaHei" pitchFamily="34" charset="0"/>
                           <a:ea typeface="Microsoft YaHei" pitchFamily="34" charset="-122"/>
@@ -4678,7 +4678,7 @@
                       <a:r>
                         <a:rPr lang="en-US" sz="1300" dirty="0">
                           <a:solidFill>
-                            <a:srgbClr val="23272E"/>
+                            <a:srgbClr val="2B2823"/>
                           </a:solidFill>
                           <a:latin typeface="Arial" pitchFamily="34" charset="0"/>
                           <a:ea typeface="Arial" pitchFamily="34" charset="-122"/>
@@ -4692,7 +4692,7 @@
                       <a:r>
                         <a:rPr lang="en-US" sz="1300" dirty="0">
                           <a:solidFill>
-                            <a:srgbClr val="23272E"/>
+                            <a:srgbClr val="2B2823"/>
                           </a:solidFill>
                           <a:latin typeface="Microsoft YaHei" pitchFamily="34" charset="0"/>
                           <a:ea typeface="Microsoft YaHei" pitchFamily="34" charset="-122"/>
@@ -4706,7 +4706,7 @@
                       <a:r>
                         <a:rPr lang="en-US" sz="1300" dirty="0">
                           <a:solidFill>
-                            <a:srgbClr val="23272E"/>
+                            <a:srgbClr val="2B2823"/>
                           </a:solidFill>
                           <a:latin typeface="Arial" pitchFamily="34" charset="0"/>
                           <a:ea typeface="Arial" pitchFamily="34" charset="-122"/>
@@ -4720,7 +4720,7 @@
                       <a:r>
                         <a:rPr lang="en-US" sz="1300" dirty="0">
                           <a:solidFill>
-                            <a:srgbClr val="23272E"/>
+                            <a:srgbClr val="2B2823"/>
                           </a:solidFill>
                           <a:latin typeface="Microsoft YaHei" pitchFamily="34" charset="0"/>
                           <a:ea typeface="Microsoft YaHei" pitchFamily="34" charset="-122"/>
@@ -4734,7 +4734,7 @@
                       <a:r>
                         <a:rPr lang="en-US" sz="1300" dirty="0">
                           <a:solidFill>
-                            <a:srgbClr val="23272E"/>
+                            <a:srgbClr val="2B2823"/>
                           </a:solidFill>
                           <a:latin typeface="Arial" pitchFamily="34" charset="0"/>
                           <a:ea typeface="Arial" pitchFamily="34" charset="-122"/>
@@ -4748,7 +4748,7 @@
                       <a:r>
                         <a:rPr lang="en-US" sz="1300" dirty="0">
                           <a:solidFill>
-                            <a:srgbClr val="23272E"/>
+                            <a:srgbClr val="2B2823"/>
                           </a:solidFill>
                           <a:latin typeface="Microsoft YaHei" pitchFamily="34" charset="0"/>
                           <a:ea typeface="Microsoft YaHei" pitchFamily="34" charset="-122"/>
@@ -4775,7 +4775,7 @@
                     </a:lnT>
                     <a:lnB w="3175" cap="flat" cmpd="sng" algn="ctr">
                       <a:solidFill>
-                        <a:srgbClr val="D9DEE6"/>
+                        <a:srgbClr val="E4E0D3"/>
                       </a:solidFill>
                       <a:prstDash val="solid"/>
                       <a:round/>
@@ -4795,7 +4795,7 @@
                       <a:r>
                         <a:rPr lang="en-US" sz="1300" dirty="0">
                           <a:solidFill>
-                            <a:srgbClr val="23272E"/>
+                            <a:srgbClr val="2B2823"/>
                           </a:solidFill>
                           <a:latin typeface="Arial" pitchFamily="34" charset="0"/>
                           <a:ea typeface="Arial" pitchFamily="34" charset="-122"/>
@@ -4809,7 +4809,7 @@
                       <a:r>
                         <a:rPr lang="en-US" sz="1300" dirty="0">
                           <a:solidFill>
-                            <a:srgbClr val="23272E"/>
+                            <a:srgbClr val="2B2823"/>
                           </a:solidFill>
                           <a:latin typeface="Microsoft YaHei" pitchFamily="34" charset="0"/>
                           <a:ea typeface="Microsoft YaHei" pitchFamily="34" charset="-122"/>
@@ -4823,7 +4823,7 @@
                       <a:r>
                         <a:rPr lang="en-US" sz="1300" dirty="0">
                           <a:solidFill>
-                            <a:srgbClr val="23272E"/>
+                            <a:srgbClr val="2B2823"/>
                           </a:solidFill>
                           <a:latin typeface="Arial" pitchFamily="34" charset="0"/>
                           <a:ea typeface="Arial" pitchFamily="34" charset="-122"/>
@@ -4850,7 +4850,7 @@
                     </a:lnT>
                     <a:lnB w="3175" cap="flat" cmpd="sng" algn="ctr">
                       <a:solidFill>
-                        <a:srgbClr val="D9DEE6"/>
+                        <a:srgbClr val="E4E0D3"/>
                       </a:solidFill>
                       <a:prstDash val="solid"/>
                       <a:round/>
@@ -4872,7 +4872,7 @@
                       <a:r>
                         <a:rPr lang="en-US" sz="1300" dirty="0">
                           <a:solidFill>
-                            <a:srgbClr val="23272E"/>
+                            <a:srgbClr val="2B2823"/>
                           </a:solidFill>
                           <a:latin typeface="Microsoft YaHei" pitchFamily="34" charset="0"/>
                           <a:ea typeface="Microsoft YaHei" pitchFamily="34" charset="-122"/>
@@ -4899,7 +4899,7 @@
                     </a:lnT>
                     <a:lnB w="3175" cap="flat" cmpd="sng" algn="ctr">
                       <a:solidFill>
-                        <a:srgbClr val="D9DEE6"/>
+                        <a:srgbClr val="E4E0D3"/>
                       </a:solidFill>
                       <a:prstDash val="solid"/>
                       <a:round/>
@@ -4919,7 +4919,7 @@
                       <a:r>
                         <a:rPr lang="en-US" sz="1300" dirty="0">
                           <a:solidFill>
-                            <a:srgbClr val="23272E"/>
+                            <a:srgbClr val="2B2823"/>
                           </a:solidFill>
                           <a:latin typeface="Arial" pitchFamily="34" charset="0"/>
                           <a:ea typeface="Arial" pitchFamily="34" charset="-122"/>
@@ -4933,7 +4933,7 @@
                       <a:r>
                         <a:rPr lang="en-US" sz="1300" dirty="0">
                           <a:solidFill>
-                            <a:srgbClr val="23272E"/>
+                            <a:srgbClr val="2B2823"/>
                           </a:solidFill>
                           <a:latin typeface="Microsoft YaHei" pitchFamily="34" charset="0"/>
                           <a:ea typeface="Microsoft YaHei" pitchFamily="34" charset="-122"/>
@@ -4947,7 +4947,7 @@
                       <a:r>
                         <a:rPr lang="en-US" sz="1300" dirty="0">
                           <a:solidFill>
-                            <a:srgbClr val="23272E"/>
+                            <a:srgbClr val="2B2823"/>
                           </a:solidFill>
                           <a:latin typeface="Arial" pitchFamily="34" charset="0"/>
                           <a:ea typeface="Arial" pitchFamily="34" charset="-122"/>
@@ -4961,7 +4961,7 @@
                       <a:r>
                         <a:rPr lang="en-US" sz="1300" dirty="0">
                           <a:solidFill>
-                            <a:srgbClr val="23272E"/>
+                            <a:srgbClr val="2B2823"/>
                           </a:solidFill>
                           <a:latin typeface="Microsoft YaHei" pitchFamily="34" charset="0"/>
                           <a:ea typeface="Microsoft YaHei" pitchFamily="34" charset="-122"/>
@@ -4975,7 +4975,7 @@
                       <a:r>
                         <a:rPr lang="en-US" sz="1300" dirty="0">
                           <a:solidFill>
-                            <a:srgbClr val="23272E"/>
+                            <a:srgbClr val="2B2823"/>
                           </a:solidFill>
                           <a:latin typeface="Arial" pitchFamily="34" charset="0"/>
                           <a:ea typeface="Arial" pitchFamily="34" charset="-122"/>
@@ -5002,7 +5002,7 @@
                     </a:lnT>
                     <a:lnB w="3175" cap="flat" cmpd="sng" algn="ctr">
                       <a:solidFill>
-                        <a:srgbClr val="D9DEE6"/>
+                        <a:srgbClr val="E4E0D3"/>
                       </a:solidFill>
                       <a:prstDash val="solid"/>
                       <a:round/>
@@ -5022,7 +5022,7 @@
                       <a:r>
                         <a:rPr lang="en-US" sz="1300" dirty="0">
                           <a:solidFill>
-                            <a:srgbClr val="23272E"/>
+                            <a:srgbClr val="2B2823"/>
                           </a:solidFill>
                           <a:latin typeface="Arial" pitchFamily="34" charset="0"/>
                           <a:ea typeface="Arial" pitchFamily="34" charset="-122"/>
@@ -5036,7 +5036,7 @@
                       <a:r>
                         <a:rPr lang="en-US" sz="1300" dirty="0">
                           <a:solidFill>
-                            <a:srgbClr val="23272E"/>
+                            <a:srgbClr val="2B2823"/>
                           </a:solidFill>
                           <a:latin typeface="Microsoft YaHei" pitchFamily="34" charset="0"/>
                           <a:ea typeface="Microsoft YaHei" pitchFamily="34" charset="-122"/>
@@ -5050,7 +5050,7 @@
                       <a:r>
                         <a:rPr lang="en-US" sz="1300" dirty="0">
                           <a:solidFill>
-                            <a:srgbClr val="23272E"/>
+                            <a:srgbClr val="2B2823"/>
                           </a:solidFill>
                           <a:latin typeface="Arial" pitchFamily="34" charset="0"/>
                           <a:ea typeface="Arial" pitchFamily="34" charset="-122"/>
@@ -5077,7 +5077,7 @@
                     </a:lnT>
                     <a:lnB w="3175" cap="flat" cmpd="sng" algn="ctr">
                       <a:solidFill>
-                        <a:srgbClr val="D9DEE6"/>
+                        <a:srgbClr val="E4E0D3"/>
                       </a:solidFill>
                       <a:prstDash val="solid"/>
                       <a:round/>
@@ -5099,7 +5099,7 @@
                       <a:r>
                         <a:rPr lang="en-US" sz="1300" dirty="0">
                           <a:solidFill>
-                            <a:srgbClr val="23272E"/>
+                            <a:srgbClr val="2B2823"/>
                           </a:solidFill>
                           <a:latin typeface="Microsoft YaHei" pitchFamily="34" charset="0"/>
                           <a:ea typeface="Microsoft YaHei" pitchFamily="34" charset="-122"/>
@@ -5126,7 +5126,7 @@
                     </a:lnT>
                     <a:lnB w="3175" cap="flat" cmpd="sng" algn="ctr">
                       <a:solidFill>
-                        <a:srgbClr val="D9DEE6"/>
+                        <a:srgbClr val="E4E0D3"/>
                       </a:solidFill>
                       <a:prstDash val="solid"/>
                       <a:round/>
@@ -5146,7 +5146,7 @@
                       <a:r>
                         <a:rPr lang="en-US" sz="1300" dirty="0">
                           <a:solidFill>
-                            <a:srgbClr val="23272E"/>
+                            <a:srgbClr val="2B2823"/>
                           </a:solidFill>
                           <a:latin typeface="Microsoft YaHei" pitchFamily="34" charset="0"/>
                           <a:ea typeface="Microsoft YaHei" pitchFamily="34" charset="-122"/>
@@ -5173,7 +5173,7 @@
                     </a:lnT>
                     <a:lnB w="3175" cap="flat" cmpd="sng" algn="ctr">
                       <a:solidFill>
-                        <a:srgbClr val="D9DEE6"/>
+                        <a:srgbClr val="E4E0D3"/>
                       </a:solidFill>
                       <a:prstDash val="solid"/>
                       <a:round/>
@@ -5193,7 +5193,7 @@
                       <a:r>
                         <a:rPr lang="en-US" sz="1300" dirty="0">
                           <a:solidFill>
-                            <a:srgbClr val="23272E"/>
+                            <a:srgbClr val="2B2823"/>
                           </a:solidFill>
                           <a:latin typeface="Arial" pitchFamily="34" charset="0"/>
                           <a:ea typeface="Arial" pitchFamily="34" charset="-122"/>
@@ -5207,7 +5207,7 @@
                       <a:r>
                         <a:rPr lang="en-US" sz="1300" dirty="0">
                           <a:solidFill>
-                            <a:srgbClr val="23272E"/>
+                            <a:srgbClr val="2B2823"/>
                           </a:solidFill>
                           <a:latin typeface="Microsoft YaHei" pitchFamily="34" charset="0"/>
                           <a:ea typeface="Microsoft YaHei" pitchFamily="34" charset="-122"/>
@@ -5221,7 +5221,7 @@
                       <a:r>
                         <a:rPr lang="en-US" sz="1300" dirty="0">
                           <a:solidFill>
-                            <a:srgbClr val="23272E"/>
+                            <a:srgbClr val="2B2823"/>
                           </a:solidFill>
                           <a:latin typeface="Arial" pitchFamily="34" charset="0"/>
                           <a:ea typeface="Arial" pitchFamily="34" charset="-122"/>
@@ -5248,7 +5248,7 @@
                     </a:lnT>
                     <a:lnB w="3175" cap="flat" cmpd="sng" algn="ctr">
                       <a:solidFill>
-                        <a:srgbClr val="D9DEE6"/>
+                        <a:srgbClr val="E4E0D3"/>
                       </a:solidFill>
                       <a:prstDash val="solid"/>
                       <a:round/>
@@ -5270,7 +5270,7 @@
                       <a:r>
                         <a:rPr lang="en-US" sz="1300" dirty="0">
                           <a:solidFill>
-                            <a:srgbClr val="23272E"/>
+                            <a:srgbClr val="2B2823"/>
                           </a:solidFill>
                           <a:latin typeface="Microsoft YaHei" pitchFamily="34" charset="0"/>
                           <a:ea typeface="Microsoft YaHei" pitchFamily="34" charset="-122"/>
@@ -5297,7 +5297,7 @@
                     </a:lnT>
                     <a:lnB w="19050" cap="flat" cmpd="sng" algn="ctr">
                       <a:solidFill>
-                        <a:srgbClr val="1F3A5F"/>
+                        <a:srgbClr val="7A3A1D"/>
                       </a:solidFill>
                       <a:prstDash val="solid"/>
                       <a:round/>
@@ -5317,7 +5317,7 @@
                       <a:r>
                         <a:rPr lang="en-US" sz="1300" dirty="0">
                           <a:solidFill>
-                            <a:srgbClr val="23272E"/>
+                            <a:srgbClr val="2B2823"/>
                           </a:solidFill>
                           <a:latin typeface="Microsoft YaHei" pitchFamily="34" charset="0"/>
                           <a:ea typeface="Microsoft YaHei" pitchFamily="34" charset="-122"/>
@@ -5344,7 +5344,7 @@
                     </a:lnT>
                     <a:lnB w="19050" cap="flat" cmpd="sng" algn="ctr">
                       <a:solidFill>
-                        <a:srgbClr val="1F3A5F"/>
+                        <a:srgbClr val="7A3A1D"/>
                       </a:solidFill>
                       <a:prstDash val="solid"/>
                       <a:round/>
@@ -5364,7 +5364,7 @@
                       <a:r>
                         <a:rPr lang="en-US" sz="1300" dirty="0">
                           <a:solidFill>
-                            <a:srgbClr val="23272E"/>
+                            <a:srgbClr val="2B2823"/>
                           </a:solidFill>
                           <a:latin typeface="Arial" pitchFamily="34" charset="0"/>
                           <a:ea typeface="Arial" pitchFamily="34" charset="-122"/>
@@ -5391,7 +5391,7 @@
                     </a:lnT>
                     <a:lnB w="19050" cap="flat" cmpd="sng" algn="ctr">
                       <a:solidFill>
-                        <a:srgbClr val="1F3A5F"/>
+                        <a:srgbClr val="7A3A1D"/>
                       </a:solidFill>
                       <a:prstDash val="solid"/>
                       <a:round/>
@@ -5435,7 +5435,7 @@
             <a:r>
               <a:rPr lang="en-US" sz="1350" b="1" dirty="0">
                 <a:solidFill>
-                  <a:srgbClr val="23272E"/>
+                  <a:srgbClr val="2B2823"/>
                 </a:solidFill>
                 <a:latin typeface="Microsoft YaHei" pitchFamily="34" charset="0"/>
                 <a:ea typeface="Microsoft YaHei" pitchFamily="34" charset="-122"/>
@@ -5452,7 +5452,7 @@
             <a:r>
               <a:rPr lang="en-US" sz="1350" dirty="0">
                 <a:solidFill>
-                  <a:srgbClr val="23272E"/>
+                  <a:srgbClr val="2B2823"/>
                 </a:solidFill>
                 <a:latin typeface="Arial" pitchFamily="34" charset="0"/>
                 <a:ea typeface="Arial" pitchFamily="34" charset="-122"/>
@@ -5469,7 +5469,7 @@
             <a:r>
               <a:rPr lang="en-US" sz="1350" dirty="0">
                 <a:solidFill>
-                  <a:srgbClr val="23272E"/>
+                  <a:srgbClr val="2B2823"/>
                 </a:solidFill>
                 <a:latin typeface="Microsoft YaHei" pitchFamily="34" charset="0"/>
                 <a:ea typeface="Microsoft YaHei" pitchFamily="34" charset="-122"/>
@@ -5508,7 +5508,7 @@
             <a:r>
               <a:rPr lang="en-US" sz="950" dirty="0">
                 <a:solidFill>
-                  <a:srgbClr val="9AA1AB"/>
+                  <a:srgbClr val="A79E93"/>
                 </a:solidFill>
                 <a:latin typeface="Arial" pitchFamily="34" charset="0"/>
                 <a:ea typeface="Arial" pitchFamily="34" charset="-122"/>
@@ -5522,7 +5522,7 @@
             <a:r>
               <a:rPr lang="en-US" sz="950" dirty="0">
                 <a:solidFill>
-                  <a:srgbClr val="9AA1AB"/>
+                  <a:srgbClr val="A79E93"/>
                 </a:solidFill>
                 <a:latin typeface="Microsoft YaHei" pitchFamily="34" charset="0"/>
                 <a:ea typeface="Microsoft YaHei" pitchFamily="34" charset="-122"/>
@@ -5536,7 +5536,7 @@
             <a:r>
               <a:rPr lang="en-US" sz="950" dirty="0">
                 <a:solidFill>
-                  <a:srgbClr val="9AA1AB"/>
+                  <a:srgbClr val="A79E93"/>
                 </a:solidFill>
                 <a:latin typeface="Arial" pitchFamily="34" charset="0"/>
                 <a:ea typeface="Arial" pitchFamily="34" charset="-122"/>
@@ -5550,7 +5550,7 @@
             <a:r>
               <a:rPr lang="en-US" sz="950" dirty="0">
                 <a:solidFill>
-                  <a:srgbClr val="9AA1AB"/>
+                  <a:srgbClr val="A79E93"/>
                 </a:solidFill>
                 <a:latin typeface="Microsoft YaHei" pitchFamily="34" charset="0"/>
                 <a:ea typeface="Microsoft YaHei" pitchFamily="34" charset="-122"/>
@@ -5564,7 +5564,7 @@
             <a:r>
               <a:rPr lang="en-US" sz="950" dirty="0">
                 <a:solidFill>
-                  <a:srgbClr val="9AA1AB"/>
+                  <a:srgbClr val="A79E93"/>
                 </a:solidFill>
                 <a:latin typeface="Arial" pitchFamily="34" charset="0"/>
                 <a:ea typeface="Arial" pitchFamily="34" charset="-122"/>
@@ -5578,7 +5578,7 @@
             <a:r>
               <a:rPr lang="en-US" sz="950" dirty="0">
                 <a:solidFill>
-                  <a:srgbClr val="9AA1AB"/>
+                  <a:srgbClr val="A79E93"/>
                 </a:solidFill>
                 <a:latin typeface="Microsoft YaHei" pitchFamily="34" charset="0"/>
                 <a:ea typeface="Microsoft YaHei" pitchFamily="34" charset="-122"/>
@@ -5617,7 +5617,7 @@
             <a:r>
               <a:rPr lang="en-US" sz="950" dirty="0">
                 <a:solidFill>
-                  <a:srgbClr val="9AA1AB"/>
+                  <a:srgbClr val="A79E93"/>
                 </a:solidFill>
                 <a:latin typeface="Arial" pitchFamily="34" charset="0"/>
                 <a:ea typeface="Arial" pitchFamily="34" charset="-122"/>
@@ -5684,7 +5684,7 @@
             <a:r>
               <a:rPr lang="en-US" sz="1200" b="1" spc="240" kern="0" dirty="0">
                 <a:solidFill>
-                  <a:srgbClr val="2F6FAE"/>
+                  <a:srgbClr val="A8492A"/>
                 </a:solidFill>
                 <a:latin typeface="Microsoft YaHei" pitchFamily="34" charset="0"/>
                 <a:ea typeface="Microsoft YaHei" pitchFamily="34" charset="-122"/>
@@ -5726,7 +5726,7 @@
             <a:r>
               <a:rPr lang="en-US" sz="2500" b="1" dirty="0">
                 <a:solidFill>
-                  <a:srgbClr val="1F3A5F"/>
+                  <a:srgbClr val="7A3A1D"/>
                 </a:solidFill>
                 <a:latin typeface="Microsoft YaHei" pitchFamily="34" charset="0"/>
                 <a:ea typeface="Microsoft YaHei" pitchFamily="34" charset="-122"/>
@@ -5743,7 +5743,7 @@
             <a:r>
               <a:rPr lang="en-US" sz="2500" b="1" dirty="0">
                 <a:solidFill>
-                  <a:srgbClr val="1F3A5F"/>
+                  <a:srgbClr val="7A3A1D"/>
                 </a:solidFill>
                 <a:latin typeface="Arial" pitchFamily="34" charset="0"/>
                 <a:ea typeface="Arial" pitchFamily="34" charset="-122"/>
@@ -5760,7 +5760,7 @@
             <a:r>
               <a:rPr lang="en-US" sz="2500" b="1" dirty="0">
                 <a:solidFill>
-                  <a:srgbClr val="1F3A5F"/>
+                  <a:srgbClr val="7A3A1D"/>
                 </a:solidFill>
                 <a:latin typeface="Microsoft YaHei" pitchFamily="34" charset="0"/>
                 <a:ea typeface="Microsoft YaHei" pitchFamily="34" charset="-122"/>
@@ -5802,7 +5802,7 @@
             <a:r>
               <a:rPr lang="en-US" sz="1200" dirty="0">
                 <a:solidFill>
-                  <a:srgbClr val="6E7681"/>
+                  <a:srgbClr val="6B635A"/>
                 </a:solidFill>
                 <a:latin typeface="Arial" pitchFamily="34" charset="0"/>
                 <a:ea typeface="Arial" pitchFamily="34" charset="-122"/>
@@ -5819,7 +5819,7 @@
             <a:r>
               <a:rPr lang="en-US" sz="1200" dirty="0">
                 <a:solidFill>
-                  <a:srgbClr val="6E7681"/>
+                  <a:srgbClr val="6B635A"/>
                 </a:solidFill>
                 <a:latin typeface="Microsoft YaHei" pitchFamily="34" charset="0"/>
                 <a:ea typeface="Microsoft YaHei" pitchFamily="34" charset="-122"/>
@@ -5836,7 +5836,7 @@
             <a:r>
               <a:rPr lang="en-US" sz="1200" dirty="0">
                 <a:solidFill>
-                  <a:srgbClr val="6E7681"/>
+                  <a:srgbClr val="6B635A"/>
                 </a:solidFill>
                 <a:latin typeface="Arial" pitchFamily="34" charset="0"/>
                 <a:ea typeface="Arial" pitchFamily="34" charset="-122"/>
@@ -5853,7 +5853,7 @@
             <a:r>
               <a:rPr lang="en-US" sz="1200" dirty="0">
                 <a:solidFill>
-                  <a:srgbClr val="6E7681"/>
+                  <a:srgbClr val="6B635A"/>
                 </a:solidFill>
                 <a:latin typeface="Microsoft YaHei" pitchFamily="34" charset="0"/>
                 <a:ea typeface="Microsoft YaHei" pitchFamily="34" charset="-122"/>
@@ -5870,7 +5870,7 @@
             <a:r>
               <a:rPr lang="en-US" sz="1200" dirty="0">
                 <a:solidFill>
-                  <a:srgbClr val="6E7681"/>
+                  <a:srgbClr val="6B635A"/>
                 </a:solidFill>
                 <a:latin typeface="Arial" pitchFamily="34" charset="0"/>
                 <a:ea typeface="Arial" pitchFamily="34" charset="-122"/>
@@ -5887,7 +5887,7 @@
             <a:r>
               <a:rPr lang="en-US" sz="1200" dirty="0">
                 <a:solidFill>
-                  <a:srgbClr val="6E7681"/>
+                  <a:srgbClr val="6B635A"/>
                 </a:solidFill>
                 <a:latin typeface="Microsoft YaHei" pitchFamily="34" charset="0"/>
                 <a:ea typeface="Microsoft YaHei" pitchFamily="34" charset="-122"/>
@@ -5904,7 +5904,7 @@
             <a:r>
               <a:rPr lang="en-US" sz="1200" dirty="0">
                 <a:solidFill>
-                  <a:srgbClr val="6E7681"/>
+                  <a:srgbClr val="6B635A"/>
                 </a:solidFill>
                 <a:latin typeface="Arial" pitchFamily="34" charset="0"/>
                 <a:ea typeface="Arial" pitchFamily="34" charset="-122"/>
@@ -5967,7 +5967,7 @@
             <a:r>
               <a:rPr lang="en-US" sz="1150" dirty="0">
                 <a:solidFill>
-                  <a:srgbClr val="6E7681"/>
+                  <a:srgbClr val="6B635A"/>
                 </a:solidFill>
                 <a:latin typeface="Microsoft YaHei" pitchFamily="34" charset="0"/>
                 <a:ea typeface="Microsoft YaHei" pitchFamily="34" charset="-122"/>
@@ -5981,7 +5981,7 @@
             <a:r>
               <a:rPr lang="en-US" sz="1150" dirty="0">
                 <a:solidFill>
-                  <a:srgbClr val="6E7681"/>
+                  <a:srgbClr val="6B635A"/>
                 </a:solidFill>
                 <a:latin typeface="Arial" pitchFamily="34" charset="0"/>
                 <a:ea typeface="Arial" pitchFamily="34" charset="-122"/>
@@ -5995,7 +5995,7 @@
             <a:r>
               <a:rPr lang="en-US" sz="1150" dirty="0">
                 <a:solidFill>
-                  <a:srgbClr val="6E7681"/>
+                  <a:srgbClr val="6B635A"/>
                 </a:solidFill>
                 <a:latin typeface="Microsoft YaHei" pitchFamily="34" charset="0"/>
                 <a:ea typeface="Microsoft YaHei" pitchFamily="34" charset="-122"/>
@@ -6009,7 +6009,7 @@
             <a:r>
               <a:rPr lang="en-US" sz="1150" dirty="0">
                 <a:solidFill>
-                  <a:srgbClr val="6E7681"/>
+                  <a:srgbClr val="6B635A"/>
                 </a:solidFill>
                 <a:latin typeface="Arial" pitchFamily="34" charset="0"/>
                 <a:ea typeface="Arial" pitchFamily="34" charset="-122"/>
@@ -6023,7 +6023,7 @@
             <a:r>
               <a:rPr lang="en-US" sz="1150" dirty="0">
                 <a:solidFill>
-                  <a:srgbClr val="6E7681"/>
+                  <a:srgbClr val="6B635A"/>
                 </a:solidFill>
                 <a:latin typeface="Microsoft YaHei" pitchFamily="34" charset="0"/>
                 <a:ea typeface="Microsoft YaHei" pitchFamily="34" charset="-122"/>
@@ -6037,7 +6037,7 @@
             <a:r>
               <a:rPr lang="en-US" sz="1150" dirty="0">
                 <a:solidFill>
-                  <a:srgbClr val="6E7681"/>
+                  <a:srgbClr val="6B635A"/>
                 </a:solidFill>
                 <a:latin typeface="Arial" pitchFamily="34" charset="0"/>
                 <a:ea typeface="Arial" pitchFamily="34" charset="-122"/>
@@ -6051,7 +6051,7 @@
             <a:r>
               <a:rPr lang="en-US" sz="1150" dirty="0">
                 <a:solidFill>
-                  <a:srgbClr val="6E7681"/>
+                  <a:srgbClr val="6B635A"/>
                 </a:solidFill>
                 <a:latin typeface="Microsoft YaHei" pitchFamily="34" charset="0"/>
                 <a:ea typeface="Microsoft YaHei" pitchFamily="34" charset="-122"/>
@@ -6114,7 +6114,7 @@
             <a:r>
               <a:rPr lang="en-US" sz="1200" dirty="0">
                 <a:solidFill>
-                  <a:srgbClr val="6E7681"/>
+                  <a:srgbClr val="6B635A"/>
                 </a:solidFill>
                 <a:latin typeface="Arial" pitchFamily="34" charset="0"/>
                 <a:ea typeface="Arial" pitchFamily="34" charset="-122"/>
@@ -6156,7 +6156,7 @@
             <a:r>
               <a:rPr lang="en-US" sz="1350" b="1" dirty="0">
                 <a:solidFill>
-                  <a:srgbClr val="23272E"/>
+                  <a:srgbClr val="2B2823"/>
                 </a:solidFill>
                 <a:latin typeface="Microsoft YaHei" pitchFamily="34" charset="0"/>
                 <a:ea typeface="Microsoft YaHei" pitchFamily="34" charset="-122"/>
@@ -6173,7 +6173,7 @@
             <a:r>
               <a:rPr lang="en-US" sz="1350" dirty="0">
                 <a:solidFill>
-                  <a:srgbClr val="23272E"/>
+                  <a:srgbClr val="2B2823"/>
                 </a:solidFill>
                 <a:latin typeface="Arial" pitchFamily="34" charset="0"/>
                 <a:ea typeface="Arial" pitchFamily="34" charset="-122"/>
@@ -6190,7 +6190,7 @@
             <a:r>
               <a:rPr lang="en-US" sz="1350" dirty="0">
                 <a:solidFill>
-                  <a:srgbClr val="23272E"/>
+                  <a:srgbClr val="2B2823"/>
                 </a:solidFill>
                 <a:latin typeface="Microsoft YaHei" pitchFamily="34" charset="0"/>
                 <a:ea typeface="Microsoft YaHei" pitchFamily="34" charset="-122"/>
@@ -6207,7 +6207,7 @@
             <a:r>
               <a:rPr lang="en-US" sz="1350" dirty="0">
                 <a:solidFill>
-                  <a:srgbClr val="23272E"/>
+                  <a:srgbClr val="2B2823"/>
                 </a:solidFill>
                 <a:latin typeface="Arial" pitchFamily="34" charset="0"/>
                 <a:ea typeface="Arial" pitchFamily="34" charset="-122"/>
@@ -6224,7 +6224,7 @@
             <a:r>
               <a:rPr lang="en-US" sz="1350" dirty="0">
                 <a:solidFill>
-                  <a:srgbClr val="23272E"/>
+                  <a:srgbClr val="2B2823"/>
                 </a:solidFill>
                 <a:latin typeface="Microsoft YaHei" pitchFamily="34" charset="0"/>
                 <a:ea typeface="Microsoft YaHei" pitchFamily="34" charset="-122"/>
@@ -6241,7 +6241,7 @@
             <a:r>
               <a:rPr lang="en-US" sz="1350" dirty="0">
                 <a:solidFill>
-                  <a:srgbClr val="23272E"/>
+                  <a:srgbClr val="2B2823"/>
                 </a:solidFill>
                 <a:latin typeface="Arial" pitchFamily="34" charset="0"/>
                 <a:ea typeface="Arial" pitchFamily="34" charset="-122"/>
@@ -6258,7 +6258,7 @@
             <a:r>
               <a:rPr lang="en-US" sz="1350" dirty="0">
                 <a:solidFill>
-                  <a:srgbClr val="23272E"/>
+                  <a:srgbClr val="2B2823"/>
                 </a:solidFill>
                 <a:latin typeface="Microsoft YaHei" pitchFamily="34" charset="0"/>
                 <a:ea typeface="Microsoft YaHei" pitchFamily="34" charset="-122"/>
@@ -6275,7 +6275,7 @@
             <a:r>
               <a:rPr lang="en-US" sz="1350" dirty="0">
                 <a:solidFill>
-                  <a:srgbClr val="23272E"/>
+                  <a:srgbClr val="2B2823"/>
                 </a:solidFill>
                 <a:latin typeface="Arial" pitchFamily="34" charset="0"/>
                 <a:ea typeface="Arial" pitchFamily="34" charset="-122"/>
@@ -6292,7 +6292,7 @@
             <a:r>
               <a:rPr lang="en-US" sz="1350" dirty="0">
                 <a:solidFill>
-                  <a:srgbClr val="23272E"/>
+                  <a:srgbClr val="2B2823"/>
                 </a:solidFill>
                 <a:latin typeface="Microsoft YaHei" pitchFamily="34" charset="0"/>
                 <a:ea typeface="Microsoft YaHei" pitchFamily="34" charset="-122"/>
@@ -6309,7 +6309,7 @@
             <a:r>
               <a:rPr lang="en-US" sz="1350" dirty="0">
                 <a:solidFill>
-                  <a:srgbClr val="23272E"/>
+                  <a:srgbClr val="2B2823"/>
                 </a:solidFill>
                 <a:latin typeface="Arial" pitchFamily="34" charset="0"/>
                 <a:ea typeface="Arial" pitchFamily="34" charset="-122"/>
@@ -6326,7 +6326,7 @@
             <a:r>
               <a:rPr lang="en-US" sz="1350" dirty="0">
                 <a:solidFill>
-                  <a:srgbClr val="23272E"/>
+                  <a:srgbClr val="2B2823"/>
                 </a:solidFill>
                 <a:latin typeface="Microsoft YaHei" pitchFamily="34" charset="0"/>
                 <a:ea typeface="Microsoft YaHei" pitchFamily="34" charset="-122"/>
@@ -6353,7 +6353,7 @@
             <a:avLst/>
           </a:prstGeom>
           <a:solidFill>
-            <a:srgbClr val="D9DEE6"/>
+            <a:srgbClr val="E4E0D3"/>
           </a:solidFill>
           <a:ln/>
         </p:spPr>
@@ -6388,7 +6388,7 @@
             <a:r>
               <a:rPr lang="en-US" sz="1350" b="1" dirty="0">
                 <a:solidFill>
-                  <a:srgbClr val="23272E"/>
+                  <a:srgbClr val="2B2823"/>
                 </a:solidFill>
                 <a:latin typeface="Microsoft YaHei" pitchFamily="34" charset="0"/>
                 <a:ea typeface="Microsoft YaHei" pitchFamily="34" charset="-122"/>
@@ -6405,7 +6405,7 @@
             <a:r>
               <a:rPr lang="en-US" sz="1350" dirty="0">
                 <a:solidFill>
-                  <a:srgbClr val="23272E"/>
+                  <a:srgbClr val="2B2823"/>
                 </a:solidFill>
                 <a:latin typeface="Arial" pitchFamily="34" charset="0"/>
                 <a:ea typeface="Arial" pitchFamily="34" charset="-122"/>
@@ -6422,7 +6422,7 @@
             <a:r>
               <a:rPr lang="en-US" sz="1350" dirty="0">
                 <a:solidFill>
-                  <a:srgbClr val="23272E"/>
+                  <a:srgbClr val="2B2823"/>
                 </a:solidFill>
                 <a:latin typeface="Microsoft YaHei" pitchFamily="34" charset="0"/>
                 <a:ea typeface="Microsoft YaHei" pitchFamily="34" charset="-122"/>
@@ -6439,7 +6439,7 @@
             <a:r>
               <a:rPr lang="en-US" sz="1350" dirty="0">
                 <a:solidFill>
-                  <a:srgbClr val="23272E"/>
+                  <a:srgbClr val="2B2823"/>
                 </a:solidFill>
                 <a:latin typeface="Arial" pitchFamily="34" charset="0"/>
                 <a:ea typeface="Arial" pitchFamily="34" charset="-122"/>
@@ -6456,7 +6456,7 @@
             <a:r>
               <a:rPr lang="en-US" sz="1350" dirty="0">
                 <a:solidFill>
-                  <a:srgbClr val="23272E"/>
+                  <a:srgbClr val="2B2823"/>
                 </a:solidFill>
                 <a:latin typeface="Microsoft YaHei" pitchFamily="34" charset="0"/>
                 <a:ea typeface="Microsoft YaHei" pitchFamily="34" charset="-122"/>
@@ -6473,7 +6473,7 @@
             <a:r>
               <a:rPr lang="en-US" sz="1350" dirty="0">
                 <a:solidFill>
-                  <a:srgbClr val="23272E"/>
+                  <a:srgbClr val="2B2823"/>
                 </a:solidFill>
                 <a:latin typeface="Arial" pitchFamily="34" charset="0"/>
                 <a:ea typeface="Arial" pitchFamily="34" charset="-122"/>
@@ -6490,7 +6490,7 @@
             <a:r>
               <a:rPr lang="en-US" sz="1350" dirty="0">
                 <a:solidFill>
-                  <a:srgbClr val="23272E"/>
+                  <a:srgbClr val="2B2823"/>
                 </a:solidFill>
                 <a:latin typeface="Microsoft YaHei" pitchFamily="34" charset="0"/>
                 <a:ea typeface="Microsoft YaHei" pitchFamily="34" charset="-122"/>
@@ -6507,7 +6507,7 @@
             <a:r>
               <a:rPr lang="en-US" sz="1350" dirty="0">
                 <a:solidFill>
-                  <a:srgbClr val="23272E"/>
+                  <a:srgbClr val="2B2823"/>
                 </a:solidFill>
                 <a:latin typeface="Arial" pitchFamily="34" charset="0"/>
                 <a:ea typeface="Arial" pitchFamily="34" charset="-122"/>
@@ -6524,7 +6524,7 @@
             <a:r>
               <a:rPr lang="en-US" sz="1350" dirty="0">
                 <a:solidFill>
-                  <a:srgbClr val="23272E"/>
+                  <a:srgbClr val="2B2823"/>
                 </a:solidFill>
                 <a:latin typeface="Microsoft YaHei" pitchFamily="34" charset="0"/>
                 <a:ea typeface="Microsoft YaHei" pitchFamily="34" charset="-122"/>
@@ -6541,7 +6541,7 @@
             <a:r>
               <a:rPr lang="en-US" sz="1350" dirty="0">
                 <a:solidFill>
-                  <a:srgbClr val="23272E"/>
+                  <a:srgbClr val="2B2823"/>
                 </a:solidFill>
                 <a:latin typeface="Arial" pitchFamily="34" charset="0"/>
                 <a:ea typeface="Arial" pitchFamily="34" charset="-122"/>
@@ -6558,7 +6558,7 @@
             <a:r>
               <a:rPr lang="en-US" sz="1350" dirty="0">
                 <a:solidFill>
-                  <a:srgbClr val="23272E"/>
+                  <a:srgbClr val="2B2823"/>
                 </a:solidFill>
                 <a:latin typeface="Microsoft YaHei" pitchFamily="34" charset="0"/>
                 <a:ea typeface="Microsoft YaHei" pitchFamily="34" charset="-122"/>
@@ -6597,7 +6597,7 @@
             <a:r>
               <a:rPr lang="en-US" sz="950" dirty="0">
                 <a:solidFill>
-                  <a:srgbClr val="9AA1AB"/>
+                  <a:srgbClr val="A79E93"/>
                 </a:solidFill>
                 <a:latin typeface="Arial" pitchFamily="34" charset="0"/>
                 <a:ea typeface="Arial" pitchFamily="34" charset="-122"/>
@@ -6611,7 +6611,7 @@
             <a:r>
               <a:rPr lang="en-US" sz="950" dirty="0">
                 <a:solidFill>
-                  <a:srgbClr val="9AA1AB"/>
+                  <a:srgbClr val="A79E93"/>
                 </a:solidFill>
                 <a:latin typeface="Microsoft YaHei" pitchFamily="34" charset="0"/>
                 <a:ea typeface="Microsoft YaHei" pitchFamily="34" charset="-122"/>
@@ -6625,7 +6625,7 @@
             <a:r>
               <a:rPr lang="en-US" sz="950" dirty="0">
                 <a:solidFill>
-                  <a:srgbClr val="9AA1AB"/>
+                  <a:srgbClr val="A79E93"/>
                 </a:solidFill>
                 <a:latin typeface="Arial" pitchFamily="34" charset="0"/>
                 <a:ea typeface="Arial" pitchFamily="34" charset="-122"/>
@@ -6639,7 +6639,7 @@
             <a:r>
               <a:rPr lang="en-US" sz="950" dirty="0">
                 <a:solidFill>
-                  <a:srgbClr val="9AA1AB"/>
+                  <a:srgbClr val="A79E93"/>
                 </a:solidFill>
                 <a:latin typeface="Microsoft YaHei" pitchFamily="34" charset="0"/>
                 <a:ea typeface="Microsoft YaHei" pitchFamily="34" charset="-122"/>
@@ -6653,7 +6653,7 @@
             <a:r>
               <a:rPr lang="en-US" sz="950" dirty="0">
                 <a:solidFill>
-                  <a:srgbClr val="9AA1AB"/>
+                  <a:srgbClr val="A79E93"/>
                 </a:solidFill>
                 <a:latin typeface="Arial" pitchFamily="34" charset="0"/>
                 <a:ea typeface="Arial" pitchFamily="34" charset="-122"/>
@@ -6667,7 +6667,7 @@
             <a:r>
               <a:rPr lang="en-US" sz="950" dirty="0">
                 <a:solidFill>
-                  <a:srgbClr val="9AA1AB"/>
+                  <a:srgbClr val="A79E93"/>
                 </a:solidFill>
                 <a:latin typeface="Microsoft YaHei" pitchFamily="34" charset="0"/>
                 <a:ea typeface="Microsoft YaHei" pitchFamily="34" charset="-122"/>
@@ -6706,7 +6706,7 @@
             <a:r>
               <a:rPr lang="en-US" sz="950" dirty="0">
                 <a:solidFill>
-                  <a:srgbClr val="9AA1AB"/>
+                  <a:srgbClr val="A79E93"/>
                 </a:solidFill>
                 <a:latin typeface="Arial" pitchFamily="34" charset="0"/>
                 <a:ea typeface="Arial" pitchFamily="34" charset="-122"/>
@@ -6773,7 +6773,7 @@
             <a:r>
               <a:rPr lang="en-US" sz="1200" b="1" spc="240" kern="0" dirty="0">
                 <a:solidFill>
-                  <a:srgbClr val="2F6FAE"/>
+                  <a:srgbClr val="A8492A"/>
                 </a:solidFill>
                 <a:latin typeface="Microsoft YaHei" pitchFamily="34" charset="0"/>
                 <a:ea typeface="Microsoft YaHei" pitchFamily="34" charset="-122"/>
@@ -6815,7 +6815,7 @@
             <a:r>
               <a:rPr lang="en-US" sz="2500" b="1" dirty="0">
                 <a:solidFill>
-                  <a:srgbClr val="1F3A5F"/>
+                  <a:srgbClr val="7A3A1D"/>
                 </a:solidFill>
                 <a:latin typeface="Microsoft YaHei" pitchFamily="34" charset="0"/>
                 <a:ea typeface="Microsoft YaHei" pitchFamily="34" charset="-122"/>
@@ -6842,7 +6842,7 @@
             <a:avLst/>
           </a:prstGeom>
           <a:solidFill>
-            <a:srgbClr val="D9DEE6"/>
+            <a:srgbClr val="E4E0D3"/>
           </a:solidFill>
           <a:ln/>
         </p:spPr>
@@ -6874,7 +6874,7 @@
             <a:r>
               <a:rPr lang="en-US" sz="1450" b="1" dirty="0">
                 <a:solidFill>
-                  <a:srgbClr val="1F3A5F"/>
+                  <a:srgbClr val="7A3A1D"/>
                 </a:solidFill>
                 <a:latin typeface="Microsoft YaHei" pitchFamily="34" charset="0"/>
                 <a:ea typeface="Microsoft YaHei" pitchFamily="34" charset="-122"/>
@@ -6888,7 +6888,7 @@
             <a:r>
               <a:rPr lang="en-US" sz="1450" b="1" dirty="0">
                 <a:solidFill>
-                  <a:srgbClr val="1F3A5F"/>
+                  <a:srgbClr val="7A3A1D"/>
                 </a:solidFill>
                 <a:latin typeface="Arial" pitchFamily="34" charset="0"/>
                 <a:ea typeface="Arial" pitchFamily="34" charset="-122"/>
@@ -6902,7 +6902,7 @@
             <a:r>
               <a:rPr lang="en-US" sz="1450" b="1" dirty="0">
                 <a:solidFill>
-                  <a:srgbClr val="1F3A5F"/>
+                  <a:srgbClr val="7A3A1D"/>
                 </a:solidFill>
                 <a:latin typeface="Microsoft YaHei" pitchFamily="34" charset="0"/>
                 <a:ea typeface="Microsoft YaHei" pitchFamily="34" charset="-122"/>
@@ -6944,7 +6944,7 @@
             <a:r>
               <a:rPr lang="en-US" sz="1250" dirty="0">
                 <a:solidFill>
-                  <a:srgbClr val="23272E"/>
+                  <a:srgbClr val="2B2823"/>
                 </a:solidFill>
                 <a:latin typeface="Arial" pitchFamily="34" charset="0"/>
                 <a:ea typeface="Arial" pitchFamily="34" charset="-122"/>
@@ -6961,7 +6961,7 @@
             <a:r>
               <a:rPr lang="en-US" sz="1250" dirty="0">
                 <a:solidFill>
-                  <a:srgbClr val="23272E"/>
+                  <a:srgbClr val="2B2823"/>
                 </a:solidFill>
                 <a:latin typeface="Microsoft YaHei" pitchFamily="34" charset="0"/>
                 <a:ea typeface="Microsoft YaHei" pitchFamily="34" charset="-122"/>
@@ -6978,7 +6978,7 @@
             <a:r>
               <a:rPr lang="en-US" sz="1250" dirty="0">
                 <a:solidFill>
-                  <a:srgbClr val="23272E"/>
+                  <a:srgbClr val="2B2823"/>
                 </a:solidFill>
                 <a:latin typeface="Arial" pitchFamily="34" charset="0"/>
                 <a:ea typeface="Arial" pitchFamily="34" charset="-122"/>
@@ -6995,7 +6995,7 @@
             <a:r>
               <a:rPr lang="en-US" sz="1250" dirty="0">
                 <a:solidFill>
-                  <a:srgbClr val="23272E"/>
+                  <a:srgbClr val="2B2823"/>
                 </a:solidFill>
                 <a:latin typeface="Microsoft YaHei" pitchFamily="34" charset="0"/>
                 <a:ea typeface="Microsoft YaHei" pitchFamily="34" charset="-122"/>
@@ -7022,7 +7022,7 @@
             <a:avLst/>
           </a:prstGeom>
           <a:solidFill>
-            <a:srgbClr val="D9DEE6"/>
+            <a:srgbClr val="E4E0D3"/>
           </a:solidFill>
           <a:ln/>
         </p:spPr>
@@ -7054,7 +7054,7 @@
             <a:r>
               <a:rPr lang="en-US" sz="1450" b="1" dirty="0">
                 <a:solidFill>
-                  <a:srgbClr val="1F3A5F"/>
+                  <a:srgbClr val="7A3A1D"/>
                 </a:solidFill>
                 <a:latin typeface="Microsoft YaHei" pitchFamily="34" charset="0"/>
                 <a:ea typeface="Microsoft YaHei" pitchFamily="34" charset="-122"/>
@@ -7096,7 +7096,7 @@
             <a:r>
               <a:rPr lang="en-US" sz="1250" dirty="0">
                 <a:solidFill>
-                  <a:srgbClr val="23272E"/>
+                  <a:srgbClr val="2B2823"/>
                 </a:solidFill>
                 <a:latin typeface="Microsoft YaHei" pitchFamily="34" charset="0"/>
                 <a:ea typeface="Microsoft YaHei" pitchFamily="34" charset="-122"/>
@@ -7113,7 +7113,7 @@
             <a:r>
               <a:rPr lang="en-US" sz="1250" dirty="0">
                 <a:solidFill>
-                  <a:srgbClr val="23272E"/>
+                  <a:srgbClr val="2B2823"/>
                 </a:solidFill>
                 <a:latin typeface="Arial" pitchFamily="34" charset="0"/>
                 <a:ea typeface="Arial" pitchFamily="34" charset="-122"/>
@@ -7130,7 +7130,7 @@
             <a:r>
               <a:rPr lang="en-US" sz="1250" dirty="0">
                 <a:solidFill>
-                  <a:srgbClr val="23272E"/>
+                  <a:srgbClr val="2B2823"/>
                 </a:solidFill>
                 <a:latin typeface="Microsoft YaHei" pitchFamily="34" charset="0"/>
                 <a:ea typeface="Microsoft YaHei" pitchFamily="34" charset="-122"/>
@@ -7147,7 +7147,7 @@
             <a:r>
               <a:rPr lang="en-US" sz="1250" dirty="0">
                 <a:solidFill>
-                  <a:srgbClr val="23272E"/>
+                  <a:srgbClr val="2B2823"/>
                 </a:solidFill>
                 <a:latin typeface="Arial" pitchFamily="34" charset="0"/>
                 <a:ea typeface="Arial" pitchFamily="34" charset="-122"/>
@@ -7164,7 +7164,7 @@
             <a:r>
               <a:rPr lang="en-US" sz="1250" dirty="0">
                 <a:solidFill>
-                  <a:srgbClr val="23272E"/>
+                  <a:srgbClr val="2B2823"/>
                 </a:solidFill>
                 <a:latin typeface="Microsoft YaHei" pitchFamily="34" charset="0"/>
                 <a:ea typeface="Microsoft YaHei" pitchFamily="34" charset="-122"/>
@@ -7191,7 +7191,7 @@
             <a:avLst/>
           </a:prstGeom>
           <a:solidFill>
-            <a:srgbClr val="1F3A5F"/>
+            <a:srgbClr val="7A3A1D"/>
           </a:solidFill>
           <a:ln/>
         </p:spPr>
@@ -7223,7 +7223,7 @@
             <a:r>
               <a:rPr lang="en-US" sz="3600" b="1" dirty="0">
                 <a:solidFill>
-                  <a:srgbClr val="1F3A5F"/>
+                  <a:srgbClr val="7A3A1D"/>
                 </a:solidFill>
                 <a:latin typeface="Arial" pitchFamily="34" charset="0"/>
                 <a:ea typeface="Arial" pitchFamily="34" charset="-122"/>
@@ -7262,7 +7262,7 @@
             <a:r>
               <a:rPr lang="en-US" sz="1350" b="1" dirty="0">
                 <a:solidFill>
-                  <a:srgbClr val="23272E"/>
+                  <a:srgbClr val="2B2823"/>
                 </a:solidFill>
                 <a:latin typeface="Microsoft YaHei" pitchFamily="34" charset="0"/>
                 <a:ea typeface="Microsoft YaHei" pitchFamily="34" charset="-122"/>
@@ -7276,7 +7276,7 @@
             <a:r>
               <a:rPr lang="en-US" sz="1350" b="1" dirty="0">
                 <a:solidFill>
-                  <a:srgbClr val="23272E"/>
+                  <a:srgbClr val="2B2823"/>
                 </a:solidFill>
                 <a:latin typeface="Arial" pitchFamily="34" charset="0"/>
                 <a:ea typeface="Arial" pitchFamily="34" charset="-122"/>
@@ -7290,7 +7290,7 @@
             <a:r>
               <a:rPr lang="en-US" sz="1350" b="1" dirty="0">
                 <a:solidFill>
-                  <a:srgbClr val="23272E"/>
+                  <a:srgbClr val="2B2823"/>
                 </a:solidFill>
                 <a:latin typeface="Microsoft YaHei" pitchFamily="34" charset="0"/>
                 <a:ea typeface="Microsoft YaHei" pitchFamily="34" charset="-122"/>
@@ -7317,7 +7317,7 @@
             <a:avLst/>
           </a:prstGeom>
           <a:solidFill>
-            <a:srgbClr val="1F3A5F"/>
+            <a:srgbClr val="7A3A1D"/>
           </a:solidFill>
           <a:ln/>
         </p:spPr>
@@ -7349,7 +7349,7 @@
             <a:r>
               <a:rPr lang="en-US" sz="3600" b="1" dirty="0">
                 <a:solidFill>
-                  <a:srgbClr val="1F3A5F"/>
+                  <a:srgbClr val="7A3A1D"/>
                 </a:solidFill>
                 <a:latin typeface="Arial" pitchFamily="34" charset="0"/>
                 <a:ea typeface="Arial" pitchFamily="34" charset="-122"/>
@@ -7363,7 +7363,7 @@
             <a:r>
               <a:rPr lang="en-US" sz="3600" b="1" dirty="0">
                 <a:solidFill>
-                  <a:srgbClr val="1F3A5F"/>
+                  <a:srgbClr val="7A3A1D"/>
                 </a:solidFill>
                 <a:latin typeface="Microsoft YaHei" pitchFamily="34" charset="0"/>
                 <a:ea typeface="Microsoft YaHei" pitchFamily="34" charset="-122"/>
@@ -7402,7 +7402,7 @@
             <a:r>
               <a:rPr lang="en-US" sz="1350" b="1" dirty="0">
                 <a:solidFill>
-                  <a:srgbClr val="23272E"/>
+                  <a:srgbClr val="2B2823"/>
                 </a:solidFill>
                 <a:latin typeface="Microsoft YaHei" pitchFamily="34" charset="0"/>
                 <a:ea typeface="Microsoft YaHei" pitchFamily="34" charset="-122"/>
@@ -7429,7 +7429,7 @@
             <a:avLst/>
           </a:prstGeom>
           <a:solidFill>
-            <a:srgbClr val="2F6FAE"/>
+            <a:srgbClr val="A8492A"/>
           </a:solidFill>
           <a:ln/>
         </p:spPr>
@@ -7461,7 +7461,7 @@
             <a:r>
               <a:rPr lang="en-US" sz="1200" b="1" spc="80" kern="0" dirty="0">
                 <a:solidFill>
-                  <a:srgbClr val="2F6FAE"/>
+                  <a:srgbClr val="A8492A"/>
                 </a:solidFill>
                 <a:latin typeface="Microsoft YaHei" pitchFamily="34" charset="0"/>
                 <a:ea typeface="Microsoft YaHei" pitchFamily="34" charset="-122"/>
@@ -7503,7 +7503,7 @@
             <a:r>
               <a:rPr lang="en-US" sz="1350" dirty="0">
                 <a:solidFill>
-                  <a:srgbClr val="23272E"/>
+                  <a:srgbClr val="2B2823"/>
                 </a:solidFill>
                 <a:latin typeface="Microsoft YaHei" pitchFamily="34" charset="0"/>
                 <a:ea typeface="Microsoft YaHei" pitchFamily="34" charset="-122"/>
@@ -7520,7 +7520,7 @@
             <a:r>
               <a:rPr lang="en-US" sz="1350" dirty="0">
                 <a:solidFill>
-                  <a:srgbClr val="23272E"/>
+                  <a:srgbClr val="2B2823"/>
                 </a:solidFill>
                 <a:latin typeface="Arial" pitchFamily="34" charset="0"/>
                 <a:ea typeface="Arial" pitchFamily="34" charset="-122"/>
@@ -7537,7 +7537,7 @@
             <a:r>
               <a:rPr lang="en-US" sz="1350" dirty="0">
                 <a:solidFill>
-                  <a:srgbClr val="23272E"/>
+                  <a:srgbClr val="2B2823"/>
                 </a:solidFill>
                 <a:latin typeface="Microsoft YaHei" pitchFamily="34" charset="0"/>
                 <a:ea typeface="Microsoft YaHei" pitchFamily="34" charset="-122"/>
@@ -7554,7 +7554,7 @@
             <a:r>
               <a:rPr lang="en-US" sz="1350" dirty="0">
                 <a:solidFill>
-                  <a:srgbClr val="23272E"/>
+                  <a:srgbClr val="2B2823"/>
                 </a:solidFill>
                 <a:latin typeface="Arial" pitchFamily="34" charset="0"/>
                 <a:ea typeface="Arial" pitchFamily="34" charset="-122"/>
@@ -7571,7 +7571,7 @@
             <a:r>
               <a:rPr lang="en-US" sz="1350" dirty="0">
                 <a:solidFill>
-                  <a:srgbClr val="23272E"/>
+                  <a:srgbClr val="2B2823"/>
                 </a:solidFill>
                 <a:latin typeface="Microsoft YaHei" pitchFamily="34" charset="0"/>
                 <a:ea typeface="Microsoft YaHei" pitchFamily="34" charset="-122"/>
@@ -7613,7 +7613,7 @@
             <a:r>
               <a:rPr lang="en-US" sz="1300" b="1" dirty="0">
                 <a:solidFill>
-                  <a:srgbClr val="23272E"/>
+                  <a:srgbClr val="2B2823"/>
                 </a:solidFill>
                 <a:latin typeface="Microsoft YaHei" pitchFamily="34" charset="0"/>
                 <a:ea typeface="Microsoft YaHei" pitchFamily="34" charset="-122"/>
@@ -7630,7 +7630,7 @@
             <a:r>
               <a:rPr lang="en-US" sz="1300" dirty="0">
                 <a:solidFill>
-                  <a:srgbClr val="23272E"/>
+                  <a:srgbClr val="2B2823"/>
                 </a:solidFill>
                 <a:latin typeface="Arial" pitchFamily="34" charset="0"/>
                 <a:ea typeface="Arial" pitchFamily="34" charset="-122"/>
@@ -7647,7 +7647,7 @@
             <a:r>
               <a:rPr lang="en-US" sz="1300" dirty="0">
                 <a:solidFill>
-                  <a:srgbClr val="23272E"/>
+                  <a:srgbClr val="2B2823"/>
                 </a:solidFill>
                 <a:latin typeface="Microsoft YaHei" pitchFamily="34" charset="0"/>
                 <a:ea typeface="Microsoft YaHei" pitchFamily="34" charset="-122"/>
@@ -7686,7 +7686,7 @@
             <a:r>
               <a:rPr lang="en-US" sz="950" dirty="0">
                 <a:solidFill>
-                  <a:srgbClr val="9AA1AB"/>
+                  <a:srgbClr val="A79E93"/>
                 </a:solidFill>
                 <a:latin typeface="Arial" pitchFamily="34" charset="0"/>
                 <a:ea typeface="Arial" pitchFamily="34" charset="-122"/>
@@ -7700,7 +7700,7 @@
             <a:r>
               <a:rPr lang="en-US" sz="950" dirty="0">
                 <a:solidFill>
-                  <a:srgbClr val="9AA1AB"/>
+                  <a:srgbClr val="A79E93"/>
                 </a:solidFill>
                 <a:latin typeface="Microsoft YaHei" pitchFamily="34" charset="0"/>
                 <a:ea typeface="Microsoft YaHei" pitchFamily="34" charset="-122"/>
@@ -7714,7 +7714,7 @@
             <a:r>
               <a:rPr lang="en-US" sz="950" dirty="0">
                 <a:solidFill>
-                  <a:srgbClr val="9AA1AB"/>
+                  <a:srgbClr val="A79E93"/>
                 </a:solidFill>
                 <a:latin typeface="Arial" pitchFamily="34" charset="0"/>
                 <a:ea typeface="Arial" pitchFamily="34" charset="-122"/>
@@ -7728,7 +7728,7 @@
             <a:r>
               <a:rPr lang="en-US" sz="950" dirty="0">
                 <a:solidFill>
-                  <a:srgbClr val="9AA1AB"/>
+                  <a:srgbClr val="A79E93"/>
                 </a:solidFill>
                 <a:latin typeface="Microsoft YaHei" pitchFamily="34" charset="0"/>
                 <a:ea typeface="Microsoft YaHei" pitchFamily="34" charset="-122"/>
@@ -7742,7 +7742,7 @@
             <a:r>
               <a:rPr lang="en-US" sz="950" dirty="0">
                 <a:solidFill>
-                  <a:srgbClr val="9AA1AB"/>
+                  <a:srgbClr val="A79E93"/>
                 </a:solidFill>
                 <a:latin typeface="Arial" pitchFamily="34" charset="0"/>
                 <a:ea typeface="Arial" pitchFamily="34" charset="-122"/>
@@ -7756,7 +7756,7 @@
             <a:r>
               <a:rPr lang="en-US" sz="950" dirty="0">
                 <a:solidFill>
-                  <a:srgbClr val="9AA1AB"/>
+                  <a:srgbClr val="A79E93"/>
                 </a:solidFill>
                 <a:latin typeface="Microsoft YaHei" pitchFamily="34" charset="0"/>
                 <a:ea typeface="Microsoft YaHei" pitchFamily="34" charset="-122"/>
@@ -7795,7 +7795,7 @@
             <a:r>
               <a:rPr lang="en-US" sz="950" dirty="0">
                 <a:solidFill>
-                  <a:srgbClr val="9AA1AB"/>
+                  <a:srgbClr val="A79E93"/>
                 </a:solidFill>
                 <a:latin typeface="Arial" pitchFamily="34" charset="0"/>
                 <a:ea typeface="Arial" pitchFamily="34" charset="-122"/>
@@ -7862,7 +7862,7 @@
             <a:r>
               <a:rPr lang="en-US" sz="1200" b="1" spc="240" kern="0" dirty="0">
                 <a:solidFill>
-                  <a:srgbClr val="2F6FAE"/>
+                  <a:srgbClr val="A8492A"/>
                 </a:solidFill>
                 <a:latin typeface="Microsoft YaHei" pitchFamily="34" charset="0"/>
                 <a:ea typeface="Microsoft YaHei" pitchFamily="34" charset="-122"/>
@@ -7904,7 +7904,7 @@
             <a:r>
               <a:rPr lang="en-US" sz="2500" b="1" dirty="0">
                 <a:solidFill>
-                  <a:srgbClr val="1F3A5F"/>
+                  <a:srgbClr val="7A3A1D"/>
                 </a:solidFill>
                 <a:latin typeface="Microsoft YaHei" pitchFamily="34" charset="0"/>
                 <a:ea typeface="Microsoft YaHei" pitchFamily="34" charset="-122"/>
@@ -7921,7 +7921,7 @@
             <a:r>
               <a:rPr lang="en-US" sz="2500" b="1" dirty="0">
                 <a:solidFill>
-                  <a:srgbClr val="1F3A5F"/>
+                  <a:srgbClr val="7A3A1D"/>
                 </a:solidFill>
                 <a:latin typeface="Arial" pitchFamily="34" charset="0"/>
                 <a:ea typeface="Arial" pitchFamily="34" charset="-122"/>
@@ -7938,7 +7938,7 @@
             <a:r>
               <a:rPr lang="en-US" sz="2500" b="1" dirty="0">
                 <a:solidFill>
-                  <a:srgbClr val="1F3A5F"/>
+                  <a:srgbClr val="7A3A1D"/>
                 </a:solidFill>
                 <a:latin typeface="Microsoft YaHei" pitchFamily="34" charset="0"/>
                 <a:ea typeface="Microsoft YaHei" pitchFamily="34" charset="-122"/>
@@ -7955,7 +7955,7 @@
             <a:r>
               <a:rPr lang="en-US" sz="2500" b="1" dirty="0">
                 <a:solidFill>
-                  <a:srgbClr val="1F3A5F"/>
+                  <a:srgbClr val="7A3A1D"/>
                 </a:solidFill>
                 <a:latin typeface="Arial" pitchFamily="34" charset="0"/>
                 <a:ea typeface="Arial" pitchFamily="34" charset="-122"/>
@@ -7972,7 +7972,7 @@
             <a:r>
               <a:rPr lang="en-US" sz="2500" b="1" dirty="0">
                 <a:solidFill>
-                  <a:srgbClr val="1F3A5F"/>
+                  <a:srgbClr val="7A3A1D"/>
                 </a:solidFill>
                 <a:latin typeface="Microsoft YaHei" pitchFamily="34" charset="0"/>
                 <a:ea typeface="Microsoft YaHei" pitchFamily="34" charset="-122"/>
@@ -8035,7 +8035,7 @@
             <a:r>
               <a:rPr lang="en-US" sz="1150" dirty="0">
                 <a:solidFill>
-                  <a:srgbClr val="6E7681"/>
+                  <a:srgbClr val="6B635A"/>
                 </a:solidFill>
                 <a:latin typeface="Microsoft YaHei" pitchFamily="34" charset="0"/>
                 <a:ea typeface="Microsoft YaHei" pitchFamily="34" charset="-122"/>
@@ -8049,7 +8049,7 @@
             <a:r>
               <a:rPr lang="en-US" sz="1150" dirty="0">
                 <a:solidFill>
-                  <a:srgbClr val="6E7681"/>
+                  <a:srgbClr val="6B635A"/>
                 </a:solidFill>
                 <a:latin typeface="Arial" pitchFamily="34" charset="0"/>
                 <a:ea typeface="Arial" pitchFamily="34" charset="-122"/>
@@ -8063,7 +8063,7 @@
             <a:r>
               <a:rPr lang="en-US" sz="1150" dirty="0">
                 <a:solidFill>
-                  <a:srgbClr val="6E7681"/>
+                  <a:srgbClr val="6B635A"/>
                 </a:solidFill>
                 <a:latin typeface="Microsoft YaHei" pitchFamily="34" charset="0"/>
                 <a:ea typeface="Microsoft YaHei" pitchFamily="34" charset="-122"/>
@@ -8105,7 +8105,7 @@
             <a:r>
               <a:rPr lang="en-US" sz="1400" b="1" dirty="0">
                 <a:solidFill>
-                  <a:srgbClr val="23272E"/>
+                  <a:srgbClr val="2B2823"/>
                 </a:solidFill>
                 <a:latin typeface="Arial" pitchFamily="34" charset="0"/>
                 <a:ea typeface="Arial" pitchFamily="34" charset="-122"/>
@@ -8122,7 +8122,7 @@
             <a:r>
               <a:rPr lang="en-US" sz="1400" b="1" dirty="0">
                 <a:solidFill>
-                  <a:srgbClr val="23272E"/>
+                  <a:srgbClr val="2B2823"/>
                 </a:solidFill>
                 <a:latin typeface="Microsoft YaHei" pitchFamily="34" charset="0"/>
                 <a:ea typeface="Microsoft YaHei" pitchFamily="34" charset="-122"/>
@@ -8139,7 +8139,7 @@
             <a:r>
               <a:rPr lang="en-US" sz="1400" dirty="0">
                 <a:solidFill>
-                  <a:srgbClr val="23272E"/>
+                  <a:srgbClr val="2B2823"/>
                 </a:solidFill>
                 <a:latin typeface="Arial" pitchFamily="34" charset="0"/>
                 <a:ea typeface="Arial" pitchFamily="34" charset="-122"/>
@@ -8156,7 +8156,7 @@
             <a:r>
               <a:rPr lang="en-US" sz="1400" dirty="0">
                 <a:solidFill>
-                  <a:srgbClr val="23272E"/>
+                  <a:srgbClr val="2B2823"/>
                 </a:solidFill>
                 <a:latin typeface="Arial" pitchFamily="34" charset="0"/>
                 <a:ea typeface="Arial" pitchFamily="34" charset="-122"/>
@@ -8173,7 +8173,7 @@
             <a:r>
               <a:rPr lang="en-US" sz="1400" dirty="0">
                 <a:solidFill>
-                  <a:srgbClr val="23272E"/>
+                  <a:srgbClr val="2B2823"/>
                 </a:solidFill>
                 <a:latin typeface="Microsoft YaHei" pitchFamily="34" charset="0"/>
                 <a:ea typeface="Microsoft YaHei" pitchFamily="34" charset="-122"/>
@@ -8190,7 +8190,7 @@
             <a:r>
               <a:rPr lang="en-US" sz="1400" dirty="0">
                 <a:solidFill>
-                  <a:srgbClr val="23272E"/>
+                  <a:srgbClr val="2B2823"/>
                 </a:solidFill>
                 <a:latin typeface="Arial" pitchFamily="34" charset="0"/>
                 <a:ea typeface="Arial" pitchFamily="34" charset="-122"/>
@@ -8207,7 +8207,7 @@
             <a:r>
               <a:rPr lang="en-US" sz="1400" dirty="0">
                 <a:solidFill>
-                  <a:srgbClr val="23272E"/>
+                  <a:srgbClr val="2B2823"/>
                 </a:solidFill>
                 <a:latin typeface="Microsoft YaHei" pitchFamily="34" charset="0"/>
                 <a:ea typeface="Microsoft YaHei" pitchFamily="34" charset="-122"/>
@@ -8234,7 +8234,7 @@
             <a:avLst/>
           </a:prstGeom>
           <a:solidFill>
-            <a:srgbClr val="D9DEE6"/>
+            <a:srgbClr val="E4E0D3"/>
           </a:solidFill>
           <a:ln/>
         </p:spPr>
@@ -8269,7 +8269,7 @@
             <a:r>
               <a:rPr lang="en-US" sz="1400" b="1" dirty="0">
                 <a:solidFill>
-                  <a:srgbClr val="23272E"/>
+                  <a:srgbClr val="2B2823"/>
                 </a:solidFill>
                 <a:latin typeface="Arial" pitchFamily="34" charset="0"/>
                 <a:ea typeface="Arial" pitchFamily="34" charset="-122"/>
@@ -8286,7 +8286,7 @@
             <a:r>
               <a:rPr lang="en-US" sz="1400" b="1" dirty="0">
                 <a:solidFill>
-                  <a:srgbClr val="23272E"/>
+                  <a:srgbClr val="2B2823"/>
                 </a:solidFill>
                 <a:latin typeface="Microsoft YaHei" pitchFamily="34" charset="0"/>
                 <a:ea typeface="Microsoft YaHei" pitchFamily="34" charset="-122"/>
@@ -8303,7 +8303,7 @@
             <a:r>
               <a:rPr lang="en-US" sz="1400" dirty="0">
                 <a:solidFill>
-                  <a:srgbClr val="23272E"/>
+                  <a:srgbClr val="2B2823"/>
                 </a:solidFill>
                 <a:latin typeface="Arial" pitchFamily="34" charset="0"/>
                 <a:ea typeface="Arial" pitchFamily="34" charset="-122"/>
@@ -8320,7 +8320,7 @@
             <a:r>
               <a:rPr lang="en-US" sz="1400" dirty="0">
                 <a:solidFill>
-                  <a:srgbClr val="23272E"/>
+                  <a:srgbClr val="2B2823"/>
                 </a:solidFill>
                 <a:latin typeface="Microsoft YaHei" pitchFamily="34" charset="0"/>
                 <a:ea typeface="Microsoft YaHei" pitchFamily="34" charset="-122"/>
@@ -8337,7 +8337,7 @@
             <a:r>
               <a:rPr lang="en-US" sz="1400" dirty="0">
                 <a:solidFill>
-                  <a:srgbClr val="23272E"/>
+                  <a:srgbClr val="2B2823"/>
                 </a:solidFill>
                 <a:latin typeface="Arial" pitchFamily="34" charset="0"/>
                 <a:ea typeface="Arial" pitchFamily="34" charset="-122"/>
@@ -8354,7 +8354,7 @@
             <a:r>
               <a:rPr lang="en-US" sz="1400" dirty="0">
                 <a:solidFill>
-                  <a:srgbClr val="23272E"/>
+                  <a:srgbClr val="2B2823"/>
                 </a:solidFill>
                 <a:latin typeface="Microsoft YaHei" pitchFamily="34" charset="0"/>
                 <a:ea typeface="Microsoft YaHei" pitchFamily="34" charset="-122"/>
@@ -8381,7 +8381,7 @@
             <a:avLst/>
           </a:prstGeom>
           <a:solidFill>
-            <a:srgbClr val="D9DEE6"/>
+            <a:srgbClr val="E4E0D3"/>
           </a:solidFill>
           <a:ln/>
         </p:spPr>
@@ -8416,7 +8416,7 @@
             <a:r>
               <a:rPr lang="en-US" sz="1400" b="1" dirty="0">
                 <a:solidFill>
-                  <a:srgbClr val="23272E"/>
+                  <a:srgbClr val="2B2823"/>
                 </a:solidFill>
                 <a:latin typeface="Arial" pitchFamily="34" charset="0"/>
                 <a:ea typeface="Arial" pitchFamily="34" charset="-122"/>
@@ -8433,7 +8433,7 @@
             <a:r>
               <a:rPr lang="en-US" sz="1400" b="1" dirty="0">
                 <a:solidFill>
-                  <a:srgbClr val="23272E"/>
+                  <a:srgbClr val="2B2823"/>
                 </a:solidFill>
                 <a:latin typeface="Microsoft YaHei" pitchFamily="34" charset="0"/>
                 <a:ea typeface="Microsoft YaHei" pitchFamily="34" charset="-122"/>
@@ -8450,7 +8450,7 @@
             <a:r>
               <a:rPr lang="en-US" sz="1400" dirty="0">
                 <a:solidFill>
-                  <a:srgbClr val="23272E"/>
+                  <a:srgbClr val="2B2823"/>
                 </a:solidFill>
                 <a:latin typeface="Arial" pitchFamily="34" charset="0"/>
                 <a:ea typeface="Arial" pitchFamily="34" charset="-122"/>
@@ -8467,7 +8467,7 @@
             <a:r>
               <a:rPr lang="en-US" sz="1400" dirty="0">
                 <a:solidFill>
-                  <a:srgbClr val="23272E"/>
+                  <a:srgbClr val="2B2823"/>
                 </a:solidFill>
                 <a:latin typeface="Microsoft YaHei" pitchFamily="34" charset="0"/>
                 <a:ea typeface="Microsoft YaHei" pitchFamily="34" charset="-122"/>
@@ -8494,7 +8494,7 @@
             <a:avLst/>
           </a:prstGeom>
           <a:solidFill>
-            <a:srgbClr val="2F6FAE"/>
+            <a:srgbClr val="A8492A"/>
           </a:solidFill>
           <a:ln/>
         </p:spPr>
@@ -8526,7 +8526,7 @@
             <a:r>
               <a:rPr lang="en-US" sz="1200" b="1" spc="80" kern="0" dirty="0">
                 <a:solidFill>
-                  <a:srgbClr val="2F6FAE"/>
+                  <a:srgbClr val="A8492A"/>
                 </a:solidFill>
                 <a:latin typeface="Microsoft YaHei" pitchFamily="34" charset="0"/>
                 <a:ea typeface="Microsoft YaHei" pitchFamily="34" charset="-122"/>
@@ -8568,7 +8568,7 @@
             <a:r>
               <a:rPr lang="en-US" sz="1350" dirty="0">
                 <a:solidFill>
-                  <a:srgbClr val="23272E"/>
+                  <a:srgbClr val="2B2823"/>
                 </a:solidFill>
                 <a:latin typeface="Microsoft YaHei" pitchFamily="34" charset="0"/>
                 <a:ea typeface="Microsoft YaHei" pitchFamily="34" charset="-122"/>
@@ -8585,7 +8585,7 @@
             <a:r>
               <a:rPr lang="en-US" sz="1350" dirty="0">
                 <a:solidFill>
-                  <a:srgbClr val="23272E"/>
+                  <a:srgbClr val="2B2823"/>
                 </a:solidFill>
                 <a:latin typeface="Arial" pitchFamily="34" charset="0"/>
                 <a:ea typeface="Arial" pitchFamily="34" charset="-122"/>
@@ -8602,7 +8602,7 @@
             <a:r>
               <a:rPr lang="en-US" sz="1350" dirty="0">
                 <a:solidFill>
-                  <a:srgbClr val="23272E"/>
+                  <a:srgbClr val="2B2823"/>
                 </a:solidFill>
                 <a:latin typeface="Microsoft YaHei" pitchFamily="34" charset="0"/>
                 <a:ea typeface="Microsoft YaHei" pitchFamily="34" charset="-122"/>
@@ -8644,7 +8644,7 @@
             <a:r>
               <a:rPr lang="en-US" sz="1300" b="1" dirty="0">
                 <a:solidFill>
-                  <a:srgbClr val="23272E"/>
+                  <a:srgbClr val="2B2823"/>
                 </a:solidFill>
                 <a:latin typeface="Microsoft YaHei" pitchFamily="34" charset="0"/>
                 <a:ea typeface="Microsoft YaHei" pitchFamily="34" charset="-122"/>
@@ -8661,7 +8661,7 @@
             <a:r>
               <a:rPr lang="en-US" sz="1300" dirty="0">
                 <a:solidFill>
-                  <a:srgbClr val="23272E"/>
+                  <a:srgbClr val="2B2823"/>
                 </a:solidFill>
                 <a:latin typeface="Arial" pitchFamily="34" charset="0"/>
                 <a:ea typeface="Arial" pitchFamily="34" charset="-122"/>
@@ -8678,7 +8678,7 @@
             <a:r>
               <a:rPr lang="en-US" sz="1300" dirty="0">
                 <a:solidFill>
-                  <a:srgbClr val="23272E"/>
+                  <a:srgbClr val="2B2823"/>
                 </a:solidFill>
                 <a:latin typeface="Microsoft YaHei" pitchFamily="34" charset="0"/>
                 <a:ea typeface="Microsoft YaHei" pitchFamily="34" charset="-122"/>
@@ -8695,7 +8695,7 @@
             <a:r>
               <a:rPr lang="en-US" sz="1300" dirty="0">
                 <a:solidFill>
-                  <a:srgbClr val="23272E"/>
+                  <a:srgbClr val="2B2823"/>
                 </a:solidFill>
                 <a:latin typeface="Arial" pitchFamily="34" charset="0"/>
                 <a:ea typeface="Arial" pitchFamily="34" charset="-122"/>
@@ -8712,7 +8712,7 @@
             <a:r>
               <a:rPr lang="en-US" sz="1300" dirty="0">
                 <a:solidFill>
-                  <a:srgbClr val="23272E"/>
+                  <a:srgbClr val="2B2823"/>
                 </a:solidFill>
                 <a:latin typeface="Microsoft YaHei" pitchFamily="34" charset="0"/>
                 <a:ea typeface="Microsoft YaHei" pitchFamily="34" charset="-122"/>
@@ -8729,7 +8729,7 @@
             <a:r>
               <a:rPr lang="en-US" sz="1300" dirty="0">
                 <a:solidFill>
-                  <a:srgbClr val="23272E"/>
+                  <a:srgbClr val="2B2823"/>
                 </a:solidFill>
                 <a:latin typeface="Arial" pitchFamily="34" charset="0"/>
                 <a:ea typeface="Arial" pitchFamily="34" charset="-122"/>
@@ -8746,7 +8746,7 @@
             <a:r>
               <a:rPr lang="en-US" sz="1300" dirty="0">
                 <a:solidFill>
-                  <a:srgbClr val="23272E"/>
+                  <a:srgbClr val="2B2823"/>
                 </a:solidFill>
                 <a:latin typeface="Microsoft YaHei" pitchFamily="34" charset="0"/>
                 <a:ea typeface="Microsoft YaHei" pitchFamily="34" charset="-122"/>
@@ -8785,7 +8785,7 @@
             <a:r>
               <a:rPr lang="en-US" sz="950" dirty="0">
                 <a:solidFill>
-                  <a:srgbClr val="9AA1AB"/>
+                  <a:srgbClr val="A79E93"/>
                 </a:solidFill>
                 <a:latin typeface="Arial" pitchFamily="34" charset="0"/>
                 <a:ea typeface="Arial" pitchFamily="34" charset="-122"/>
@@ -8799,7 +8799,7 @@
             <a:r>
               <a:rPr lang="en-US" sz="950" dirty="0">
                 <a:solidFill>
-                  <a:srgbClr val="9AA1AB"/>
+                  <a:srgbClr val="A79E93"/>
                 </a:solidFill>
                 <a:latin typeface="Microsoft YaHei" pitchFamily="34" charset="0"/>
                 <a:ea typeface="Microsoft YaHei" pitchFamily="34" charset="-122"/>
@@ -8813,7 +8813,7 @@
             <a:r>
               <a:rPr lang="en-US" sz="950" dirty="0">
                 <a:solidFill>
-                  <a:srgbClr val="9AA1AB"/>
+                  <a:srgbClr val="A79E93"/>
                 </a:solidFill>
                 <a:latin typeface="Arial" pitchFamily="34" charset="0"/>
                 <a:ea typeface="Arial" pitchFamily="34" charset="-122"/>
@@ -8827,7 +8827,7 @@
             <a:r>
               <a:rPr lang="en-US" sz="950" dirty="0">
                 <a:solidFill>
-                  <a:srgbClr val="9AA1AB"/>
+                  <a:srgbClr val="A79E93"/>
                 </a:solidFill>
                 <a:latin typeface="Microsoft YaHei" pitchFamily="34" charset="0"/>
                 <a:ea typeface="Microsoft YaHei" pitchFamily="34" charset="-122"/>
@@ -8841,7 +8841,7 @@
             <a:r>
               <a:rPr lang="en-US" sz="950" dirty="0">
                 <a:solidFill>
-                  <a:srgbClr val="9AA1AB"/>
+                  <a:srgbClr val="A79E93"/>
                 </a:solidFill>
                 <a:latin typeface="Arial" pitchFamily="34" charset="0"/>
                 <a:ea typeface="Arial" pitchFamily="34" charset="-122"/>
@@ -8855,7 +8855,7 @@
             <a:r>
               <a:rPr lang="en-US" sz="950" dirty="0">
                 <a:solidFill>
-                  <a:srgbClr val="9AA1AB"/>
+                  <a:srgbClr val="A79E93"/>
                 </a:solidFill>
                 <a:latin typeface="Microsoft YaHei" pitchFamily="34" charset="0"/>
                 <a:ea typeface="Microsoft YaHei" pitchFamily="34" charset="-122"/>
@@ -8894,7 +8894,7 @@
             <a:r>
               <a:rPr lang="en-US" sz="950" dirty="0">
                 <a:solidFill>
-                  <a:srgbClr val="9AA1AB"/>
+                  <a:srgbClr val="A79E93"/>
                 </a:solidFill>
                 <a:latin typeface="Arial" pitchFamily="34" charset="0"/>
                 <a:ea typeface="Arial" pitchFamily="34" charset="-122"/>
@@ -8961,7 +8961,7 @@
             <a:r>
               <a:rPr lang="en-US" sz="1200" b="1" spc="240" kern="0" dirty="0">
                 <a:solidFill>
-                  <a:srgbClr val="2F6FAE"/>
+                  <a:srgbClr val="A8492A"/>
                 </a:solidFill>
                 <a:latin typeface="Microsoft YaHei" pitchFamily="34" charset="0"/>
                 <a:ea typeface="Microsoft YaHei" pitchFamily="34" charset="-122"/>
@@ -9003,7 +9003,7 @@
             <a:r>
               <a:rPr lang="en-US" sz="2500" b="1" dirty="0">
                 <a:solidFill>
-                  <a:srgbClr val="1F3A5F"/>
+                  <a:srgbClr val="7A3A1D"/>
                 </a:solidFill>
                 <a:latin typeface="Microsoft YaHei" pitchFamily="34" charset="0"/>
                 <a:ea typeface="Microsoft YaHei" pitchFamily="34" charset="-122"/>
@@ -9066,7 +9066,7 @@
             <a:r>
               <a:rPr lang="en-US" sz="1150" dirty="0">
                 <a:solidFill>
-                  <a:srgbClr val="6E7681"/>
+                  <a:srgbClr val="6B635A"/>
                 </a:solidFill>
                 <a:latin typeface="Microsoft YaHei" pitchFamily="34" charset="0"/>
                 <a:ea typeface="Microsoft YaHei" pitchFamily="34" charset="-122"/>
@@ -9080,7 +9080,7 @@
             <a:r>
               <a:rPr lang="en-US" sz="1150" dirty="0">
                 <a:solidFill>
-                  <a:srgbClr val="6E7681"/>
+                  <a:srgbClr val="6B635A"/>
                 </a:solidFill>
                 <a:latin typeface="Arial" pitchFamily="34" charset="0"/>
                 <a:ea typeface="Arial" pitchFamily="34" charset="-122"/>
@@ -9094,7 +9094,7 @@
             <a:r>
               <a:rPr lang="en-US" sz="1150" dirty="0">
                 <a:solidFill>
-                  <a:srgbClr val="6E7681"/>
+                  <a:srgbClr val="6B635A"/>
                 </a:solidFill>
                 <a:latin typeface="Microsoft YaHei" pitchFamily="34" charset="0"/>
                 <a:ea typeface="Microsoft YaHei" pitchFamily="34" charset="-122"/>
@@ -9108,7 +9108,7 @@
             <a:r>
               <a:rPr lang="en-US" sz="1150" dirty="0">
                 <a:solidFill>
-                  <a:srgbClr val="6E7681"/>
+                  <a:srgbClr val="6B635A"/>
                 </a:solidFill>
                 <a:latin typeface="Arial" pitchFamily="34" charset="0"/>
                 <a:ea typeface="Arial" pitchFamily="34" charset="-122"/>
@@ -9171,7 +9171,7 @@
             <a:r>
               <a:rPr lang="en-US" sz="1150" dirty="0">
                 <a:solidFill>
-                  <a:srgbClr val="6E7681"/>
+                  <a:srgbClr val="6B635A"/>
                 </a:solidFill>
                 <a:latin typeface="Microsoft YaHei" pitchFamily="34" charset="0"/>
                 <a:ea typeface="Microsoft YaHei" pitchFamily="34" charset="-122"/>
@@ -9185,7 +9185,7 @@
             <a:r>
               <a:rPr lang="en-US" sz="1150" dirty="0">
                 <a:solidFill>
-                  <a:srgbClr val="6E7681"/>
+                  <a:srgbClr val="6B635A"/>
                 </a:solidFill>
                 <a:latin typeface="Arial" pitchFamily="34" charset="0"/>
                 <a:ea typeface="Arial" pitchFamily="34" charset="-122"/>
@@ -9199,7 +9199,7 @@
             <a:r>
               <a:rPr lang="en-US" sz="1150" dirty="0">
                 <a:solidFill>
-                  <a:srgbClr val="6E7681"/>
+                  <a:srgbClr val="6B635A"/>
                 </a:solidFill>
                 <a:latin typeface="Microsoft YaHei" pitchFamily="34" charset="0"/>
                 <a:ea typeface="Microsoft YaHei" pitchFamily="34" charset="-122"/>
@@ -9213,7 +9213,7 @@
             <a:r>
               <a:rPr lang="en-US" sz="1150" dirty="0">
                 <a:solidFill>
-                  <a:srgbClr val="6E7681"/>
+                  <a:srgbClr val="6B635A"/>
                 </a:solidFill>
                 <a:latin typeface="Arial" pitchFamily="34" charset="0"/>
                 <a:ea typeface="Arial" pitchFamily="34" charset="-122"/>
@@ -9227,7 +9227,7 @@
             <a:r>
               <a:rPr lang="en-US" sz="1150" dirty="0">
                 <a:solidFill>
-                  <a:srgbClr val="6E7681"/>
+                  <a:srgbClr val="6B635A"/>
                 </a:solidFill>
                 <a:latin typeface="Microsoft YaHei" pitchFamily="34" charset="0"/>
                 <a:ea typeface="Microsoft YaHei" pitchFamily="34" charset="-122"/>
@@ -9241,7 +9241,7 @@
             <a:r>
               <a:rPr lang="en-US" sz="1150" dirty="0">
                 <a:solidFill>
-                  <a:srgbClr val="6E7681"/>
+                  <a:srgbClr val="6B635A"/>
                 </a:solidFill>
                 <a:latin typeface="Arial" pitchFamily="34" charset="0"/>
                 <a:ea typeface="Arial" pitchFamily="34" charset="-122"/>
@@ -9283,7 +9283,7 @@
             <a:r>
               <a:rPr lang="en-US" sz="1350" b="1" dirty="0">
                 <a:solidFill>
-                  <a:srgbClr val="23272E"/>
+                  <a:srgbClr val="2B2823"/>
                 </a:solidFill>
                 <a:latin typeface="Microsoft YaHei" pitchFamily="34" charset="0"/>
                 <a:ea typeface="Microsoft YaHei" pitchFamily="34" charset="-122"/>
@@ -9300,7 +9300,7 @@
             <a:r>
               <a:rPr lang="en-US" sz="1350" dirty="0">
                 <a:solidFill>
-                  <a:srgbClr val="23272E"/>
+                  <a:srgbClr val="2B2823"/>
                 </a:solidFill>
                 <a:latin typeface="Arial" pitchFamily="34" charset="0"/>
                 <a:ea typeface="Arial" pitchFamily="34" charset="-122"/>
@@ -9317,7 +9317,7 @@
             <a:r>
               <a:rPr lang="en-US" sz="1350" dirty="0">
                 <a:solidFill>
-                  <a:srgbClr val="23272E"/>
+                  <a:srgbClr val="2B2823"/>
                 </a:solidFill>
                 <a:latin typeface="Arial" pitchFamily="34" charset="0"/>
                 <a:ea typeface="Arial" pitchFamily="34" charset="-122"/>
@@ -9334,7 +9334,7 @@
             <a:r>
               <a:rPr lang="en-US" sz="1350" dirty="0">
                 <a:solidFill>
-                  <a:srgbClr val="23272E"/>
+                  <a:srgbClr val="2B2823"/>
                 </a:solidFill>
                 <a:latin typeface="Microsoft YaHei" pitchFamily="34" charset="0"/>
                 <a:ea typeface="Microsoft YaHei" pitchFamily="34" charset="-122"/>
@@ -9351,7 +9351,7 @@
             <a:r>
               <a:rPr lang="en-US" sz="1350" dirty="0">
                 <a:solidFill>
-                  <a:srgbClr val="23272E"/>
+                  <a:srgbClr val="2B2823"/>
                 </a:solidFill>
                 <a:latin typeface="Arial" pitchFamily="34" charset="0"/>
                 <a:ea typeface="Arial" pitchFamily="34" charset="-122"/>
@@ -9368,7 +9368,7 @@
             <a:r>
               <a:rPr lang="en-US" sz="1350" dirty="0">
                 <a:solidFill>
-                  <a:srgbClr val="23272E"/>
+                  <a:srgbClr val="2B2823"/>
                 </a:solidFill>
                 <a:latin typeface="Microsoft YaHei" pitchFamily="34" charset="0"/>
                 <a:ea typeface="Microsoft YaHei" pitchFamily="34" charset="-122"/>
@@ -9407,7 +9407,7 @@
             <a:r>
               <a:rPr lang="en-US" sz="950" dirty="0">
                 <a:solidFill>
-                  <a:srgbClr val="9AA1AB"/>
+                  <a:srgbClr val="A79E93"/>
                 </a:solidFill>
                 <a:latin typeface="Arial" pitchFamily="34" charset="0"/>
                 <a:ea typeface="Arial" pitchFamily="34" charset="-122"/>
@@ -9421,7 +9421,7 @@
             <a:r>
               <a:rPr lang="en-US" sz="950" dirty="0">
                 <a:solidFill>
-                  <a:srgbClr val="9AA1AB"/>
+                  <a:srgbClr val="A79E93"/>
                 </a:solidFill>
                 <a:latin typeface="Microsoft YaHei" pitchFamily="34" charset="0"/>
                 <a:ea typeface="Microsoft YaHei" pitchFamily="34" charset="-122"/>
@@ -9435,7 +9435,7 @@
             <a:r>
               <a:rPr lang="en-US" sz="950" dirty="0">
                 <a:solidFill>
-                  <a:srgbClr val="9AA1AB"/>
+                  <a:srgbClr val="A79E93"/>
                 </a:solidFill>
                 <a:latin typeface="Arial" pitchFamily="34" charset="0"/>
                 <a:ea typeface="Arial" pitchFamily="34" charset="-122"/>
@@ -9449,7 +9449,7 @@
             <a:r>
               <a:rPr lang="en-US" sz="950" dirty="0">
                 <a:solidFill>
-                  <a:srgbClr val="9AA1AB"/>
+                  <a:srgbClr val="A79E93"/>
                 </a:solidFill>
                 <a:latin typeface="Microsoft YaHei" pitchFamily="34" charset="0"/>
                 <a:ea typeface="Microsoft YaHei" pitchFamily="34" charset="-122"/>
@@ -9463,7 +9463,7 @@
             <a:r>
               <a:rPr lang="en-US" sz="950" dirty="0">
                 <a:solidFill>
-                  <a:srgbClr val="9AA1AB"/>
+                  <a:srgbClr val="A79E93"/>
                 </a:solidFill>
                 <a:latin typeface="Arial" pitchFamily="34" charset="0"/>
                 <a:ea typeface="Arial" pitchFamily="34" charset="-122"/>
@@ -9477,7 +9477,7 @@
             <a:r>
               <a:rPr lang="en-US" sz="950" dirty="0">
                 <a:solidFill>
-                  <a:srgbClr val="9AA1AB"/>
+                  <a:srgbClr val="A79E93"/>
                 </a:solidFill>
                 <a:latin typeface="Microsoft YaHei" pitchFamily="34" charset="0"/>
                 <a:ea typeface="Microsoft YaHei" pitchFamily="34" charset="-122"/>
@@ -9516,7 +9516,7 @@
             <a:r>
               <a:rPr lang="en-US" sz="950" dirty="0">
                 <a:solidFill>
-                  <a:srgbClr val="9AA1AB"/>
+                  <a:srgbClr val="A79E93"/>
                 </a:solidFill>
                 <a:latin typeface="Arial" pitchFamily="34" charset="0"/>
                 <a:ea typeface="Arial" pitchFamily="34" charset="-122"/>
@@ -9583,7 +9583,7 @@
             <a:r>
               <a:rPr lang="en-US" sz="9600" b="1" dirty="0">
                 <a:solidFill>
-                  <a:srgbClr val="E7EEF6"/>
+                  <a:srgbClr val="F3E3D8"/>
                 </a:solidFill>
                 <a:latin typeface="Arial" pitchFamily="34" charset="0"/>
                 <a:ea typeface="Arial" pitchFamily="34" charset="-122"/>
@@ -9622,7 +9622,7 @@
             <a:r>
               <a:rPr lang="en-US" sz="1300" b="1" spc="300" kern="0" dirty="0">
                 <a:solidFill>
-                  <a:srgbClr val="2F6FAE"/>
+                  <a:srgbClr val="A8492A"/>
                 </a:solidFill>
                 <a:latin typeface="Arial" pitchFamily="34" charset="0"/>
                 <a:ea typeface="Arial" pitchFamily="34" charset="-122"/>
@@ -9649,7 +9649,7 @@
             <a:avLst/>
           </a:prstGeom>
           <a:solidFill>
-            <a:srgbClr val="2F6FAE"/>
+            <a:srgbClr val="A8492A"/>
           </a:solidFill>
           <a:ln/>
         </p:spPr>
@@ -9681,7 +9681,7 @@
             <a:r>
               <a:rPr lang="en-US" sz="3000" b="1" dirty="0">
                 <a:solidFill>
-                  <a:srgbClr val="1F3A5F"/>
+                  <a:srgbClr val="7A3A1D"/>
                 </a:solidFill>
                 <a:latin typeface="Microsoft YaHei" pitchFamily="34" charset="0"/>
                 <a:ea typeface="Microsoft YaHei" pitchFamily="34" charset="-122"/>
@@ -9723,7 +9723,7 @@
             <a:r>
               <a:rPr lang="en-US" sz="1450" dirty="0">
                 <a:solidFill>
-                  <a:srgbClr val="6E7681"/>
+                  <a:srgbClr val="6B635A"/>
                 </a:solidFill>
                 <a:latin typeface="Microsoft YaHei" pitchFamily="34" charset="0"/>
                 <a:ea typeface="Microsoft YaHei" pitchFamily="34" charset="-122"/>
@@ -9750,7 +9750,7 @@
             <a:avLst/>
           </a:prstGeom>
           <a:solidFill>
-            <a:srgbClr val="D9DEE6"/>
+            <a:srgbClr val="E4E0D3"/>
           </a:solidFill>
           <a:ln/>
         </p:spPr>
@@ -9782,7 +9782,7 @@
             <a:r>
               <a:rPr lang="en-US" sz="1400" b="1" dirty="0">
                 <a:solidFill>
-                  <a:srgbClr val="1F3A5F"/>
+                  <a:srgbClr val="7A3A1D"/>
                 </a:solidFill>
                 <a:latin typeface="Microsoft YaHei" pitchFamily="34" charset="0"/>
                 <a:ea typeface="Microsoft YaHei" pitchFamily="34" charset="-122"/>
@@ -9824,7 +9824,7 @@
             <a:r>
               <a:rPr lang="en-US" sz="1250" dirty="0">
                 <a:solidFill>
-                  <a:srgbClr val="6E7681"/>
+                  <a:srgbClr val="6B635A"/>
                 </a:solidFill>
                 <a:latin typeface="Microsoft YaHei" pitchFamily="34" charset="0"/>
                 <a:ea typeface="Microsoft YaHei" pitchFamily="34" charset="-122"/>
@@ -9851,7 +9851,7 @@
             <a:avLst/>
           </a:prstGeom>
           <a:solidFill>
-            <a:srgbClr val="D9DEE6"/>
+            <a:srgbClr val="E4E0D3"/>
           </a:solidFill>
           <a:ln/>
         </p:spPr>
@@ -9883,7 +9883,7 @@
             <a:r>
               <a:rPr lang="en-US" sz="1400" b="1" dirty="0">
                 <a:solidFill>
-                  <a:srgbClr val="1F3A5F"/>
+                  <a:srgbClr val="7A3A1D"/>
                 </a:solidFill>
                 <a:latin typeface="Microsoft YaHei" pitchFamily="34" charset="0"/>
                 <a:ea typeface="Microsoft YaHei" pitchFamily="34" charset="-122"/>
@@ -9925,7 +9925,7 @@
             <a:r>
               <a:rPr lang="en-US" sz="1250" dirty="0">
                 <a:solidFill>
-                  <a:srgbClr val="6E7681"/>
+                  <a:srgbClr val="6B635A"/>
                 </a:solidFill>
                 <a:latin typeface="Microsoft YaHei" pitchFamily="34" charset="0"/>
                 <a:ea typeface="Microsoft YaHei" pitchFamily="34" charset="-122"/>
@@ -9952,7 +9952,7 @@
             <a:avLst/>
           </a:prstGeom>
           <a:solidFill>
-            <a:srgbClr val="D9DEE6"/>
+            <a:srgbClr val="E4E0D3"/>
           </a:solidFill>
           <a:ln/>
         </p:spPr>
@@ -9984,7 +9984,7 @@
             <a:r>
               <a:rPr lang="en-US" sz="1400" b="1" dirty="0">
                 <a:solidFill>
-                  <a:srgbClr val="1F3A5F"/>
+                  <a:srgbClr val="7A3A1D"/>
                 </a:solidFill>
                 <a:latin typeface="Microsoft YaHei" pitchFamily="34" charset="0"/>
                 <a:ea typeface="Microsoft YaHei" pitchFamily="34" charset="-122"/>
@@ -10026,7 +10026,7 @@
             <a:r>
               <a:rPr lang="en-US" sz="1250" dirty="0">
                 <a:solidFill>
-                  <a:srgbClr val="6E7681"/>
+                  <a:srgbClr val="6B635A"/>
                 </a:solidFill>
                 <a:latin typeface="Microsoft YaHei" pitchFamily="34" charset="0"/>
                 <a:ea typeface="Microsoft YaHei" pitchFamily="34" charset="-122"/>
@@ -10065,7 +10065,7 @@
             <a:r>
               <a:rPr lang="en-US" sz="1150" dirty="0">
                 <a:solidFill>
-                  <a:srgbClr val="9AA1AB"/>
+                  <a:srgbClr val="A79E93"/>
                 </a:solidFill>
                 <a:latin typeface="Arial" pitchFamily="34" charset="0"/>
                 <a:ea typeface="Arial" pitchFamily="34" charset="-122"/>
@@ -10079,7 +10079,7 @@
             <a:r>
               <a:rPr lang="en-US" sz="1150" dirty="0">
                 <a:solidFill>
-                  <a:srgbClr val="9AA1AB"/>
+                  <a:srgbClr val="A79E93"/>
                 </a:solidFill>
                 <a:latin typeface="Microsoft YaHei" pitchFamily="34" charset="0"/>
                 <a:ea typeface="Microsoft YaHei" pitchFamily="34" charset="-122"/>
@@ -10118,7 +10118,7 @@
             <a:r>
               <a:rPr lang="en-US" sz="1150" dirty="0">
                 <a:solidFill>
-                  <a:srgbClr val="9AA1AB"/>
+                  <a:srgbClr val="A79E93"/>
                 </a:solidFill>
                 <a:latin typeface="Arial" pitchFamily="34" charset="0"/>
                 <a:ea typeface="Arial" pitchFamily="34" charset="-122"/>
@@ -10132,7 +10132,7 @@
             <a:r>
               <a:rPr lang="en-US" sz="1150" dirty="0">
                 <a:solidFill>
-                  <a:srgbClr val="9AA1AB"/>
+                  <a:srgbClr val="A79E93"/>
                 </a:solidFill>
                 <a:latin typeface="Microsoft YaHei" pitchFamily="34" charset="0"/>
                 <a:ea typeface="Microsoft YaHei" pitchFamily="34" charset="-122"/>
@@ -10171,7 +10171,7 @@
             <a:r>
               <a:rPr lang="en-US" sz="1150" dirty="0">
                 <a:solidFill>
-                  <a:srgbClr val="9AA1AB"/>
+                  <a:srgbClr val="A79E93"/>
                 </a:solidFill>
                 <a:latin typeface="Arial" pitchFamily="34" charset="0"/>
                 <a:ea typeface="Arial" pitchFamily="34" charset="-122"/>
@@ -10185,7 +10185,7 @@
             <a:r>
               <a:rPr lang="en-US" sz="1150" dirty="0">
                 <a:solidFill>
-                  <a:srgbClr val="9AA1AB"/>
+                  <a:srgbClr val="A79E93"/>
                 </a:solidFill>
                 <a:latin typeface="Microsoft YaHei" pitchFamily="34" charset="0"/>
                 <a:ea typeface="Microsoft YaHei" pitchFamily="34" charset="-122"/>
@@ -10224,7 +10224,7 @@
             <a:r>
               <a:rPr lang="en-US" sz="1150" b="1" dirty="0">
                 <a:solidFill>
-                  <a:srgbClr val="2F6FAE"/>
+                  <a:srgbClr val="A8492A"/>
                 </a:solidFill>
                 <a:latin typeface="Arial" pitchFamily="34" charset="0"/>
                 <a:ea typeface="Arial" pitchFamily="34" charset="-122"/>
@@ -10238,7 +10238,7 @@
             <a:r>
               <a:rPr lang="en-US" sz="1150" b="1" dirty="0">
                 <a:solidFill>
-                  <a:srgbClr val="2F6FAE"/>
+                  <a:srgbClr val="A8492A"/>
                 </a:solidFill>
                 <a:latin typeface="Microsoft YaHei" pitchFamily="34" charset="0"/>
                 <a:ea typeface="Microsoft YaHei" pitchFamily="34" charset="-122"/>
@@ -10277,7 +10277,7 @@
             <a:r>
               <a:rPr lang="en-US" sz="950" dirty="0">
                 <a:solidFill>
-                  <a:srgbClr val="9AA1AB"/>
+                  <a:srgbClr val="A79E93"/>
                 </a:solidFill>
                 <a:latin typeface="Arial" pitchFamily="34" charset="0"/>
                 <a:ea typeface="Arial" pitchFamily="34" charset="-122"/>
@@ -10291,7 +10291,7 @@
             <a:r>
               <a:rPr lang="en-US" sz="950" dirty="0">
                 <a:solidFill>
-                  <a:srgbClr val="9AA1AB"/>
+                  <a:srgbClr val="A79E93"/>
                 </a:solidFill>
                 <a:latin typeface="Microsoft YaHei" pitchFamily="34" charset="0"/>
                 <a:ea typeface="Microsoft YaHei" pitchFamily="34" charset="-122"/>
@@ -10305,7 +10305,7 @@
             <a:r>
               <a:rPr lang="en-US" sz="950" dirty="0">
                 <a:solidFill>
-                  <a:srgbClr val="9AA1AB"/>
+                  <a:srgbClr val="A79E93"/>
                 </a:solidFill>
                 <a:latin typeface="Arial" pitchFamily="34" charset="0"/>
                 <a:ea typeface="Arial" pitchFamily="34" charset="-122"/>
@@ -10319,7 +10319,7 @@
             <a:r>
               <a:rPr lang="en-US" sz="950" dirty="0">
                 <a:solidFill>
-                  <a:srgbClr val="9AA1AB"/>
+                  <a:srgbClr val="A79E93"/>
                 </a:solidFill>
                 <a:latin typeface="Microsoft YaHei" pitchFamily="34" charset="0"/>
                 <a:ea typeface="Microsoft YaHei" pitchFamily="34" charset="-122"/>
@@ -10333,7 +10333,7 @@
             <a:r>
               <a:rPr lang="en-US" sz="950" dirty="0">
                 <a:solidFill>
-                  <a:srgbClr val="9AA1AB"/>
+                  <a:srgbClr val="A79E93"/>
                 </a:solidFill>
                 <a:latin typeface="Arial" pitchFamily="34" charset="0"/>
                 <a:ea typeface="Arial" pitchFamily="34" charset="-122"/>
@@ -10347,7 +10347,7 @@
             <a:r>
               <a:rPr lang="en-US" sz="950" dirty="0">
                 <a:solidFill>
-                  <a:srgbClr val="9AA1AB"/>
+                  <a:srgbClr val="A79E93"/>
                 </a:solidFill>
                 <a:latin typeface="Microsoft YaHei" pitchFamily="34" charset="0"/>
                 <a:ea typeface="Microsoft YaHei" pitchFamily="34" charset="-122"/>
@@ -10386,7 +10386,7 @@
             <a:r>
               <a:rPr lang="en-US" sz="950" dirty="0">
                 <a:solidFill>
-                  <a:srgbClr val="9AA1AB"/>
+                  <a:srgbClr val="A79E93"/>
                 </a:solidFill>
                 <a:latin typeface="Arial" pitchFamily="34" charset="0"/>
                 <a:ea typeface="Arial" pitchFamily="34" charset="-122"/>
@@ -10453,7 +10453,7 @@
             <a:r>
               <a:rPr lang="en-US" sz="1200" b="1" spc="240" kern="0" dirty="0">
                 <a:solidFill>
-                  <a:srgbClr val="2F6FAE"/>
+                  <a:srgbClr val="A8492A"/>
                 </a:solidFill>
                 <a:latin typeface="Microsoft YaHei" pitchFamily="34" charset="0"/>
                 <a:ea typeface="Microsoft YaHei" pitchFamily="34" charset="-122"/>
@@ -10495,7 +10495,7 @@
             <a:r>
               <a:rPr lang="en-US" sz="2500" b="1" dirty="0">
                 <a:solidFill>
-                  <a:srgbClr val="1F3A5F"/>
+                  <a:srgbClr val="7A3A1D"/>
                 </a:solidFill>
                 <a:latin typeface="Microsoft YaHei" pitchFamily="34" charset="0"/>
                 <a:ea typeface="Microsoft YaHei" pitchFamily="34" charset="-122"/>
@@ -10537,7 +10537,7 @@
             <a:r>
               <a:rPr lang="en-US" sz="1200" dirty="0">
                 <a:solidFill>
-                  <a:srgbClr val="6E7681"/>
+                  <a:srgbClr val="6B635A"/>
                 </a:solidFill>
                 <a:latin typeface="Microsoft YaHei" pitchFamily="34" charset="0"/>
                 <a:ea typeface="Microsoft YaHei" pitchFamily="34" charset="-122"/>
@@ -10579,7 +10579,7 @@
             <a:r>
               <a:rPr lang="en-US" sz="1500" b="1" dirty="0">
                 <a:solidFill>
-                  <a:srgbClr val="23272E"/>
+                  <a:srgbClr val="2B2823"/>
                 </a:solidFill>
                 <a:latin typeface="Arial" pitchFamily="34" charset="0"/>
                 <a:ea typeface="Arial" pitchFamily="34" charset="-122"/>
@@ -10596,7 +10596,7 @@
             <a:r>
               <a:rPr lang="en-US" sz="1500" b="1" dirty="0">
                 <a:solidFill>
-                  <a:srgbClr val="23272E"/>
+                  <a:srgbClr val="2B2823"/>
                 </a:solidFill>
                 <a:latin typeface="Microsoft YaHei" pitchFamily="34" charset="0"/>
                 <a:ea typeface="Microsoft YaHei" pitchFamily="34" charset="-122"/>
@@ -10613,7 +10613,7 @@
             <a:r>
               <a:rPr lang="en-US" sz="1500" dirty="0">
                 <a:solidFill>
-                  <a:srgbClr val="23272E"/>
+                  <a:srgbClr val="2B2823"/>
                 </a:solidFill>
                 <a:latin typeface="Arial" pitchFamily="34" charset="0"/>
                 <a:ea typeface="Arial" pitchFamily="34" charset="-122"/>
@@ -10630,7 +10630,7 @@
             <a:r>
               <a:rPr lang="en-US" sz="1500" dirty="0">
                 <a:solidFill>
-                  <a:srgbClr val="23272E"/>
+                  <a:srgbClr val="2B2823"/>
                 </a:solidFill>
                 <a:latin typeface="Microsoft YaHei" pitchFamily="34" charset="0"/>
                 <a:ea typeface="Microsoft YaHei" pitchFamily="34" charset="-122"/>
@@ -10647,7 +10647,7 @@
             <a:r>
               <a:rPr lang="en-US" sz="1500" dirty="0">
                 <a:solidFill>
-                  <a:srgbClr val="23272E"/>
+                  <a:srgbClr val="2B2823"/>
                 </a:solidFill>
                 <a:latin typeface="Arial" pitchFamily="34" charset="0"/>
                 <a:ea typeface="Arial" pitchFamily="34" charset="-122"/>
@@ -10664,7 +10664,7 @@
             <a:r>
               <a:rPr lang="en-US" sz="1500" dirty="0">
                 <a:solidFill>
-                  <a:srgbClr val="23272E"/>
+                  <a:srgbClr val="2B2823"/>
                 </a:solidFill>
                 <a:latin typeface="Microsoft YaHei" pitchFamily="34" charset="0"/>
                 <a:ea typeface="Microsoft YaHei" pitchFamily="34" charset="-122"/>
@@ -10681,7 +10681,7 @@
             <a:r>
               <a:rPr lang="en-US" sz="1500" dirty="0">
                 <a:solidFill>
-                  <a:srgbClr val="23272E"/>
+                  <a:srgbClr val="2B2823"/>
                 </a:solidFill>
                 <a:latin typeface="Arial" pitchFamily="34" charset="0"/>
                 <a:ea typeface="Arial" pitchFamily="34" charset="-122"/>
@@ -10698,7 +10698,7 @@
             <a:r>
               <a:rPr lang="en-US" sz="1500" dirty="0">
                 <a:solidFill>
-                  <a:srgbClr val="23272E"/>
+                  <a:srgbClr val="2B2823"/>
                 </a:solidFill>
                 <a:latin typeface="Microsoft YaHei" pitchFamily="34" charset="0"/>
                 <a:ea typeface="Microsoft YaHei" pitchFamily="34" charset="-122"/>
@@ -10715,7 +10715,7 @@
             <a:r>
               <a:rPr lang="en-US" sz="1500" dirty="0">
                 <a:solidFill>
-                  <a:srgbClr val="23272E"/>
+                  <a:srgbClr val="2B2823"/>
                 </a:solidFill>
                 <a:latin typeface="Arial" pitchFamily="34" charset="0"/>
                 <a:ea typeface="Arial" pitchFamily="34" charset="-122"/>
@@ -10732,7 +10732,7 @@
             <a:r>
               <a:rPr lang="en-US" sz="1500" dirty="0">
                 <a:solidFill>
-                  <a:srgbClr val="23272E"/>
+                  <a:srgbClr val="2B2823"/>
                 </a:solidFill>
                 <a:latin typeface="Microsoft YaHei" pitchFamily="34" charset="0"/>
                 <a:ea typeface="Microsoft YaHei" pitchFamily="34" charset="-122"/>
@@ -10749,7 +10749,7 @@
             <a:r>
               <a:rPr lang="en-US" sz="1500" dirty="0">
                 <a:solidFill>
-                  <a:srgbClr val="23272E"/>
+                  <a:srgbClr val="2B2823"/>
                 </a:solidFill>
                 <a:latin typeface="Arial" pitchFamily="34" charset="0"/>
                 <a:ea typeface="Arial" pitchFamily="34" charset="-122"/>
@@ -10766,7 +10766,7 @@
             <a:r>
               <a:rPr lang="en-US" sz="1500" dirty="0">
                 <a:solidFill>
-                  <a:srgbClr val="23272E"/>
+                  <a:srgbClr val="2B2823"/>
                 </a:solidFill>
                 <a:latin typeface="Microsoft YaHei" pitchFamily="34" charset="0"/>
                 <a:ea typeface="Microsoft YaHei" pitchFamily="34" charset="-122"/>
@@ -10793,7 +10793,7 @@
             <a:avLst/>
           </a:prstGeom>
           <a:solidFill>
-            <a:srgbClr val="D9DEE6"/>
+            <a:srgbClr val="E4E0D3"/>
           </a:solidFill>
           <a:ln/>
         </p:spPr>
@@ -10828,7 +10828,7 @@
             <a:r>
               <a:rPr lang="en-US" sz="1500" b="1" dirty="0">
                 <a:solidFill>
-                  <a:srgbClr val="23272E"/>
+                  <a:srgbClr val="2B2823"/>
                 </a:solidFill>
                 <a:latin typeface="Arial" pitchFamily="34" charset="0"/>
                 <a:ea typeface="Arial" pitchFamily="34" charset="-122"/>
@@ -10845,7 +10845,7 @@
             <a:r>
               <a:rPr lang="en-US" sz="1500" b="1" dirty="0">
                 <a:solidFill>
-                  <a:srgbClr val="23272E"/>
+                  <a:srgbClr val="2B2823"/>
                 </a:solidFill>
                 <a:latin typeface="Microsoft YaHei" pitchFamily="34" charset="0"/>
                 <a:ea typeface="Microsoft YaHei" pitchFamily="34" charset="-122"/>
@@ -10862,7 +10862,7 @@
             <a:r>
               <a:rPr lang="en-US" sz="1500" dirty="0">
                 <a:solidFill>
-                  <a:srgbClr val="23272E"/>
+                  <a:srgbClr val="2B2823"/>
                 </a:solidFill>
                 <a:latin typeface="Arial" pitchFamily="34" charset="0"/>
                 <a:ea typeface="Arial" pitchFamily="34" charset="-122"/>
@@ -10879,7 +10879,7 @@
             <a:r>
               <a:rPr lang="en-US" sz="1500" dirty="0">
                 <a:solidFill>
-                  <a:srgbClr val="23272E"/>
+                  <a:srgbClr val="2B2823"/>
                 </a:solidFill>
                 <a:latin typeface="Microsoft YaHei" pitchFamily="34" charset="0"/>
                 <a:ea typeface="Microsoft YaHei" pitchFamily="34" charset="-122"/>
@@ -10906,7 +10906,7 @@
             <a:avLst/>
           </a:prstGeom>
           <a:solidFill>
-            <a:srgbClr val="D9DEE6"/>
+            <a:srgbClr val="E4E0D3"/>
           </a:solidFill>
           <a:ln/>
         </p:spPr>
@@ -10941,7 +10941,7 @@
             <a:r>
               <a:rPr lang="en-US" sz="1500" b="1" dirty="0">
                 <a:solidFill>
-                  <a:srgbClr val="23272E"/>
+                  <a:srgbClr val="2B2823"/>
                 </a:solidFill>
                 <a:latin typeface="Arial" pitchFamily="34" charset="0"/>
                 <a:ea typeface="Arial" pitchFamily="34" charset="-122"/>
@@ -10958,7 +10958,7 @@
             <a:r>
               <a:rPr lang="en-US" sz="1500" b="1" dirty="0">
                 <a:solidFill>
-                  <a:srgbClr val="23272E"/>
+                  <a:srgbClr val="2B2823"/>
                 </a:solidFill>
                 <a:latin typeface="Microsoft YaHei" pitchFamily="34" charset="0"/>
                 <a:ea typeface="Microsoft YaHei" pitchFamily="34" charset="-122"/>
@@ -10975,7 +10975,7 @@
             <a:r>
               <a:rPr lang="en-US" sz="1500" dirty="0">
                 <a:solidFill>
-                  <a:srgbClr val="23272E"/>
+                  <a:srgbClr val="2B2823"/>
                 </a:solidFill>
                 <a:latin typeface="Arial" pitchFamily="34" charset="0"/>
                 <a:ea typeface="Arial" pitchFamily="34" charset="-122"/>
@@ -10992,7 +10992,7 @@
             <a:r>
               <a:rPr lang="en-US" sz="1500" dirty="0">
                 <a:solidFill>
-                  <a:srgbClr val="23272E"/>
+                  <a:srgbClr val="2B2823"/>
                 </a:solidFill>
                 <a:latin typeface="Microsoft YaHei" pitchFamily="34" charset="0"/>
                 <a:ea typeface="Microsoft YaHei" pitchFamily="34" charset="-122"/>
@@ -11009,7 +11009,7 @@
             <a:r>
               <a:rPr lang="en-US" sz="1500" dirty="0">
                 <a:solidFill>
-                  <a:srgbClr val="23272E"/>
+                  <a:srgbClr val="2B2823"/>
                 </a:solidFill>
                 <a:latin typeface="Arial" pitchFamily="34" charset="0"/>
                 <a:ea typeface="Arial" pitchFamily="34" charset="-122"/>
@@ -11026,7 +11026,7 @@
             <a:r>
               <a:rPr lang="en-US" sz="1500" dirty="0">
                 <a:solidFill>
-                  <a:srgbClr val="23272E"/>
+                  <a:srgbClr val="2B2823"/>
                 </a:solidFill>
                 <a:latin typeface="Microsoft YaHei" pitchFamily="34" charset="0"/>
                 <a:ea typeface="Microsoft YaHei" pitchFamily="34" charset="-122"/>
@@ -11043,7 +11043,7 @@
             <a:r>
               <a:rPr lang="en-US" sz="1500" dirty="0">
                 <a:solidFill>
-                  <a:srgbClr val="23272E"/>
+                  <a:srgbClr val="2B2823"/>
                 </a:solidFill>
                 <a:latin typeface="Arial" pitchFamily="34" charset="0"/>
                 <a:ea typeface="Arial" pitchFamily="34" charset="-122"/>
@@ -11060,7 +11060,7 @@
             <a:r>
               <a:rPr lang="en-US" sz="1500" dirty="0">
                 <a:solidFill>
-                  <a:srgbClr val="23272E"/>
+                  <a:srgbClr val="2B2823"/>
                 </a:solidFill>
                 <a:latin typeface="Microsoft YaHei" pitchFamily="34" charset="0"/>
                 <a:ea typeface="Microsoft YaHei" pitchFamily="34" charset="-122"/>
@@ -11087,7 +11087,7 @@
             <a:avLst/>
           </a:prstGeom>
           <a:solidFill>
-            <a:srgbClr val="2F6FAE"/>
+            <a:srgbClr val="A8492A"/>
           </a:solidFill>
           <a:ln/>
         </p:spPr>
@@ -11119,7 +11119,7 @@
             <a:r>
               <a:rPr lang="en-US" sz="1200" b="1" spc="80" kern="0" dirty="0">
                 <a:solidFill>
-                  <a:srgbClr val="2F6FAE"/>
+                  <a:srgbClr val="A8492A"/>
                 </a:solidFill>
                 <a:latin typeface="Microsoft YaHei" pitchFamily="34" charset="0"/>
                 <a:ea typeface="Microsoft YaHei" pitchFamily="34" charset="-122"/>
@@ -11161,7 +11161,7 @@
             <a:r>
               <a:rPr lang="en-US" sz="1350" dirty="0">
                 <a:solidFill>
-                  <a:srgbClr val="23272E"/>
+                  <a:srgbClr val="2B2823"/>
                 </a:solidFill>
                 <a:latin typeface="Microsoft YaHei" pitchFamily="34" charset="0"/>
                 <a:ea typeface="Microsoft YaHei" pitchFamily="34" charset="-122"/>
@@ -11200,7 +11200,7 @@
             <a:r>
               <a:rPr lang="en-US" sz="950" dirty="0">
                 <a:solidFill>
-                  <a:srgbClr val="9AA1AB"/>
+                  <a:srgbClr val="A79E93"/>
                 </a:solidFill>
                 <a:latin typeface="Arial" pitchFamily="34" charset="0"/>
                 <a:ea typeface="Arial" pitchFamily="34" charset="-122"/>
@@ -11214,7 +11214,7 @@
             <a:r>
               <a:rPr lang="en-US" sz="950" dirty="0">
                 <a:solidFill>
-                  <a:srgbClr val="9AA1AB"/>
+                  <a:srgbClr val="A79E93"/>
                 </a:solidFill>
                 <a:latin typeface="Microsoft YaHei" pitchFamily="34" charset="0"/>
                 <a:ea typeface="Microsoft YaHei" pitchFamily="34" charset="-122"/>
@@ -11228,7 +11228,7 @@
             <a:r>
               <a:rPr lang="en-US" sz="950" dirty="0">
                 <a:solidFill>
-                  <a:srgbClr val="9AA1AB"/>
+                  <a:srgbClr val="A79E93"/>
                 </a:solidFill>
                 <a:latin typeface="Arial" pitchFamily="34" charset="0"/>
                 <a:ea typeface="Arial" pitchFamily="34" charset="-122"/>
@@ -11242,7 +11242,7 @@
             <a:r>
               <a:rPr lang="en-US" sz="950" dirty="0">
                 <a:solidFill>
-                  <a:srgbClr val="9AA1AB"/>
+                  <a:srgbClr val="A79E93"/>
                 </a:solidFill>
                 <a:latin typeface="Microsoft YaHei" pitchFamily="34" charset="0"/>
                 <a:ea typeface="Microsoft YaHei" pitchFamily="34" charset="-122"/>
@@ -11256,7 +11256,7 @@
             <a:r>
               <a:rPr lang="en-US" sz="950" dirty="0">
                 <a:solidFill>
-                  <a:srgbClr val="9AA1AB"/>
+                  <a:srgbClr val="A79E93"/>
                 </a:solidFill>
                 <a:latin typeface="Arial" pitchFamily="34" charset="0"/>
                 <a:ea typeface="Arial" pitchFamily="34" charset="-122"/>
@@ -11270,7 +11270,7 @@
             <a:r>
               <a:rPr lang="en-US" sz="950" dirty="0">
                 <a:solidFill>
-                  <a:srgbClr val="9AA1AB"/>
+                  <a:srgbClr val="A79E93"/>
                 </a:solidFill>
                 <a:latin typeface="Microsoft YaHei" pitchFamily="34" charset="0"/>
                 <a:ea typeface="Microsoft YaHei" pitchFamily="34" charset="-122"/>
@@ -11309,7 +11309,7 @@
             <a:r>
               <a:rPr lang="en-US" sz="950" dirty="0">
                 <a:solidFill>
-                  <a:srgbClr val="9AA1AB"/>
+                  <a:srgbClr val="A79E93"/>
                 </a:solidFill>
                 <a:latin typeface="Arial" pitchFamily="34" charset="0"/>
                 <a:ea typeface="Arial" pitchFamily="34" charset="-122"/>
@@ -11376,7 +11376,7 @@
             <a:r>
               <a:rPr lang="en-US" sz="1200" b="1" spc="240" kern="0" dirty="0">
                 <a:solidFill>
-                  <a:srgbClr val="2F6FAE"/>
+                  <a:srgbClr val="A8492A"/>
                 </a:solidFill>
                 <a:latin typeface="Microsoft YaHei" pitchFamily="34" charset="0"/>
                 <a:ea typeface="Microsoft YaHei" pitchFamily="34" charset="-122"/>
@@ -11418,7 +11418,7 @@
             <a:r>
               <a:rPr lang="en-US" sz="2500" b="1" dirty="0">
                 <a:solidFill>
-                  <a:srgbClr val="1F3A5F"/>
+                  <a:srgbClr val="7A3A1D"/>
                 </a:solidFill>
                 <a:latin typeface="Microsoft YaHei" pitchFamily="34" charset="0"/>
                 <a:ea typeface="Microsoft YaHei" pitchFamily="34" charset="-122"/>
@@ -11445,7 +11445,7 @@
             <a:avLst/>
           </a:prstGeom>
           <a:solidFill>
-            <a:srgbClr val="D9DEE6"/>
+            <a:srgbClr val="E4E0D3"/>
           </a:solidFill>
           <a:ln/>
         </p:spPr>
@@ -11469,7 +11469,7 @@
           </a:solidFill>
           <a:ln w="17780">
             <a:solidFill>
-              <a:srgbClr val="1F3A5F"/>
+              <a:srgbClr val="7A3A1D"/>
             </a:solidFill>
             <a:prstDash val="solid"/>
           </a:ln>
@@ -11502,7 +11502,7 @@
             <a:r>
               <a:rPr lang="en-US" sz="1500" b="1" dirty="0">
                 <a:solidFill>
-                  <a:srgbClr val="1F3A5F"/>
+                  <a:srgbClr val="7A3A1D"/>
                 </a:solidFill>
                 <a:latin typeface="Arial" pitchFamily="34" charset="0"/>
                 <a:ea typeface="Arial" pitchFamily="34" charset="-122"/>
@@ -11541,7 +11541,7 @@
             <a:r>
               <a:rPr lang="en-US" sz="1400" b="1" dirty="0">
                 <a:solidFill>
-                  <a:srgbClr val="1F3A5F"/>
+                  <a:srgbClr val="7A3A1D"/>
                 </a:solidFill>
                 <a:latin typeface="Microsoft YaHei" pitchFamily="34" charset="0"/>
                 <a:ea typeface="Microsoft YaHei" pitchFamily="34" charset="-122"/>
@@ -11555,7 +11555,7 @@
             <a:r>
               <a:rPr lang="en-US" sz="1400" b="1" dirty="0">
                 <a:solidFill>
-                  <a:srgbClr val="1F3A5F"/>
+                  <a:srgbClr val="7A3A1D"/>
                 </a:solidFill>
                 <a:latin typeface="Arial" pitchFamily="34" charset="0"/>
                 <a:ea typeface="Arial" pitchFamily="34" charset="-122"/>
@@ -11569,7 +11569,7 @@
             <a:r>
               <a:rPr lang="en-US" sz="1400" b="1" dirty="0">
                 <a:solidFill>
-                  <a:srgbClr val="1F3A5F"/>
+                  <a:srgbClr val="7A3A1D"/>
                 </a:solidFill>
                 <a:latin typeface="Microsoft YaHei" pitchFamily="34" charset="0"/>
                 <a:ea typeface="Microsoft YaHei" pitchFamily="34" charset="-122"/>
@@ -11611,7 +11611,7 @@
             <a:r>
               <a:rPr lang="en-US" sz="1200" dirty="0">
                 <a:solidFill>
-                  <a:srgbClr val="6E7681"/>
+                  <a:srgbClr val="6B635A"/>
                 </a:solidFill>
                 <a:latin typeface="Microsoft YaHei" pitchFamily="34" charset="0"/>
                 <a:ea typeface="Microsoft YaHei" pitchFamily="34" charset="-122"/>
@@ -11642,7 +11642,7 @@
           </a:solidFill>
           <a:ln w="17780">
             <a:solidFill>
-              <a:srgbClr val="1F3A5F"/>
+              <a:srgbClr val="7A3A1D"/>
             </a:solidFill>
             <a:prstDash val="solid"/>
           </a:ln>
@@ -11675,7 +11675,7 @@
             <a:r>
               <a:rPr lang="en-US" sz="1500" b="1" dirty="0">
                 <a:solidFill>
-                  <a:srgbClr val="1F3A5F"/>
+                  <a:srgbClr val="7A3A1D"/>
                 </a:solidFill>
                 <a:latin typeface="Arial" pitchFamily="34" charset="0"/>
                 <a:ea typeface="Arial" pitchFamily="34" charset="-122"/>
@@ -11714,7 +11714,7 @@
             <a:r>
               <a:rPr lang="en-US" sz="1400" b="1" dirty="0">
                 <a:solidFill>
-                  <a:srgbClr val="1F3A5F"/>
+                  <a:srgbClr val="7A3A1D"/>
                 </a:solidFill>
                 <a:latin typeface="Microsoft YaHei" pitchFamily="34" charset="0"/>
                 <a:ea typeface="Microsoft YaHei" pitchFamily="34" charset="-122"/>
@@ -11728,7 +11728,7 @@
             <a:r>
               <a:rPr lang="en-US" sz="1400" b="1" dirty="0">
                 <a:solidFill>
-                  <a:srgbClr val="1F3A5F"/>
+                  <a:srgbClr val="7A3A1D"/>
                 </a:solidFill>
                 <a:latin typeface="Arial" pitchFamily="34" charset="0"/>
                 <a:ea typeface="Arial" pitchFamily="34" charset="-122"/>
@@ -11742,7 +11742,7 @@
             <a:r>
               <a:rPr lang="en-US" sz="1400" b="1" dirty="0">
                 <a:solidFill>
-                  <a:srgbClr val="1F3A5F"/>
+                  <a:srgbClr val="7A3A1D"/>
                 </a:solidFill>
                 <a:latin typeface="Microsoft YaHei" pitchFamily="34" charset="0"/>
                 <a:ea typeface="Microsoft YaHei" pitchFamily="34" charset="-122"/>
@@ -11784,7 +11784,7 @@
             <a:r>
               <a:rPr lang="en-US" sz="1200" dirty="0">
                 <a:solidFill>
-                  <a:srgbClr val="6E7681"/>
+                  <a:srgbClr val="6B635A"/>
                 </a:solidFill>
                 <a:latin typeface="Microsoft YaHei" pitchFamily="34" charset="0"/>
                 <a:ea typeface="Microsoft YaHei" pitchFamily="34" charset="-122"/>
@@ -11826,7 +11826,7 @@
             <a:r>
               <a:rPr lang="en-US" sz="1350" b="1" dirty="0">
                 <a:solidFill>
-                  <a:srgbClr val="23272E"/>
+                  <a:srgbClr val="2B2823"/>
                 </a:solidFill>
                 <a:latin typeface="Microsoft YaHei" pitchFamily="34" charset="0"/>
                 <a:ea typeface="Microsoft YaHei" pitchFamily="34" charset="-122"/>
@@ -11843,7 +11843,7 @@
             <a:r>
               <a:rPr lang="en-US" sz="1350" dirty="0">
                 <a:solidFill>
-                  <a:srgbClr val="23272E"/>
+                  <a:srgbClr val="2B2823"/>
                 </a:solidFill>
                 <a:latin typeface="Arial" pitchFamily="34" charset="0"/>
                 <a:ea typeface="Arial" pitchFamily="34" charset="-122"/>
@@ -11860,7 +11860,7 @@
             <a:r>
               <a:rPr lang="en-US" sz="1350" dirty="0">
                 <a:solidFill>
-                  <a:srgbClr val="23272E"/>
+                  <a:srgbClr val="2B2823"/>
                 </a:solidFill>
                 <a:latin typeface="Arial" pitchFamily="34" charset="0"/>
                 <a:ea typeface="Arial" pitchFamily="34" charset="-122"/>
@@ -11877,7 +11877,7 @@
             <a:r>
               <a:rPr lang="en-US" sz="1350" dirty="0">
                 <a:solidFill>
-                  <a:srgbClr val="23272E"/>
+                  <a:srgbClr val="2B2823"/>
                 </a:solidFill>
                 <a:latin typeface="Microsoft YaHei" pitchFamily="34" charset="0"/>
                 <a:ea typeface="Microsoft YaHei" pitchFamily="34" charset="-122"/>
@@ -11904,7 +11904,7 @@
             <a:avLst/>
           </a:prstGeom>
           <a:solidFill>
-            <a:srgbClr val="D9DEE6"/>
+            <a:srgbClr val="E4E0D3"/>
           </a:solidFill>
           <a:ln/>
         </p:spPr>
@@ -11939,7 +11939,7 @@
             <a:r>
               <a:rPr lang="en-US" sz="1350" b="1" dirty="0">
                 <a:solidFill>
-                  <a:srgbClr val="23272E"/>
+                  <a:srgbClr val="2B2823"/>
                 </a:solidFill>
                 <a:latin typeface="Microsoft YaHei" pitchFamily="34" charset="0"/>
                 <a:ea typeface="Microsoft YaHei" pitchFamily="34" charset="-122"/>
@@ -11956,7 +11956,7 @@
             <a:r>
               <a:rPr lang="en-US" sz="1350" dirty="0">
                 <a:solidFill>
-                  <a:srgbClr val="23272E"/>
+                  <a:srgbClr val="2B2823"/>
                 </a:solidFill>
                 <a:latin typeface="Arial" pitchFamily="34" charset="0"/>
                 <a:ea typeface="Arial" pitchFamily="34" charset="-122"/>
@@ -11973,7 +11973,7 @@
             <a:r>
               <a:rPr lang="en-US" sz="1350" dirty="0">
                 <a:solidFill>
-                  <a:srgbClr val="23272E"/>
+                  <a:srgbClr val="2B2823"/>
                 </a:solidFill>
                 <a:latin typeface="Microsoft YaHei" pitchFamily="34" charset="0"/>
                 <a:ea typeface="Microsoft YaHei" pitchFamily="34" charset="-122"/>
@@ -11990,7 +11990,7 @@
             <a:r>
               <a:rPr lang="en-US" sz="1350" dirty="0">
                 <a:solidFill>
-                  <a:srgbClr val="23272E"/>
+                  <a:srgbClr val="2B2823"/>
                 </a:solidFill>
                 <a:latin typeface="Arial" pitchFamily="34" charset="0"/>
                 <a:ea typeface="Arial" pitchFamily="34" charset="-122"/>
@@ -12007,7 +12007,7 @@
             <a:r>
               <a:rPr lang="en-US" sz="1350" dirty="0">
                 <a:solidFill>
-                  <a:srgbClr val="23272E"/>
+                  <a:srgbClr val="2B2823"/>
                 </a:solidFill>
                 <a:latin typeface="Microsoft YaHei" pitchFamily="34" charset="0"/>
                 <a:ea typeface="Microsoft YaHei" pitchFamily="34" charset="-122"/>
@@ -12024,7 +12024,7 @@
             <a:r>
               <a:rPr lang="en-US" sz="1350" dirty="0">
                 <a:solidFill>
-                  <a:srgbClr val="23272E"/>
+                  <a:srgbClr val="2B2823"/>
                 </a:solidFill>
                 <a:latin typeface="Arial" pitchFamily="34" charset="0"/>
                 <a:ea typeface="Arial" pitchFamily="34" charset="-122"/>
@@ -12041,7 +12041,7 @@
             <a:r>
               <a:rPr lang="en-US" sz="1350" dirty="0">
                 <a:solidFill>
-                  <a:srgbClr val="23272E"/>
+                  <a:srgbClr val="2B2823"/>
                 </a:solidFill>
                 <a:latin typeface="Microsoft YaHei" pitchFamily="34" charset="0"/>
                 <a:ea typeface="Microsoft YaHei" pitchFamily="34" charset="-122"/>
@@ -12068,7 +12068,7 @@
             <a:avLst/>
           </a:prstGeom>
           <a:solidFill>
-            <a:srgbClr val="2F6FAE"/>
+            <a:srgbClr val="A8492A"/>
           </a:solidFill>
           <a:ln/>
         </p:spPr>
@@ -12100,7 +12100,7 @@
             <a:r>
               <a:rPr lang="en-US" sz="1200" b="1" spc="80" kern="0" dirty="0">
                 <a:solidFill>
-                  <a:srgbClr val="2F6FAE"/>
+                  <a:srgbClr val="A8492A"/>
                 </a:solidFill>
                 <a:latin typeface="Microsoft YaHei" pitchFamily="34" charset="0"/>
                 <a:ea typeface="Microsoft YaHei" pitchFamily="34" charset="-122"/>
@@ -12142,7 +12142,7 @@
             <a:r>
               <a:rPr lang="en-US" sz="1300" dirty="0">
                 <a:solidFill>
-                  <a:srgbClr val="23272E"/>
+                  <a:srgbClr val="2B2823"/>
                 </a:solidFill>
                 <a:latin typeface="Microsoft YaHei" pitchFamily="34" charset="0"/>
                 <a:ea typeface="Microsoft YaHei" pitchFamily="34" charset="-122"/>
@@ -12159,7 +12159,7 @@
             <a:r>
               <a:rPr lang="en-US" sz="1300" dirty="0">
                 <a:solidFill>
-                  <a:srgbClr val="23272E"/>
+                  <a:srgbClr val="2B2823"/>
                 </a:solidFill>
                 <a:latin typeface="Arial" pitchFamily="34" charset="0"/>
                 <a:ea typeface="Arial" pitchFamily="34" charset="-122"/>
@@ -12176,7 +12176,7 @@
             <a:r>
               <a:rPr lang="en-US" sz="1300" dirty="0">
                 <a:solidFill>
-                  <a:srgbClr val="23272E"/>
+                  <a:srgbClr val="2B2823"/>
                 </a:solidFill>
                 <a:latin typeface="Microsoft YaHei" pitchFamily="34" charset="0"/>
                 <a:ea typeface="Microsoft YaHei" pitchFamily="34" charset="-122"/>
@@ -12218,7 +12218,7 @@
             <a:r>
               <a:rPr lang="en-US" sz="1300" b="1" dirty="0">
                 <a:solidFill>
-                  <a:srgbClr val="23272E"/>
+                  <a:srgbClr val="2B2823"/>
                 </a:solidFill>
                 <a:latin typeface="Microsoft YaHei" pitchFamily="34" charset="0"/>
                 <a:ea typeface="Microsoft YaHei" pitchFamily="34" charset="-122"/>
@@ -12235,7 +12235,7 @@
             <a:r>
               <a:rPr lang="en-US" sz="1300" dirty="0">
                 <a:solidFill>
-                  <a:srgbClr val="23272E"/>
+                  <a:srgbClr val="2B2823"/>
                 </a:solidFill>
                 <a:latin typeface="Arial" pitchFamily="34" charset="0"/>
                 <a:ea typeface="Arial" pitchFamily="34" charset="-122"/>
@@ -12252,7 +12252,7 @@
             <a:r>
               <a:rPr lang="en-US" sz="1300" dirty="0">
                 <a:solidFill>
-                  <a:srgbClr val="23272E"/>
+                  <a:srgbClr val="2B2823"/>
                 </a:solidFill>
                 <a:latin typeface="Microsoft YaHei" pitchFamily="34" charset="0"/>
                 <a:ea typeface="Microsoft YaHei" pitchFamily="34" charset="-122"/>
@@ -12269,7 +12269,7 @@
             <a:r>
               <a:rPr lang="en-US" sz="1300" dirty="0">
                 <a:solidFill>
-                  <a:srgbClr val="23272E"/>
+                  <a:srgbClr val="2B2823"/>
                 </a:solidFill>
                 <a:latin typeface="Arial" pitchFamily="34" charset="0"/>
                 <a:ea typeface="Arial" pitchFamily="34" charset="-122"/>
@@ -12286,7 +12286,7 @@
             <a:r>
               <a:rPr lang="en-US" sz="1300" dirty="0">
                 <a:solidFill>
-                  <a:srgbClr val="23272E"/>
+                  <a:srgbClr val="2B2823"/>
                 </a:solidFill>
                 <a:latin typeface="Microsoft YaHei" pitchFamily="34" charset="0"/>
                 <a:ea typeface="Microsoft YaHei" pitchFamily="34" charset="-122"/>
@@ -12325,7 +12325,7 @@
             <a:r>
               <a:rPr lang="en-US" sz="950" dirty="0">
                 <a:solidFill>
-                  <a:srgbClr val="9AA1AB"/>
+                  <a:srgbClr val="A79E93"/>
                 </a:solidFill>
                 <a:latin typeface="Arial" pitchFamily="34" charset="0"/>
                 <a:ea typeface="Arial" pitchFamily="34" charset="-122"/>
@@ -12339,7 +12339,7 @@
             <a:r>
               <a:rPr lang="en-US" sz="950" dirty="0">
                 <a:solidFill>
-                  <a:srgbClr val="9AA1AB"/>
+                  <a:srgbClr val="A79E93"/>
                 </a:solidFill>
                 <a:latin typeface="Microsoft YaHei" pitchFamily="34" charset="0"/>
                 <a:ea typeface="Microsoft YaHei" pitchFamily="34" charset="-122"/>
@@ -12353,7 +12353,7 @@
             <a:r>
               <a:rPr lang="en-US" sz="950" dirty="0">
                 <a:solidFill>
-                  <a:srgbClr val="9AA1AB"/>
+                  <a:srgbClr val="A79E93"/>
                 </a:solidFill>
                 <a:latin typeface="Arial" pitchFamily="34" charset="0"/>
                 <a:ea typeface="Arial" pitchFamily="34" charset="-122"/>
@@ -12367,7 +12367,7 @@
             <a:r>
               <a:rPr lang="en-US" sz="950" dirty="0">
                 <a:solidFill>
-                  <a:srgbClr val="9AA1AB"/>
+                  <a:srgbClr val="A79E93"/>
                 </a:solidFill>
                 <a:latin typeface="Microsoft YaHei" pitchFamily="34" charset="0"/>
                 <a:ea typeface="Microsoft YaHei" pitchFamily="34" charset="-122"/>
@@ -12381,7 +12381,7 @@
             <a:r>
               <a:rPr lang="en-US" sz="950" dirty="0">
                 <a:solidFill>
-                  <a:srgbClr val="9AA1AB"/>
+                  <a:srgbClr val="A79E93"/>
                 </a:solidFill>
                 <a:latin typeface="Arial" pitchFamily="34" charset="0"/>
                 <a:ea typeface="Arial" pitchFamily="34" charset="-122"/>
@@ -12395,7 +12395,7 @@
             <a:r>
               <a:rPr lang="en-US" sz="950" dirty="0">
                 <a:solidFill>
-                  <a:srgbClr val="9AA1AB"/>
+                  <a:srgbClr val="A79E93"/>
                 </a:solidFill>
                 <a:latin typeface="Microsoft YaHei" pitchFamily="34" charset="0"/>
                 <a:ea typeface="Microsoft YaHei" pitchFamily="34" charset="-122"/>
@@ -12434,7 +12434,7 @@
             <a:r>
               <a:rPr lang="en-US" sz="950" dirty="0">
                 <a:solidFill>
-                  <a:srgbClr val="9AA1AB"/>
+                  <a:srgbClr val="A79E93"/>
                 </a:solidFill>
                 <a:latin typeface="Arial" pitchFamily="34" charset="0"/>
                 <a:ea typeface="Arial" pitchFamily="34" charset="-122"/>
@@ -12501,7 +12501,7 @@
             <a:r>
               <a:rPr lang="en-US" sz="1200" b="1" spc="240" kern="0" dirty="0">
                 <a:solidFill>
-                  <a:srgbClr val="2F6FAE"/>
+                  <a:srgbClr val="A8492A"/>
                 </a:solidFill>
                 <a:latin typeface="Microsoft YaHei" pitchFamily="34" charset="0"/>
                 <a:ea typeface="Microsoft YaHei" pitchFamily="34" charset="-122"/>
@@ -12543,7 +12543,7 @@
             <a:r>
               <a:rPr lang="en-US" sz="2500" b="1" dirty="0">
                 <a:solidFill>
-                  <a:srgbClr val="1F3A5F"/>
+                  <a:srgbClr val="7A3A1D"/>
                 </a:solidFill>
                 <a:latin typeface="Microsoft YaHei" pitchFamily="34" charset="0"/>
                 <a:ea typeface="Microsoft YaHei" pitchFamily="34" charset="-122"/>
@@ -12582,7 +12582,7 @@
             <a:r>
               <a:rPr lang="en-US" sz="1200" b="1" dirty="0">
                 <a:solidFill>
-                  <a:srgbClr val="2F6FAE"/>
+                  <a:srgbClr val="A8492A"/>
                 </a:solidFill>
                 <a:latin typeface="Arial" pitchFamily="34" charset="0"/>
                 <a:ea typeface="Arial" pitchFamily="34" charset="-122"/>
@@ -12624,7 +12624,7 @@
             <a:r>
               <a:rPr lang="en-US" sz="1200" dirty="0">
                 <a:solidFill>
-                  <a:srgbClr val="23272E"/>
+                  <a:srgbClr val="2B2823"/>
                 </a:solidFill>
                 <a:latin typeface="Arial" pitchFamily="34" charset="0"/>
                 <a:ea typeface="Arial" pitchFamily="34" charset="-122"/>
@@ -12663,7 +12663,7 @@
             <a:r>
               <a:rPr lang="en-US" sz="1200" b="1" dirty="0">
                 <a:solidFill>
-                  <a:srgbClr val="2F6FAE"/>
+                  <a:srgbClr val="A8492A"/>
                 </a:solidFill>
                 <a:latin typeface="Arial" pitchFamily="34" charset="0"/>
                 <a:ea typeface="Arial" pitchFamily="34" charset="-122"/>
@@ -12705,7 +12705,7 @@
             <a:r>
               <a:rPr lang="en-US" sz="1200" dirty="0">
                 <a:solidFill>
-                  <a:srgbClr val="23272E"/>
+                  <a:srgbClr val="2B2823"/>
                 </a:solidFill>
                 <a:latin typeface="Arial" pitchFamily="34" charset="0"/>
                 <a:ea typeface="Arial" pitchFamily="34" charset="-122"/>
@@ -12744,7 +12744,7 @@
             <a:r>
               <a:rPr lang="en-US" sz="1200" b="1" dirty="0">
                 <a:solidFill>
-                  <a:srgbClr val="2F6FAE"/>
+                  <a:srgbClr val="A8492A"/>
                 </a:solidFill>
                 <a:latin typeface="Arial" pitchFamily="34" charset="0"/>
                 <a:ea typeface="Arial" pitchFamily="34" charset="-122"/>
@@ -12786,7 +12786,7 @@
             <a:r>
               <a:rPr lang="en-US" sz="1200" dirty="0">
                 <a:solidFill>
-                  <a:srgbClr val="23272E"/>
+                  <a:srgbClr val="2B2823"/>
                 </a:solidFill>
                 <a:latin typeface="Arial" pitchFamily="34" charset="0"/>
                 <a:ea typeface="Arial" pitchFamily="34" charset="-122"/>
@@ -12825,7 +12825,7 @@
             <a:r>
               <a:rPr lang="en-US" sz="1200" b="1" dirty="0">
                 <a:solidFill>
-                  <a:srgbClr val="2F6FAE"/>
+                  <a:srgbClr val="A8492A"/>
                 </a:solidFill>
                 <a:latin typeface="Arial" pitchFamily="34" charset="0"/>
                 <a:ea typeface="Arial" pitchFamily="34" charset="-122"/>
@@ -12867,7 +12867,7 @@
             <a:r>
               <a:rPr lang="en-US" sz="1200" dirty="0">
                 <a:solidFill>
-                  <a:srgbClr val="23272E"/>
+                  <a:srgbClr val="2B2823"/>
                 </a:solidFill>
                 <a:latin typeface="Arial" pitchFamily="34" charset="0"/>
                 <a:ea typeface="Arial" pitchFamily="34" charset="-122"/>
@@ -12906,7 +12906,7 @@
             <a:r>
               <a:rPr lang="en-US" sz="1200" b="1" dirty="0">
                 <a:solidFill>
-                  <a:srgbClr val="2F6FAE"/>
+                  <a:srgbClr val="A8492A"/>
                 </a:solidFill>
                 <a:latin typeface="Arial" pitchFamily="34" charset="0"/>
                 <a:ea typeface="Arial" pitchFamily="34" charset="-122"/>
@@ -12948,7 +12948,7 @@
             <a:r>
               <a:rPr lang="en-US" sz="1200" dirty="0">
                 <a:solidFill>
-                  <a:srgbClr val="23272E"/>
+                  <a:srgbClr val="2B2823"/>
                 </a:solidFill>
                 <a:latin typeface="Arial" pitchFamily="34" charset="0"/>
                 <a:ea typeface="Arial" pitchFamily="34" charset="-122"/>
@@ -12987,7 +12987,7 @@
             <a:r>
               <a:rPr lang="en-US" sz="950" dirty="0">
                 <a:solidFill>
-                  <a:srgbClr val="9AA1AB"/>
+                  <a:srgbClr val="A79E93"/>
                 </a:solidFill>
                 <a:latin typeface="Arial" pitchFamily="34" charset="0"/>
                 <a:ea typeface="Arial" pitchFamily="34" charset="-122"/>
@@ -13001,7 +13001,7 @@
             <a:r>
               <a:rPr lang="en-US" sz="950" dirty="0">
                 <a:solidFill>
-                  <a:srgbClr val="9AA1AB"/>
+                  <a:srgbClr val="A79E93"/>
                 </a:solidFill>
                 <a:latin typeface="Microsoft YaHei" pitchFamily="34" charset="0"/>
                 <a:ea typeface="Microsoft YaHei" pitchFamily="34" charset="-122"/>
@@ -13015,7 +13015,7 @@
             <a:r>
               <a:rPr lang="en-US" sz="950" dirty="0">
                 <a:solidFill>
-                  <a:srgbClr val="9AA1AB"/>
+                  <a:srgbClr val="A79E93"/>
                 </a:solidFill>
                 <a:latin typeface="Arial" pitchFamily="34" charset="0"/>
                 <a:ea typeface="Arial" pitchFamily="34" charset="-122"/>
@@ -13029,7 +13029,7 @@
             <a:r>
               <a:rPr lang="en-US" sz="950" dirty="0">
                 <a:solidFill>
-                  <a:srgbClr val="9AA1AB"/>
+                  <a:srgbClr val="A79E93"/>
                 </a:solidFill>
                 <a:latin typeface="Microsoft YaHei" pitchFamily="34" charset="0"/>
                 <a:ea typeface="Microsoft YaHei" pitchFamily="34" charset="-122"/>
@@ -13043,7 +13043,7 @@
             <a:r>
               <a:rPr lang="en-US" sz="950" dirty="0">
                 <a:solidFill>
-                  <a:srgbClr val="9AA1AB"/>
+                  <a:srgbClr val="A79E93"/>
                 </a:solidFill>
                 <a:latin typeface="Arial" pitchFamily="34" charset="0"/>
                 <a:ea typeface="Arial" pitchFamily="34" charset="-122"/>
@@ -13057,7 +13057,7 @@
             <a:r>
               <a:rPr lang="en-US" sz="950" dirty="0">
                 <a:solidFill>
-                  <a:srgbClr val="9AA1AB"/>
+                  <a:srgbClr val="A79E93"/>
                 </a:solidFill>
                 <a:latin typeface="Microsoft YaHei" pitchFamily="34" charset="0"/>
                 <a:ea typeface="Microsoft YaHei" pitchFamily="34" charset="-122"/>
@@ -13096,7 +13096,7 @@
             <a:r>
               <a:rPr lang="en-US" sz="950" dirty="0">
                 <a:solidFill>
-                  <a:srgbClr val="9AA1AB"/>
+                  <a:srgbClr val="A79E93"/>
                 </a:solidFill>
                 <a:latin typeface="Arial" pitchFamily="34" charset="0"/>
                 <a:ea typeface="Arial" pitchFamily="34" charset="-122"/>
@@ -13163,7 +13163,7 @@
             <a:r>
               <a:rPr lang="en-US" sz="3000" b="1" spc="600" kern="0" dirty="0">
                 <a:solidFill>
-                  <a:srgbClr val="1F3A5F"/>
+                  <a:srgbClr val="7A3A1D"/>
                 </a:solidFill>
                 <a:latin typeface="Microsoft YaHei" pitchFamily="34" charset="0"/>
                 <a:ea typeface="Microsoft YaHei" pitchFamily="34" charset="-122"/>
@@ -13177,7 +13177,7 @@
             <a:r>
               <a:rPr lang="en-US" sz="3000" b="1" spc="600" kern="0" dirty="0">
                 <a:solidFill>
-                  <a:srgbClr val="1F3A5F"/>
+                  <a:srgbClr val="7A3A1D"/>
                 </a:solidFill>
                 <a:latin typeface="Arial" pitchFamily="34" charset="0"/>
                 <a:ea typeface="Arial" pitchFamily="34" charset="-122"/>
@@ -13191,7 +13191,7 @@
             <a:r>
               <a:rPr lang="en-US" sz="3000" b="1" spc="600" kern="0" dirty="0">
                 <a:solidFill>
-                  <a:srgbClr val="1F3A5F"/>
+                  <a:srgbClr val="7A3A1D"/>
                 </a:solidFill>
                 <a:latin typeface="Microsoft YaHei" pitchFamily="34" charset="0"/>
                 <a:ea typeface="Microsoft YaHei" pitchFamily="34" charset="-122"/>
@@ -13218,7 +13218,7 @@
             <a:avLst/>
           </a:prstGeom>
           <a:solidFill>
-            <a:srgbClr val="2F6FAE"/>
+            <a:srgbClr val="A8492A"/>
           </a:solidFill>
           <a:ln/>
         </p:spPr>
@@ -13250,7 +13250,7 @@
             <a:r>
               <a:rPr lang="en-US" sz="2200" b="1" dirty="0">
                 <a:solidFill>
-                  <a:srgbClr val="2F6FAE"/>
+                  <a:srgbClr val="A8492A"/>
                 </a:solidFill>
                 <a:latin typeface="Arial" pitchFamily="34" charset="0"/>
                 <a:ea typeface="Arial" pitchFamily="34" charset="-122"/>
@@ -13289,7 +13289,7 @@
             <a:r>
               <a:rPr lang="en-US" sz="1700" b="1" dirty="0">
                 <a:solidFill>
-                  <a:srgbClr val="23272E"/>
+                  <a:srgbClr val="2B2823"/>
                 </a:solidFill>
                 <a:latin typeface="Microsoft YaHei" pitchFamily="34" charset="0"/>
                 <a:ea typeface="Microsoft YaHei" pitchFamily="34" charset="-122"/>
@@ -13328,7 +13328,7 @@
             <a:r>
               <a:rPr lang="en-US" sz="1250" dirty="0">
                 <a:solidFill>
-                  <a:srgbClr val="6E7681"/>
+                  <a:srgbClr val="6B635A"/>
                 </a:solidFill>
                 <a:latin typeface="Microsoft YaHei" pitchFamily="34" charset="0"/>
                 <a:ea typeface="Microsoft YaHei" pitchFamily="34" charset="-122"/>
@@ -13355,7 +13355,7 @@
             <a:avLst/>
           </a:prstGeom>
           <a:solidFill>
-            <a:srgbClr val="D9DEE6"/>
+            <a:srgbClr val="E4E0D3"/>
           </a:solidFill>
           <a:ln/>
         </p:spPr>
@@ -13387,7 +13387,7 @@
             <a:r>
               <a:rPr lang="en-US" sz="2200" b="1" dirty="0">
                 <a:solidFill>
-                  <a:srgbClr val="2F6FAE"/>
+                  <a:srgbClr val="A8492A"/>
                 </a:solidFill>
                 <a:latin typeface="Arial" pitchFamily="34" charset="0"/>
                 <a:ea typeface="Arial" pitchFamily="34" charset="-122"/>
@@ -13426,7 +13426,7 @@
             <a:r>
               <a:rPr lang="en-US" sz="1700" b="1" dirty="0">
                 <a:solidFill>
-                  <a:srgbClr val="23272E"/>
+                  <a:srgbClr val="2B2823"/>
                 </a:solidFill>
                 <a:latin typeface="Microsoft YaHei" pitchFamily="34" charset="0"/>
                 <a:ea typeface="Microsoft YaHei" pitchFamily="34" charset="-122"/>
@@ -13465,7 +13465,7 @@
             <a:r>
               <a:rPr lang="en-US" sz="1250" dirty="0">
                 <a:solidFill>
-                  <a:srgbClr val="6E7681"/>
+                  <a:srgbClr val="6B635A"/>
                 </a:solidFill>
                 <a:latin typeface="Microsoft YaHei" pitchFamily="34" charset="0"/>
                 <a:ea typeface="Microsoft YaHei" pitchFamily="34" charset="-122"/>
@@ -13492,7 +13492,7 @@
             <a:avLst/>
           </a:prstGeom>
           <a:solidFill>
-            <a:srgbClr val="D9DEE6"/>
+            <a:srgbClr val="E4E0D3"/>
           </a:solidFill>
           <a:ln/>
         </p:spPr>
@@ -13524,7 +13524,7 @@
             <a:r>
               <a:rPr lang="en-US" sz="2200" b="1" dirty="0">
                 <a:solidFill>
-                  <a:srgbClr val="2F6FAE"/>
+                  <a:srgbClr val="A8492A"/>
                 </a:solidFill>
                 <a:latin typeface="Arial" pitchFamily="34" charset="0"/>
                 <a:ea typeface="Arial" pitchFamily="34" charset="-122"/>
@@ -13563,7 +13563,7 @@
             <a:r>
               <a:rPr lang="en-US" sz="1700" b="1" dirty="0">
                 <a:solidFill>
-                  <a:srgbClr val="23272E"/>
+                  <a:srgbClr val="2B2823"/>
                 </a:solidFill>
                 <a:latin typeface="Microsoft YaHei" pitchFamily="34" charset="0"/>
                 <a:ea typeface="Microsoft YaHei" pitchFamily="34" charset="-122"/>
@@ -13602,7 +13602,7 @@
             <a:r>
               <a:rPr lang="en-US" sz="1250" dirty="0">
                 <a:solidFill>
-                  <a:srgbClr val="6E7681"/>
+                  <a:srgbClr val="6B635A"/>
                 </a:solidFill>
                 <a:latin typeface="Microsoft YaHei" pitchFamily="34" charset="0"/>
                 <a:ea typeface="Microsoft YaHei" pitchFamily="34" charset="-122"/>
@@ -13629,7 +13629,7 @@
             <a:avLst/>
           </a:prstGeom>
           <a:solidFill>
-            <a:srgbClr val="D9DEE6"/>
+            <a:srgbClr val="E4E0D3"/>
           </a:solidFill>
           <a:ln/>
         </p:spPr>
@@ -13661,7 +13661,7 @@
             <a:r>
               <a:rPr lang="en-US" sz="2200" b="1" dirty="0">
                 <a:solidFill>
-                  <a:srgbClr val="2F6FAE"/>
+                  <a:srgbClr val="A8492A"/>
                 </a:solidFill>
                 <a:latin typeface="Arial" pitchFamily="34" charset="0"/>
                 <a:ea typeface="Arial" pitchFamily="34" charset="-122"/>
@@ -13700,7 +13700,7 @@
             <a:r>
               <a:rPr lang="en-US" sz="1700" b="1" dirty="0">
                 <a:solidFill>
-                  <a:srgbClr val="23272E"/>
+                  <a:srgbClr val="2B2823"/>
                 </a:solidFill>
                 <a:latin typeface="Microsoft YaHei" pitchFamily="34" charset="0"/>
                 <a:ea typeface="Microsoft YaHei" pitchFamily="34" charset="-122"/>
@@ -13739,7 +13739,7 @@
             <a:r>
               <a:rPr lang="en-US" sz="1250" dirty="0">
                 <a:solidFill>
-                  <a:srgbClr val="6E7681"/>
+                  <a:srgbClr val="6B635A"/>
                 </a:solidFill>
                 <a:latin typeface="Microsoft YaHei" pitchFamily="34" charset="0"/>
                 <a:ea typeface="Microsoft YaHei" pitchFamily="34" charset="-122"/>
@@ -13778,7 +13778,7 @@
             <a:r>
               <a:rPr lang="en-US" sz="950" dirty="0">
                 <a:solidFill>
-                  <a:srgbClr val="9AA1AB"/>
+                  <a:srgbClr val="A79E93"/>
                 </a:solidFill>
                 <a:latin typeface="Arial" pitchFamily="34" charset="0"/>
                 <a:ea typeface="Arial" pitchFamily="34" charset="-122"/>
@@ -13792,7 +13792,7 @@
             <a:r>
               <a:rPr lang="en-US" sz="950" dirty="0">
                 <a:solidFill>
-                  <a:srgbClr val="9AA1AB"/>
+                  <a:srgbClr val="A79E93"/>
                 </a:solidFill>
                 <a:latin typeface="Microsoft YaHei" pitchFamily="34" charset="0"/>
                 <a:ea typeface="Microsoft YaHei" pitchFamily="34" charset="-122"/>
@@ -13806,7 +13806,7 @@
             <a:r>
               <a:rPr lang="en-US" sz="950" dirty="0">
                 <a:solidFill>
-                  <a:srgbClr val="9AA1AB"/>
+                  <a:srgbClr val="A79E93"/>
                 </a:solidFill>
                 <a:latin typeface="Arial" pitchFamily="34" charset="0"/>
                 <a:ea typeface="Arial" pitchFamily="34" charset="-122"/>
@@ -13845,7 +13845,7 @@
             <a:r>
               <a:rPr lang="en-US" sz="950" dirty="0">
                 <a:solidFill>
-                  <a:srgbClr val="9AA1AB"/>
+                  <a:srgbClr val="A79E93"/>
                 </a:solidFill>
                 <a:latin typeface="Arial" pitchFamily="34" charset="0"/>
                 <a:ea typeface="Arial" pitchFamily="34" charset="-122"/>
@@ -13936,7 +13936,7 @@
             <a:r>
               <a:rPr lang="en-US" sz="3000" b="1" spc="600" kern="0" dirty="0">
                 <a:solidFill>
-                  <a:srgbClr val="1F3A5F"/>
+                  <a:srgbClr val="7A3A1D"/>
                 </a:solidFill>
                 <a:latin typeface="Microsoft YaHei" pitchFamily="34" charset="0"/>
                 <a:ea typeface="Microsoft YaHei" pitchFamily="34" charset="-122"/>
@@ -13950,7 +13950,7 @@
             <a:r>
               <a:rPr lang="en-US" sz="3000" b="1" spc="600" kern="0" dirty="0">
                 <a:solidFill>
-                  <a:srgbClr val="1F3A5F"/>
+                  <a:srgbClr val="7A3A1D"/>
                 </a:solidFill>
                 <a:latin typeface="Arial" pitchFamily="34" charset="0"/>
                 <a:ea typeface="Arial" pitchFamily="34" charset="-122"/>
@@ -13964,7 +13964,7 @@
             <a:r>
               <a:rPr lang="en-US" sz="3000" b="1" spc="600" kern="0" dirty="0">
                 <a:solidFill>
-                  <a:srgbClr val="1F3A5F"/>
+                  <a:srgbClr val="7A3A1D"/>
                 </a:solidFill>
                 <a:latin typeface="Microsoft YaHei" pitchFamily="34" charset="0"/>
                 <a:ea typeface="Microsoft YaHei" pitchFamily="34" charset="-122"/>
@@ -13991,7 +13991,7 @@
             <a:avLst/>
           </a:prstGeom>
           <a:solidFill>
-            <a:srgbClr val="2F6FAE"/>
+            <a:srgbClr val="A8492A"/>
           </a:solidFill>
           <a:ln/>
         </p:spPr>
@@ -14011,7 +14011,7 @@
             <a:avLst/>
           </a:prstGeom>
           <a:solidFill>
-            <a:srgbClr val="D9DEE6"/>
+            <a:srgbClr val="E4E0D3"/>
           </a:solidFill>
           <a:ln/>
         </p:spPr>
@@ -14043,7 +14043,7 @@
             <a:r>
               <a:rPr lang="en-US" sz="1200" b="1" spc="200" kern="0" dirty="0">
                 <a:solidFill>
-                  <a:srgbClr val="6E7681"/>
+                  <a:srgbClr val="6B635A"/>
                 </a:solidFill>
                 <a:latin typeface="Microsoft YaHei" pitchFamily="34" charset="0"/>
                 <a:ea typeface="Microsoft YaHei" pitchFamily="34" charset="-122"/>
@@ -14082,7 +14082,7 @@
             <a:r>
               <a:rPr lang="en-US" sz="1500" b="1" dirty="0">
                 <a:solidFill>
-                  <a:srgbClr val="23272E"/>
+                  <a:srgbClr val="2B2823"/>
                 </a:solidFill>
                 <a:latin typeface="Microsoft YaHei" pitchFamily="34" charset="0"/>
                 <a:ea typeface="Microsoft YaHei" pitchFamily="34" charset="-122"/>
@@ -14121,7 +14121,7 @@
             <a:r>
               <a:rPr lang="en-US" sz="1200" dirty="0">
                 <a:solidFill>
-                  <a:srgbClr val="6E7681"/>
+                  <a:srgbClr val="6B635A"/>
                 </a:solidFill>
                 <a:latin typeface="Microsoft YaHei" pitchFamily="34" charset="0"/>
                 <a:ea typeface="Microsoft YaHei" pitchFamily="34" charset="-122"/>
@@ -14160,7 +14160,7 @@
             <a:r>
               <a:rPr lang="en-US" sz="1500" dirty="0">
                 <a:solidFill>
-                  <a:srgbClr val="23272E"/>
+                  <a:srgbClr val="2B2823"/>
                 </a:solidFill>
                 <a:latin typeface="Arial" pitchFamily="34" charset="0"/>
                 <a:ea typeface="Arial" pitchFamily="34" charset="-122"/>
@@ -14174,7 +14174,7 @@
             <a:r>
               <a:rPr lang="en-US" sz="1500" dirty="0">
                 <a:solidFill>
-                  <a:srgbClr val="23272E"/>
+                  <a:srgbClr val="2B2823"/>
                 </a:solidFill>
                 <a:latin typeface="Microsoft YaHei" pitchFamily="34" charset="0"/>
                 <a:ea typeface="Microsoft YaHei" pitchFamily="34" charset="-122"/>
@@ -14213,7 +14213,7 @@
             <a:r>
               <a:rPr lang="en-US" sz="1200" dirty="0">
                 <a:solidFill>
-                  <a:srgbClr val="6E7681"/>
+                  <a:srgbClr val="6B635A"/>
                 </a:solidFill>
                 <a:latin typeface="Microsoft YaHei" pitchFamily="34" charset="0"/>
                 <a:ea typeface="Microsoft YaHei" pitchFamily="34" charset="-122"/>
@@ -14240,7 +14240,7 @@
             <a:avLst/>
           </a:prstGeom>
           <a:solidFill>
-            <a:srgbClr val="D9DEE6"/>
+            <a:srgbClr val="E4E0D3"/>
           </a:solidFill>
           <a:ln/>
         </p:spPr>
@@ -14272,7 +14272,7 @@
             <a:r>
               <a:rPr lang="en-US" sz="1200" b="1" spc="200" kern="0" dirty="0">
                 <a:solidFill>
-                  <a:srgbClr val="6E7681"/>
+                  <a:srgbClr val="6B635A"/>
                 </a:solidFill>
                 <a:latin typeface="Microsoft YaHei" pitchFamily="34" charset="0"/>
                 <a:ea typeface="Microsoft YaHei" pitchFamily="34" charset="-122"/>
@@ -14311,7 +14311,7 @@
             <a:r>
               <a:rPr lang="en-US" sz="1500" dirty="0">
                 <a:solidFill>
-                  <a:srgbClr val="23272E"/>
+                  <a:srgbClr val="2B2823"/>
                 </a:solidFill>
                 <a:latin typeface="Microsoft YaHei" pitchFamily="34" charset="0"/>
                 <a:ea typeface="Microsoft YaHei" pitchFamily="34" charset="-122"/>
@@ -14350,7 +14350,7 @@
             <a:r>
               <a:rPr lang="en-US" sz="1300" dirty="0">
                 <a:solidFill>
-                  <a:srgbClr val="6E7681"/>
+                  <a:srgbClr val="6B635A"/>
                 </a:solidFill>
                 <a:latin typeface="Microsoft YaHei" pitchFamily="34" charset="0"/>
                 <a:ea typeface="Microsoft YaHei" pitchFamily="34" charset="-122"/>
@@ -14377,7 +14377,7 @@
             <a:avLst/>
           </a:prstGeom>
           <a:solidFill>
-            <a:srgbClr val="1F3A5F"/>
+            <a:srgbClr val="7A3A1D"/>
           </a:solidFill>
           <a:ln/>
         </p:spPr>
@@ -14409,7 +14409,7 @@
             <a:r>
               <a:rPr lang="en-US" sz="950" dirty="0">
                 <a:solidFill>
-                  <a:srgbClr val="9AA1AB"/>
+                  <a:srgbClr val="A79E93"/>
                 </a:solidFill>
                 <a:latin typeface="Arial" pitchFamily="34" charset="0"/>
                 <a:ea typeface="Arial" pitchFamily="34" charset="-122"/>
@@ -14423,7 +14423,7 @@
             <a:r>
               <a:rPr lang="en-US" sz="950" dirty="0">
                 <a:solidFill>
-                  <a:srgbClr val="9AA1AB"/>
+                  <a:srgbClr val="A79E93"/>
                 </a:solidFill>
                 <a:latin typeface="Microsoft YaHei" pitchFamily="34" charset="0"/>
                 <a:ea typeface="Microsoft YaHei" pitchFamily="34" charset="-122"/>
@@ -14437,7 +14437,7 @@
             <a:r>
               <a:rPr lang="en-US" sz="950" dirty="0">
                 <a:solidFill>
-                  <a:srgbClr val="9AA1AB"/>
+                  <a:srgbClr val="A79E93"/>
                 </a:solidFill>
                 <a:latin typeface="Arial" pitchFamily="34" charset="0"/>
                 <a:ea typeface="Arial" pitchFamily="34" charset="-122"/>
@@ -14451,7 +14451,7 @@
             <a:r>
               <a:rPr lang="en-US" sz="950" dirty="0">
                 <a:solidFill>
-                  <a:srgbClr val="9AA1AB"/>
+                  <a:srgbClr val="A79E93"/>
                 </a:solidFill>
                 <a:latin typeface="Microsoft YaHei" pitchFamily="34" charset="0"/>
                 <a:ea typeface="Microsoft YaHei" pitchFamily="34" charset="-122"/>
@@ -14465,7 +14465,7 @@
             <a:r>
               <a:rPr lang="en-US" sz="950" dirty="0">
                 <a:solidFill>
-                  <a:srgbClr val="9AA1AB"/>
+                  <a:srgbClr val="A79E93"/>
                 </a:solidFill>
                 <a:latin typeface="Arial" pitchFamily="34" charset="0"/>
                 <a:ea typeface="Arial" pitchFamily="34" charset="-122"/>
@@ -14479,7 +14479,7 @@
             <a:r>
               <a:rPr lang="en-US" sz="950" dirty="0">
                 <a:solidFill>
-                  <a:srgbClr val="9AA1AB"/>
+                  <a:srgbClr val="A79E93"/>
                 </a:solidFill>
                 <a:latin typeface="Microsoft YaHei" pitchFamily="34" charset="0"/>
                 <a:ea typeface="Microsoft YaHei" pitchFamily="34" charset="-122"/>
@@ -14518,7 +14518,7 @@
             <a:r>
               <a:rPr lang="en-US" sz="950" dirty="0">
                 <a:solidFill>
-                  <a:srgbClr val="9AA1AB"/>
+                  <a:srgbClr val="A79E93"/>
                 </a:solidFill>
                 <a:latin typeface="Arial" pitchFamily="34" charset="0"/>
                 <a:ea typeface="Arial" pitchFamily="34" charset="-122"/>
@@ -14612,7 +14612,7 @@
             <a:r>
               <a:rPr lang="en-US" sz="3400" b="1" dirty="0">
                 <a:solidFill>
-                  <a:srgbClr val="1F3A5F"/>
+                  <a:srgbClr val="7A3A1D"/>
                 </a:solidFill>
                 <a:latin typeface="Microsoft YaHei" pitchFamily="34" charset="0"/>
                 <a:ea typeface="Microsoft YaHei" pitchFamily="34" charset="-122"/>
@@ -14639,7 +14639,7 @@
             <a:avLst/>
           </a:prstGeom>
           <a:solidFill>
-            <a:srgbClr val="1F3A5F"/>
+            <a:srgbClr val="7A3A1D"/>
           </a:solidFill>
           <a:ln/>
         </p:spPr>
@@ -14674,7 +14674,7 @@
             <a:r>
               <a:rPr lang="en-US" sz="1800" dirty="0">
                 <a:solidFill>
-                  <a:srgbClr val="23272E"/>
+                  <a:srgbClr val="2B2823"/>
                 </a:solidFill>
                 <a:latin typeface="Microsoft YaHei" pitchFamily="34" charset="0"/>
                 <a:ea typeface="Microsoft YaHei" pitchFamily="34" charset="-122"/>
@@ -14701,7 +14701,7 @@
             <a:avLst/>
           </a:prstGeom>
           <a:solidFill>
-            <a:srgbClr val="1F3A5F"/>
+            <a:srgbClr val="7A3A1D"/>
           </a:solidFill>
           <a:ln/>
         </p:spPr>
@@ -14721,7 +14721,7 @@
             <a:avLst/>
           </a:prstGeom>
           <a:solidFill>
-            <a:srgbClr val="D9DEE6"/>
+            <a:srgbClr val="E4E0D3"/>
           </a:solidFill>
           <a:ln/>
         </p:spPr>
@@ -14741,7 +14741,7 @@
             <a:avLst/>
           </a:prstGeom>
           <a:solidFill>
-            <a:srgbClr val="E1E8F0"/>
+            <a:srgbClr val="EAE6D8"/>
           </a:solidFill>
           <a:ln/>
         </p:spPr>
@@ -14773,7 +14773,7 @@
             <a:r>
               <a:rPr lang="en-US" sz="1100" spc="100" kern="0" dirty="0">
                 <a:solidFill>
-                  <a:srgbClr val="6E7681"/>
+                  <a:srgbClr val="6B635A"/>
                 </a:solidFill>
                 <a:latin typeface="Microsoft YaHei" pitchFamily="34" charset="0"/>
                 <a:ea typeface="Microsoft YaHei" pitchFamily="34" charset="-122"/>
@@ -14812,7 +14812,7 @@
             <a:r>
               <a:rPr lang="en-US" sz="1400" dirty="0">
                 <a:solidFill>
-                  <a:srgbClr val="23272E"/>
+                  <a:srgbClr val="2B2823"/>
                 </a:solidFill>
                 <a:latin typeface="Arial" pitchFamily="34" charset="0"/>
                 <a:ea typeface="Arial" pitchFamily="34" charset="-122"/>
@@ -14851,7 +14851,7 @@
             <a:r>
               <a:rPr lang="en-US" sz="1100" spc="100" kern="0" dirty="0">
                 <a:solidFill>
-                  <a:srgbClr val="6E7681"/>
+                  <a:srgbClr val="6B635A"/>
                 </a:solidFill>
                 <a:latin typeface="Microsoft YaHei" pitchFamily="34" charset="0"/>
                 <a:ea typeface="Microsoft YaHei" pitchFamily="34" charset="-122"/>
@@ -14890,7 +14890,7 @@
             <a:r>
               <a:rPr lang="en-US" sz="1400" dirty="0">
                 <a:solidFill>
-                  <a:srgbClr val="23272E"/>
+                  <a:srgbClr val="2B2823"/>
                 </a:solidFill>
                 <a:latin typeface="Microsoft YaHei" pitchFamily="34" charset="0"/>
                 <a:ea typeface="Microsoft YaHei" pitchFamily="34" charset="-122"/>
@@ -14917,7 +14917,7 @@
             <a:avLst/>
           </a:prstGeom>
           <a:solidFill>
-            <a:srgbClr val="1F3A5F"/>
+            <a:srgbClr val="7A3A1D"/>
           </a:solidFill>
           <a:ln/>
         </p:spPr>
@@ -14977,7 +14977,7 @@
             <a:r>
               <a:rPr lang="en-US" sz="9600" b="1" dirty="0">
                 <a:solidFill>
-                  <a:srgbClr val="E7EEF6"/>
+                  <a:srgbClr val="F3E3D8"/>
                 </a:solidFill>
                 <a:latin typeface="Arial" pitchFamily="34" charset="0"/>
                 <a:ea typeface="Arial" pitchFamily="34" charset="-122"/>
@@ -15016,7 +15016,7 @@
             <a:r>
               <a:rPr lang="en-US" sz="1300" b="1" spc="300" kern="0" dirty="0">
                 <a:solidFill>
-                  <a:srgbClr val="2F6FAE"/>
+                  <a:srgbClr val="A8492A"/>
                 </a:solidFill>
                 <a:latin typeface="Arial" pitchFamily="34" charset="0"/>
                 <a:ea typeface="Arial" pitchFamily="34" charset="-122"/>
@@ -15043,7 +15043,7 @@
             <a:avLst/>
           </a:prstGeom>
           <a:solidFill>
-            <a:srgbClr val="2F6FAE"/>
+            <a:srgbClr val="A8492A"/>
           </a:solidFill>
           <a:ln/>
         </p:spPr>
@@ -15075,7 +15075,7 @@
             <a:r>
               <a:rPr lang="en-US" sz="3000" b="1" dirty="0">
                 <a:solidFill>
-                  <a:srgbClr val="1F3A5F"/>
+                  <a:srgbClr val="7A3A1D"/>
                 </a:solidFill>
                 <a:latin typeface="Microsoft YaHei" pitchFamily="34" charset="0"/>
                 <a:ea typeface="Microsoft YaHei" pitchFamily="34" charset="-122"/>
@@ -15117,7 +15117,7 @@
             <a:r>
               <a:rPr lang="en-US" sz="1450" dirty="0">
                 <a:solidFill>
-                  <a:srgbClr val="6E7681"/>
+                  <a:srgbClr val="6B635A"/>
                 </a:solidFill>
                 <a:latin typeface="Microsoft YaHei" pitchFamily="34" charset="0"/>
                 <a:ea typeface="Microsoft YaHei" pitchFamily="34" charset="-122"/>
@@ -15144,7 +15144,7 @@
             <a:avLst/>
           </a:prstGeom>
           <a:solidFill>
-            <a:srgbClr val="D9DEE6"/>
+            <a:srgbClr val="E4E0D3"/>
           </a:solidFill>
           <a:ln/>
         </p:spPr>
@@ -15176,7 +15176,7 @@
             <a:r>
               <a:rPr lang="en-US" sz="1400" b="1" dirty="0">
                 <a:solidFill>
-                  <a:srgbClr val="1F3A5F"/>
+                  <a:srgbClr val="7A3A1D"/>
                 </a:solidFill>
                 <a:latin typeface="Microsoft YaHei" pitchFamily="34" charset="0"/>
                 <a:ea typeface="Microsoft YaHei" pitchFamily="34" charset="-122"/>
@@ -15218,7 +15218,7 @@
             <a:r>
               <a:rPr lang="en-US" sz="1250" dirty="0">
                 <a:solidFill>
-                  <a:srgbClr val="6E7681"/>
+                  <a:srgbClr val="6B635A"/>
                 </a:solidFill>
                 <a:latin typeface="Microsoft YaHei" pitchFamily="34" charset="0"/>
                 <a:ea typeface="Microsoft YaHei" pitchFamily="34" charset="-122"/>
@@ -15245,7 +15245,7 @@
             <a:avLst/>
           </a:prstGeom>
           <a:solidFill>
-            <a:srgbClr val="D9DEE6"/>
+            <a:srgbClr val="E4E0D3"/>
           </a:solidFill>
           <a:ln/>
         </p:spPr>
@@ -15277,7 +15277,7 @@
             <a:r>
               <a:rPr lang="en-US" sz="1400" b="1" dirty="0">
                 <a:solidFill>
-                  <a:srgbClr val="1F3A5F"/>
+                  <a:srgbClr val="7A3A1D"/>
                 </a:solidFill>
                 <a:latin typeface="Microsoft YaHei" pitchFamily="34" charset="0"/>
                 <a:ea typeface="Microsoft YaHei" pitchFamily="34" charset="-122"/>
@@ -15319,7 +15319,7 @@
             <a:r>
               <a:rPr lang="en-US" sz="1250" dirty="0">
                 <a:solidFill>
-                  <a:srgbClr val="6E7681"/>
+                  <a:srgbClr val="6B635A"/>
                 </a:solidFill>
                 <a:latin typeface="Microsoft YaHei" pitchFamily="34" charset="0"/>
                 <a:ea typeface="Microsoft YaHei" pitchFamily="34" charset="-122"/>
@@ -15346,7 +15346,7 @@
             <a:avLst/>
           </a:prstGeom>
           <a:solidFill>
-            <a:srgbClr val="D9DEE6"/>
+            <a:srgbClr val="E4E0D3"/>
           </a:solidFill>
           <a:ln/>
         </p:spPr>
@@ -15378,7 +15378,7 @@
             <a:r>
               <a:rPr lang="en-US" sz="1400" b="1" dirty="0">
                 <a:solidFill>
-                  <a:srgbClr val="1F3A5F"/>
+                  <a:srgbClr val="7A3A1D"/>
                 </a:solidFill>
                 <a:latin typeface="Microsoft YaHei" pitchFamily="34" charset="0"/>
                 <a:ea typeface="Microsoft YaHei" pitchFamily="34" charset="-122"/>
@@ -15420,7 +15420,7 @@
             <a:r>
               <a:rPr lang="en-US" sz="1250" dirty="0">
                 <a:solidFill>
-                  <a:srgbClr val="6E7681"/>
+                  <a:srgbClr val="6B635A"/>
                 </a:solidFill>
                 <a:latin typeface="Microsoft YaHei" pitchFamily="34" charset="0"/>
                 <a:ea typeface="Microsoft YaHei" pitchFamily="34" charset="-122"/>
@@ -15459,7 +15459,7 @@
             <a:r>
               <a:rPr lang="en-US" sz="1150" b="1" dirty="0">
                 <a:solidFill>
-                  <a:srgbClr val="2F6FAE"/>
+                  <a:srgbClr val="A8492A"/>
                 </a:solidFill>
                 <a:latin typeface="Arial" pitchFamily="34" charset="0"/>
                 <a:ea typeface="Arial" pitchFamily="34" charset="-122"/>
@@ -15473,7 +15473,7 @@
             <a:r>
               <a:rPr lang="en-US" sz="1150" b="1" dirty="0">
                 <a:solidFill>
-                  <a:srgbClr val="2F6FAE"/>
+                  <a:srgbClr val="A8492A"/>
                 </a:solidFill>
                 <a:latin typeface="Microsoft YaHei" pitchFamily="34" charset="0"/>
                 <a:ea typeface="Microsoft YaHei" pitchFamily="34" charset="-122"/>
@@ -15512,7 +15512,7 @@
             <a:r>
               <a:rPr lang="en-US" sz="1150" dirty="0">
                 <a:solidFill>
-                  <a:srgbClr val="9AA1AB"/>
+                  <a:srgbClr val="A79E93"/>
                 </a:solidFill>
                 <a:latin typeface="Arial" pitchFamily="34" charset="0"/>
                 <a:ea typeface="Arial" pitchFamily="34" charset="-122"/>
@@ -15526,7 +15526,7 @@
             <a:r>
               <a:rPr lang="en-US" sz="1150" dirty="0">
                 <a:solidFill>
-                  <a:srgbClr val="9AA1AB"/>
+                  <a:srgbClr val="A79E93"/>
                 </a:solidFill>
                 <a:latin typeface="Microsoft YaHei" pitchFamily="34" charset="0"/>
                 <a:ea typeface="Microsoft YaHei" pitchFamily="34" charset="-122"/>
@@ -15565,7 +15565,7 @@
             <a:r>
               <a:rPr lang="en-US" sz="1150" dirty="0">
                 <a:solidFill>
-                  <a:srgbClr val="9AA1AB"/>
+                  <a:srgbClr val="A79E93"/>
                 </a:solidFill>
                 <a:latin typeface="Arial" pitchFamily="34" charset="0"/>
                 <a:ea typeface="Arial" pitchFamily="34" charset="-122"/>
@@ -15579,7 +15579,7 @@
             <a:r>
               <a:rPr lang="en-US" sz="1150" dirty="0">
                 <a:solidFill>
-                  <a:srgbClr val="9AA1AB"/>
+                  <a:srgbClr val="A79E93"/>
                 </a:solidFill>
                 <a:latin typeface="Microsoft YaHei" pitchFamily="34" charset="0"/>
                 <a:ea typeface="Microsoft YaHei" pitchFamily="34" charset="-122"/>
@@ -15618,7 +15618,7 @@
             <a:r>
               <a:rPr lang="en-US" sz="1150" dirty="0">
                 <a:solidFill>
-                  <a:srgbClr val="9AA1AB"/>
+                  <a:srgbClr val="A79E93"/>
                 </a:solidFill>
                 <a:latin typeface="Arial" pitchFamily="34" charset="0"/>
                 <a:ea typeface="Arial" pitchFamily="34" charset="-122"/>
@@ -15632,7 +15632,7 @@
             <a:r>
               <a:rPr lang="en-US" sz="1150" dirty="0">
                 <a:solidFill>
-                  <a:srgbClr val="9AA1AB"/>
+                  <a:srgbClr val="A79E93"/>
                 </a:solidFill>
                 <a:latin typeface="Microsoft YaHei" pitchFamily="34" charset="0"/>
                 <a:ea typeface="Microsoft YaHei" pitchFamily="34" charset="-122"/>
@@ -15671,7 +15671,7 @@
             <a:r>
               <a:rPr lang="en-US" sz="950" dirty="0">
                 <a:solidFill>
-                  <a:srgbClr val="9AA1AB"/>
+                  <a:srgbClr val="A79E93"/>
                 </a:solidFill>
                 <a:latin typeface="Arial" pitchFamily="34" charset="0"/>
                 <a:ea typeface="Arial" pitchFamily="34" charset="-122"/>
@@ -15685,7 +15685,7 @@
             <a:r>
               <a:rPr lang="en-US" sz="950" dirty="0">
                 <a:solidFill>
-                  <a:srgbClr val="9AA1AB"/>
+                  <a:srgbClr val="A79E93"/>
                 </a:solidFill>
                 <a:latin typeface="Microsoft YaHei" pitchFamily="34" charset="0"/>
                 <a:ea typeface="Microsoft YaHei" pitchFamily="34" charset="-122"/>
@@ -15699,7 +15699,7 @@
             <a:r>
               <a:rPr lang="en-US" sz="950" dirty="0">
                 <a:solidFill>
-                  <a:srgbClr val="9AA1AB"/>
+                  <a:srgbClr val="A79E93"/>
                 </a:solidFill>
                 <a:latin typeface="Arial" pitchFamily="34" charset="0"/>
                 <a:ea typeface="Arial" pitchFamily="34" charset="-122"/>
@@ -15713,7 +15713,7 @@
             <a:r>
               <a:rPr lang="en-US" sz="950" dirty="0">
                 <a:solidFill>
-                  <a:srgbClr val="9AA1AB"/>
+                  <a:srgbClr val="A79E93"/>
                 </a:solidFill>
                 <a:latin typeface="Microsoft YaHei" pitchFamily="34" charset="0"/>
                 <a:ea typeface="Microsoft YaHei" pitchFamily="34" charset="-122"/>
@@ -15727,7 +15727,7 @@
             <a:r>
               <a:rPr lang="en-US" sz="950" dirty="0">
                 <a:solidFill>
-                  <a:srgbClr val="9AA1AB"/>
+                  <a:srgbClr val="A79E93"/>
                 </a:solidFill>
                 <a:latin typeface="Arial" pitchFamily="34" charset="0"/>
                 <a:ea typeface="Arial" pitchFamily="34" charset="-122"/>
@@ -15741,7 +15741,7 @@
             <a:r>
               <a:rPr lang="en-US" sz="950" dirty="0">
                 <a:solidFill>
-                  <a:srgbClr val="9AA1AB"/>
+                  <a:srgbClr val="A79E93"/>
                 </a:solidFill>
                 <a:latin typeface="Microsoft YaHei" pitchFamily="34" charset="0"/>
                 <a:ea typeface="Microsoft YaHei" pitchFamily="34" charset="-122"/>
@@ -15780,7 +15780,7 @@
             <a:r>
               <a:rPr lang="en-US" sz="950" dirty="0">
                 <a:solidFill>
-                  <a:srgbClr val="9AA1AB"/>
+                  <a:srgbClr val="A79E93"/>
                 </a:solidFill>
                 <a:latin typeface="Arial" pitchFamily="34" charset="0"/>
                 <a:ea typeface="Arial" pitchFamily="34" charset="-122"/>
@@ -15847,7 +15847,7 @@
             <a:r>
               <a:rPr lang="en-US" sz="1200" b="1" spc="240" kern="0" dirty="0">
                 <a:solidFill>
-                  <a:srgbClr val="2F6FAE"/>
+                  <a:srgbClr val="A8492A"/>
                 </a:solidFill>
                 <a:latin typeface="Microsoft YaHei" pitchFamily="34" charset="0"/>
                 <a:ea typeface="Microsoft YaHei" pitchFamily="34" charset="-122"/>
@@ -15889,7 +15889,7 @@
             <a:r>
               <a:rPr lang="en-US" sz="2500" b="1" dirty="0">
                 <a:solidFill>
-                  <a:srgbClr val="1F3A5F"/>
+                  <a:srgbClr val="7A3A1D"/>
                 </a:solidFill>
                 <a:latin typeface="Microsoft YaHei" pitchFamily="34" charset="0"/>
                 <a:ea typeface="Microsoft YaHei" pitchFamily="34" charset="-122"/>
@@ -15931,7 +15931,7 @@
             <a:r>
               <a:rPr lang="en-US" sz="1500" b="1" dirty="0">
                 <a:solidFill>
-                  <a:srgbClr val="23272E"/>
+                  <a:srgbClr val="2B2823"/>
                 </a:solidFill>
                 <a:latin typeface="Microsoft YaHei" pitchFamily="34" charset="0"/>
                 <a:ea typeface="Microsoft YaHei" pitchFamily="34" charset="-122"/>
@@ -15948,7 +15948,7 @@
             <a:r>
               <a:rPr lang="en-US" sz="1500" dirty="0">
                 <a:solidFill>
-                  <a:srgbClr val="23272E"/>
+                  <a:srgbClr val="2B2823"/>
                 </a:solidFill>
                 <a:latin typeface="Arial" pitchFamily="34" charset="0"/>
                 <a:ea typeface="Arial" pitchFamily="34" charset="-122"/>
@@ -15965,7 +15965,7 @@
             <a:r>
               <a:rPr lang="en-US" sz="1500" dirty="0">
                 <a:solidFill>
-                  <a:srgbClr val="23272E"/>
+                  <a:srgbClr val="2B2823"/>
                 </a:solidFill>
                 <a:latin typeface="Microsoft YaHei" pitchFamily="34" charset="0"/>
                 <a:ea typeface="Microsoft YaHei" pitchFamily="34" charset="-122"/>
@@ -15982,7 +15982,7 @@
             <a:r>
               <a:rPr lang="en-US" sz="1500" dirty="0">
                 <a:solidFill>
-                  <a:srgbClr val="23272E"/>
+                  <a:srgbClr val="2B2823"/>
                 </a:solidFill>
                 <a:latin typeface="Arial" pitchFamily="34" charset="0"/>
                 <a:ea typeface="Arial" pitchFamily="34" charset="-122"/>
@@ -15999,7 +15999,7 @@
             <a:r>
               <a:rPr lang="en-US" sz="1500" dirty="0">
                 <a:solidFill>
-                  <a:srgbClr val="23272E"/>
+                  <a:srgbClr val="2B2823"/>
                 </a:solidFill>
                 <a:latin typeface="Microsoft YaHei" pitchFamily="34" charset="0"/>
                 <a:ea typeface="Microsoft YaHei" pitchFamily="34" charset="-122"/>
@@ -16026,7 +16026,7 @@
             <a:avLst/>
           </a:prstGeom>
           <a:solidFill>
-            <a:srgbClr val="D9DEE6"/>
+            <a:srgbClr val="E4E0D3"/>
           </a:solidFill>
           <a:ln/>
         </p:spPr>
@@ -16061,7 +16061,7 @@
             <a:r>
               <a:rPr lang="en-US" sz="1500" b="1" dirty="0">
                 <a:solidFill>
-                  <a:srgbClr val="23272E"/>
+                  <a:srgbClr val="2B2823"/>
                 </a:solidFill>
                 <a:latin typeface="Microsoft YaHei" pitchFamily="34" charset="0"/>
                 <a:ea typeface="Microsoft YaHei" pitchFamily="34" charset="-122"/>
@@ -16078,7 +16078,7 @@
             <a:r>
               <a:rPr lang="en-US" sz="1500" dirty="0">
                 <a:solidFill>
-                  <a:srgbClr val="23272E"/>
+                  <a:srgbClr val="2B2823"/>
                 </a:solidFill>
                 <a:latin typeface="Arial" pitchFamily="34" charset="0"/>
                 <a:ea typeface="Arial" pitchFamily="34" charset="-122"/>
@@ -16095,7 +16095,7 @@
             <a:r>
               <a:rPr lang="en-US" sz="1500" dirty="0">
                 <a:solidFill>
-                  <a:srgbClr val="23272E"/>
+                  <a:srgbClr val="2B2823"/>
                 </a:solidFill>
                 <a:latin typeface="Microsoft YaHei" pitchFamily="34" charset="0"/>
                 <a:ea typeface="Microsoft YaHei" pitchFamily="34" charset="-122"/>
@@ -16112,7 +16112,7 @@
             <a:r>
               <a:rPr lang="en-US" sz="1500" dirty="0">
                 <a:solidFill>
-                  <a:srgbClr val="23272E"/>
+                  <a:srgbClr val="2B2823"/>
                 </a:solidFill>
                 <a:latin typeface="Arial" pitchFamily="34" charset="0"/>
                 <a:ea typeface="Arial" pitchFamily="34" charset="-122"/>
@@ -16129,7 +16129,7 @@
             <a:r>
               <a:rPr lang="en-US" sz="1500" dirty="0">
                 <a:solidFill>
-                  <a:srgbClr val="23272E"/>
+                  <a:srgbClr val="2B2823"/>
                 </a:solidFill>
                 <a:latin typeface="Microsoft YaHei" pitchFamily="34" charset="0"/>
                 <a:ea typeface="Microsoft YaHei" pitchFamily="34" charset="-122"/>
@@ -16146,7 +16146,7 @@
             <a:r>
               <a:rPr lang="en-US" sz="1500" dirty="0">
                 <a:solidFill>
-                  <a:srgbClr val="23272E"/>
+                  <a:srgbClr val="2B2823"/>
                 </a:solidFill>
                 <a:latin typeface="Arial" pitchFamily="34" charset="0"/>
                 <a:ea typeface="Arial" pitchFamily="34" charset="-122"/>
@@ -16163,7 +16163,7 @@
             <a:r>
               <a:rPr lang="en-US" sz="1500" dirty="0">
                 <a:solidFill>
-                  <a:srgbClr val="23272E"/>
+                  <a:srgbClr val="2B2823"/>
                 </a:solidFill>
                 <a:latin typeface="Microsoft YaHei" pitchFamily="34" charset="0"/>
                 <a:ea typeface="Microsoft YaHei" pitchFamily="34" charset="-122"/>
@@ -16190,7 +16190,7 @@
             <a:avLst/>
           </a:prstGeom>
           <a:solidFill>
-            <a:srgbClr val="D9DEE6"/>
+            <a:srgbClr val="E4E0D3"/>
           </a:solidFill>
           <a:ln/>
         </p:spPr>
@@ -16225,7 +16225,7 @@
             <a:r>
               <a:rPr lang="en-US" sz="1500" b="1" dirty="0">
                 <a:solidFill>
-                  <a:srgbClr val="23272E"/>
+                  <a:srgbClr val="2B2823"/>
                 </a:solidFill>
                 <a:latin typeface="Microsoft YaHei" pitchFamily="34" charset="0"/>
                 <a:ea typeface="Microsoft YaHei" pitchFamily="34" charset="-122"/>
@@ -16242,7 +16242,7 @@
             <a:r>
               <a:rPr lang="en-US" sz="1500" dirty="0">
                 <a:solidFill>
-                  <a:srgbClr val="23272E"/>
+                  <a:srgbClr val="2B2823"/>
                 </a:solidFill>
                 <a:latin typeface="Arial" pitchFamily="34" charset="0"/>
                 <a:ea typeface="Arial" pitchFamily="34" charset="-122"/>
@@ -16259,7 +16259,7 @@
             <a:r>
               <a:rPr lang="en-US" sz="1500" dirty="0">
                 <a:solidFill>
-                  <a:srgbClr val="23272E"/>
+                  <a:srgbClr val="2B2823"/>
                 </a:solidFill>
                 <a:latin typeface="Microsoft YaHei" pitchFamily="34" charset="0"/>
                 <a:ea typeface="Microsoft YaHei" pitchFamily="34" charset="-122"/>
@@ -16322,7 +16322,7 @@
             <a:r>
               <a:rPr lang="en-US" sz="1200" dirty="0">
                 <a:solidFill>
-                  <a:srgbClr val="6E7681"/>
+                  <a:srgbClr val="6B635A"/>
                 </a:solidFill>
                 <a:latin typeface="Arial" pitchFamily="34" charset="0"/>
                 <a:ea typeface="Arial" pitchFamily="34" charset="-122"/>
@@ -16364,7 +16364,7 @@
             <a:r>
               <a:rPr lang="en-US" sz="1200" b="1" dirty="0">
                 <a:solidFill>
-                  <a:srgbClr val="6E7681"/>
+                  <a:srgbClr val="6B635A"/>
                 </a:solidFill>
                 <a:latin typeface="Microsoft YaHei" pitchFamily="34" charset="0"/>
                 <a:ea typeface="Microsoft YaHei" pitchFamily="34" charset="-122"/>
@@ -16381,7 +16381,7 @@
             <a:r>
               <a:rPr lang="en-US" sz="1200" b="1" dirty="0">
                 <a:solidFill>
-                  <a:srgbClr val="1F3A5F"/>
+                  <a:srgbClr val="7A3A1D"/>
                 </a:solidFill>
                 <a:latin typeface="Arial" pitchFamily="34" charset="0"/>
                 <a:ea typeface="Arial" pitchFamily="34" charset="-122"/>
@@ -16398,7 +16398,7 @@
             <a:r>
               <a:rPr lang="en-US" sz="1200" dirty="0">
                 <a:solidFill>
-                  <a:srgbClr val="6E7681"/>
+                  <a:srgbClr val="6B635A"/>
                 </a:solidFill>
                 <a:latin typeface="Microsoft YaHei" pitchFamily="34" charset="0"/>
                 <a:ea typeface="Microsoft YaHei" pitchFamily="34" charset="-122"/>
@@ -16415,7 +16415,7 @@
             <a:r>
               <a:rPr lang="en-US" sz="1200" b="1" dirty="0">
                 <a:solidFill>
-                  <a:srgbClr val="1F3A5F"/>
+                  <a:srgbClr val="7A3A1D"/>
                 </a:solidFill>
                 <a:latin typeface="Arial" pitchFamily="34" charset="0"/>
                 <a:ea typeface="Arial" pitchFamily="34" charset="-122"/>
@@ -16432,7 +16432,7 @@
             <a:r>
               <a:rPr lang="en-US" sz="1200" dirty="0">
                 <a:solidFill>
-                  <a:srgbClr val="6E7681"/>
+                  <a:srgbClr val="6B635A"/>
                 </a:solidFill>
                 <a:latin typeface="Microsoft YaHei" pitchFamily="34" charset="0"/>
                 <a:ea typeface="Microsoft YaHei" pitchFamily="34" charset="-122"/>
@@ -16449,7 +16449,7 @@
             <a:r>
               <a:rPr lang="en-US" sz="1200" b="1" dirty="0">
                 <a:solidFill>
-                  <a:srgbClr val="1F3A5F"/>
+                  <a:srgbClr val="7A3A1D"/>
                 </a:solidFill>
                 <a:latin typeface="Arial" pitchFamily="34" charset="0"/>
                 <a:ea typeface="Arial" pitchFamily="34" charset="-122"/>
@@ -16466,7 +16466,7 @@
             <a:r>
               <a:rPr lang="en-US" sz="1200" dirty="0">
                 <a:solidFill>
-                  <a:srgbClr val="6E7681"/>
+                  <a:srgbClr val="6B635A"/>
                 </a:solidFill>
                 <a:latin typeface="Microsoft YaHei" pitchFamily="34" charset="0"/>
                 <a:ea typeface="Microsoft YaHei" pitchFamily="34" charset="-122"/>
@@ -16483,7 +16483,7 @@
             <a:r>
               <a:rPr lang="en-US" sz="1200" dirty="0">
                 <a:solidFill>
-                  <a:srgbClr val="6E7681"/>
+                  <a:srgbClr val="6B635A"/>
                 </a:solidFill>
                 <a:latin typeface="Arial" pitchFamily="34" charset="0"/>
                 <a:ea typeface="Arial" pitchFamily="34" charset="-122"/>
@@ -16500,7 +16500,7 @@
             <a:r>
               <a:rPr lang="en-US" sz="1200" dirty="0">
                 <a:solidFill>
-                  <a:srgbClr val="6E7681"/>
+                  <a:srgbClr val="6B635A"/>
                 </a:solidFill>
                 <a:latin typeface="Microsoft YaHei" pitchFamily="34" charset="0"/>
                 <a:ea typeface="Microsoft YaHei" pitchFamily="34" charset="-122"/>
@@ -16527,7 +16527,7 @@
             <a:avLst/>
           </a:prstGeom>
           <a:solidFill>
-            <a:srgbClr val="2F6FAE"/>
+            <a:srgbClr val="A8492A"/>
           </a:solidFill>
           <a:ln/>
         </p:spPr>
@@ -16559,7 +16559,7 @@
             <a:r>
               <a:rPr lang="en-US" sz="1200" b="1" spc="80" kern="0" dirty="0">
                 <a:solidFill>
-                  <a:srgbClr val="2F6FAE"/>
+                  <a:srgbClr val="A8492A"/>
                 </a:solidFill>
                 <a:latin typeface="Microsoft YaHei" pitchFamily="34" charset="0"/>
                 <a:ea typeface="Microsoft YaHei" pitchFamily="34" charset="-122"/>
@@ -16573,7 +16573,7 @@
             <a:r>
               <a:rPr lang="en-US" sz="1200" b="1" spc="80" kern="0" dirty="0">
                 <a:solidFill>
-                  <a:srgbClr val="2F6FAE"/>
+                  <a:srgbClr val="A8492A"/>
                 </a:solidFill>
                 <a:latin typeface="Arial" pitchFamily="34" charset="0"/>
                 <a:ea typeface="Arial" pitchFamily="34" charset="-122"/>
@@ -16615,7 +16615,7 @@
             <a:r>
               <a:rPr lang="en-US" sz="1350" dirty="0">
                 <a:solidFill>
-                  <a:srgbClr val="23272E"/>
+                  <a:srgbClr val="2B2823"/>
                 </a:solidFill>
                 <a:latin typeface="Microsoft YaHei" pitchFamily="34" charset="0"/>
                 <a:ea typeface="Microsoft YaHei" pitchFamily="34" charset="-122"/>
@@ -16632,7 +16632,7 @@
             <a:r>
               <a:rPr lang="en-US" sz="1350" dirty="0">
                 <a:solidFill>
-                  <a:srgbClr val="23272E"/>
+                  <a:srgbClr val="2B2823"/>
                 </a:solidFill>
                 <a:latin typeface="Arial" pitchFamily="34" charset="0"/>
                 <a:ea typeface="Arial" pitchFamily="34" charset="-122"/>
@@ -16649,7 +16649,7 @@
             <a:r>
               <a:rPr lang="en-US" sz="1350" dirty="0">
                 <a:solidFill>
-                  <a:srgbClr val="23272E"/>
+                  <a:srgbClr val="2B2823"/>
                 </a:solidFill>
                 <a:latin typeface="Microsoft YaHei" pitchFamily="34" charset="0"/>
                 <a:ea typeface="Microsoft YaHei" pitchFamily="34" charset="-122"/>
@@ -16676,7 +16676,7 @@
             <a:avLst/>
           </a:prstGeom>
           <a:solidFill>
-            <a:srgbClr val="1F3A5F"/>
+            <a:srgbClr val="7A3A1D"/>
           </a:solidFill>
           <a:ln/>
         </p:spPr>
@@ -16708,7 +16708,7 @@
             <a:r>
               <a:rPr lang="en-US" sz="3600" b="1" dirty="0">
                 <a:solidFill>
-                  <a:srgbClr val="1F3A5F"/>
+                  <a:srgbClr val="7A3A1D"/>
                 </a:solidFill>
                 <a:latin typeface="Arial" pitchFamily="34" charset="0"/>
                 <a:ea typeface="Arial" pitchFamily="34" charset="-122"/>
@@ -16747,7 +16747,7 @@
             <a:r>
               <a:rPr lang="en-US" sz="1350" b="1" dirty="0">
                 <a:solidFill>
-                  <a:srgbClr val="23272E"/>
+                  <a:srgbClr val="2B2823"/>
                 </a:solidFill>
                 <a:latin typeface="Microsoft YaHei" pitchFamily="34" charset="0"/>
                 <a:ea typeface="Microsoft YaHei" pitchFamily="34" charset="-122"/>
@@ -16774,7 +16774,7 @@
             <a:avLst/>
           </a:prstGeom>
           <a:solidFill>
-            <a:srgbClr val="1F3A5F"/>
+            <a:srgbClr val="7A3A1D"/>
           </a:solidFill>
           <a:ln/>
         </p:spPr>
@@ -16806,7 +16806,7 @@
             <a:r>
               <a:rPr lang="en-US" sz="3600" b="1" dirty="0">
                 <a:solidFill>
-                  <a:srgbClr val="1F3A5F"/>
+                  <a:srgbClr val="7A3A1D"/>
                 </a:solidFill>
                 <a:latin typeface="Arial" pitchFamily="34" charset="0"/>
                 <a:ea typeface="Arial" pitchFamily="34" charset="-122"/>
@@ -16820,7 +16820,7 @@
             <a:r>
               <a:rPr lang="en-US" sz="3600" b="1" dirty="0">
                 <a:solidFill>
-                  <a:srgbClr val="1F3A5F"/>
+                  <a:srgbClr val="7A3A1D"/>
                 </a:solidFill>
                 <a:latin typeface="Microsoft YaHei" pitchFamily="34" charset="0"/>
                 <a:ea typeface="Microsoft YaHei" pitchFamily="34" charset="-122"/>
@@ -16859,7 +16859,7 @@
             <a:r>
               <a:rPr lang="en-US" sz="1350" b="1" dirty="0">
                 <a:solidFill>
-                  <a:srgbClr val="23272E"/>
+                  <a:srgbClr val="2B2823"/>
                 </a:solidFill>
                 <a:latin typeface="Microsoft YaHei" pitchFamily="34" charset="0"/>
                 <a:ea typeface="Microsoft YaHei" pitchFamily="34" charset="-122"/>
@@ -16886,7 +16886,7 @@
             <a:avLst/>
           </a:prstGeom>
           <a:solidFill>
-            <a:srgbClr val="1F3A5F"/>
+            <a:srgbClr val="7A3A1D"/>
           </a:solidFill>
           <a:ln/>
         </p:spPr>
@@ -16918,7 +16918,7 @@
             <a:r>
               <a:rPr lang="en-US" sz="3600" b="1" dirty="0">
                 <a:solidFill>
-                  <a:srgbClr val="1F3A5F"/>
+                  <a:srgbClr val="7A3A1D"/>
                 </a:solidFill>
                 <a:latin typeface="Arial" pitchFamily="34" charset="0"/>
                 <a:ea typeface="Arial" pitchFamily="34" charset="-122"/>
@@ -16932,7 +16932,7 @@
             <a:r>
               <a:rPr lang="en-US" sz="3600" b="1" dirty="0">
                 <a:solidFill>
-                  <a:srgbClr val="1F3A5F"/>
+                  <a:srgbClr val="7A3A1D"/>
                 </a:solidFill>
                 <a:latin typeface="Microsoft YaHei" pitchFamily="34" charset="0"/>
                 <a:ea typeface="Microsoft YaHei" pitchFamily="34" charset="-122"/>
@@ -16971,7 +16971,7 @@
             <a:r>
               <a:rPr lang="en-US" sz="1350" b="1" dirty="0">
                 <a:solidFill>
-                  <a:srgbClr val="23272E"/>
+                  <a:srgbClr val="2B2823"/>
                 </a:solidFill>
                 <a:latin typeface="Microsoft YaHei" pitchFamily="34" charset="0"/>
                 <a:ea typeface="Microsoft YaHei" pitchFamily="34" charset="-122"/>
@@ -17010,7 +17010,7 @@
             <a:r>
               <a:rPr lang="en-US" sz="950" dirty="0">
                 <a:solidFill>
-                  <a:srgbClr val="9AA1AB"/>
+                  <a:srgbClr val="A79E93"/>
                 </a:solidFill>
                 <a:latin typeface="Arial" pitchFamily="34" charset="0"/>
                 <a:ea typeface="Arial" pitchFamily="34" charset="-122"/>
@@ -17024,7 +17024,7 @@
             <a:r>
               <a:rPr lang="en-US" sz="950" dirty="0">
                 <a:solidFill>
-                  <a:srgbClr val="9AA1AB"/>
+                  <a:srgbClr val="A79E93"/>
                 </a:solidFill>
                 <a:latin typeface="Microsoft YaHei" pitchFamily="34" charset="0"/>
                 <a:ea typeface="Microsoft YaHei" pitchFamily="34" charset="-122"/>
@@ -17038,7 +17038,7 @@
             <a:r>
               <a:rPr lang="en-US" sz="950" dirty="0">
                 <a:solidFill>
-                  <a:srgbClr val="9AA1AB"/>
+                  <a:srgbClr val="A79E93"/>
                 </a:solidFill>
                 <a:latin typeface="Arial" pitchFamily="34" charset="0"/>
                 <a:ea typeface="Arial" pitchFamily="34" charset="-122"/>
@@ -17052,7 +17052,7 @@
             <a:r>
               <a:rPr lang="en-US" sz="950" dirty="0">
                 <a:solidFill>
-                  <a:srgbClr val="9AA1AB"/>
+                  <a:srgbClr val="A79E93"/>
                 </a:solidFill>
                 <a:latin typeface="Microsoft YaHei" pitchFamily="34" charset="0"/>
                 <a:ea typeface="Microsoft YaHei" pitchFamily="34" charset="-122"/>
@@ -17066,7 +17066,7 @@
             <a:r>
               <a:rPr lang="en-US" sz="950" dirty="0">
                 <a:solidFill>
-                  <a:srgbClr val="9AA1AB"/>
+                  <a:srgbClr val="A79E93"/>
                 </a:solidFill>
                 <a:latin typeface="Arial" pitchFamily="34" charset="0"/>
                 <a:ea typeface="Arial" pitchFamily="34" charset="-122"/>
@@ -17080,7 +17080,7 @@
             <a:r>
               <a:rPr lang="en-US" sz="950" dirty="0">
                 <a:solidFill>
-                  <a:srgbClr val="9AA1AB"/>
+                  <a:srgbClr val="A79E93"/>
                 </a:solidFill>
                 <a:latin typeface="Microsoft YaHei" pitchFamily="34" charset="0"/>
                 <a:ea typeface="Microsoft YaHei" pitchFamily="34" charset="-122"/>
@@ -17119,7 +17119,7 @@
             <a:r>
               <a:rPr lang="en-US" sz="950" dirty="0">
                 <a:solidFill>
-                  <a:srgbClr val="9AA1AB"/>
+                  <a:srgbClr val="A79E93"/>
                 </a:solidFill>
                 <a:latin typeface="Arial" pitchFamily="34" charset="0"/>
                 <a:ea typeface="Arial" pitchFamily="34" charset="-122"/>
@@ -17186,7 +17186,7 @@
             <a:r>
               <a:rPr lang="en-US" sz="1200" b="1" spc="240" kern="0" dirty="0">
                 <a:solidFill>
-                  <a:srgbClr val="2F6FAE"/>
+                  <a:srgbClr val="A8492A"/>
                 </a:solidFill>
                 <a:latin typeface="Microsoft YaHei" pitchFamily="34" charset="0"/>
                 <a:ea typeface="Microsoft YaHei" pitchFamily="34" charset="-122"/>
@@ -17228,7 +17228,7 @@
             <a:r>
               <a:rPr lang="en-US" sz="2500" b="1" dirty="0">
                 <a:solidFill>
-                  <a:srgbClr val="1F3A5F"/>
+                  <a:srgbClr val="7A3A1D"/>
                 </a:solidFill>
                 <a:latin typeface="Microsoft YaHei" pitchFamily="34" charset="0"/>
                 <a:ea typeface="Microsoft YaHei" pitchFamily="34" charset="-122"/>
@@ -17245,7 +17245,7 @@
             <a:r>
               <a:rPr lang="en-US" sz="2500" b="1" dirty="0">
                 <a:solidFill>
-                  <a:srgbClr val="1F3A5F"/>
+                  <a:srgbClr val="7A3A1D"/>
                 </a:solidFill>
                 <a:latin typeface="Arial" pitchFamily="34" charset="0"/>
                 <a:ea typeface="Arial" pitchFamily="34" charset="-122"/>
@@ -17262,7 +17262,7 @@
             <a:r>
               <a:rPr lang="en-US" sz="2500" b="1" dirty="0">
                 <a:solidFill>
-                  <a:srgbClr val="1F3A5F"/>
+                  <a:srgbClr val="7A3A1D"/>
                 </a:solidFill>
                 <a:latin typeface="Microsoft YaHei" pitchFamily="34" charset="0"/>
                 <a:ea typeface="Microsoft YaHei" pitchFamily="34" charset="-122"/>
@@ -17279,7 +17279,7 @@
             <a:r>
               <a:rPr lang="en-US" sz="2500" b="1" dirty="0">
                 <a:solidFill>
-                  <a:srgbClr val="1F3A5F"/>
+                  <a:srgbClr val="7A3A1D"/>
                 </a:solidFill>
                 <a:latin typeface="Arial" pitchFamily="34" charset="0"/>
                 <a:ea typeface="Arial" pitchFamily="34" charset="-122"/>
@@ -17296,7 +17296,7 @@
             <a:r>
               <a:rPr lang="en-US" sz="2500" b="1" dirty="0">
                 <a:solidFill>
-                  <a:srgbClr val="1F3A5F"/>
+                  <a:srgbClr val="7A3A1D"/>
                 </a:solidFill>
                 <a:latin typeface="Microsoft YaHei" pitchFamily="34" charset="0"/>
                 <a:ea typeface="Microsoft YaHei" pitchFamily="34" charset="-122"/>
@@ -17313,7 +17313,7 @@
             <a:r>
               <a:rPr lang="en-US" sz="2500" b="1" dirty="0">
                 <a:solidFill>
-                  <a:srgbClr val="1F3A5F"/>
+                  <a:srgbClr val="7A3A1D"/>
                 </a:solidFill>
                 <a:latin typeface="Arial" pitchFamily="34" charset="0"/>
                 <a:ea typeface="Arial" pitchFamily="34" charset="-122"/>
@@ -17330,7 +17330,7 @@
             <a:r>
               <a:rPr lang="en-US" sz="2500" b="1" dirty="0">
                 <a:solidFill>
-                  <a:srgbClr val="1F3A5F"/>
+                  <a:srgbClr val="7A3A1D"/>
                 </a:solidFill>
                 <a:latin typeface="Microsoft YaHei" pitchFamily="34" charset="0"/>
                 <a:ea typeface="Microsoft YaHei" pitchFamily="34" charset="-122"/>
@@ -17372,7 +17372,7 @@
             <a:r>
               <a:rPr lang="en-US" sz="1200" dirty="0">
                 <a:solidFill>
-                  <a:srgbClr val="6E7681"/>
+                  <a:srgbClr val="6B635A"/>
                 </a:solidFill>
                 <a:latin typeface="Arial" pitchFamily="34" charset="0"/>
                 <a:ea typeface="Arial" pitchFamily="34" charset="-122"/>
@@ -17389,7 +17389,7 @@
             <a:r>
               <a:rPr lang="en-US" sz="1200" dirty="0">
                 <a:solidFill>
-                  <a:srgbClr val="6E7681"/>
+                  <a:srgbClr val="6B635A"/>
                 </a:solidFill>
                 <a:latin typeface="Microsoft YaHei" pitchFamily="34" charset="0"/>
                 <a:ea typeface="Microsoft YaHei" pitchFamily="34" charset="-122"/>
@@ -17406,7 +17406,7 @@
             <a:r>
               <a:rPr lang="en-US" sz="1200" dirty="0">
                 <a:solidFill>
-                  <a:srgbClr val="6E7681"/>
+                  <a:srgbClr val="6B635A"/>
                 </a:solidFill>
                 <a:latin typeface="Arial" pitchFamily="34" charset="0"/>
                 <a:ea typeface="Arial" pitchFamily="34" charset="-122"/>
@@ -17423,7 +17423,7 @@
             <a:r>
               <a:rPr lang="en-US" sz="1200" dirty="0">
                 <a:solidFill>
-                  <a:srgbClr val="6E7681"/>
+                  <a:srgbClr val="6B635A"/>
                 </a:solidFill>
                 <a:latin typeface="Microsoft YaHei" pitchFamily="34" charset="0"/>
                 <a:ea typeface="Microsoft YaHei" pitchFamily="34" charset="-122"/>
@@ -17440,7 +17440,7 @@
             <a:r>
               <a:rPr lang="en-US" sz="1200" dirty="0">
                 <a:solidFill>
-                  <a:srgbClr val="6E7681"/>
+                  <a:srgbClr val="6B635A"/>
                 </a:solidFill>
                 <a:latin typeface="Arial" pitchFamily="34" charset="0"/>
                 <a:ea typeface="Arial" pitchFamily="34" charset="-122"/>
@@ -17503,7 +17503,7 @@
             <a:r>
               <a:rPr lang="en-US" sz="1150" dirty="0">
                 <a:solidFill>
-                  <a:srgbClr val="6E7681"/>
+                  <a:srgbClr val="6B635A"/>
                 </a:solidFill>
                 <a:latin typeface="Microsoft YaHei" pitchFamily="34" charset="0"/>
                 <a:ea typeface="Microsoft YaHei" pitchFamily="34" charset="-122"/>
@@ -17517,7 +17517,7 @@
             <a:r>
               <a:rPr lang="en-US" sz="1150" dirty="0">
                 <a:solidFill>
-                  <a:srgbClr val="6E7681"/>
+                  <a:srgbClr val="6B635A"/>
                 </a:solidFill>
                 <a:latin typeface="Arial" pitchFamily="34" charset="0"/>
                 <a:ea typeface="Arial" pitchFamily="34" charset="-122"/>
@@ -17531,7 +17531,7 @@
             <a:r>
               <a:rPr lang="en-US" sz="1150" dirty="0">
                 <a:solidFill>
-                  <a:srgbClr val="6E7681"/>
+                  <a:srgbClr val="6B635A"/>
                 </a:solidFill>
                 <a:latin typeface="Microsoft YaHei" pitchFamily="34" charset="0"/>
                 <a:ea typeface="Microsoft YaHei" pitchFamily="34" charset="-122"/>
@@ -17545,7 +17545,7 @@
             <a:r>
               <a:rPr lang="en-US" sz="1150" dirty="0">
                 <a:solidFill>
-                  <a:srgbClr val="6E7681"/>
+                  <a:srgbClr val="6B635A"/>
                 </a:solidFill>
                 <a:latin typeface="Arial" pitchFamily="34" charset="0"/>
                 <a:ea typeface="Arial" pitchFamily="34" charset="-122"/>
@@ -17559,7 +17559,7 @@
             <a:r>
               <a:rPr lang="en-US" sz="1150" dirty="0">
                 <a:solidFill>
-                  <a:srgbClr val="6E7681"/>
+                  <a:srgbClr val="6B635A"/>
                 </a:solidFill>
                 <a:latin typeface="Microsoft YaHei" pitchFamily="34" charset="0"/>
                 <a:ea typeface="Microsoft YaHei" pitchFamily="34" charset="-122"/>
@@ -17601,7 +17601,7 @@
             <a:r>
               <a:rPr lang="en-US" sz="1350" b="1" dirty="0">
                 <a:solidFill>
-                  <a:srgbClr val="23272E"/>
+                  <a:srgbClr val="2B2823"/>
                 </a:solidFill>
                 <a:latin typeface="Microsoft YaHei" pitchFamily="34" charset="0"/>
                 <a:ea typeface="Microsoft YaHei" pitchFamily="34" charset="-122"/>
@@ -17618,7 +17618,7 @@
             <a:r>
               <a:rPr lang="en-US" sz="1350" b="1" dirty="0">
                 <a:solidFill>
-                  <a:srgbClr val="23272E"/>
+                  <a:srgbClr val="2B2823"/>
                 </a:solidFill>
                 <a:latin typeface="Arial" pitchFamily="34" charset="0"/>
                 <a:ea typeface="Arial" pitchFamily="34" charset="-122"/>
@@ -17635,7 +17635,7 @@
             <a:r>
               <a:rPr lang="en-US" sz="1350" b="1" dirty="0">
                 <a:solidFill>
-                  <a:srgbClr val="23272E"/>
+                  <a:srgbClr val="2B2823"/>
                 </a:solidFill>
                 <a:latin typeface="Microsoft YaHei" pitchFamily="34" charset="0"/>
                 <a:ea typeface="Microsoft YaHei" pitchFamily="34" charset="-122"/>
@@ -17652,7 +17652,7 @@
             <a:r>
               <a:rPr lang="en-US" sz="1350" dirty="0">
                 <a:solidFill>
-                  <a:srgbClr val="23272E"/>
+                  <a:srgbClr val="2B2823"/>
                 </a:solidFill>
                 <a:latin typeface="Arial" pitchFamily="34" charset="0"/>
                 <a:ea typeface="Arial" pitchFamily="34" charset="-122"/>
@@ -17669,7 +17669,7 @@
             <a:r>
               <a:rPr lang="en-US" sz="1350" dirty="0">
                 <a:solidFill>
-                  <a:srgbClr val="23272E"/>
+                  <a:srgbClr val="2B2823"/>
                 </a:solidFill>
                 <a:latin typeface="Microsoft YaHei" pitchFamily="34" charset="0"/>
                 <a:ea typeface="Microsoft YaHei" pitchFamily="34" charset="-122"/>
@@ -17708,7 +17708,7 @@
             <a:r>
               <a:rPr lang="en-US" sz="950" dirty="0">
                 <a:solidFill>
-                  <a:srgbClr val="9AA1AB"/>
+                  <a:srgbClr val="A79E93"/>
                 </a:solidFill>
                 <a:latin typeface="Arial" pitchFamily="34" charset="0"/>
                 <a:ea typeface="Arial" pitchFamily="34" charset="-122"/>
@@ -17722,7 +17722,7 @@
             <a:r>
               <a:rPr lang="en-US" sz="950" dirty="0">
                 <a:solidFill>
-                  <a:srgbClr val="9AA1AB"/>
+                  <a:srgbClr val="A79E93"/>
                 </a:solidFill>
                 <a:latin typeface="Microsoft YaHei" pitchFamily="34" charset="0"/>
                 <a:ea typeface="Microsoft YaHei" pitchFamily="34" charset="-122"/>
@@ -17736,7 +17736,7 @@
             <a:r>
               <a:rPr lang="en-US" sz="950" dirty="0">
                 <a:solidFill>
-                  <a:srgbClr val="9AA1AB"/>
+                  <a:srgbClr val="A79E93"/>
                 </a:solidFill>
                 <a:latin typeface="Arial" pitchFamily="34" charset="0"/>
                 <a:ea typeface="Arial" pitchFamily="34" charset="-122"/>
@@ -17750,7 +17750,7 @@
             <a:r>
               <a:rPr lang="en-US" sz="950" dirty="0">
                 <a:solidFill>
-                  <a:srgbClr val="9AA1AB"/>
+                  <a:srgbClr val="A79E93"/>
                 </a:solidFill>
                 <a:latin typeface="Microsoft YaHei" pitchFamily="34" charset="0"/>
                 <a:ea typeface="Microsoft YaHei" pitchFamily="34" charset="-122"/>
@@ -17764,7 +17764,7 @@
             <a:r>
               <a:rPr lang="en-US" sz="950" dirty="0">
                 <a:solidFill>
-                  <a:srgbClr val="9AA1AB"/>
+                  <a:srgbClr val="A79E93"/>
                 </a:solidFill>
                 <a:latin typeface="Arial" pitchFamily="34" charset="0"/>
                 <a:ea typeface="Arial" pitchFamily="34" charset="-122"/>
@@ -17778,7 +17778,7 @@
             <a:r>
               <a:rPr lang="en-US" sz="950" dirty="0">
                 <a:solidFill>
-                  <a:srgbClr val="9AA1AB"/>
+                  <a:srgbClr val="A79E93"/>
                 </a:solidFill>
                 <a:latin typeface="Microsoft YaHei" pitchFamily="34" charset="0"/>
                 <a:ea typeface="Microsoft YaHei" pitchFamily="34" charset="-122"/>
@@ -17817,7 +17817,7 @@
             <a:r>
               <a:rPr lang="en-US" sz="950" dirty="0">
                 <a:solidFill>
-                  <a:srgbClr val="9AA1AB"/>
+                  <a:srgbClr val="A79E93"/>
                 </a:solidFill>
                 <a:latin typeface="Arial" pitchFamily="34" charset="0"/>
                 <a:ea typeface="Arial" pitchFamily="34" charset="-122"/>
@@ -17884,7 +17884,7 @@
             <a:r>
               <a:rPr lang="en-US" sz="9600" b="1" dirty="0">
                 <a:solidFill>
-                  <a:srgbClr val="E7EEF6"/>
+                  <a:srgbClr val="F3E3D8"/>
                 </a:solidFill>
                 <a:latin typeface="Arial" pitchFamily="34" charset="0"/>
                 <a:ea typeface="Arial" pitchFamily="34" charset="-122"/>
@@ -17923,7 +17923,7 @@
             <a:r>
               <a:rPr lang="en-US" sz="1300" b="1" spc="300" kern="0" dirty="0">
                 <a:solidFill>
-                  <a:srgbClr val="2F6FAE"/>
+                  <a:srgbClr val="A8492A"/>
                 </a:solidFill>
                 <a:latin typeface="Arial" pitchFamily="34" charset="0"/>
                 <a:ea typeface="Arial" pitchFamily="34" charset="-122"/>
@@ -17950,7 +17950,7 @@
             <a:avLst/>
           </a:prstGeom>
           <a:solidFill>
-            <a:srgbClr val="2F6FAE"/>
+            <a:srgbClr val="A8492A"/>
           </a:solidFill>
           <a:ln/>
         </p:spPr>
@@ -17982,7 +17982,7 @@
             <a:r>
               <a:rPr lang="en-US" sz="3000" b="1" dirty="0">
                 <a:solidFill>
-                  <a:srgbClr val="1F3A5F"/>
+                  <a:srgbClr val="7A3A1D"/>
                 </a:solidFill>
                 <a:latin typeface="Microsoft YaHei" pitchFamily="34" charset="0"/>
                 <a:ea typeface="Microsoft YaHei" pitchFamily="34" charset="-122"/>
@@ -18024,7 +18024,7 @@
             <a:r>
               <a:rPr lang="en-US" sz="1450" dirty="0">
                 <a:solidFill>
-                  <a:srgbClr val="6E7681"/>
+                  <a:srgbClr val="6B635A"/>
                 </a:solidFill>
                 <a:latin typeface="Microsoft YaHei" pitchFamily="34" charset="0"/>
                 <a:ea typeface="Microsoft YaHei" pitchFamily="34" charset="-122"/>
@@ -18051,7 +18051,7 @@
             <a:avLst/>
           </a:prstGeom>
           <a:solidFill>
-            <a:srgbClr val="D9DEE6"/>
+            <a:srgbClr val="E4E0D3"/>
           </a:solidFill>
           <a:ln/>
         </p:spPr>
@@ -18083,7 +18083,7 @@
             <a:r>
               <a:rPr lang="en-US" sz="1400" b="1" dirty="0">
                 <a:solidFill>
-                  <a:srgbClr val="1F3A5F"/>
+                  <a:srgbClr val="7A3A1D"/>
                 </a:solidFill>
                 <a:latin typeface="Microsoft YaHei" pitchFamily="34" charset="0"/>
                 <a:ea typeface="Microsoft YaHei" pitchFamily="34" charset="-122"/>
@@ -18125,7 +18125,7 @@
             <a:r>
               <a:rPr lang="en-US" sz="1250" dirty="0">
                 <a:solidFill>
-                  <a:srgbClr val="6E7681"/>
+                  <a:srgbClr val="6B635A"/>
                 </a:solidFill>
                 <a:latin typeface="Microsoft YaHei" pitchFamily="34" charset="0"/>
                 <a:ea typeface="Microsoft YaHei" pitchFamily="34" charset="-122"/>
@@ -18142,7 +18142,7 @@
             <a:r>
               <a:rPr lang="en-US" sz="1250" dirty="0">
                 <a:solidFill>
-                  <a:srgbClr val="6E7681"/>
+                  <a:srgbClr val="6B635A"/>
                 </a:solidFill>
                 <a:latin typeface="Arial" pitchFamily="34" charset="0"/>
                 <a:ea typeface="Arial" pitchFamily="34" charset="-122"/>
@@ -18159,7 +18159,7 @@
             <a:r>
               <a:rPr lang="en-US" sz="1250" dirty="0">
                 <a:solidFill>
-                  <a:srgbClr val="6E7681"/>
+                  <a:srgbClr val="6B635A"/>
                 </a:solidFill>
                 <a:latin typeface="Microsoft YaHei" pitchFamily="34" charset="0"/>
                 <a:ea typeface="Microsoft YaHei" pitchFamily="34" charset="-122"/>
@@ -18186,7 +18186,7 @@
             <a:avLst/>
           </a:prstGeom>
           <a:solidFill>
-            <a:srgbClr val="D9DEE6"/>
+            <a:srgbClr val="E4E0D3"/>
           </a:solidFill>
           <a:ln/>
         </p:spPr>
@@ -18218,7 +18218,7 @@
             <a:r>
               <a:rPr lang="en-US" sz="1400" b="1" dirty="0">
                 <a:solidFill>
-                  <a:srgbClr val="1F3A5F"/>
+                  <a:srgbClr val="7A3A1D"/>
                 </a:solidFill>
                 <a:latin typeface="Microsoft YaHei" pitchFamily="34" charset="0"/>
                 <a:ea typeface="Microsoft YaHei" pitchFamily="34" charset="-122"/>
@@ -18260,7 +18260,7 @@
             <a:r>
               <a:rPr lang="en-US" sz="1250" dirty="0">
                 <a:solidFill>
-                  <a:srgbClr val="6E7681"/>
+                  <a:srgbClr val="6B635A"/>
                 </a:solidFill>
                 <a:latin typeface="Microsoft YaHei" pitchFamily="34" charset="0"/>
                 <a:ea typeface="Microsoft YaHei" pitchFamily="34" charset="-122"/>
@@ -18287,7 +18287,7 @@
             <a:avLst/>
           </a:prstGeom>
           <a:solidFill>
-            <a:srgbClr val="D9DEE6"/>
+            <a:srgbClr val="E4E0D3"/>
           </a:solidFill>
           <a:ln/>
         </p:spPr>
@@ -18319,7 +18319,7 @@
             <a:r>
               <a:rPr lang="en-US" sz="1400" b="1" dirty="0">
                 <a:solidFill>
-                  <a:srgbClr val="1F3A5F"/>
+                  <a:srgbClr val="7A3A1D"/>
                 </a:solidFill>
                 <a:latin typeface="Microsoft YaHei" pitchFamily="34" charset="0"/>
                 <a:ea typeface="Microsoft YaHei" pitchFamily="34" charset="-122"/>
@@ -18361,7 +18361,7 @@
             <a:r>
               <a:rPr lang="en-US" sz="1250" dirty="0">
                 <a:solidFill>
-                  <a:srgbClr val="6E7681"/>
+                  <a:srgbClr val="6B635A"/>
                 </a:solidFill>
                 <a:latin typeface="Microsoft YaHei" pitchFamily="34" charset="0"/>
                 <a:ea typeface="Microsoft YaHei" pitchFamily="34" charset="-122"/>
@@ -18400,7 +18400,7 @@
             <a:r>
               <a:rPr lang="en-US" sz="1150" dirty="0">
                 <a:solidFill>
-                  <a:srgbClr val="9AA1AB"/>
+                  <a:srgbClr val="A79E93"/>
                 </a:solidFill>
                 <a:latin typeface="Arial" pitchFamily="34" charset="0"/>
                 <a:ea typeface="Arial" pitchFamily="34" charset="-122"/>
@@ -18414,7 +18414,7 @@
             <a:r>
               <a:rPr lang="en-US" sz="1150" dirty="0">
                 <a:solidFill>
-                  <a:srgbClr val="9AA1AB"/>
+                  <a:srgbClr val="A79E93"/>
                 </a:solidFill>
                 <a:latin typeface="Microsoft YaHei" pitchFamily="34" charset="0"/>
                 <a:ea typeface="Microsoft YaHei" pitchFamily="34" charset="-122"/>
@@ -18453,7 +18453,7 @@
             <a:r>
               <a:rPr lang="en-US" sz="1150" b="1" dirty="0">
                 <a:solidFill>
-                  <a:srgbClr val="2F6FAE"/>
+                  <a:srgbClr val="A8492A"/>
                 </a:solidFill>
                 <a:latin typeface="Arial" pitchFamily="34" charset="0"/>
                 <a:ea typeface="Arial" pitchFamily="34" charset="-122"/>
@@ -18467,7 +18467,7 @@
             <a:r>
               <a:rPr lang="en-US" sz="1150" b="1" dirty="0">
                 <a:solidFill>
-                  <a:srgbClr val="2F6FAE"/>
+                  <a:srgbClr val="A8492A"/>
                 </a:solidFill>
                 <a:latin typeface="Microsoft YaHei" pitchFamily="34" charset="0"/>
                 <a:ea typeface="Microsoft YaHei" pitchFamily="34" charset="-122"/>
@@ -18506,7 +18506,7 @@
             <a:r>
               <a:rPr lang="en-US" sz="1150" dirty="0">
                 <a:solidFill>
-                  <a:srgbClr val="9AA1AB"/>
+                  <a:srgbClr val="A79E93"/>
                 </a:solidFill>
                 <a:latin typeface="Arial" pitchFamily="34" charset="0"/>
                 <a:ea typeface="Arial" pitchFamily="34" charset="-122"/>
@@ -18520,7 +18520,7 @@
             <a:r>
               <a:rPr lang="en-US" sz="1150" dirty="0">
                 <a:solidFill>
-                  <a:srgbClr val="9AA1AB"/>
+                  <a:srgbClr val="A79E93"/>
                 </a:solidFill>
                 <a:latin typeface="Microsoft YaHei" pitchFamily="34" charset="0"/>
                 <a:ea typeface="Microsoft YaHei" pitchFamily="34" charset="-122"/>
@@ -18559,7 +18559,7 @@
             <a:r>
               <a:rPr lang="en-US" sz="1150" dirty="0">
                 <a:solidFill>
-                  <a:srgbClr val="9AA1AB"/>
+                  <a:srgbClr val="A79E93"/>
                 </a:solidFill>
                 <a:latin typeface="Arial" pitchFamily="34" charset="0"/>
                 <a:ea typeface="Arial" pitchFamily="34" charset="-122"/>
@@ -18573,7 +18573,7 @@
             <a:r>
               <a:rPr lang="en-US" sz="1150" dirty="0">
                 <a:solidFill>
-                  <a:srgbClr val="9AA1AB"/>
+                  <a:srgbClr val="A79E93"/>
                 </a:solidFill>
                 <a:latin typeface="Microsoft YaHei" pitchFamily="34" charset="0"/>
                 <a:ea typeface="Microsoft YaHei" pitchFamily="34" charset="-122"/>
@@ -18612,7 +18612,7 @@
             <a:r>
               <a:rPr lang="en-US" sz="950" dirty="0">
                 <a:solidFill>
-                  <a:srgbClr val="9AA1AB"/>
+                  <a:srgbClr val="A79E93"/>
                 </a:solidFill>
                 <a:latin typeface="Arial" pitchFamily="34" charset="0"/>
                 <a:ea typeface="Arial" pitchFamily="34" charset="-122"/>
@@ -18626,7 +18626,7 @@
             <a:r>
               <a:rPr lang="en-US" sz="950" dirty="0">
                 <a:solidFill>
-                  <a:srgbClr val="9AA1AB"/>
+                  <a:srgbClr val="A79E93"/>
                 </a:solidFill>
                 <a:latin typeface="Microsoft YaHei" pitchFamily="34" charset="0"/>
                 <a:ea typeface="Microsoft YaHei" pitchFamily="34" charset="-122"/>
@@ -18640,7 +18640,7 @@
             <a:r>
               <a:rPr lang="en-US" sz="950" dirty="0">
                 <a:solidFill>
-                  <a:srgbClr val="9AA1AB"/>
+                  <a:srgbClr val="A79E93"/>
                 </a:solidFill>
                 <a:latin typeface="Arial" pitchFamily="34" charset="0"/>
                 <a:ea typeface="Arial" pitchFamily="34" charset="-122"/>
@@ -18654,7 +18654,7 @@
             <a:r>
               <a:rPr lang="en-US" sz="950" dirty="0">
                 <a:solidFill>
-                  <a:srgbClr val="9AA1AB"/>
+                  <a:srgbClr val="A79E93"/>
                 </a:solidFill>
                 <a:latin typeface="Microsoft YaHei" pitchFamily="34" charset="0"/>
                 <a:ea typeface="Microsoft YaHei" pitchFamily="34" charset="-122"/>
@@ -18668,7 +18668,7 @@
             <a:r>
               <a:rPr lang="en-US" sz="950" dirty="0">
                 <a:solidFill>
-                  <a:srgbClr val="9AA1AB"/>
+                  <a:srgbClr val="A79E93"/>
                 </a:solidFill>
                 <a:latin typeface="Arial" pitchFamily="34" charset="0"/>
                 <a:ea typeface="Arial" pitchFamily="34" charset="-122"/>
@@ -18682,7 +18682,7 @@
             <a:r>
               <a:rPr lang="en-US" sz="950" dirty="0">
                 <a:solidFill>
-                  <a:srgbClr val="9AA1AB"/>
+                  <a:srgbClr val="A79E93"/>
                 </a:solidFill>
                 <a:latin typeface="Microsoft YaHei" pitchFamily="34" charset="0"/>
                 <a:ea typeface="Microsoft YaHei" pitchFamily="34" charset="-122"/>
@@ -18721,7 +18721,7 @@
             <a:r>
               <a:rPr lang="en-US" sz="950" dirty="0">
                 <a:solidFill>
-                  <a:srgbClr val="9AA1AB"/>
+                  <a:srgbClr val="A79E93"/>
                 </a:solidFill>
                 <a:latin typeface="Arial" pitchFamily="34" charset="0"/>
                 <a:ea typeface="Arial" pitchFamily="34" charset="-122"/>
@@ -18788,7 +18788,7 @@
             <a:r>
               <a:rPr lang="en-US" sz="1200" b="1" spc="240" kern="0" dirty="0">
                 <a:solidFill>
-                  <a:srgbClr val="2F6FAE"/>
+                  <a:srgbClr val="A8492A"/>
                 </a:solidFill>
                 <a:latin typeface="Microsoft YaHei" pitchFamily="34" charset="0"/>
                 <a:ea typeface="Microsoft YaHei" pitchFamily="34" charset="-122"/>
@@ -18830,7 +18830,7 @@
             <a:r>
               <a:rPr lang="en-US" sz="2500" b="1" dirty="0">
                 <a:solidFill>
-                  <a:srgbClr val="1F3A5F"/>
+                  <a:srgbClr val="7A3A1D"/>
                 </a:solidFill>
                 <a:latin typeface="Microsoft YaHei" pitchFamily="34" charset="0"/>
                 <a:ea typeface="Microsoft YaHei" pitchFamily="34" charset="-122"/>
@@ -18893,7 +18893,7 @@
             <a:r>
               <a:rPr lang="en-US" sz="1200" dirty="0">
                 <a:solidFill>
-                  <a:srgbClr val="6E7681"/>
+                  <a:srgbClr val="6B635A"/>
                 </a:solidFill>
                 <a:latin typeface="Arial" pitchFamily="34" charset="0"/>
                 <a:ea typeface="Arial" pitchFamily="34" charset="-122"/>
@@ -18935,7 +18935,7 @@
             <a:r>
               <a:rPr lang="en-US" sz="1200" b="1" dirty="0">
                 <a:solidFill>
-                  <a:srgbClr val="6E7681"/>
+                  <a:srgbClr val="6B635A"/>
                 </a:solidFill>
                 <a:latin typeface="Microsoft YaHei" pitchFamily="34" charset="0"/>
                 <a:ea typeface="Microsoft YaHei" pitchFamily="34" charset="-122"/>
@@ -18952,7 +18952,7 @@
             <a:r>
               <a:rPr lang="en-US" sz="1200" b="1" dirty="0">
                 <a:solidFill>
-                  <a:srgbClr val="1F3A5F"/>
+                  <a:srgbClr val="7A3A1D"/>
                 </a:solidFill>
                 <a:latin typeface="Arial" pitchFamily="34" charset="0"/>
                 <a:ea typeface="Arial" pitchFamily="34" charset="-122"/>
@@ -18969,7 +18969,7 @@
             <a:r>
               <a:rPr lang="en-US" sz="1200" dirty="0">
                 <a:solidFill>
-                  <a:srgbClr val="6E7681"/>
+                  <a:srgbClr val="6B635A"/>
                 </a:solidFill>
                 <a:latin typeface="Microsoft YaHei" pitchFamily="34" charset="0"/>
                 <a:ea typeface="Microsoft YaHei" pitchFamily="34" charset="-122"/>
@@ -18986,7 +18986,7 @@
             <a:r>
               <a:rPr lang="en-US" sz="1200" b="1" dirty="0">
                 <a:solidFill>
-                  <a:srgbClr val="1F3A5F"/>
+                  <a:srgbClr val="7A3A1D"/>
                 </a:solidFill>
                 <a:latin typeface="Arial" pitchFamily="34" charset="0"/>
                 <a:ea typeface="Arial" pitchFamily="34" charset="-122"/>
@@ -19003,7 +19003,7 @@
             <a:r>
               <a:rPr lang="en-US" sz="1200" dirty="0">
                 <a:solidFill>
-                  <a:srgbClr val="6E7681"/>
+                  <a:srgbClr val="6B635A"/>
                 </a:solidFill>
                 <a:latin typeface="Microsoft YaHei" pitchFamily="34" charset="0"/>
                 <a:ea typeface="Microsoft YaHei" pitchFamily="34" charset="-122"/>
@@ -19020,7 +19020,7 @@
             <a:r>
               <a:rPr lang="en-US" sz="1200" dirty="0">
                 <a:solidFill>
-                  <a:srgbClr val="6E7681"/>
+                  <a:srgbClr val="6B635A"/>
                 </a:solidFill>
                 <a:latin typeface="Arial" pitchFamily="34" charset="0"/>
                 <a:ea typeface="Arial" pitchFamily="34" charset="-122"/>
@@ -19037,7 +19037,7 @@
             <a:r>
               <a:rPr lang="en-US" sz="1200" dirty="0">
                 <a:solidFill>
-                  <a:srgbClr val="6E7681"/>
+                  <a:srgbClr val="6B635A"/>
                 </a:solidFill>
                 <a:latin typeface="Microsoft YaHei" pitchFamily="34" charset="0"/>
                 <a:ea typeface="Microsoft YaHei" pitchFamily="34" charset="-122"/>
@@ -19100,7 +19100,7 @@
             <a:r>
               <a:rPr lang="en-US" sz="1200" dirty="0">
                 <a:solidFill>
-                  <a:srgbClr val="6E7681"/>
+                  <a:srgbClr val="6B635A"/>
                 </a:solidFill>
                 <a:latin typeface="Arial" pitchFamily="34" charset="0"/>
                 <a:ea typeface="Arial" pitchFamily="34" charset="-122"/>
@@ -19142,7 +19142,7 @@
             <a:r>
               <a:rPr lang="en-US" sz="1200" b="1" dirty="0">
                 <a:solidFill>
-                  <a:srgbClr val="6E7681"/>
+                  <a:srgbClr val="6B635A"/>
                 </a:solidFill>
                 <a:latin typeface="Microsoft YaHei" pitchFamily="34" charset="0"/>
                 <a:ea typeface="Microsoft YaHei" pitchFamily="34" charset="-122"/>
@@ -19159,7 +19159,7 @@
             <a:r>
               <a:rPr lang="en-US" sz="1200" b="1" dirty="0">
                 <a:solidFill>
-                  <a:srgbClr val="1F3A5F"/>
+                  <a:srgbClr val="7A3A1D"/>
                 </a:solidFill>
                 <a:latin typeface="Arial" pitchFamily="34" charset="0"/>
                 <a:ea typeface="Arial" pitchFamily="34" charset="-122"/>
@@ -19176,7 +19176,7 @@
             <a:r>
               <a:rPr lang="en-US" sz="1200" dirty="0">
                 <a:solidFill>
-                  <a:srgbClr val="6E7681"/>
+                  <a:srgbClr val="6B635A"/>
                 </a:solidFill>
                 <a:latin typeface="Microsoft YaHei" pitchFamily="34" charset="0"/>
                 <a:ea typeface="Microsoft YaHei" pitchFamily="34" charset="-122"/>
@@ -19193,7 +19193,7 @@
             <a:r>
               <a:rPr lang="en-US" sz="1200" b="1" dirty="0">
                 <a:solidFill>
-                  <a:srgbClr val="1F3A5F"/>
+                  <a:srgbClr val="7A3A1D"/>
                 </a:solidFill>
                 <a:latin typeface="Arial" pitchFamily="34" charset="0"/>
                 <a:ea typeface="Arial" pitchFamily="34" charset="-122"/>
@@ -19210,7 +19210,7 @@
             <a:r>
               <a:rPr lang="en-US" sz="1200" dirty="0">
                 <a:solidFill>
-                  <a:srgbClr val="6E7681"/>
+                  <a:srgbClr val="6B635A"/>
                 </a:solidFill>
                 <a:latin typeface="Microsoft YaHei" pitchFamily="34" charset="0"/>
                 <a:ea typeface="Microsoft YaHei" pitchFamily="34" charset="-122"/>
@@ -19273,7 +19273,7 @@
             <a:r>
               <a:rPr lang="en-US" sz="1200" dirty="0">
                 <a:solidFill>
-                  <a:srgbClr val="6E7681"/>
+                  <a:srgbClr val="6B635A"/>
                 </a:solidFill>
                 <a:latin typeface="Arial" pitchFamily="34" charset="0"/>
                 <a:ea typeface="Arial" pitchFamily="34" charset="-122"/>
@@ -19315,7 +19315,7 @@
             <a:r>
               <a:rPr lang="en-US" sz="1200" b="1" dirty="0">
                 <a:solidFill>
-                  <a:srgbClr val="6E7681"/>
+                  <a:srgbClr val="6B635A"/>
                 </a:solidFill>
                 <a:latin typeface="Microsoft YaHei" pitchFamily="34" charset="0"/>
                 <a:ea typeface="Microsoft YaHei" pitchFamily="34" charset="-122"/>
@@ -19332,7 +19332,7 @@
             <a:r>
               <a:rPr lang="en-US" sz="1200" b="1" dirty="0">
                 <a:solidFill>
-                  <a:srgbClr val="1F3A5F"/>
+                  <a:srgbClr val="7A3A1D"/>
                 </a:solidFill>
                 <a:latin typeface="Arial" pitchFamily="34" charset="0"/>
                 <a:ea typeface="Arial" pitchFamily="34" charset="-122"/>
@@ -19349,7 +19349,7 @@
             <a:r>
               <a:rPr lang="en-US" sz="1200" dirty="0">
                 <a:solidFill>
-                  <a:srgbClr val="6E7681"/>
+                  <a:srgbClr val="6B635A"/>
                 </a:solidFill>
                 <a:latin typeface="Microsoft YaHei" pitchFamily="34" charset="0"/>
                 <a:ea typeface="Microsoft YaHei" pitchFamily="34" charset="-122"/>
@@ -19391,7 +19391,7 @@
             <a:r>
               <a:rPr lang="en-US" sz="1400" b="1" dirty="0">
                 <a:solidFill>
-                  <a:srgbClr val="23272E"/>
+                  <a:srgbClr val="2B2823"/>
                 </a:solidFill>
                 <a:latin typeface="Microsoft YaHei" pitchFamily="34" charset="0"/>
                 <a:ea typeface="Microsoft YaHei" pitchFamily="34" charset="-122"/>
@@ -19408,7 +19408,7 @@
             <a:r>
               <a:rPr lang="en-US" sz="1400" b="1" dirty="0">
                 <a:solidFill>
-                  <a:srgbClr val="23272E"/>
+                  <a:srgbClr val="2B2823"/>
                 </a:solidFill>
                 <a:latin typeface="Arial" pitchFamily="34" charset="0"/>
                 <a:ea typeface="Arial" pitchFamily="34" charset="-122"/>
@@ -19425,7 +19425,7 @@
             <a:r>
               <a:rPr lang="en-US" sz="1400" b="1" dirty="0">
                 <a:solidFill>
-                  <a:srgbClr val="23272E"/>
+                  <a:srgbClr val="2B2823"/>
                 </a:solidFill>
                 <a:latin typeface="Microsoft YaHei" pitchFamily="34" charset="0"/>
                 <a:ea typeface="Microsoft YaHei" pitchFamily="34" charset="-122"/>
@@ -19442,7 +19442,7 @@
             <a:r>
               <a:rPr lang="en-US" sz="1400" dirty="0">
                 <a:solidFill>
-                  <a:srgbClr val="23272E"/>
+                  <a:srgbClr val="2B2823"/>
                 </a:solidFill>
                 <a:latin typeface="Arial" pitchFamily="34" charset="0"/>
                 <a:ea typeface="Arial" pitchFamily="34" charset="-122"/>
@@ -19459,7 +19459,7 @@
             <a:r>
               <a:rPr lang="en-US" sz="1400" dirty="0">
                 <a:solidFill>
-                  <a:srgbClr val="23272E"/>
+                  <a:srgbClr val="2B2823"/>
                 </a:solidFill>
                 <a:latin typeface="Microsoft YaHei" pitchFamily="34" charset="0"/>
                 <a:ea typeface="Microsoft YaHei" pitchFamily="34" charset="-122"/>
@@ -19476,7 +19476,7 @@
             <a:r>
               <a:rPr lang="en-US" sz="1400" dirty="0">
                 <a:solidFill>
-                  <a:srgbClr val="23272E"/>
+                  <a:srgbClr val="2B2823"/>
                 </a:solidFill>
                 <a:latin typeface="Arial" pitchFamily="34" charset="0"/>
                 <a:ea typeface="Arial" pitchFamily="34" charset="-122"/>
@@ -19493,7 +19493,7 @@
             <a:r>
               <a:rPr lang="en-US" sz="1400" dirty="0">
                 <a:solidFill>
-                  <a:srgbClr val="23272E"/>
+                  <a:srgbClr val="2B2823"/>
                 </a:solidFill>
                 <a:latin typeface="Microsoft YaHei" pitchFamily="34" charset="0"/>
                 <a:ea typeface="Microsoft YaHei" pitchFamily="34" charset="-122"/>
@@ -19520,7 +19520,7 @@
             <a:avLst/>
           </a:prstGeom>
           <a:solidFill>
-            <a:srgbClr val="D9DEE6"/>
+            <a:srgbClr val="E4E0D3"/>
           </a:solidFill>
           <a:ln/>
         </p:spPr>
@@ -19555,7 +19555,7 @@
             <a:r>
               <a:rPr lang="en-US" sz="1400" b="1" dirty="0">
                 <a:solidFill>
-                  <a:srgbClr val="23272E"/>
+                  <a:srgbClr val="2B2823"/>
                 </a:solidFill>
                 <a:latin typeface="Microsoft YaHei" pitchFamily="34" charset="0"/>
                 <a:ea typeface="Microsoft YaHei" pitchFamily="34" charset="-122"/>
@@ -19572,7 +19572,7 @@
             <a:r>
               <a:rPr lang="en-US" sz="1400" b="1" dirty="0">
                 <a:solidFill>
-                  <a:srgbClr val="23272E"/>
+                  <a:srgbClr val="2B2823"/>
                 </a:solidFill>
                 <a:latin typeface="Arial" pitchFamily="34" charset="0"/>
                 <a:ea typeface="Arial" pitchFamily="34" charset="-122"/>
@@ -19589,7 +19589,7 @@
             <a:r>
               <a:rPr lang="en-US" sz="1400" b="1" dirty="0">
                 <a:solidFill>
-                  <a:srgbClr val="23272E"/>
+                  <a:srgbClr val="2B2823"/>
                 </a:solidFill>
                 <a:latin typeface="Microsoft YaHei" pitchFamily="34" charset="0"/>
                 <a:ea typeface="Microsoft YaHei" pitchFamily="34" charset="-122"/>
@@ -19606,7 +19606,7 @@
             <a:r>
               <a:rPr lang="en-US" sz="1400" dirty="0">
                 <a:solidFill>
-                  <a:srgbClr val="23272E"/>
+                  <a:srgbClr val="2B2823"/>
                 </a:solidFill>
                 <a:latin typeface="Arial" pitchFamily="34" charset="0"/>
                 <a:ea typeface="Arial" pitchFamily="34" charset="-122"/>
@@ -19623,7 +19623,7 @@
             <a:r>
               <a:rPr lang="en-US" sz="1400" dirty="0">
                 <a:solidFill>
-                  <a:srgbClr val="23272E"/>
+                  <a:srgbClr val="2B2823"/>
                 </a:solidFill>
                 <a:latin typeface="Microsoft YaHei" pitchFamily="34" charset="0"/>
                 <a:ea typeface="Microsoft YaHei" pitchFamily="34" charset="-122"/>
@@ -19650,7 +19650,7 @@
             <a:avLst/>
           </a:prstGeom>
           <a:solidFill>
-            <a:srgbClr val="D9DEE6"/>
+            <a:srgbClr val="E4E0D3"/>
           </a:solidFill>
           <a:ln/>
         </p:spPr>
@@ -19685,7 +19685,7 @@
             <a:r>
               <a:rPr lang="en-US" sz="1400" b="1" dirty="0">
                 <a:solidFill>
-                  <a:srgbClr val="23272E"/>
+                  <a:srgbClr val="2B2823"/>
                 </a:solidFill>
                 <a:latin typeface="Microsoft YaHei" pitchFamily="34" charset="0"/>
                 <a:ea typeface="Microsoft YaHei" pitchFamily="34" charset="-122"/>
@@ -19702,7 +19702,7 @@
             <a:r>
               <a:rPr lang="en-US" sz="1400" b="1" dirty="0">
                 <a:solidFill>
-                  <a:srgbClr val="23272E"/>
+                  <a:srgbClr val="2B2823"/>
                 </a:solidFill>
                 <a:latin typeface="Arial" pitchFamily="34" charset="0"/>
                 <a:ea typeface="Arial" pitchFamily="34" charset="-122"/>
@@ -19719,7 +19719,7 @@
             <a:r>
               <a:rPr lang="en-US" sz="1400" b="1" dirty="0">
                 <a:solidFill>
-                  <a:srgbClr val="23272E"/>
+                  <a:srgbClr val="2B2823"/>
                 </a:solidFill>
                 <a:latin typeface="Microsoft YaHei" pitchFamily="34" charset="0"/>
                 <a:ea typeface="Microsoft YaHei" pitchFamily="34" charset="-122"/>
@@ -19736,7 +19736,7 @@
             <a:r>
               <a:rPr lang="en-US" sz="1400" dirty="0">
                 <a:solidFill>
-                  <a:srgbClr val="23272E"/>
+                  <a:srgbClr val="2B2823"/>
                 </a:solidFill>
                 <a:latin typeface="Arial" pitchFamily="34" charset="0"/>
                 <a:ea typeface="Arial" pitchFamily="34" charset="-122"/>
@@ -19753,7 +19753,7 @@
             <a:r>
               <a:rPr lang="en-US" sz="1400" dirty="0">
                 <a:solidFill>
-                  <a:srgbClr val="23272E"/>
+                  <a:srgbClr val="2B2823"/>
                 </a:solidFill>
                 <a:latin typeface="Microsoft YaHei" pitchFamily="34" charset="0"/>
                 <a:ea typeface="Microsoft YaHei" pitchFamily="34" charset="-122"/>
@@ -19792,7 +19792,7 @@
             <a:r>
               <a:rPr lang="en-US" sz="950" dirty="0">
                 <a:solidFill>
-                  <a:srgbClr val="9AA1AB"/>
+                  <a:srgbClr val="A79E93"/>
                 </a:solidFill>
                 <a:latin typeface="Arial" pitchFamily="34" charset="0"/>
                 <a:ea typeface="Arial" pitchFamily="34" charset="-122"/>
@@ -19806,7 +19806,7 @@
             <a:r>
               <a:rPr lang="en-US" sz="950" dirty="0">
                 <a:solidFill>
-                  <a:srgbClr val="9AA1AB"/>
+                  <a:srgbClr val="A79E93"/>
                 </a:solidFill>
                 <a:latin typeface="Microsoft YaHei" pitchFamily="34" charset="0"/>
                 <a:ea typeface="Microsoft YaHei" pitchFamily="34" charset="-122"/>
@@ -19820,7 +19820,7 @@
             <a:r>
               <a:rPr lang="en-US" sz="950" dirty="0">
                 <a:solidFill>
-                  <a:srgbClr val="9AA1AB"/>
+                  <a:srgbClr val="A79E93"/>
                 </a:solidFill>
                 <a:latin typeface="Arial" pitchFamily="34" charset="0"/>
                 <a:ea typeface="Arial" pitchFamily="34" charset="-122"/>
@@ -19834,7 +19834,7 @@
             <a:r>
               <a:rPr lang="en-US" sz="950" dirty="0">
                 <a:solidFill>
-                  <a:srgbClr val="9AA1AB"/>
+                  <a:srgbClr val="A79E93"/>
                 </a:solidFill>
                 <a:latin typeface="Microsoft YaHei" pitchFamily="34" charset="0"/>
                 <a:ea typeface="Microsoft YaHei" pitchFamily="34" charset="-122"/>
@@ -19848,7 +19848,7 @@
             <a:r>
               <a:rPr lang="en-US" sz="950" dirty="0">
                 <a:solidFill>
-                  <a:srgbClr val="9AA1AB"/>
+                  <a:srgbClr val="A79E93"/>
                 </a:solidFill>
                 <a:latin typeface="Arial" pitchFamily="34" charset="0"/>
                 <a:ea typeface="Arial" pitchFamily="34" charset="-122"/>
@@ -19862,7 +19862,7 @@
             <a:r>
               <a:rPr lang="en-US" sz="950" dirty="0">
                 <a:solidFill>
-                  <a:srgbClr val="9AA1AB"/>
+                  <a:srgbClr val="A79E93"/>
                 </a:solidFill>
                 <a:latin typeface="Microsoft YaHei" pitchFamily="34" charset="0"/>
                 <a:ea typeface="Microsoft YaHei" pitchFamily="34" charset="-122"/>
@@ -19901,7 +19901,7 @@
             <a:r>
               <a:rPr lang="en-US" sz="950" dirty="0">
                 <a:solidFill>
-                  <a:srgbClr val="9AA1AB"/>
+                  <a:srgbClr val="A79E93"/>
                 </a:solidFill>
                 <a:latin typeface="Arial" pitchFamily="34" charset="0"/>
                 <a:ea typeface="Arial" pitchFamily="34" charset="-122"/>
@@ -19968,7 +19968,7 @@
             <a:r>
               <a:rPr lang="en-US" sz="1200" b="1" spc="240" kern="0" dirty="0">
                 <a:solidFill>
-                  <a:srgbClr val="2F6FAE"/>
+                  <a:srgbClr val="A8492A"/>
                 </a:solidFill>
                 <a:latin typeface="Microsoft YaHei" pitchFamily="34" charset="0"/>
                 <a:ea typeface="Microsoft YaHei" pitchFamily="34" charset="-122"/>
@@ -20010,7 +20010,7 @@
             <a:r>
               <a:rPr lang="en-US" sz="2500" b="1" dirty="0">
                 <a:solidFill>
-                  <a:srgbClr val="1F3A5F"/>
+                  <a:srgbClr val="7A3A1D"/>
                 </a:solidFill>
                 <a:latin typeface="Microsoft YaHei" pitchFamily="34" charset="0"/>
                 <a:ea typeface="Microsoft YaHei" pitchFamily="34" charset="-122"/>
@@ -20052,7 +20052,7 @@
             <a:r>
               <a:rPr lang="en-US" sz="1200" dirty="0">
                 <a:solidFill>
-                  <a:srgbClr val="6E7681"/>
+                  <a:srgbClr val="6B635A"/>
                 </a:solidFill>
                 <a:latin typeface="Arial" pitchFamily="34" charset="0"/>
                 <a:ea typeface="Arial" pitchFamily="34" charset="-122"/>
@@ -20079,7 +20079,7 @@
             <a:avLst/>
           </a:prstGeom>
           <a:solidFill>
-            <a:srgbClr val="D9DEE6"/>
+            <a:srgbClr val="E4E0D3"/>
           </a:solidFill>
           <a:ln/>
         </p:spPr>
@@ -20103,7 +20103,7 @@
           </a:solidFill>
           <a:ln w="17780">
             <a:solidFill>
-              <a:srgbClr val="1F3A5F"/>
+              <a:srgbClr val="7A3A1D"/>
             </a:solidFill>
             <a:prstDash val="solid"/>
           </a:ln>
@@ -20136,7 +20136,7 @@
             <a:r>
               <a:rPr lang="en-US" sz="1500" b="1" dirty="0">
                 <a:solidFill>
-                  <a:srgbClr val="1F3A5F"/>
+                  <a:srgbClr val="7A3A1D"/>
                 </a:solidFill>
                 <a:latin typeface="Arial" pitchFamily="34" charset="0"/>
                 <a:ea typeface="Arial" pitchFamily="34" charset="-122"/>
@@ -20175,7 +20175,7 @@
             <a:r>
               <a:rPr lang="en-US" sz="1400" b="1" dirty="0">
                 <a:solidFill>
-                  <a:srgbClr val="1F3A5F"/>
+                  <a:srgbClr val="7A3A1D"/>
                 </a:solidFill>
                 <a:latin typeface="Microsoft YaHei" pitchFamily="34" charset="0"/>
                 <a:ea typeface="Microsoft YaHei" pitchFamily="34" charset="-122"/>
@@ -20217,7 +20217,7 @@
             <a:r>
               <a:rPr lang="en-US" sz="1200" dirty="0">
                 <a:solidFill>
-                  <a:srgbClr val="6E7681"/>
+                  <a:srgbClr val="6B635A"/>
                 </a:solidFill>
                 <a:latin typeface="Microsoft YaHei" pitchFamily="34" charset="0"/>
                 <a:ea typeface="Microsoft YaHei" pitchFamily="34" charset="-122"/>
@@ -20234,7 +20234,7 @@
             <a:r>
               <a:rPr lang="en-US" sz="1200" dirty="0">
                 <a:solidFill>
-                  <a:srgbClr val="6E7681"/>
+                  <a:srgbClr val="6B635A"/>
                 </a:solidFill>
                 <a:latin typeface="Arial" pitchFamily="34" charset="0"/>
                 <a:ea typeface="Arial" pitchFamily="34" charset="-122"/>
@@ -20251,7 +20251,7 @@
             <a:r>
               <a:rPr lang="en-US" sz="1200" dirty="0">
                 <a:solidFill>
-                  <a:srgbClr val="6E7681"/>
+                  <a:srgbClr val="6B635A"/>
                 </a:solidFill>
                 <a:latin typeface="Microsoft YaHei" pitchFamily="34" charset="0"/>
                 <a:ea typeface="Microsoft YaHei" pitchFamily="34" charset="-122"/>
@@ -20282,7 +20282,7 @@
           </a:solidFill>
           <a:ln w="17780">
             <a:solidFill>
-              <a:srgbClr val="1F3A5F"/>
+              <a:srgbClr val="7A3A1D"/>
             </a:solidFill>
             <a:prstDash val="solid"/>
           </a:ln>
@@ -20315,7 +20315,7 @@
             <a:r>
               <a:rPr lang="en-US" sz="1500" b="1" dirty="0">
                 <a:solidFill>
-                  <a:srgbClr val="1F3A5F"/>
+                  <a:srgbClr val="7A3A1D"/>
                 </a:solidFill>
                 <a:latin typeface="Arial" pitchFamily="34" charset="0"/>
                 <a:ea typeface="Arial" pitchFamily="34" charset="-122"/>
@@ -20354,7 +20354,7 @@
             <a:r>
               <a:rPr lang="en-US" sz="1400" b="1" dirty="0">
                 <a:solidFill>
-                  <a:srgbClr val="1F3A5F"/>
+                  <a:srgbClr val="7A3A1D"/>
                 </a:solidFill>
                 <a:latin typeface="Microsoft YaHei" pitchFamily="34" charset="0"/>
                 <a:ea typeface="Microsoft YaHei" pitchFamily="34" charset="-122"/>
@@ -20396,7 +20396,7 @@
             <a:r>
               <a:rPr lang="en-US" sz="1200" dirty="0">
                 <a:solidFill>
-                  <a:srgbClr val="6E7681"/>
+                  <a:srgbClr val="6B635A"/>
                 </a:solidFill>
                 <a:latin typeface="Microsoft YaHei" pitchFamily="34" charset="0"/>
                 <a:ea typeface="Microsoft YaHei" pitchFamily="34" charset="-122"/>
@@ -20413,7 +20413,7 @@
             <a:r>
               <a:rPr lang="en-US" sz="1200" dirty="0">
                 <a:solidFill>
-                  <a:srgbClr val="6E7681"/>
+                  <a:srgbClr val="6B635A"/>
                 </a:solidFill>
                 <a:latin typeface="Arial" pitchFamily="34" charset="0"/>
                 <a:ea typeface="Arial" pitchFamily="34" charset="-122"/>
@@ -20430,7 +20430,7 @@
             <a:r>
               <a:rPr lang="en-US" sz="1200" dirty="0">
                 <a:solidFill>
-                  <a:srgbClr val="6E7681"/>
+                  <a:srgbClr val="6B635A"/>
                 </a:solidFill>
                 <a:latin typeface="Microsoft YaHei" pitchFamily="34" charset="0"/>
                 <a:ea typeface="Microsoft YaHei" pitchFamily="34" charset="-122"/>
@@ -20447,7 +20447,7 @@
             <a:r>
               <a:rPr lang="en-US" sz="1200" dirty="0">
                 <a:solidFill>
-                  <a:srgbClr val="6E7681"/>
+                  <a:srgbClr val="6B635A"/>
                 </a:solidFill>
                 <a:latin typeface="Arial" pitchFamily="34" charset="0"/>
                 <a:ea typeface="Arial" pitchFamily="34" charset="-122"/>
@@ -20464,7 +20464,7 @@
             <a:r>
               <a:rPr lang="en-US" sz="1200" dirty="0">
                 <a:solidFill>
-                  <a:srgbClr val="6E7681"/>
+                  <a:srgbClr val="6B635A"/>
                 </a:solidFill>
                 <a:latin typeface="Microsoft YaHei" pitchFamily="34" charset="0"/>
                 <a:ea typeface="Microsoft YaHei" pitchFamily="34" charset="-122"/>
@@ -20495,7 +20495,7 @@
           </a:solidFill>
           <a:ln w="17780">
             <a:solidFill>
-              <a:srgbClr val="1F3A5F"/>
+              <a:srgbClr val="7A3A1D"/>
             </a:solidFill>
             <a:prstDash val="solid"/>
           </a:ln>
@@ -20528,7 +20528,7 @@
             <a:r>
               <a:rPr lang="en-US" sz="1500" b="1" dirty="0">
                 <a:solidFill>
-                  <a:srgbClr val="1F3A5F"/>
+                  <a:srgbClr val="7A3A1D"/>
                 </a:solidFill>
                 <a:latin typeface="Arial" pitchFamily="34" charset="0"/>
                 <a:ea typeface="Arial" pitchFamily="34" charset="-122"/>
@@ -20567,7 +20567,7 @@
             <a:r>
               <a:rPr lang="en-US" sz="1400" b="1" dirty="0">
                 <a:solidFill>
-                  <a:srgbClr val="1F3A5F"/>
+                  <a:srgbClr val="7A3A1D"/>
                 </a:solidFill>
                 <a:latin typeface="Microsoft YaHei" pitchFamily="34" charset="0"/>
                 <a:ea typeface="Microsoft YaHei" pitchFamily="34" charset="-122"/>
@@ -20609,7 +20609,7 @@
             <a:r>
               <a:rPr lang="en-US" sz="1200" dirty="0">
                 <a:solidFill>
-                  <a:srgbClr val="6E7681"/>
+                  <a:srgbClr val="6B635A"/>
                 </a:solidFill>
                 <a:latin typeface="Microsoft YaHei" pitchFamily="34" charset="0"/>
                 <a:ea typeface="Microsoft YaHei" pitchFamily="34" charset="-122"/>
@@ -20626,7 +20626,7 @@
             <a:r>
               <a:rPr lang="en-US" sz="1200" dirty="0">
                 <a:solidFill>
-                  <a:srgbClr val="6E7681"/>
+                  <a:srgbClr val="6B635A"/>
                 </a:solidFill>
                 <a:latin typeface="Arial" pitchFamily="34" charset="0"/>
                 <a:ea typeface="Arial" pitchFamily="34" charset="-122"/>
@@ -20643,7 +20643,7 @@
             <a:r>
               <a:rPr lang="en-US" sz="1200" dirty="0">
                 <a:solidFill>
-                  <a:srgbClr val="6E7681"/>
+                  <a:srgbClr val="6B635A"/>
                 </a:solidFill>
                 <a:latin typeface="Microsoft YaHei" pitchFamily="34" charset="0"/>
                 <a:ea typeface="Microsoft YaHei" pitchFamily="34" charset="-122"/>
@@ -20660,7 +20660,7 @@
             <a:r>
               <a:rPr lang="en-US" sz="1200" dirty="0">
                 <a:solidFill>
-                  <a:srgbClr val="6E7681"/>
+                  <a:srgbClr val="6B635A"/>
                 </a:solidFill>
                 <a:latin typeface="Arial" pitchFamily="34" charset="0"/>
                 <a:ea typeface="Arial" pitchFamily="34" charset="-122"/>
@@ -20677,7 +20677,7 @@
             <a:r>
               <a:rPr lang="en-US" sz="1200" dirty="0">
                 <a:solidFill>
-                  <a:srgbClr val="6E7681"/>
+                  <a:srgbClr val="6B635A"/>
                 </a:solidFill>
                 <a:latin typeface="Microsoft YaHei" pitchFamily="34" charset="0"/>
                 <a:ea typeface="Microsoft YaHei" pitchFamily="34" charset="-122"/>
@@ -20694,7 +20694,7 @@
             <a:r>
               <a:rPr lang="en-US" sz="1200" dirty="0">
                 <a:solidFill>
-                  <a:srgbClr val="6E7681"/>
+                  <a:srgbClr val="6B635A"/>
                 </a:solidFill>
                 <a:latin typeface="Arial" pitchFamily="34" charset="0"/>
                 <a:ea typeface="Arial" pitchFamily="34" charset="-122"/>
@@ -20711,7 +20711,7 @@
             <a:r>
               <a:rPr lang="en-US" sz="1200" dirty="0">
                 <a:solidFill>
-                  <a:srgbClr val="6E7681"/>
+                  <a:srgbClr val="6B635A"/>
                 </a:solidFill>
                 <a:latin typeface="Microsoft YaHei" pitchFamily="34" charset="0"/>
                 <a:ea typeface="Microsoft YaHei" pitchFamily="34" charset="-122"/>
@@ -20738,7 +20738,7 @@
             <a:avLst/>
           </a:prstGeom>
           <a:solidFill>
-            <a:srgbClr val="1F3A5F"/>
+            <a:srgbClr val="7A3A1D"/>
           </a:solidFill>
           <a:ln/>
         </p:spPr>
@@ -20770,7 +20770,7 @@
             <a:r>
               <a:rPr lang="en-US" sz="3600" b="1" dirty="0">
                 <a:solidFill>
-                  <a:srgbClr val="1F3A5F"/>
+                  <a:srgbClr val="7A3A1D"/>
                 </a:solidFill>
                 <a:latin typeface="Arial" pitchFamily="34" charset="0"/>
                 <a:ea typeface="Arial" pitchFamily="34" charset="-122"/>
@@ -20809,7 +20809,7 @@
             <a:r>
               <a:rPr lang="en-US" sz="1350" b="1" dirty="0">
                 <a:solidFill>
-                  <a:srgbClr val="23272E"/>
+                  <a:srgbClr val="2B2823"/>
                 </a:solidFill>
                 <a:latin typeface="Microsoft YaHei" pitchFamily="34" charset="0"/>
                 <a:ea typeface="Microsoft YaHei" pitchFamily="34" charset="-122"/>
@@ -20823,7 +20823,7 @@
             <a:r>
               <a:rPr lang="en-US" sz="1350" b="1" dirty="0">
                 <a:solidFill>
-                  <a:srgbClr val="23272E"/>
+                  <a:srgbClr val="2B2823"/>
                 </a:solidFill>
                 <a:latin typeface="Arial" pitchFamily="34" charset="0"/>
                 <a:ea typeface="Arial" pitchFamily="34" charset="-122"/>
@@ -20837,7 +20837,7 @@
             <a:r>
               <a:rPr lang="en-US" sz="1350" b="1" dirty="0">
                 <a:solidFill>
-                  <a:srgbClr val="23272E"/>
+                  <a:srgbClr val="2B2823"/>
                 </a:solidFill>
                 <a:latin typeface="Microsoft YaHei" pitchFamily="34" charset="0"/>
                 <a:ea typeface="Microsoft YaHei" pitchFamily="34" charset="-122"/>
@@ -20876,7 +20876,7 @@
             <a:r>
               <a:rPr lang="en-US" sz="1100" dirty="0">
                 <a:solidFill>
-                  <a:srgbClr val="6E7681"/>
+                  <a:srgbClr val="6B635A"/>
                 </a:solidFill>
                 <a:latin typeface="Arial" pitchFamily="34" charset="0"/>
                 <a:ea typeface="Arial" pitchFamily="34" charset="-122"/>
@@ -20903,7 +20903,7 @@
             <a:avLst/>
           </a:prstGeom>
           <a:solidFill>
-            <a:srgbClr val="1F3A5F"/>
+            <a:srgbClr val="7A3A1D"/>
           </a:solidFill>
           <a:ln/>
         </p:spPr>
@@ -20935,7 +20935,7 @@
             <a:r>
               <a:rPr lang="en-US" sz="3600" b="1" dirty="0">
                 <a:solidFill>
-                  <a:srgbClr val="1F3A5F"/>
+                  <a:srgbClr val="7A3A1D"/>
                 </a:solidFill>
                 <a:latin typeface="Arial" pitchFamily="34" charset="0"/>
                 <a:ea typeface="Arial" pitchFamily="34" charset="-122"/>
@@ -20974,7 +20974,7 @@
             <a:r>
               <a:rPr lang="en-US" sz="1350" b="1" dirty="0">
                 <a:solidFill>
-                  <a:srgbClr val="23272E"/>
+                  <a:srgbClr val="2B2823"/>
                 </a:solidFill>
                 <a:latin typeface="Microsoft YaHei" pitchFamily="34" charset="0"/>
                 <a:ea typeface="Microsoft YaHei" pitchFamily="34" charset="-122"/>
@@ -21013,7 +21013,7 @@
             <a:r>
               <a:rPr lang="en-US" sz="1100" dirty="0">
                 <a:solidFill>
-                  <a:srgbClr val="6E7681"/>
+                  <a:srgbClr val="6B635A"/>
                 </a:solidFill>
                 <a:latin typeface="Microsoft YaHei" pitchFamily="34" charset="0"/>
                 <a:ea typeface="Microsoft YaHei" pitchFamily="34" charset="-122"/>
@@ -21027,7 +21027,7 @@
             <a:r>
               <a:rPr lang="en-US" sz="1100" dirty="0">
                 <a:solidFill>
-                  <a:srgbClr val="6E7681"/>
+                  <a:srgbClr val="6B635A"/>
                 </a:solidFill>
                 <a:latin typeface="Arial" pitchFamily="34" charset="0"/>
                 <a:ea typeface="Arial" pitchFamily="34" charset="-122"/>
@@ -21041,7 +21041,7 @@
             <a:r>
               <a:rPr lang="en-US" sz="1100" dirty="0">
                 <a:solidFill>
-                  <a:srgbClr val="6E7681"/>
+                  <a:srgbClr val="6B635A"/>
                 </a:solidFill>
                 <a:latin typeface="Microsoft YaHei" pitchFamily="34" charset="0"/>
                 <a:ea typeface="Microsoft YaHei" pitchFamily="34" charset="-122"/>
@@ -21068,7 +21068,7 @@
             <a:avLst/>
           </a:prstGeom>
           <a:solidFill>
-            <a:srgbClr val="2F6FAE"/>
+            <a:srgbClr val="A8492A"/>
           </a:solidFill>
           <a:ln/>
         </p:spPr>
@@ -21100,7 +21100,7 @@
             <a:r>
               <a:rPr lang="en-US" sz="1200" b="1" spc="80" kern="0" dirty="0">
                 <a:solidFill>
-                  <a:srgbClr val="2F6FAE"/>
+                  <a:srgbClr val="A8492A"/>
                 </a:solidFill>
                 <a:latin typeface="Microsoft YaHei" pitchFamily="34" charset="0"/>
                 <a:ea typeface="Microsoft YaHei" pitchFamily="34" charset="-122"/>
@@ -21142,7 +21142,7 @@
             <a:r>
               <a:rPr lang="en-US" sz="1350" dirty="0">
                 <a:solidFill>
-                  <a:srgbClr val="23272E"/>
+                  <a:srgbClr val="2B2823"/>
                 </a:solidFill>
                 <a:latin typeface="Microsoft YaHei" pitchFamily="34" charset="0"/>
                 <a:ea typeface="Microsoft YaHei" pitchFamily="34" charset="-122"/>
@@ -21184,7 +21184,7 @@
             <a:r>
               <a:rPr lang="en-US" sz="1300" b="1" dirty="0">
                 <a:solidFill>
-                  <a:srgbClr val="23272E"/>
+                  <a:srgbClr val="2B2823"/>
                 </a:solidFill>
                 <a:latin typeface="Microsoft YaHei" pitchFamily="34" charset="0"/>
                 <a:ea typeface="Microsoft YaHei" pitchFamily="34" charset="-122"/>
@@ -21201,7 +21201,7 @@
             <a:r>
               <a:rPr lang="en-US" sz="1300" dirty="0">
                 <a:solidFill>
-                  <a:srgbClr val="23272E"/>
+                  <a:srgbClr val="2B2823"/>
                 </a:solidFill>
                 <a:latin typeface="Arial" pitchFamily="34" charset="0"/>
                 <a:ea typeface="Arial" pitchFamily="34" charset="-122"/>
@@ -21218,7 +21218,7 @@
             <a:r>
               <a:rPr lang="en-US" sz="1300" dirty="0">
                 <a:solidFill>
-                  <a:srgbClr val="23272E"/>
+                  <a:srgbClr val="2B2823"/>
                 </a:solidFill>
                 <a:latin typeface="Microsoft YaHei" pitchFamily="34" charset="0"/>
                 <a:ea typeface="Microsoft YaHei" pitchFamily="34" charset="-122"/>
@@ -21257,7 +21257,7 @@
             <a:r>
               <a:rPr lang="en-US" sz="950" dirty="0">
                 <a:solidFill>
-                  <a:srgbClr val="9AA1AB"/>
+                  <a:srgbClr val="A79E93"/>
                 </a:solidFill>
                 <a:latin typeface="Arial" pitchFamily="34" charset="0"/>
                 <a:ea typeface="Arial" pitchFamily="34" charset="-122"/>
@@ -21271,7 +21271,7 @@
             <a:r>
               <a:rPr lang="en-US" sz="950" dirty="0">
                 <a:solidFill>
-                  <a:srgbClr val="9AA1AB"/>
+                  <a:srgbClr val="A79E93"/>
                 </a:solidFill>
                 <a:latin typeface="Microsoft YaHei" pitchFamily="34" charset="0"/>
                 <a:ea typeface="Microsoft YaHei" pitchFamily="34" charset="-122"/>
@@ -21285,7 +21285,7 @@
             <a:r>
               <a:rPr lang="en-US" sz="950" dirty="0">
                 <a:solidFill>
-                  <a:srgbClr val="9AA1AB"/>
+                  <a:srgbClr val="A79E93"/>
                 </a:solidFill>
                 <a:latin typeface="Arial" pitchFamily="34" charset="0"/>
                 <a:ea typeface="Arial" pitchFamily="34" charset="-122"/>
@@ -21299,7 +21299,7 @@
             <a:r>
               <a:rPr lang="en-US" sz="950" dirty="0">
                 <a:solidFill>
-                  <a:srgbClr val="9AA1AB"/>
+                  <a:srgbClr val="A79E93"/>
                 </a:solidFill>
                 <a:latin typeface="Microsoft YaHei" pitchFamily="34" charset="0"/>
                 <a:ea typeface="Microsoft YaHei" pitchFamily="34" charset="-122"/>
@@ -21313,7 +21313,7 @@
             <a:r>
               <a:rPr lang="en-US" sz="950" dirty="0">
                 <a:solidFill>
-                  <a:srgbClr val="9AA1AB"/>
+                  <a:srgbClr val="A79E93"/>
                 </a:solidFill>
                 <a:latin typeface="Arial" pitchFamily="34" charset="0"/>
                 <a:ea typeface="Arial" pitchFamily="34" charset="-122"/>
@@ -21327,7 +21327,7 @@
             <a:r>
               <a:rPr lang="en-US" sz="950" dirty="0">
                 <a:solidFill>
-                  <a:srgbClr val="9AA1AB"/>
+                  <a:srgbClr val="A79E93"/>
                 </a:solidFill>
                 <a:latin typeface="Microsoft YaHei" pitchFamily="34" charset="0"/>
                 <a:ea typeface="Microsoft YaHei" pitchFamily="34" charset="-122"/>
@@ -21366,7 +21366,7 @@
             <a:r>
               <a:rPr lang="en-US" sz="950" dirty="0">
                 <a:solidFill>
-                  <a:srgbClr val="9AA1AB"/>
+                  <a:srgbClr val="A79E93"/>
                 </a:solidFill>
                 <a:latin typeface="Arial" pitchFamily="34" charset="0"/>
                 <a:ea typeface="Arial" pitchFamily="34" charset="-122"/>
@@ -21433,7 +21433,7 @@
             <a:r>
               <a:rPr lang="en-US" sz="9600" b="1" dirty="0">
                 <a:solidFill>
-                  <a:srgbClr val="E7EEF6"/>
+                  <a:srgbClr val="F3E3D8"/>
                 </a:solidFill>
                 <a:latin typeface="Arial" pitchFamily="34" charset="0"/>
                 <a:ea typeface="Arial" pitchFamily="34" charset="-122"/>
@@ -21472,7 +21472,7 @@
             <a:r>
               <a:rPr lang="en-US" sz="1300" b="1" spc="300" kern="0" dirty="0">
                 <a:solidFill>
-                  <a:srgbClr val="2F6FAE"/>
+                  <a:srgbClr val="A8492A"/>
                 </a:solidFill>
                 <a:latin typeface="Arial" pitchFamily="34" charset="0"/>
                 <a:ea typeface="Arial" pitchFamily="34" charset="-122"/>
@@ -21499,7 +21499,7 @@
             <a:avLst/>
           </a:prstGeom>
           <a:solidFill>
-            <a:srgbClr val="2F6FAE"/>
+            <a:srgbClr val="A8492A"/>
           </a:solidFill>
           <a:ln/>
         </p:spPr>
@@ -21531,7 +21531,7 @@
             <a:r>
               <a:rPr lang="en-US" sz="3000" b="1" dirty="0">
                 <a:solidFill>
-                  <a:srgbClr val="1F3A5F"/>
+                  <a:srgbClr val="7A3A1D"/>
                 </a:solidFill>
                 <a:latin typeface="Microsoft YaHei" pitchFamily="34" charset="0"/>
                 <a:ea typeface="Microsoft YaHei" pitchFamily="34" charset="-122"/>
@@ -21573,7 +21573,7 @@
             <a:r>
               <a:rPr lang="en-US" sz="1450" dirty="0">
                 <a:solidFill>
-                  <a:srgbClr val="6E7681"/>
+                  <a:srgbClr val="6B635A"/>
                 </a:solidFill>
                 <a:latin typeface="Microsoft YaHei" pitchFamily="34" charset="0"/>
                 <a:ea typeface="Microsoft YaHei" pitchFamily="34" charset="-122"/>
@@ -21600,7 +21600,7 @@
             <a:avLst/>
           </a:prstGeom>
           <a:solidFill>
-            <a:srgbClr val="D9DEE6"/>
+            <a:srgbClr val="E4E0D3"/>
           </a:solidFill>
           <a:ln/>
         </p:spPr>
@@ -21632,7 +21632,7 @@
             <a:r>
               <a:rPr lang="en-US" sz="1400" b="1" dirty="0">
                 <a:solidFill>
-                  <a:srgbClr val="1F3A5F"/>
+                  <a:srgbClr val="7A3A1D"/>
                 </a:solidFill>
                 <a:latin typeface="Microsoft YaHei" pitchFamily="34" charset="0"/>
                 <a:ea typeface="Microsoft YaHei" pitchFamily="34" charset="-122"/>
@@ -21674,7 +21674,7 @@
             <a:r>
               <a:rPr lang="en-US" sz="1250" dirty="0">
                 <a:solidFill>
-                  <a:srgbClr val="6E7681"/>
+                  <a:srgbClr val="6B635A"/>
                 </a:solidFill>
                 <a:latin typeface="Microsoft YaHei" pitchFamily="34" charset="0"/>
                 <a:ea typeface="Microsoft YaHei" pitchFamily="34" charset="-122"/>
@@ -21701,7 +21701,7 @@
             <a:avLst/>
           </a:prstGeom>
           <a:solidFill>
-            <a:srgbClr val="D9DEE6"/>
+            <a:srgbClr val="E4E0D3"/>
           </a:solidFill>
           <a:ln/>
         </p:spPr>
@@ -21733,7 +21733,7 @@
             <a:r>
               <a:rPr lang="en-US" sz="1400" b="1" dirty="0">
                 <a:solidFill>
-                  <a:srgbClr val="1F3A5F"/>
+                  <a:srgbClr val="7A3A1D"/>
                 </a:solidFill>
                 <a:latin typeface="Microsoft YaHei" pitchFamily="34" charset="0"/>
                 <a:ea typeface="Microsoft YaHei" pitchFamily="34" charset="-122"/>
@@ -21775,7 +21775,7 @@
             <a:r>
               <a:rPr lang="en-US" sz="1250" dirty="0">
                 <a:solidFill>
-                  <a:srgbClr val="6E7681"/>
+                  <a:srgbClr val="6B635A"/>
                 </a:solidFill>
                 <a:latin typeface="Microsoft YaHei" pitchFamily="34" charset="0"/>
                 <a:ea typeface="Microsoft YaHei" pitchFamily="34" charset="-122"/>
@@ -21802,7 +21802,7 @@
             <a:avLst/>
           </a:prstGeom>
           <a:solidFill>
-            <a:srgbClr val="D9DEE6"/>
+            <a:srgbClr val="E4E0D3"/>
           </a:solidFill>
           <a:ln/>
         </p:spPr>
@@ -21834,7 +21834,7 @@
             <a:r>
               <a:rPr lang="en-US" sz="1400" b="1" dirty="0">
                 <a:solidFill>
-                  <a:srgbClr val="1F3A5F"/>
+                  <a:srgbClr val="7A3A1D"/>
                 </a:solidFill>
                 <a:latin typeface="Microsoft YaHei" pitchFamily="34" charset="0"/>
                 <a:ea typeface="Microsoft YaHei" pitchFamily="34" charset="-122"/>
@@ -21876,7 +21876,7 @@
             <a:r>
               <a:rPr lang="en-US" sz="1250" dirty="0">
                 <a:solidFill>
-                  <a:srgbClr val="6E7681"/>
+                  <a:srgbClr val="6B635A"/>
                 </a:solidFill>
                 <a:latin typeface="Microsoft YaHei" pitchFamily="34" charset="0"/>
                 <a:ea typeface="Microsoft YaHei" pitchFamily="34" charset="-122"/>
@@ -21915,7 +21915,7 @@
             <a:r>
               <a:rPr lang="en-US" sz="1150" dirty="0">
                 <a:solidFill>
-                  <a:srgbClr val="9AA1AB"/>
+                  <a:srgbClr val="A79E93"/>
                 </a:solidFill>
                 <a:latin typeface="Arial" pitchFamily="34" charset="0"/>
                 <a:ea typeface="Arial" pitchFamily="34" charset="-122"/>
@@ -21929,7 +21929,7 @@
             <a:r>
               <a:rPr lang="en-US" sz="1150" dirty="0">
                 <a:solidFill>
-                  <a:srgbClr val="9AA1AB"/>
+                  <a:srgbClr val="A79E93"/>
                 </a:solidFill>
                 <a:latin typeface="Microsoft YaHei" pitchFamily="34" charset="0"/>
                 <a:ea typeface="Microsoft YaHei" pitchFamily="34" charset="-122"/>
@@ -21968,7 +21968,7 @@
             <a:r>
               <a:rPr lang="en-US" sz="1150" dirty="0">
                 <a:solidFill>
-                  <a:srgbClr val="9AA1AB"/>
+                  <a:srgbClr val="A79E93"/>
                 </a:solidFill>
                 <a:latin typeface="Arial" pitchFamily="34" charset="0"/>
                 <a:ea typeface="Arial" pitchFamily="34" charset="-122"/>
@@ -21982,7 +21982,7 @@
             <a:r>
               <a:rPr lang="en-US" sz="1150" dirty="0">
                 <a:solidFill>
-                  <a:srgbClr val="9AA1AB"/>
+                  <a:srgbClr val="A79E93"/>
                 </a:solidFill>
                 <a:latin typeface="Microsoft YaHei" pitchFamily="34" charset="0"/>
                 <a:ea typeface="Microsoft YaHei" pitchFamily="34" charset="-122"/>
@@ -22021,7 +22021,7 @@
             <a:r>
               <a:rPr lang="en-US" sz="1150" b="1" dirty="0">
                 <a:solidFill>
-                  <a:srgbClr val="2F6FAE"/>
+                  <a:srgbClr val="A8492A"/>
                 </a:solidFill>
                 <a:latin typeface="Arial" pitchFamily="34" charset="0"/>
                 <a:ea typeface="Arial" pitchFamily="34" charset="-122"/>
@@ -22035,7 +22035,7 @@
             <a:r>
               <a:rPr lang="en-US" sz="1150" b="1" dirty="0">
                 <a:solidFill>
-                  <a:srgbClr val="2F6FAE"/>
+                  <a:srgbClr val="A8492A"/>
                 </a:solidFill>
                 <a:latin typeface="Microsoft YaHei" pitchFamily="34" charset="0"/>
                 <a:ea typeface="Microsoft YaHei" pitchFamily="34" charset="-122"/>
@@ -22074,7 +22074,7 @@
             <a:r>
               <a:rPr lang="en-US" sz="1150" dirty="0">
                 <a:solidFill>
-                  <a:srgbClr val="9AA1AB"/>
+                  <a:srgbClr val="A79E93"/>
                 </a:solidFill>
                 <a:latin typeface="Arial" pitchFamily="34" charset="0"/>
                 <a:ea typeface="Arial" pitchFamily="34" charset="-122"/>
@@ -22088,7 +22088,7 @@
             <a:r>
               <a:rPr lang="en-US" sz="1150" dirty="0">
                 <a:solidFill>
-                  <a:srgbClr val="9AA1AB"/>
+                  <a:srgbClr val="A79E93"/>
                 </a:solidFill>
                 <a:latin typeface="Microsoft YaHei" pitchFamily="34" charset="0"/>
                 <a:ea typeface="Microsoft YaHei" pitchFamily="34" charset="-122"/>
@@ -22127,7 +22127,7 @@
             <a:r>
               <a:rPr lang="en-US" sz="950" dirty="0">
                 <a:solidFill>
-                  <a:srgbClr val="9AA1AB"/>
+                  <a:srgbClr val="A79E93"/>
                 </a:solidFill>
                 <a:latin typeface="Arial" pitchFamily="34" charset="0"/>
                 <a:ea typeface="Arial" pitchFamily="34" charset="-122"/>
@@ -22141,7 +22141,7 @@
             <a:r>
               <a:rPr lang="en-US" sz="950" dirty="0">
                 <a:solidFill>
-                  <a:srgbClr val="9AA1AB"/>
+                  <a:srgbClr val="A79E93"/>
                 </a:solidFill>
                 <a:latin typeface="Microsoft YaHei" pitchFamily="34" charset="0"/>
                 <a:ea typeface="Microsoft YaHei" pitchFamily="34" charset="-122"/>
@@ -22155,7 +22155,7 @@
             <a:r>
               <a:rPr lang="en-US" sz="950" dirty="0">
                 <a:solidFill>
-                  <a:srgbClr val="9AA1AB"/>
+                  <a:srgbClr val="A79E93"/>
                 </a:solidFill>
                 <a:latin typeface="Arial" pitchFamily="34" charset="0"/>
                 <a:ea typeface="Arial" pitchFamily="34" charset="-122"/>
@@ -22169,7 +22169,7 @@
             <a:r>
               <a:rPr lang="en-US" sz="950" dirty="0">
                 <a:solidFill>
-                  <a:srgbClr val="9AA1AB"/>
+                  <a:srgbClr val="A79E93"/>
                 </a:solidFill>
                 <a:latin typeface="Microsoft YaHei" pitchFamily="34" charset="0"/>
                 <a:ea typeface="Microsoft YaHei" pitchFamily="34" charset="-122"/>
@@ -22183,7 +22183,7 @@
             <a:r>
               <a:rPr lang="en-US" sz="950" dirty="0">
                 <a:solidFill>
-                  <a:srgbClr val="9AA1AB"/>
+                  <a:srgbClr val="A79E93"/>
                 </a:solidFill>
                 <a:latin typeface="Arial" pitchFamily="34" charset="0"/>
                 <a:ea typeface="Arial" pitchFamily="34" charset="-122"/>
@@ -22197,7 +22197,7 @@
             <a:r>
               <a:rPr lang="en-US" sz="950" dirty="0">
                 <a:solidFill>
-                  <a:srgbClr val="9AA1AB"/>
+                  <a:srgbClr val="A79E93"/>
                 </a:solidFill>
                 <a:latin typeface="Microsoft YaHei" pitchFamily="34" charset="0"/>
                 <a:ea typeface="Microsoft YaHei" pitchFamily="34" charset="-122"/>
@@ -22236,7 +22236,7 @@
             <a:r>
               <a:rPr lang="en-US" sz="950" dirty="0">
                 <a:solidFill>
-                  <a:srgbClr val="9AA1AB"/>
+                  <a:srgbClr val="A79E93"/>
                 </a:solidFill>
                 <a:latin typeface="Arial" pitchFamily="34" charset="0"/>
                 <a:ea typeface="Arial" pitchFamily="34" charset="-122"/>

--- a/examples/ai-2030-slides/ai2030_talk.pptx
+++ b/examples/ai-2030-slides/ai2030_talk.pptx
@@ -2687,7 +2687,7 @@
             <a:avLst/>
           </a:prstGeom>
           <a:solidFill>
-            <a:srgbClr val="7A3A1D"/>
+            <a:srgbClr val="D97757"/>
           </a:solidFill>
           <a:ln/>
         </p:spPr>
@@ -2719,7 +2719,7 @@
             <a:r>
               <a:rPr lang="en-US" sz="1200" b="1" spc="300" kern="0" dirty="0">
                 <a:solidFill>
-                  <a:srgbClr val="FFFFFF"/>
+                  <a:srgbClr val="2B2823"/>
                 </a:solidFill>
                 <a:latin typeface="Microsoft YaHei" pitchFamily="34" charset="0"/>
                 <a:ea typeface="Microsoft YaHei" pitchFamily="34" charset="-122"/>
@@ -2758,7 +2758,7 @@
             <a:r>
               <a:rPr lang="en-US" sz="1100" spc="100" kern="0" dirty="0">
                 <a:solidFill>
-                  <a:srgbClr val="EFC7AE"/>
+                  <a:srgbClr val="2B2823"/>
                 </a:solidFill>
                 <a:latin typeface="Microsoft YaHei" pitchFamily="34" charset="0"/>
                 <a:ea typeface="Microsoft YaHei" pitchFamily="34" charset="-122"/>
@@ -2797,7 +2797,7 @@
             <a:r>
               <a:rPr lang="en-US" sz="1400" dirty="0">
                 <a:solidFill>
-                  <a:srgbClr val="FFFFFF"/>
+                  <a:srgbClr val="2B2823"/>
                 </a:solidFill>
                 <a:latin typeface="Microsoft YaHei" pitchFamily="34" charset="0"/>
                 <a:ea typeface="Microsoft YaHei" pitchFamily="34" charset="-122"/>
@@ -2811,7 +2811,7 @@
             <a:r>
               <a:rPr lang="en-US" sz="1400" dirty="0">
                 <a:solidFill>
-                  <a:srgbClr val="FFFFFF"/>
+                  <a:srgbClr val="2B2823"/>
                 </a:solidFill>
                 <a:latin typeface="Arial" pitchFamily="34" charset="0"/>
                 <a:ea typeface="Arial" pitchFamily="34" charset="-122"/>
@@ -2825,7 +2825,7 @@
             <a:r>
               <a:rPr lang="en-US" sz="1400" dirty="0">
                 <a:solidFill>
-                  <a:srgbClr val="FFFFFF"/>
+                  <a:srgbClr val="2B2823"/>
                 </a:solidFill>
                 <a:latin typeface="Microsoft YaHei" pitchFamily="34" charset="0"/>
                 <a:ea typeface="Microsoft YaHei" pitchFamily="34" charset="-122"/>
@@ -2864,7 +2864,7 @@
             <a:r>
               <a:rPr lang="en-US" sz="1100" spc="100" kern="0" dirty="0">
                 <a:solidFill>
-                  <a:srgbClr val="EFC7AE"/>
+                  <a:srgbClr val="2B2823"/>
                 </a:solidFill>
                 <a:latin typeface="Microsoft YaHei" pitchFamily="34" charset="0"/>
                 <a:ea typeface="Microsoft YaHei" pitchFamily="34" charset="-122"/>
@@ -2903,7 +2903,7 @@
             <a:r>
               <a:rPr lang="en-US" sz="1400" dirty="0">
                 <a:solidFill>
-                  <a:srgbClr val="FFFFFF"/>
+                  <a:srgbClr val="2B2823"/>
                 </a:solidFill>
                 <a:latin typeface="Arial" pitchFamily="34" charset="0"/>
                 <a:ea typeface="Arial" pitchFamily="34" charset="-122"/>
@@ -2917,7 +2917,7 @@
             <a:r>
               <a:rPr lang="en-US" sz="1400" dirty="0">
                 <a:solidFill>
-                  <a:srgbClr val="FFFFFF"/>
+                  <a:srgbClr val="2B2823"/>
                 </a:solidFill>
                 <a:latin typeface="Microsoft YaHei" pitchFamily="34" charset="0"/>
                 <a:ea typeface="Microsoft YaHei" pitchFamily="34" charset="-122"/>
@@ -2931,7 +2931,7 @@
             <a:r>
               <a:rPr lang="en-US" sz="1400" dirty="0">
                 <a:solidFill>
-                  <a:srgbClr val="FFFFFF"/>
+                  <a:srgbClr val="2B2823"/>
                 </a:solidFill>
                 <a:latin typeface="Arial" pitchFamily="34" charset="0"/>
                 <a:ea typeface="Arial" pitchFamily="34" charset="-122"/>
@@ -2945,7 +2945,7 @@
             <a:r>
               <a:rPr lang="en-US" sz="1400" dirty="0">
                 <a:solidFill>
-                  <a:srgbClr val="FFFFFF"/>
+                  <a:srgbClr val="2B2823"/>
                 </a:solidFill>
                 <a:latin typeface="Microsoft YaHei" pitchFamily="34" charset="0"/>
                 <a:ea typeface="Microsoft YaHei" pitchFamily="34" charset="-122"/>
@@ -2987,7 +2987,7 @@
             <a:r>
               <a:rPr lang="en-US" sz="4200" b="1" dirty="0">
                 <a:solidFill>
-                  <a:srgbClr val="7A3A1D"/>
+                  <a:srgbClr val="B4552D"/>
                 </a:solidFill>
                 <a:latin typeface="Microsoft YaHei" pitchFamily="34" charset="0"/>
                 <a:ea typeface="Microsoft YaHei" pitchFamily="34" charset="-122"/>
@@ -3004,7 +3004,7 @@
             <a:r>
               <a:rPr lang="en-US" sz="4200" b="1" dirty="0">
                 <a:solidFill>
-                  <a:srgbClr val="7A3A1D"/>
+                  <a:srgbClr val="B4552D"/>
                 </a:solidFill>
                 <a:latin typeface="Arial" pitchFamily="34" charset="0"/>
                 <a:ea typeface="Arial" pitchFamily="34" charset="-122"/>
@@ -3021,7 +3021,7 @@
             <a:r>
               <a:rPr lang="en-US" sz="4200" b="1" dirty="0">
                 <a:solidFill>
-                  <a:srgbClr val="7A3A1D"/>
+                  <a:srgbClr val="B4552D"/>
                 </a:solidFill>
                 <a:latin typeface="Microsoft YaHei" pitchFamily="34" charset="0"/>
                 <a:ea typeface="Microsoft YaHei" pitchFamily="34" charset="-122"/>
@@ -3041,7 +3041,7 @@
             <a:r>
               <a:rPr lang="en-US" sz="4200" b="1" dirty="0">
                 <a:solidFill>
-                  <a:srgbClr val="7A3A1D"/>
+                  <a:srgbClr val="B4552D"/>
                 </a:solidFill>
                 <a:latin typeface="Microsoft YaHei" pitchFamily="34" charset="0"/>
                 <a:ea typeface="Microsoft YaHei" pitchFamily="34" charset="-122"/>
@@ -3068,7 +3068,7 @@
             <a:avLst/>
           </a:prstGeom>
           <a:solidFill>
-            <a:srgbClr val="7A3A1D"/>
+            <a:srgbClr val="B4552D"/>
           </a:solidFill>
           <a:ln/>
         </p:spPr>
@@ -3127,7 +3127,7 @@
             <a:avLst/>
           </a:prstGeom>
           <a:solidFill>
-            <a:srgbClr val="E4E0D3"/>
+            <a:srgbClr val="EADFD6"/>
           </a:solidFill>
           <a:ln/>
         </p:spPr>
@@ -3307,7 +3307,7 @@
             <a:r>
               <a:rPr lang="en-US" sz="2500" b="1" dirty="0">
                 <a:solidFill>
-                  <a:srgbClr val="7A3A1D"/>
+                  <a:srgbClr val="B4552D"/>
                 </a:solidFill>
                 <a:latin typeface="Microsoft YaHei" pitchFamily="34" charset="0"/>
                 <a:ea typeface="Microsoft YaHei" pitchFamily="34" charset="-122"/>
@@ -3937,7 +3937,7 @@
             <a:r>
               <a:rPr lang="en-US" sz="2500" b="1" dirty="0">
                 <a:solidFill>
-                  <a:srgbClr val="7A3A1D"/>
+                  <a:srgbClr val="B4552D"/>
                 </a:solidFill>
                 <a:latin typeface="Microsoft YaHei" pitchFamily="34" charset="0"/>
                 <a:ea typeface="Microsoft YaHei" pitchFamily="34" charset="-122"/>
@@ -4030,7 +4030,7 @@
                       <a:r>
                         <a:rPr lang="en-US" sz="1300" b="1" dirty="0">
                           <a:solidFill>
-                            <a:srgbClr val="7A3A1D"/>
+                            <a:srgbClr val="B4552D"/>
                           </a:solidFill>
                           <a:latin typeface="Microsoft YaHei" pitchFamily="34" charset="0"/>
                           <a:ea typeface="Microsoft YaHei" pitchFamily="34" charset="-122"/>
@@ -4054,7 +4054,7 @@
                     </a:lnR>
                     <a:lnT w="19050" cap="flat" cmpd="sng" algn="ctr">
                       <a:solidFill>
-                        <a:srgbClr val="7A3A1D"/>
+                        <a:srgbClr val="B4552D"/>
                       </a:solidFill>
                       <a:prstDash val="solid"/>
                       <a:round/>
@@ -4083,7 +4083,7 @@
                       <a:r>
                         <a:rPr lang="en-US" sz="1300" b="1" dirty="0">
                           <a:solidFill>
-                            <a:srgbClr val="7A3A1D"/>
+                            <a:srgbClr val="B4552D"/>
                           </a:solidFill>
                           <a:latin typeface="Microsoft YaHei" pitchFamily="34" charset="0"/>
                           <a:ea typeface="Microsoft YaHei" pitchFamily="34" charset="-122"/>
@@ -4107,7 +4107,7 @@
                     </a:lnR>
                     <a:lnT w="19050" cap="flat" cmpd="sng" algn="ctr">
                       <a:solidFill>
-                        <a:srgbClr val="7A3A1D"/>
+                        <a:srgbClr val="B4552D"/>
                       </a:solidFill>
                       <a:prstDash val="solid"/>
                       <a:round/>
@@ -4136,7 +4136,7 @@
                       <a:r>
                         <a:rPr lang="en-US" sz="1300" b="1" dirty="0">
                           <a:solidFill>
-                            <a:srgbClr val="7A3A1D"/>
+                            <a:srgbClr val="B4552D"/>
                           </a:solidFill>
                           <a:latin typeface="Microsoft YaHei" pitchFamily="34" charset="0"/>
                           <a:ea typeface="Microsoft YaHei" pitchFamily="34" charset="-122"/>
@@ -4150,7 +4150,7 @@
                       <a:r>
                         <a:rPr lang="en-US" sz="1300" b="1" dirty="0">
                           <a:solidFill>
-                            <a:srgbClr val="7A3A1D"/>
+                            <a:srgbClr val="B4552D"/>
                           </a:solidFill>
                           <a:latin typeface="Arial" pitchFamily="34" charset="0"/>
                           <a:ea typeface="Arial" pitchFamily="34" charset="-122"/>
@@ -4174,7 +4174,7 @@
                     </a:lnR>
                     <a:lnT w="19050" cap="flat" cmpd="sng" algn="ctr">
                       <a:solidFill>
-                        <a:srgbClr val="7A3A1D"/>
+                        <a:srgbClr val="B4552D"/>
                       </a:solidFill>
                       <a:prstDash val="solid"/>
                       <a:round/>
@@ -4232,7 +4232,7 @@
                     </a:lnT>
                     <a:lnB w="3175" cap="flat" cmpd="sng" algn="ctr">
                       <a:solidFill>
-                        <a:srgbClr val="E4E0D3"/>
+                        <a:srgbClr val="EADFD6"/>
                       </a:solidFill>
                       <a:prstDash val="solid"/>
                       <a:round/>
@@ -4307,7 +4307,7 @@
                     </a:lnT>
                     <a:lnB w="3175" cap="flat" cmpd="sng" algn="ctr">
                       <a:solidFill>
-                        <a:srgbClr val="E4E0D3"/>
+                        <a:srgbClr val="EADFD6"/>
                       </a:solidFill>
                       <a:prstDash val="solid"/>
                       <a:round/>
@@ -4382,7 +4382,7 @@
                     </a:lnT>
                     <a:lnB w="3175" cap="flat" cmpd="sng" algn="ctr">
                       <a:solidFill>
-                        <a:srgbClr val="E4E0D3"/>
+                        <a:srgbClr val="EADFD6"/>
                       </a:solidFill>
                       <a:prstDash val="solid"/>
                       <a:round/>
@@ -4431,7 +4431,7 @@
                     </a:lnT>
                     <a:lnB w="3175" cap="flat" cmpd="sng" algn="ctr">
                       <a:solidFill>
-                        <a:srgbClr val="E4E0D3"/>
+                        <a:srgbClr val="EADFD6"/>
                       </a:solidFill>
                       <a:prstDash val="solid"/>
                       <a:round/>
@@ -4506,7 +4506,7 @@
                     </a:lnT>
                     <a:lnB w="3175" cap="flat" cmpd="sng" algn="ctr">
                       <a:solidFill>
-                        <a:srgbClr val="E4E0D3"/>
+                        <a:srgbClr val="EADFD6"/>
                       </a:solidFill>
                       <a:prstDash val="solid"/>
                       <a:round/>
@@ -4581,7 +4581,7 @@
                     </a:lnT>
                     <a:lnB w="3175" cap="flat" cmpd="sng" algn="ctr">
                       <a:solidFill>
-                        <a:srgbClr val="E4E0D3"/>
+                        <a:srgbClr val="EADFD6"/>
                       </a:solidFill>
                       <a:prstDash val="solid"/>
                       <a:round/>
@@ -4630,7 +4630,7 @@
                     </a:lnT>
                     <a:lnB w="3175" cap="flat" cmpd="sng" algn="ctr">
                       <a:solidFill>
-                        <a:srgbClr val="E4E0D3"/>
+                        <a:srgbClr val="EADFD6"/>
                       </a:solidFill>
                       <a:prstDash val="solid"/>
                       <a:round/>
@@ -4775,7 +4775,7 @@
                     </a:lnT>
                     <a:lnB w="3175" cap="flat" cmpd="sng" algn="ctr">
                       <a:solidFill>
-                        <a:srgbClr val="E4E0D3"/>
+                        <a:srgbClr val="EADFD6"/>
                       </a:solidFill>
                       <a:prstDash val="solid"/>
                       <a:round/>
@@ -4850,7 +4850,7 @@
                     </a:lnT>
                     <a:lnB w="3175" cap="flat" cmpd="sng" algn="ctr">
                       <a:solidFill>
-                        <a:srgbClr val="E4E0D3"/>
+                        <a:srgbClr val="EADFD6"/>
                       </a:solidFill>
                       <a:prstDash val="solid"/>
                       <a:round/>
@@ -4899,7 +4899,7 @@
                     </a:lnT>
                     <a:lnB w="3175" cap="flat" cmpd="sng" algn="ctr">
                       <a:solidFill>
-                        <a:srgbClr val="E4E0D3"/>
+                        <a:srgbClr val="EADFD6"/>
                       </a:solidFill>
                       <a:prstDash val="solid"/>
                       <a:round/>
@@ -5002,7 +5002,7 @@
                     </a:lnT>
                     <a:lnB w="3175" cap="flat" cmpd="sng" algn="ctr">
                       <a:solidFill>
-                        <a:srgbClr val="E4E0D3"/>
+                        <a:srgbClr val="EADFD6"/>
                       </a:solidFill>
                       <a:prstDash val="solid"/>
                       <a:round/>
@@ -5077,7 +5077,7 @@
                     </a:lnT>
                     <a:lnB w="3175" cap="flat" cmpd="sng" algn="ctr">
                       <a:solidFill>
-                        <a:srgbClr val="E4E0D3"/>
+                        <a:srgbClr val="EADFD6"/>
                       </a:solidFill>
                       <a:prstDash val="solid"/>
                       <a:round/>
@@ -5126,7 +5126,7 @@
                     </a:lnT>
                     <a:lnB w="3175" cap="flat" cmpd="sng" algn="ctr">
                       <a:solidFill>
-                        <a:srgbClr val="E4E0D3"/>
+                        <a:srgbClr val="EADFD6"/>
                       </a:solidFill>
                       <a:prstDash val="solid"/>
                       <a:round/>
@@ -5173,7 +5173,7 @@
                     </a:lnT>
                     <a:lnB w="3175" cap="flat" cmpd="sng" algn="ctr">
                       <a:solidFill>
-                        <a:srgbClr val="E4E0D3"/>
+                        <a:srgbClr val="EADFD6"/>
                       </a:solidFill>
                       <a:prstDash val="solid"/>
                       <a:round/>
@@ -5248,7 +5248,7 @@
                     </a:lnT>
                     <a:lnB w="3175" cap="flat" cmpd="sng" algn="ctr">
                       <a:solidFill>
-                        <a:srgbClr val="E4E0D3"/>
+                        <a:srgbClr val="EADFD6"/>
                       </a:solidFill>
                       <a:prstDash val="solid"/>
                       <a:round/>
@@ -5297,7 +5297,7 @@
                     </a:lnT>
                     <a:lnB w="19050" cap="flat" cmpd="sng" algn="ctr">
                       <a:solidFill>
-                        <a:srgbClr val="7A3A1D"/>
+                        <a:srgbClr val="B4552D"/>
                       </a:solidFill>
                       <a:prstDash val="solid"/>
                       <a:round/>
@@ -5344,7 +5344,7 @@
                     </a:lnT>
                     <a:lnB w="19050" cap="flat" cmpd="sng" algn="ctr">
                       <a:solidFill>
-                        <a:srgbClr val="7A3A1D"/>
+                        <a:srgbClr val="B4552D"/>
                       </a:solidFill>
                       <a:prstDash val="solid"/>
                       <a:round/>
@@ -5391,7 +5391,7 @@
                     </a:lnT>
                     <a:lnB w="19050" cap="flat" cmpd="sng" algn="ctr">
                       <a:solidFill>
-                        <a:srgbClr val="7A3A1D"/>
+                        <a:srgbClr val="B4552D"/>
                       </a:solidFill>
                       <a:prstDash val="solid"/>
                       <a:round/>
@@ -5726,7 +5726,7 @@
             <a:r>
               <a:rPr lang="en-US" sz="2500" b="1" dirty="0">
                 <a:solidFill>
-                  <a:srgbClr val="7A3A1D"/>
+                  <a:srgbClr val="B4552D"/>
                 </a:solidFill>
                 <a:latin typeface="Microsoft YaHei" pitchFamily="34" charset="0"/>
                 <a:ea typeface="Microsoft YaHei" pitchFamily="34" charset="-122"/>
@@ -5743,7 +5743,7 @@
             <a:r>
               <a:rPr lang="en-US" sz="2500" b="1" dirty="0">
                 <a:solidFill>
-                  <a:srgbClr val="7A3A1D"/>
+                  <a:srgbClr val="B4552D"/>
                 </a:solidFill>
                 <a:latin typeface="Arial" pitchFamily="34" charset="0"/>
                 <a:ea typeface="Arial" pitchFamily="34" charset="-122"/>
@@ -5760,7 +5760,7 @@
             <a:r>
               <a:rPr lang="en-US" sz="2500" b="1" dirty="0">
                 <a:solidFill>
-                  <a:srgbClr val="7A3A1D"/>
+                  <a:srgbClr val="B4552D"/>
                 </a:solidFill>
                 <a:latin typeface="Microsoft YaHei" pitchFamily="34" charset="0"/>
                 <a:ea typeface="Microsoft YaHei" pitchFamily="34" charset="-122"/>
@@ -6353,7 +6353,7 @@
             <a:avLst/>
           </a:prstGeom>
           <a:solidFill>
-            <a:srgbClr val="E4E0D3"/>
+            <a:srgbClr val="EADFD6"/>
           </a:solidFill>
           <a:ln/>
         </p:spPr>
@@ -6815,7 +6815,7 @@
             <a:r>
               <a:rPr lang="en-US" sz="2500" b="1" dirty="0">
                 <a:solidFill>
-                  <a:srgbClr val="7A3A1D"/>
+                  <a:srgbClr val="B4552D"/>
                 </a:solidFill>
                 <a:latin typeface="Microsoft YaHei" pitchFamily="34" charset="0"/>
                 <a:ea typeface="Microsoft YaHei" pitchFamily="34" charset="-122"/>
@@ -6842,7 +6842,7 @@
             <a:avLst/>
           </a:prstGeom>
           <a:solidFill>
-            <a:srgbClr val="E4E0D3"/>
+            <a:srgbClr val="EADFD6"/>
           </a:solidFill>
           <a:ln/>
         </p:spPr>
@@ -6874,7 +6874,7 @@
             <a:r>
               <a:rPr lang="en-US" sz="1450" b="1" dirty="0">
                 <a:solidFill>
-                  <a:srgbClr val="7A3A1D"/>
+                  <a:srgbClr val="B4552D"/>
                 </a:solidFill>
                 <a:latin typeface="Microsoft YaHei" pitchFamily="34" charset="0"/>
                 <a:ea typeface="Microsoft YaHei" pitchFamily="34" charset="-122"/>
@@ -6888,7 +6888,7 @@
             <a:r>
               <a:rPr lang="en-US" sz="1450" b="1" dirty="0">
                 <a:solidFill>
-                  <a:srgbClr val="7A3A1D"/>
+                  <a:srgbClr val="B4552D"/>
                 </a:solidFill>
                 <a:latin typeface="Arial" pitchFamily="34" charset="0"/>
                 <a:ea typeface="Arial" pitchFamily="34" charset="-122"/>
@@ -6902,7 +6902,7 @@
             <a:r>
               <a:rPr lang="en-US" sz="1450" b="1" dirty="0">
                 <a:solidFill>
-                  <a:srgbClr val="7A3A1D"/>
+                  <a:srgbClr val="B4552D"/>
                 </a:solidFill>
                 <a:latin typeface="Microsoft YaHei" pitchFamily="34" charset="0"/>
                 <a:ea typeface="Microsoft YaHei" pitchFamily="34" charset="-122"/>
@@ -7022,7 +7022,7 @@
             <a:avLst/>
           </a:prstGeom>
           <a:solidFill>
-            <a:srgbClr val="E4E0D3"/>
+            <a:srgbClr val="EADFD6"/>
           </a:solidFill>
           <a:ln/>
         </p:spPr>
@@ -7054,7 +7054,7 @@
             <a:r>
               <a:rPr lang="en-US" sz="1450" b="1" dirty="0">
                 <a:solidFill>
-                  <a:srgbClr val="7A3A1D"/>
+                  <a:srgbClr val="B4552D"/>
                 </a:solidFill>
                 <a:latin typeface="Microsoft YaHei" pitchFamily="34" charset="0"/>
                 <a:ea typeface="Microsoft YaHei" pitchFamily="34" charset="-122"/>
@@ -7191,7 +7191,7 @@
             <a:avLst/>
           </a:prstGeom>
           <a:solidFill>
-            <a:srgbClr val="7A3A1D"/>
+            <a:srgbClr val="D97757"/>
           </a:solidFill>
           <a:ln/>
         </p:spPr>
@@ -7223,7 +7223,7 @@
             <a:r>
               <a:rPr lang="en-US" sz="3600" b="1" dirty="0">
                 <a:solidFill>
-                  <a:srgbClr val="7A3A1D"/>
+                  <a:srgbClr val="B4552D"/>
                 </a:solidFill>
                 <a:latin typeface="Arial" pitchFamily="34" charset="0"/>
                 <a:ea typeface="Arial" pitchFamily="34" charset="-122"/>
@@ -7317,7 +7317,7 @@
             <a:avLst/>
           </a:prstGeom>
           <a:solidFill>
-            <a:srgbClr val="7A3A1D"/>
+            <a:srgbClr val="D97757"/>
           </a:solidFill>
           <a:ln/>
         </p:spPr>
@@ -7349,7 +7349,7 @@
             <a:r>
               <a:rPr lang="en-US" sz="3600" b="1" dirty="0">
                 <a:solidFill>
-                  <a:srgbClr val="7A3A1D"/>
+                  <a:srgbClr val="B4552D"/>
                 </a:solidFill>
                 <a:latin typeface="Arial" pitchFamily="34" charset="0"/>
                 <a:ea typeface="Arial" pitchFamily="34" charset="-122"/>
@@ -7363,7 +7363,7 @@
             <a:r>
               <a:rPr lang="en-US" sz="3600" b="1" dirty="0">
                 <a:solidFill>
-                  <a:srgbClr val="7A3A1D"/>
+                  <a:srgbClr val="B4552D"/>
                 </a:solidFill>
                 <a:latin typeface="Microsoft YaHei" pitchFamily="34" charset="0"/>
                 <a:ea typeface="Microsoft YaHei" pitchFamily="34" charset="-122"/>
@@ -7904,7 +7904,7 @@
             <a:r>
               <a:rPr lang="en-US" sz="2500" b="1" dirty="0">
                 <a:solidFill>
-                  <a:srgbClr val="7A3A1D"/>
+                  <a:srgbClr val="B4552D"/>
                 </a:solidFill>
                 <a:latin typeface="Microsoft YaHei" pitchFamily="34" charset="0"/>
                 <a:ea typeface="Microsoft YaHei" pitchFamily="34" charset="-122"/>
@@ -7921,7 +7921,7 @@
             <a:r>
               <a:rPr lang="en-US" sz="2500" b="1" dirty="0">
                 <a:solidFill>
-                  <a:srgbClr val="7A3A1D"/>
+                  <a:srgbClr val="B4552D"/>
                 </a:solidFill>
                 <a:latin typeface="Arial" pitchFamily="34" charset="0"/>
                 <a:ea typeface="Arial" pitchFamily="34" charset="-122"/>
@@ -7938,7 +7938,7 @@
             <a:r>
               <a:rPr lang="en-US" sz="2500" b="1" dirty="0">
                 <a:solidFill>
-                  <a:srgbClr val="7A3A1D"/>
+                  <a:srgbClr val="B4552D"/>
                 </a:solidFill>
                 <a:latin typeface="Microsoft YaHei" pitchFamily="34" charset="0"/>
                 <a:ea typeface="Microsoft YaHei" pitchFamily="34" charset="-122"/>
@@ -7955,7 +7955,7 @@
             <a:r>
               <a:rPr lang="en-US" sz="2500" b="1" dirty="0">
                 <a:solidFill>
-                  <a:srgbClr val="7A3A1D"/>
+                  <a:srgbClr val="B4552D"/>
                 </a:solidFill>
                 <a:latin typeface="Arial" pitchFamily="34" charset="0"/>
                 <a:ea typeface="Arial" pitchFamily="34" charset="-122"/>
@@ -7972,7 +7972,7 @@
             <a:r>
               <a:rPr lang="en-US" sz="2500" b="1" dirty="0">
                 <a:solidFill>
-                  <a:srgbClr val="7A3A1D"/>
+                  <a:srgbClr val="B4552D"/>
                 </a:solidFill>
                 <a:latin typeface="Microsoft YaHei" pitchFamily="34" charset="0"/>
                 <a:ea typeface="Microsoft YaHei" pitchFamily="34" charset="-122"/>
@@ -8234,7 +8234,7 @@
             <a:avLst/>
           </a:prstGeom>
           <a:solidFill>
-            <a:srgbClr val="E4E0D3"/>
+            <a:srgbClr val="EADFD6"/>
           </a:solidFill>
           <a:ln/>
         </p:spPr>
@@ -8381,7 +8381,7 @@
             <a:avLst/>
           </a:prstGeom>
           <a:solidFill>
-            <a:srgbClr val="E4E0D3"/>
+            <a:srgbClr val="EADFD6"/>
           </a:solidFill>
           <a:ln/>
         </p:spPr>
@@ -9003,7 +9003,7 @@
             <a:r>
               <a:rPr lang="en-US" sz="2500" b="1" dirty="0">
                 <a:solidFill>
-                  <a:srgbClr val="7A3A1D"/>
+                  <a:srgbClr val="B4552D"/>
                 </a:solidFill>
                 <a:latin typeface="Microsoft YaHei" pitchFamily="34" charset="0"/>
                 <a:ea typeface="Microsoft YaHei" pitchFamily="34" charset="-122"/>
@@ -9583,7 +9583,7 @@
             <a:r>
               <a:rPr lang="en-US" sz="9600" b="1" dirty="0">
                 <a:solidFill>
-                  <a:srgbClr val="F3E3D8"/>
+                  <a:srgbClr val="F7E7DE"/>
                 </a:solidFill>
                 <a:latin typeface="Arial" pitchFamily="34" charset="0"/>
                 <a:ea typeface="Arial" pitchFamily="34" charset="-122"/>
@@ -9681,7 +9681,7 @@
             <a:r>
               <a:rPr lang="en-US" sz="3000" b="1" dirty="0">
                 <a:solidFill>
-                  <a:srgbClr val="7A3A1D"/>
+                  <a:srgbClr val="B4552D"/>
                 </a:solidFill>
                 <a:latin typeface="Microsoft YaHei" pitchFamily="34" charset="0"/>
                 <a:ea typeface="Microsoft YaHei" pitchFamily="34" charset="-122"/>
@@ -9750,7 +9750,7 @@
             <a:avLst/>
           </a:prstGeom>
           <a:solidFill>
-            <a:srgbClr val="E4E0D3"/>
+            <a:srgbClr val="EADFD6"/>
           </a:solidFill>
           <a:ln/>
         </p:spPr>
@@ -9782,7 +9782,7 @@
             <a:r>
               <a:rPr lang="en-US" sz="1400" b="1" dirty="0">
                 <a:solidFill>
-                  <a:srgbClr val="7A3A1D"/>
+                  <a:srgbClr val="B4552D"/>
                 </a:solidFill>
                 <a:latin typeface="Microsoft YaHei" pitchFamily="34" charset="0"/>
                 <a:ea typeface="Microsoft YaHei" pitchFamily="34" charset="-122"/>
@@ -9851,7 +9851,7 @@
             <a:avLst/>
           </a:prstGeom>
           <a:solidFill>
-            <a:srgbClr val="E4E0D3"/>
+            <a:srgbClr val="EADFD6"/>
           </a:solidFill>
           <a:ln/>
         </p:spPr>
@@ -9883,7 +9883,7 @@
             <a:r>
               <a:rPr lang="en-US" sz="1400" b="1" dirty="0">
                 <a:solidFill>
-                  <a:srgbClr val="7A3A1D"/>
+                  <a:srgbClr val="B4552D"/>
                 </a:solidFill>
                 <a:latin typeface="Microsoft YaHei" pitchFamily="34" charset="0"/>
                 <a:ea typeface="Microsoft YaHei" pitchFamily="34" charset="-122"/>
@@ -9952,7 +9952,7 @@
             <a:avLst/>
           </a:prstGeom>
           <a:solidFill>
-            <a:srgbClr val="E4E0D3"/>
+            <a:srgbClr val="EADFD6"/>
           </a:solidFill>
           <a:ln/>
         </p:spPr>
@@ -9984,7 +9984,7 @@
             <a:r>
               <a:rPr lang="en-US" sz="1400" b="1" dirty="0">
                 <a:solidFill>
-                  <a:srgbClr val="7A3A1D"/>
+                  <a:srgbClr val="B4552D"/>
                 </a:solidFill>
                 <a:latin typeface="Microsoft YaHei" pitchFamily="34" charset="0"/>
                 <a:ea typeface="Microsoft YaHei" pitchFamily="34" charset="-122"/>
@@ -10495,7 +10495,7 @@
             <a:r>
               <a:rPr lang="en-US" sz="2500" b="1" dirty="0">
                 <a:solidFill>
-                  <a:srgbClr val="7A3A1D"/>
+                  <a:srgbClr val="B4552D"/>
                 </a:solidFill>
                 <a:latin typeface="Microsoft YaHei" pitchFamily="34" charset="0"/>
                 <a:ea typeface="Microsoft YaHei" pitchFamily="34" charset="-122"/>
@@ -10793,7 +10793,7 @@
             <a:avLst/>
           </a:prstGeom>
           <a:solidFill>
-            <a:srgbClr val="E4E0D3"/>
+            <a:srgbClr val="EADFD6"/>
           </a:solidFill>
           <a:ln/>
         </p:spPr>
@@ -10906,7 +10906,7 @@
             <a:avLst/>
           </a:prstGeom>
           <a:solidFill>
-            <a:srgbClr val="E4E0D3"/>
+            <a:srgbClr val="EADFD6"/>
           </a:solidFill>
           <a:ln/>
         </p:spPr>
@@ -11418,7 +11418,7 @@
             <a:r>
               <a:rPr lang="en-US" sz="2500" b="1" dirty="0">
                 <a:solidFill>
-                  <a:srgbClr val="7A3A1D"/>
+                  <a:srgbClr val="B4552D"/>
                 </a:solidFill>
                 <a:latin typeface="Microsoft YaHei" pitchFamily="34" charset="0"/>
                 <a:ea typeface="Microsoft YaHei" pitchFamily="34" charset="-122"/>
@@ -11445,7 +11445,7 @@
             <a:avLst/>
           </a:prstGeom>
           <a:solidFill>
-            <a:srgbClr val="E4E0D3"/>
+            <a:srgbClr val="EADFD6"/>
           </a:solidFill>
           <a:ln/>
         </p:spPr>
@@ -11469,7 +11469,7 @@
           </a:solidFill>
           <a:ln w="17780">
             <a:solidFill>
-              <a:srgbClr val="7A3A1D"/>
+              <a:srgbClr val="B4552D"/>
             </a:solidFill>
             <a:prstDash val="solid"/>
           </a:ln>
@@ -11502,7 +11502,7 @@
             <a:r>
               <a:rPr lang="en-US" sz="1500" b="1" dirty="0">
                 <a:solidFill>
-                  <a:srgbClr val="7A3A1D"/>
+                  <a:srgbClr val="B4552D"/>
                 </a:solidFill>
                 <a:latin typeface="Arial" pitchFamily="34" charset="0"/>
                 <a:ea typeface="Arial" pitchFamily="34" charset="-122"/>
@@ -11541,7 +11541,7 @@
             <a:r>
               <a:rPr lang="en-US" sz="1400" b="1" dirty="0">
                 <a:solidFill>
-                  <a:srgbClr val="7A3A1D"/>
+                  <a:srgbClr val="B4552D"/>
                 </a:solidFill>
                 <a:latin typeface="Microsoft YaHei" pitchFamily="34" charset="0"/>
                 <a:ea typeface="Microsoft YaHei" pitchFamily="34" charset="-122"/>
@@ -11555,7 +11555,7 @@
             <a:r>
               <a:rPr lang="en-US" sz="1400" b="1" dirty="0">
                 <a:solidFill>
-                  <a:srgbClr val="7A3A1D"/>
+                  <a:srgbClr val="B4552D"/>
                 </a:solidFill>
                 <a:latin typeface="Arial" pitchFamily="34" charset="0"/>
                 <a:ea typeface="Arial" pitchFamily="34" charset="-122"/>
@@ -11569,7 +11569,7 @@
             <a:r>
               <a:rPr lang="en-US" sz="1400" b="1" dirty="0">
                 <a:solidFill>
-                  <a:srgbClr val="7A3A1D"/>
+                  <a:srgbClr val="B4552D"/>
                 </a:solidFill>
                 <a:latin typeface="Microsoft YaHei" pitchFamily="34" charset="0"/>
                 <a:ea typeface="Microsoft YaHei" pitchFamily="34" charset="-122"/>
@@ -11642,7 +11642,7 @@
           </a:solidFill>
           <a:ln w="17780">
             <a:solidFill>
-              <a:srgbClr val="7A3A1D"/>
+              <a:srgbClr val="B4552D"/>
             </a:solidFill>
             <a:prstDash val="solid"/>
           </a:ln>
@@ -11675,7 +11675,7 @@
             <a:r>
               <a:rPr lang="en-US" sz="1500" b="1" dirty="0">
                 <a:solidFill>
-                  <a:srgbClr val="7A3A1D"/>
+                  <a:srgbClr val="B4552D"/>
                 </a:solidFill>
                 <a:latin typeface="Arial" pitchFamily="34" charset="0"/>
                 <a:ea typeface="Arial" pitchFamily="34" charset="-122"/>
@@ -11714,7 +11714,7 @@
             <a:r>
               <a:rPr lang="en-US" sz="1400" b="1" dirty="0">
                 <a:solidFill>
-                  <a:srgbClr val="7A3A1D"/>
+                  <a:srgbClr val="B4552D"/>
                 </a:solidFill>
                 <a:latin typeface="Microsoft YaHei" pitchFamily="34" charset="0"/>
                 <a:ea typeface="Microsoft YaHei" pitchFamily="34" charset="-122"/>
@@ -11728,7 +11728,7 @@
             <a:r>
               <a:rPr lang="en-US" sz="1400" b="1" dirty="0">
                 <a:solidFill>
-                  <a:srgbClr val="7A3A1D"/>
+                  <a:srgbClr val="B4552D"/>
                 </a:solidFill>
                 <a:latin typeface="Arial" pitchFamily="34" charset="0"/>
                 <a:ea typeface="Arial" pitchFamily="34" charset="-122"/>
@@ -11742,7 +11742,7 @@
             <a:r>
               <a:rPr lang="en-US" sz="1400" b="1" dirty="0">
                 <a:solidFill>
-                  <a:srgbClr val="7A3A1D"/>
+                  <a:srgbClr val="B4552D"/>
                 </a:solidFill>
                 <a:latin typeface="Microsoft YaHei" pitchFamily="34" charset="0"/>
                 <a:ea typeface="Microsoft YaHei" pitchFamily="34" charset="-122"/>
@@ -11904,7 +11904,7 @@
             <a:avLst/>
           </a:prstGeom>
           <a:solidFill>
-            <a:srgbClr val="E4E0D3"/>
+            <a:srgbClr val="EADFD6"/>
           </a:solidFill>
           <a:ln/>
         </p:spPr>
@@ -12543,7 +12543,7 @@
             <a:r>
               <a:rPr lang="en-US" sz="2500" b="1" dirty="0">
                 <a:solidFill>
-                  <a:srgbClr val="7A3A1D"/>
+                  <a:srgbClr val="B4552D"/>
                 </a:solidFill>
                 <a:latin typeface="Microsoft YaHei" pitchFamily="34" charset="0"/>
                 <a:ea typeface="Microsoft YaHei" pitchFamily="34" charset="-122"/>
@@ -13163,7 +13163,7 @@
             <a:r>
               <a:rPr lang="en-US" sz="3000" b="1" spc="600" kern="0" dirty="0">
                 <a:solidFill>
-                  <a:srgbClr val="7A3A1D"/>
+                  <a:srgbClr val="B4552D"/>
                 </a:solidFill>
                 <a:latin typeface="Microsoft YaHei" pitchFamily="34" charset="0"/>
                 <a:ea typeface="Microsoft YaHei" pitchFamily="34" charset="-122"/>
@@ -13177,7 +13177,7 @@
             <a:r>
               <a:rPr lang="en-US" sz="3000" b="1" spc="600" kern="0" dirty="0">
                 <a:solidFill>
-                  <a:srgbClr val="7A3A1D"/>
+                  <a:srgbClr val="B4552D"/>
                 </a:solidFill>
                 <a:latin typeface="Arial" pitchFamily="34" charset="0"/>
                 <a:ea typeface="Arial" pitchFamily="34" charset="-122"/>
@@ -13191,7 +13191,7 @@
             <a:r>
               <a:rPr lang="en-US" sz="3000" b="1" spc="600" kern="0" dirty="0">
                 <a:solidFill>
-                  <a:srgbClr val="7A3A1D"/>
+                  <a:srgbClr val="B4552D"/>
                 </a:solidFill>
                 <a:latin typeface="Microsoft YaHei" pitchFamily="34" charset="0"/>
                 <a:ea typeface="Microsoft YaHei" pitchFamily="34" charset="-122"/>
@@ -13355,7 +13355,7 @@
             <a:avLst/>
           </a:prstGeom>
           <a:solidFill>
-            <a:srgbClr val="E4E0D3"/>
+            <a:srgbClr val="EADFD6"/>
           </a:solidFill>
           <a:ln/>
         </p:spPr>
@@ -13492,7 +13492,7 @@
             <a:avLst/>
           </a:prstGeom>
           <a:solidFill>
-            <a:srgbClr val="E4E0D3"/>
+            <a:srgbClr val="EADFD6"/>
           </a:solidFill>
           <a:ln/>
         </p:spPr>
@@ -13629,7 +13629,7 @@
             <a:avLst/>
           </a:prstGeom>
           <a:solidFill>
-            <a:srgbClr val="E4E0D3"/>
+            <a:srgbClr val="EADFD6"/>
           </a:solidFill>
           <a:ln/>
         </p:spPr>
@@ -13936,7 +13936,7 @@
             <a:r>
               <a:rPr lang="en-US" sz="3000" b="1" spc="600" kern="0" dirty="0">
                 <a:solidFill>
-                  <a:srgbClr val="7A3A1D"/>
+                  <a:srgbClr val="B4552D"/>
                 </a:solidFill>
                 <a:latin typeface="Microsoft YaHei" pitchFamily="34" charset="0"/>
                 <a:ea typeface="Microsoft YaHei" pitchFamily="34" charset="-122"/>
@@ -13950,7 +13950,7 @@
             <a:r>
               <a:rPr lang="en-US" sz="3000" b="1" spc="600" kern="0" dirty="0">
                 <a:solidFill>
-                  <a:srgbClr val="7A3A1D"/>
+                  <a:srgbClr val="B4552D"/>
                 </a:solidFill>
                 <a:latin typeface="Arial" pitchFamily="34" charset="0"/>
                 <a:ea typeface="Arial" pitchFamily="34" charset="-122"/>
@@ -13964,7 +13964,7 @@
             <a:r>
               <a:rPr lang="en-US" sz="3000" b="1" spc="600" kern="0" dirty="0">
                 <a:solidFill>
-                  <a:srgbClr val="7A3A1D"/>
+                  <a:srgbClr val="B4552D"/>
                 </a:solidFill>
                 <a:latin typeface="Microsoft YaHei" pitchFamily="34" charset="0"/>
                 <a:ea typeface="Microsoft YaHei" pitchFamily="34" charset="-122"/>
@@ -14011,7 +14011,7 @@
             <a:avLst/>
           </a:prstGeom>
           <a:solidFill>
-            <a:srgbClr val="E4E0D3"/>
+            <a:srgbClr val="EADFD6"/>
           </a:solidFill>
           <a:ln/>
         </p:spPr>
@@ -14240,7 +14240,7 @@
             <a:avLst/>
           </a:prstGeom>
           <a:solidFill>
-            <a:srgbClr val="E4E0D3"/>
+            <a:srgbClr val="EADFD6"/>
           </a:solidFill>
           <a:ln/>
         </p:spPr>
@@ -14377,7 +14377,7 @@
             <a:avLst/>
           </a:prstGeom>
           <a:solidFill>
-            <a:srgbClr val="7A3A1D"/>
+            <a:srgbClr val="D97757"/>
           </a:solidFill>
           <a:ln/>
         </p:spPr>
@@ -14612,7 +14612,7 @@
             <a:r>
               <a:rPr lang="en-US" sz="3400" b="1" dirty="0">
                 <a:solidFill>
-                  <a:srgbClr val="7A3A1D"/>
+                  <a:srgbClr val="B4552D"/>
                 </a:solidFill>
                 <a:latin typeface="Microsoft YaHei" pitchFamily="34" charset="0"/>
                 <a:ea typeface="Microsoft YaHei" pitchFamily="34" charset="-122"/>
@@ -14639,7 +14639,7 @@
             <a:avLst/>
           </a:prstGeom>
           <a:solidFill>
-            <a:srgbClr val="7A3A1D"/>
+            <a:srgbClr val="B4552D"/>
           </a:solidFill>
           <a:ln/>
         </p:spPr>
@@ -14701,7 +14701,7 @@
             <a:avLst/>
           </a:prstGeom>
           <a:solidFill>
-            <a:srgbClr val="7A3A1D"/>
+            <a:srgbClr val="D97757"/>
           </a:solidFill>
           <a:ln/>
         </p:spPr>
@@ -14721,7 +14721,7 @@
             <a:avLst/>
           </a:prstGeom>
           <a:solidFill>
-            <a:srgbClr val="E4E0D3"/>
+            <a:srgbClr val="EADFD6"/>
           </a:solidFill>
           <a:ln/>
         </p:spPr>
@@ -14741,7 +14741,7 @@
             <a:avLst/>
           </a:prstGeom>
           <a:solidFill>
-            <a:srgbClr val="EAE6D8"/>
+            <a:srgbClr val="F0E2D9"/>
           </a:solidFill>
           <a:ln/>
         </p:spPr>
@@ -14917,7 +14917,7 @@
             <a:avLst/>
           </a:prstGeom>
           <a:solidFill>
-            <a:srgbClr val="7A3A1D"/>
+            <a:srgbClr val="D97757"/>
           </a:solidFill>
           <a:ln/>
         </p:spPr>
@@ -14977,7 +14977,7 @@
             <a:r>
               <a:rPr lang="en-US" sz="9600" b="1" dirty="0">
                 <a:solidFill>
-                  <a:srgbClr val="F3E3D8"/>
+                  <a:srgbClr val="F7E7DE"/>
                 </a:solidFill>
                 <a:latin typeface="Arial" pitchFamily="34" charset="0"/>
                 <a:ea typeface="Arial" pitchFamily="34" charset="-122"/>
@@ -15075,7 +15075,7 @@
             <a:r>
               <a:rPr lang="en-US" sz="3000" b="1" dirty="0">
                 <a:solidFill>
-                  <a:srgbClr val="7A3A1D"/>
+                  <a:srgbClr val="B4552D"/>
                 </a:solidFill>
                 <a:latin typeface="Microsoft YaHei" pitchFamily="34" charset="0"/>
                 <a:ea typeface="Microsoft YaHei" pitchFamily="34" charset="-122"/>
@@ -15144,7 +15144,7 @@
             <a:avLst/>
           </a:prstGeom>
           <a:solidFill>
-            <a:srgbClr val="E4E0D3"/>
+            <a:srgbClr val="EADFD6"/>
           </a:solidFill>
           <a:ln/>
         </p:spPr>
@@ -15176,7 +15176,7 @@
             <a:r>
               <a:rPr lang="en-US" sz="1400" b="1" dirty="0">
                 <a:solidFill>
-                  <a:srgbClr val="7A3A1D"/>
+                  <a:srgbClr val="B4552D"/>
                 </a:solidFill>
                 <a:latin typeface="Microsoft YaHei" pitchFamily="34" charset="0"/>
                 <a:ea typeface="Microsoft YaHei" pitchFamily="34" charset="-122"/>
@@ -15245,7 +15245,7 @@
             <a:avLst/>
           </a:prstGeom>
           <a:solidFill>
-            <a:srgbClr val="E4E0D3"/>
+            <a:srgbClr val="EADFD6"/>
           </a:solidFill>
           <a:ln/>
         </p:spPr>
@@ -15277,7 +15277,7 @@
             <a:r>
               <a:rPr lang="en-US" sz="1400" b="1" dirty="0">
                 <a:solidFill>
-                  <a:srgbClr val="7A3A1D"/>
+                  <a:srgbClr val="B4552D"/>
                 </a:solidFill>
                 <a:latin typeface="Microsoft YaHei" pitchFamily="34" charset="0"/>
                 <a:ea typeface="Microsoft YaHei" pitchFamily="34" charset="-122"/>
@@ -15346,7 +15346,7 @@
             <a:avLst/>
           </a:prstGeom>
           <a:solidFill>
-            <a:srgbClr val="E4E0D3"/>
+            <a:srgbClr val="EADFD6"/>
           </a:solidFill>
           <a:ln/>
         </p:spPr>
@@ -15378,7 +15378,7 @@
             <a:r>
               <a:rPr lang="en-US" sz="1400" b="1" dirty="0">
                 <a:solidFill>
-                  <a:srgbClr val="7A3A1D"/>
+                  <a:srgbClr val="B4552D"/>
                 </a:solidFill>
                 <a:latin typeface="Microsoft YaHei" pitchFamily="34" charset="0"/>
                 <a:ea typeface="Microsoft YaHei" pitchFamily="34" charset="-122"/>
@@ -15889,7 +15889,7 @@
             <a:r>
               <a:rPr lang="en-US" sz="2500" b="1" dirty="0">
                 <a:solidFill>
-                  <a:srgbClr val="7A3A1D"/>
+                  <a:srgbClr val="B4552D"/>
                 </a:solidFill>
                 <a:latin typeface="Microsoft YaHei" pitchFamily="34" charset="0"/>
                 <a:ea typeface="Microsoft YaHei" pitchFamily="34" charset="-122"/>
@@ -16026,7 +16026,7 @@
             <a:avLst/>
           </a:prstGeom>
           <a:solidFill>
-            <a:srgbClr val="E4E0D3"/>
+            <a:srgbClr val="EADFD6"/>
           </a:solidFill>
           <a:ln/>
         </p:spPr>
@@ -16190,7 +16190,7 @@
             <a:avLst/>
           </a:prstGeom>
           <a:solidFill>
-            <a:srgbClr val="E4E0D3"/>
+            <a:srgbClr val="EADFD6"/>
           </a:solidFill>
           <a:ln/>
         </p:spPr>
@@ -16381,7 +16381,7 @@
             <a:r>
               <a:rPr lang="en-US" sz="1200" b="1" dirty="0">
                 <a:solidFill>
-                  <a:srgbClr val="7A3A1D"/>
+                  <a:srgbClr val="B4552D"/>
                 </a:solidFill>
                 <a:latin typeface="Arial" pitchFamily="34" charset="0"/>
                 <a:ea typeface="Arial" pitchFamily="34" charset="-122"/>
@@ -16415,7 +16415,7 @@
             <a:r>
               <a:rPr lang="en-US" sz="1200" b="1" dirty="0">
                 <a:solidFill>
-                  <a:srgbClr val="7A3A1D"/>
+                  <a:srgbClr val="B4552D"/>
                 </a:solidFill>
                 <a:latin typeface="Arial" pitchFamily="34" charset="0"/>
                 <a:ea typeface="Arial" pitchFamily="34" charset="-122"/>
@@ -16449,7 +16449,7 @@
             <a:r>
               <a:rPr lang="en-US" sz="1200" b="1" dirty="0">
                 <a:solidFill>
-                  <a:srgbClr val="7A3A1D"/>
+                  <a:srgbClr val="B4552D"/>
                 </a:solidFill>
                 <a:latin typeface="Arial" pitchFamily="34" charset="0"/>
                 <a:ea typeface="Arial" pitchFamily="34" charset="-122"/>
@@ -16676,7 +16676,7 @@
             <a:avLst/>
           </a:prstGeom>
           <a:solidFill>
-            <a:srgbClr val="7A3A1D"/>
+            <a:srgbClr val="D97757"/>
           </a:solidFill>
           <a:ln/>
         </p:spPr>
@@ -16708,7 +16708,7 @@
             <a:r>
               <a:rPr lang="en-US" sz="3600" b="1" dirty="0">
                 <a:solidFill>
-                  <a:srgbClr val="7A3A1D"/>
+                  <a:srgbClr val="B4552D"/>
                 </a:solidFill>
                 <a:latin typeface="Arial" pitchFamily="34" charset="0"/>
                 <a:ea typeface="Arial" pitchFamily="34" charset="-122"/>
@@ -16774,7 +16774,7 @@
             <a:avLst/>
           </a:prstGeom>
           <a:solidFill>
-            <a:srgbClr val="7A3A1D"/>
+            <a:srgbClr val="D97757"/>
           </a:solidFill>
           <a:ln/>
         </p:spPr>
@@ -16806,7 +16806,7 @@
             <a:r>
               <a:rPr lang="en-US" sz="3600" b="1" dirty="0">
                 <a:solidFill>
-                  <a:srgbClr val="7A3A1D"/>
+                  <a:srgbClr val="B4552D"/>
                 </a:solidFill>
                 <a:latin typeface="Arial" pitchFamily="34" charset="0"/>
                 <a:ea typeface="Arial" pitchFamily="34" charset="-122"/>
@@ -16820,7 +16820,7 @@
             <a:r>
               <a:rPr lang="en-US" sz="3600" b="1" dirty="0">
                 <a:solidFill>
-                  <a:srgbClr val="7A3A1D"/>
+                  <a:srgbClr val="B4552D"/>
                 </a:solidFill>
                 <a:latin typeface="Microsoft YaHei" pitchFamily="34" charset="0"/>
                 <a:ea typeface="Microsoft YaHei" pitchFamily="34" charset="-122"/>
@@ -16886,7 +16886,7 @@
             <a:avLst/>
           </a:prstGeom>
           <a:solidFill>
-            <a:srgbClr val="7A3A1D"/>
+            <a:srgbClr val="D97757"/>
           </a:solidFill>
           <a:ln/>
         </p:spPr>
@@ -16918,7 +16918,7 @@
             <a:r>
               <a:rPr lang="en-US" sz="3600" b="1" dirty="0">
                 <a:solidFill>
-                  <a:srgbClr val="7A3A1D"/>
+                  <a:srgbClr val="B4552D"/>
                 </a:solidFill>
                 <a:latin typeface="Arial" pitchFamily="34" charset="0"/>
                 <a:ea typeface="Arial" pitchFamily="34" charset="-122"/>
@@ -16932,7 +16932,7 @@
             <a:r>
               <a:rPr lang="en-US" sz="3600" b="1" dirty="0">
                 <a:solidFill>
-                  <a:srgbClr val="7A3A1D"/>
+                  <a:srgbClr val="B4552D"/>
                 </a:solidFill>
                 <a:latin typeface="Microsoft YaHei" pitchFamily="34" charset="0"/>
                 <a:ea typeface="Microsoft YaHei" pitchFamily="34" charset="-122"/>
@@ -17228,7 +17228,7 @@
             <a:r>
               <a:rPr lang="en-US" sz="2500" b="1" dirty="0">
                 <a:solidFill>
-                  <a:srgbClr val="7A3A1D"/>
+                  <a:srgbClr val="B4552D"/>
                 </a:solidFill>
                 <a:latin typeface="Microsoft YaHei" pitchFamily="34" charset="0"/>
                 <a:ea typeface="Microsoft YaHei" pitchFamily="34" charset="-122"/>
@@ -17245,7 +17245,7 @@
             <a:r>
               <a:rPr lang="en-US" sz="2500" b="1" dirty="0">
                 <a:solidFill>
-                  <a:srgbClr val="7A3A1D"/>
+                  <a:srgbClr val="B4552D"/>
                 </a:solidFill>
                 <a:latin typeface="Arial" pitchFamily="34" charset="0"/>
                 <a:ea typeface="Arial" pitchFamily="34" charset="-122"/>
@@ -17262,7 +17262,7 @@
             <a:r>
               <a:rPr lang="en-US" sz="2500" b="1" dirty="0">
                 <a:solidFill>
-                  <a:srgbClr val="7A3A1D"/>
+                  <a:srgbClr val="B4552D"/>
                 </a:solidFill>
                 <a:latin typeface="Microsoft YaHei" pitchFamily="34" charset="0"/>
                 <a:ea typeface="Microsoft YaHei" pitchFamily="34" charset="-122"/>
@@ -17279,7 +17279,7 @@
             <a:r>
               <a:rPr lang="en-US" sz="2500" b="1" dirty="0">
                 <a:solidFill>
-                  <a:srgbClr val="7A3A1D"/>
+                  <a:srgbClr val="B4552D"/>
                 </a:solidFill>
                 <a:latin typeface="Arial" pitchFamily="34" charset="0"/>
                 <a:ea typeface="Arial" pitchFamily="34" charset="-122"/>
@@ -17296,7 +17296,7 @@
             <a:r>
               <a:rPr lang="en-US" sz="2500" b="1" dirty="0">
                 <a:solidFill>
-                  <a:srgbClr val="7A3A1D"/>
+                  <a:srgbClr val="B4552D"/>
                 </a:solidFill>
                 <a:latin typeface="Microsoft YaHei" pitchFamily="34" charset="0"/>
                 <a:ea typeface="Microsoft YaHei" pitchFamily="34" charset="-122"/>
@@ -17313,7 +17313,7 @@
             <a:r>
               <a:rPr lang="en-US" sz="2500" b="1" dirty="0">
                 <a:solidFill>
-                  <a:srgbClr val="7A3A1D"/>
+                  <a:srgbClr val="B4552D"/>
                 </a:solidFill>
                 <a:latin typeface="Arial" pitchFamily="34" charset="0"/>
                 <a:ea typeface="Arial" pitchFamily="34" charset="-122"/>
@@ -17330,7 +17330,7 @@
             <a:r>
               <a:rPr lang="en-US" sz="2500" b="1" dirty="0">
                 <a:solidFill>
-                  <a:srgbClr val="7A3A1D"/>
+                  <a:srgbClr val="B4552D"/>
                 </a:solidFill>
                 <a:latin typeface="Microsoft YaHei" pitchFamily="34" charset="0"/>
                 <a:ea typeface="Microsoft YaHei" pitchFamily="34" charset="-122"/>
@@ -17884,7 +17884,7 @@
             <a:r>
               <a:rPr lang="en-US" sz="9600" b="1" dirty="0">
                 <a:solidFill>
-                  <a:srgbClr val="F3E3D8"/>
+                  <a:srgbClr val="F7E7DE"/>
                 </a:solidFill>
                 <a:latin typeface="Arial" pitchFamily="34" charset="0"/>
                 <a:ea typeface="Arial" pitchFamily="34" charset="-122"/>
@@ -17982,7 +17982,7 @@
             <a:r>
               <a:rPr lang="en-US" sz="3000" b="1" dirty="0">
                 <a:solidFill>
-                  <a:srgbClr val="7A3A1D"/>
+                  <a:srgbClr val="B4552D"/>
                 </a:solidFill>
                 <a:latin typeface="Microsoft YaHei" pitchFamily="34" charset="0"/>
                 <a:ea typeface="Microsoft YaHei" pitchFamily="34" charset="-122"/>
@@ -18051,7 +18051,7 @@
             <a:avLst/>
           </a:prstGeom>
           <a:solidFill>
-            <a:srgbClr val="E4E0D3"/>
+            <a:srgbClr val="EADFD6"/>
           </a:solidFill>
           <a:ln/>
         </p:spPr>
@@ -18083,7 +18083,7 @@
             <a:r>
               <a:rPr lang="en-US" sz="1400" b="1" dirty="0">
                 <a:solidFill>
-                  <a:srgbClr val="7A3A1D"/>
+                  <a:srgbClr val="B4552D"/>
                 </a:solidFill>
                 <a:latin typeface="Microsoft YaHei" pitchFamily="34" charset="0"/>
                 <a:ea typeface="Microsoft YaHei" pitchFamily="34" charset="-122"/>
@@ -18186,7 +18186,7 @@
             <a:avLst/>
           </a:prstGeom>
           <a:solidFill>
-            <a:srgbClr val="E4E0D3"/>
+            <a:srgbClr val="EADFD6"/>
           </a:solidFill>
           <a:ln/>
         </p:spPr>
@@ -18218,7 +18218,7 @@
             <a:r>
               <a:rPr lang="en-US" sz="1400" b="1" dirty="0">
                 <a:solidFill>
-                  <a:srgbClr val="7A3A1D"/>
+                  <a:srgbClr val="B4552D"/>
                 </a:solidFill>
                 <a:latin typeface="Microsoft YaHei" pitchFamily="34" charset="0"/>
                 <a:ea typeface="Microsoft YaHei" pitchFamily="34" charset="-122"/>
@@ -18287,7 +18287,7 @@
             <a:avLst/>
           </a:prstGeom>
           <a:solidFill>
-            <a:srgbClr val="E4E0D3"/>
+            <a:srgbClr val="EADFD6"/>
           </a:solidFill>
           <a:ln/>
         </p:spPr>
@@ -18319,7 +18319,7 @@
             <a:r>
               <a:rPr lang="en-US" sz="1400" b="1" dirty="0">
                 <a:solidFill>
-                  <a:srgbClr val="7A3A1D"/>
+                  <a:srgbClr val="B4552D"/>
                 </a:solidFill>
                 <a:latin typeface="Microsoft YaHei" pitchFamily="34" charset="0"/>
                 <a:ea typeface="Microsoft YaHei" pitchFamily="34" charset="-122"/>
@@ -18830,7 +18830,7 @@
             <a:r>
               <a:rPr lang="en-US" sz="2500" b="1" dirty="0">
                 <a:solidFill>
-                  <a:srgbClr val="7A3A1D"/>
+                  <a:srgbClr val="B4552D"/>
                 </a:solidFill>
                 <a:latin typeface="Microsoft YaHei" pitchFamily="34" charset="0"/>
                 <a:ea typeface="Microsoft YaHei" pitchFamily="34" charset="-122"/>
@@ -18952,7 +18952,7 @@
             <a:r>
               <a:rPr lang="en-US" sz="1200" b="1" dirty="0">
                 <a:solidFill>
-                  <a:srgbClr val="7A3A1D"/>
+                  <a:srgbClr val="B4552D"/>
                 </a:solidFill>
                 <a:latin typeface="Arial" pitchFamily="34" charset="0"/>
                 <a:ea typeface="Arial" pitchFamily="34" charset="-122"/>
@@ -18986,7 +18986,7 @@
             <a:r>
               <a:rPr lang="en-US" sz="1200" b="1" dirty="0">
                 <a:solidFill>
-                  <a:srgbClr val="7A3A1D"/>
+                  <a:srgbClr val="B4552D"/>
                 </a:solidFill>
                 <a:latin typeface="Arial" pitchFamily="34" charset="0"/>
                 <a:ea typeface="Arial" pitchFamily="34" charset="-122"/>
@@ -19159,7 +19159,7 @@
             <a:r>
               <a:rPr lang="en-US" sz="1200" b="1" dirty="0">
                 <a:solidFill>
-                  <a:srgbClr val="7A3A1D"/>
+                  <a:srgbClr val="B4552D"/>
                 </a:solidFill>
                 <a:latin typeface="Arial" pitchFamily="34" charset="0"/>
                 <a:ea typeface="Arial" pitchFamily="34" charset="-122"/>
@@ -19193,7 +19193,7 @@
             <a:r>
               <a:rPr lang="en-US" sz="1200" b="1" dirty="0">
                 <a:solidFill>
-                  <a:srgbClr val="7A3A1D"/>
+                  <a:srgbClr val="B4552D"/>
                 </a:solidFill>
                 <a:latin typeface="Arial" pitchFamily="34" charset="0"/>
                 <a:ea typeface="Arial" pitchFamily="34" charset="-122"/>
@@ -19332,7 +19332,7 @@
             <a:r>
               <a:rPr lang="en-US" sz="1200" b="1" dirty="0">
                 <a:solidFill>
-                  <a:srgbClr val="7A3A1D"/>
+                  <a:srgbClr val="B4552D"/>
                 </a:solidFill>
                 <a:latin typeface="Arial" pitchFamily="34" charset="0"/>
                 <a:ea typeface="Arial" pitchFamily="34" charset="-122"/>
@@ -19520,7 +19520,7 @@
             <a:avLst/>
           </a:prstGeom>
           <a:solidFill>
-            <a:srgbClr val="E4E0D3"/>
+            <a:srgbClr val="EADFD6"/>
           </a:solidFill>
           <a:ln/>
         </p:spPr>
@@ -19650,7 +19650,7 @@
             <a:avLst/>
           </a:prstGeom>
           <a:solidFill>
-            <a:srgbClr val="E4E0D3"/>
+            <a:srgbClr val="EADFD6"/>
           </a:solidFill>
           <a:ln/>
         </p:spPr>
@@ -20010,7 +20010,7 @@
             <a:r>
               <a:rPr lang="en-US" sz="2500" b="1" dirty="0">
                 <a:solidFill>
-                  <a:srgbClr val="7A3A1D"/>
+                  <a:srgbClr val="B4552D"/>
                 </a:solidFill>
                 <a:latin typeface="Microsoft YaHei" pitchFamily="34" charset="0"/>
                 <a:ea typeface="Microsoft YaHei" pitchFamily="34" charset="-122"/>
@@ -20079,7 +20079,7 @@
             <a:avLst/>
           </a:prstGeom>
           <a:solidFill>
-            <a:srgbClr val="E4E0D3"/>
+            <a:srgbClr val="EADFD6"/>
           </a:solidFill>
           <a:ln/>
         </p:spPr>
@@ -20103,7 +20103,7 @@
           </a:solidFill>
           <a:ln w="17780">
             <a:solidFill>
-              <a:srgbClr val="7A3A1D"/>
+              <a:srgbClr val="B4552D"/>
             </a:solidFill>
             <a:prstDash val="solid"/>
           </a:ln>
@@ -20136,7 +20136,7 @@
             <a:r>
               <a:rPr lang="en-US" sz="1500" b="1" dirty="0">
                 <a:solidFill>
-                  <a:srgbClr val="7A3A1D"/>
+                  <a:srgbClr val="B4552D"/>
                 </a:solidFill>
                 <a:latin typeface="Arial" pitchFamily="34" charset="0"/>
                 <a:ea typeface="Arial" pitchFamily="34" charset="-122"/>
@@ -20175,7 +20175,7 @@
             <a:r>
               <a:rPr lang="en-US" sz="1400" b="1" dirty="0">
                 <a:solidFill>
-                  <a:srgbClr val="7A3A1D"/>
+                  <a:srgbClr val="B4552D"/>
                 </a:solidFill>
                 <a:latin typeface="Microsoft YaHei" pitchFamily="34" charset="0"/>
                 <a:ea typeface="Microsoft YaHei" pitchFamily="34" charset="-122"/>
@@ -20282,7 +20282,7 @@
           </a:solidFill>
           <a:ln w="17780">
             <a:solidFill>
-              <a:srgbClr val="7A3A1D"/>
+              <a:srgbClr val="B4552D"/>
             </a:solidFill>
             <a:prstDash val="solid"/>
           </a:ln>
@@ -20315,7 +20315,7 @@
             <a:r>
               <a:rPr lang="en-US" sz="1500" b="1" dirty="0">
                 <a:solidFill>
-                  <a:srgbClr val="7A3A1D"/>
+                  <a:srgbClr val="B4552D"/>
                 </a:solidFill>
                 <a:latin typeface="Arial" pitchFamily="34" charset="0"/>
                 <a:ea typeface="Arial" pitchFamily="34" charset="-122"/>
@@ -20354,7 +20354,7 @@
             <a:r>
               <a:rPr lang="en-US" sz="1400" b="1" dirty="0">
                 <a:solidFill>
-                  <a:srgbClr val="7A3A1D"/>
+                  <a:srgbClr val="B4552D"/>
                 </a:solidFill>
                 <a:latin typeface="Microsoft YaHei" pitchFamily="34" charset="0"/>
                 <a:ea typeface="Microsoft YaHei" pitchFamily="34" charset="-122"/>
@@ -20495,7 +20495,7 @@
           </a:solidFill>
           <a:ln w="17780">
             <a:solidFill>
-              <a:srgbClr val="7A3A1D"/>
+              <a:srgbClr val="B4552D"/>
             </a:solidFill>
             <a:prstDash val="solid"/>
           </a:ln>
@@ -20528,7 +20528,7 @@
             <a:r>
               <a:rPr lang="en-US" sz="1500" b="1" dirty="0">
                 <a:solidFill>
-                  <a:srgbClr val="7A3A1D"/>
+                  <a:srgbClr val="B4552D"/>
                 </a:solidFill>
                 <a:latin typeface="Arial" pitchFamily="34" charset="0"/>
                 <a:ea typeface="Arial" pitchFamily="34" charset="-122"/>
@@ -20567,7 +20567,7 @@
             <a:r>
               <a:rPr lang="en-US" sz="1400" b="1" dirty="0">
                 <a:solidFill>
-                  <a:srgbClr val="7A3A1D"/>
+                  <a:srgbClr val="B4552D"/>
                 </a:solidFill>
                 <a:latin typeface="Microsoft YaHei" pitchFamily="34" charset="0"/>
                 <a:ea typeface="Microsoft YaHei" pitchFamily="34" charset="-122"/>
@@ -20738,7 +20738,7 @@
             <a:avLst/>
           </a:prstGeom>
           <a:solidFill>
-            <a:srgbClr val="7A3A1D"/>
+            <a:srgbClr val="D97757"/>
           </a:solidFill>
           <a:ln/>
         </p:spPr>
@@ -20770,7 +20770,7 @@
             <a:r>
               <a:rPr lang="en-US" sz="3600" b="1" dirty="0">
                 <a:solidFill>
-                  <a:srgbClr val="7A3A1D"/>
+                  <a:srgbClr val="B4552D"/>
                 </a:solidFill>
                 <a:latin typeface="Arial" pitchFamily="34" charset="0"/>
                 <a:ea typeface="Arial" pitchFamily="34" charset="-122"/>
@@ -20903,7 +20903,7 @@
             <a:avLst/>
           </a:prstGeom>
           <a:solidFill>
-            <a:srgbClr val="7A3A1D"/>
+            <a:srgbClr val="D97757"/>
           </a:solidFill>
           <a:ln/>
         </p:spPr>
@@ -20935,7 +20935,7 @@
             <a:r>
               <a:rPr lang="en-US" sz="3600" b="1" dirty="0">
                 <a:solidFill>
-                  <a:srgbClr val="7A3A1D"/>
+                  <a:srgbClr val="B4552D"/>
                 </a:solidFill>
                 <a:latin typeface="Arial" pitchFamily="34" charset="0"/>
                 <a:ea typeface="Arial" pitchFamily="34" charset="-122"/>
@@ -21433,7 +21433,7 @@
             <a:r>
               <a:rPr lang="en-US" sz="9600" b="1" dirty="0">
                 <a:solidFill>
-                  <a:srgbClr val="F3E3D8"/>
+                  <a:srgbClr val="F7E7DE"/>
                 </a:solidFill>
                 <a:latin typeface="Arial" pitchFamily="34" charset="0"/>
                 <a:ea typeface="Arial" pitchFamily="34" charset="-122"/>
@@ -21531,7 +21531,7 @@
             <a:r>
               <a:rPr lang="en-US" sz="3000" b="1" dirty="0">
                 <a:solidFill>
-                  <a:srgbClr val="7A3A1D"/>
+                  <a:srgbClr val="B4552D"/>
                 </a:solidFill>
                 <a:latin typeface="Microsoft YaHei" pitchFamily="34" charset="0"/>
                 <a:ea typeface="Microsoft YaHei" pitchFamily="34" charset="-122"/>
@@ -21600,7 +21600,7 @@
             <a:avLst/>
           </a:prstGeom>
           <a:solidFill>
-            <a:srgbClr val="E4E0D3"/>
+            <a:srgbClr val="EADFD6"/>
           </a:solidFill>
           <a:ln/>
         </p:spPr>
@@ -21632,7 +21632,7 @@
             <a:r>
               <a:rPr lang="en-US" sz="1400" b="1" dirty="0">
                 <a:solidFill>
-                  <a:srgbClr val="7A3A1D"/>
+                  <a:srgbClr val="B4552D"/>
                 </a:solidFill>
                 <a:latin typeface="Microsoft YaHei" pitchFamily="34" charset="0"/>
                 <a:ea typeface="Microsoft YaHei" pitchFamily="34" charset="-122"/>
@@ -21701,7 +21701,7 @@
             <a:avLst/>
           </a:prstGeom>
           <a:solidFill>
-            <a:srgbClr val="E4E0D3"/>
+            <a:srgbClr val="EADFD6"/>
           </a:solidFill>
           <a:ln/>
         </p:spPr>
@@ -21733,7 +21733,7 @@
             <a:r>
               <a:rPr lang="en-US" sz="1400" b="1" dirty="0">
                 <a:solidFill>
-                  <a:srgbClr val="7A3A1D"/>
+                  <a:srgbClr val="B4552D"/>
                 </a:solidFill>
                 <a:latin typeface="Microsoft YaHei" pitchFamily="34" charset="0"/>
                 <a:ea typeface="Microsoft YaHei" pitchFamily="34" charset="-122"/>
@@ -21802,7 +21802,7 @@
             <a:avLst/>
           </a:prstGeom>
           <a:solidFill>
-            <a:srgbClr val="E4E0D3"/>
+            <a:srgbClr val="EADFD6"/>
           </a:solidFill>
           <a:ln/>
         </p:spPr>
@@ -21834,7 +21834,7 @@
             <a:r>
               <a:rPr lang="en-US" sz="1400" b="1" dirty="0">
                 <a:solidFill>
-                  <a:srgbClr val="7A3A1D"/>
+                  <a:srgbClr val="B4552D"/>
                 </a:solidFill>
                 <a:latin typeface="Microsoft YaHei" pitchFamily="34" charset="0"/>
                 <a:ea typeface="Microsoft YaHei" pitchFamily="34" charset="-122"/>

--- a/examples/ai-2030-slides/ai2030_talk.pptx
+++ b/examples/ai-2030-slides/ai2030_talk.pptx
@@ -2692,9 +2692,33 @@
           <a:ln/>
         </p:spPr>
       </p:sp>
-      <p:sp>
-        <p:nvSpPr>
-          <p:cNvPr id="4" name="Text 1"/>
+      <p:pic>
+        <p:nvPicPr>
+          <p:cNvPr id="4" name="Image 1" descr="assets/bg_block.png">    </p:cNvPr>
+          <p:cNvPicPr>
+            <a:picLocks noChangeAspect="1"/>
+          </p:cNvPicPr>
+          <p:nvPr/>
+        </p:nvPicPr>
+        <p:blipFill>
+          <a:blip r:embed="rId2"/>
+          <a:stretch>
+            <a:fillRect/>
+          </a:stretch>
+        </p:blipFill>
+        <p:spPr>
+          <a:xfrm>
+            <a:off x="0" y="0"/>
+            <a:ext cx="4133088" cy="6858000"/>
+          </a:xfrm>
+          <a:prstGeom prst="rect">
+            <a:avLst/>
+          </a:prstGeom>
+        </p:spPr>
+      </p:pic>
+      <p:sp>
+        <p:nvSpPr>
+          <p:cNvPr id="5" name="Text 1"/>
           <p:cNvSpPr/>
           <p:nvPr/>
         </p:nvSpPr>
@@ -2733,7 +2757,7 @@
       </p:sp>
       <p:sp>
         <p:nvSpPr>
-          <p:cNvPr id="5" name="Text 2"/>
+          <p:cNvPr id="6" name="Text 2"/>
           <p:cNvSpPr/>
           <p:nvPr/>
         </p:nvSpPr>
@@ -2772,7 +2796,7 @@
       </p:sp>
       <p:sp>
         <p:nvSpPr>
-          <p:cNvPr id="6" name="Text 3"/>
+          <p:cNvPr id="7" name="Text 3"/>
           <p:cNvSpPr/>
           <p:nvPr/>
         </p:nvSpPr>
@@ -2839,7 +2863,7 @@
       </p:sp>
       <p:sp>
         <p:nvSpPr>
-          <p:cNvPr id="7" name="Text 4"/>
+          <p:cNvPr id="8" name="Text 4"/>
           <p:cNvSpPr/>
           <p:nvPr/>
         </p:nvSpPr>
@@ -2878,7 +2902,7 @@
       </p:sp>
       <p:sp>
         <p:nvSpPr>
-          <p:cNvPr id="8" name="Text 5"/>
+          <p:cNvPr id="9" name="Text 5"/>
           <p:cNvSpPr/>
           <p:nvPr/>
         </p:nvSpPr>
@@ -2959,7 +2983,7 @@
       </p:sp>
       <p:sp>
         <p:nvSpPr>
-          <p:cNvPr id="9" name="Text 6"/>
+          <p:cNvPr id="10" name="Text 6"/>
           <p:cNvSpPr/>
           <p:nvPr/>
         </p:nvSpPr>
@@ -3055,7 +3079,7 @@
       </p:sp>
       <p:sp>
         <p:nvSpPr>
-          <p:cNvPr id="10" name="Shape 7"/>
+          <p:cNvPr id="11" name="Shape 7"/>
           <p:cNvSpPr/>
           <p:nvPr/>
         </p:nvSpPr>
@@ -3075,7 +3099,7 @@
       </p:sp>
       <p:sp>
         <p:nvSpPr>
-          <p:cNvPr id="11" name="Text 8"/>
+          <p:cNvPr id="12" name="Text 8"/>
           <p:cNvSpPr/>
           <p:nvPr/>
         </p:nvSpPr>
@@ -3114,7 +3138,7 @@
       </p:sp>
       <p:sp>
         <p:nvSpPr>
-          <p:cNvPr id="12" name="Shape 9"/>
+          <p:cNvPr id="13" name="Shape 9"/>
           <p:cNvSpPr/>
           <p:nvPr/>
         </p:nvSpPr>
@@ -3134,7 +3158,7 @@
       </p:sp>
       <p:sp>
         <p:nvSpPr>
-          <p:cNvPr id="13" name="Text 10"/>
+          <p:cNvPr id="14" name="Text 10"/>
           <p:cNvSpPr/>
           <p:nvPr/>
         </p:nvSpPr>
@@ -3173,7 +3197,7 @@
       </p:sp>
       <p:sp>
         <p:nvSpPr>
-          <p:cNvPr id="14" name="Text 11"/>
+          <p:cNvPr id="15" name="Text 11"/>
           <p:cNvSpPr/>
           <p:nvPr/>
         </p:nvSpPr>

--- a/examples/ai-2030-slides/ai2030_talk.pptx
+++ b/examples/ai-2030-slides/ai2030_talk.pptx
@@ -2716,9 +2716,33 @@
           </a:prstGeom>
         </p:spPr>
       </p:pic>
-      <p:sp>
-        <p:nvSpPr>
-          <p:cNvPr id="5" name="Text 1"/>
+      <p:pic>
+        <p:nvPicPr>
+          <p:cNvPr id="5" name="Image 2" descr="assets/claude_mark.png">    </p:cNvPr>
+          <p:cNvPicPr>
+            <a:picLocks noChangeAspect="1"/>
+          </p:cNvPicPr>
+          <p:nvPr/>
+        </p:nvPicPr>
+        <p:blipFill>
+          <a:blip r:embed="rId3"/>
+          <a:stretch>
+            <a:fillRect/>
+          </a:stretch>
+        </p:blipFill>
+        <p:spPr>
+          <a:xfrm>
+            <a:off x="566928" y="566928"/>
+            <a:ext cx="1499787" cy="1371600"/>
+          </a:xfrm>
+          <a:prstGeom prst="rect">
+            <a:avLst/>
+          </a:prstGeom>
+        </p:spPr>
+      </p:pic>
+      <p:sp>
+        <p:nvSpPr>
+          <p:cNvPr id="6" name="Text 1"/>
           <p:cNvSpPr/>
           <p:nvPr/>
         </p:nvSpPr>
@@ -2757,7 +2781,7 @@
       </p:sp>
       <p:sp>
         <p:nvSpPr>
-          <p:cNvPr id="6" name="Text 2"/>
+          <p:cNvPr id="7" name="Text 2"/>
           <p:cNvSpPr/>
           <p:nvPr/>
         </p:nvSpPr>
@@ -2796,7 +2820,7 @@
       </p:sp>
       <p:sp>
         <p:nvSpPr>
-          <p:cNvPr id="7" name="Text 3"/>
+          <p:cNvPr id="8" name="Text 3"/>
           <p:cNvSpPr/>
           <p:nvPr/>
         </p:nvSpPr>
@@ -2863,7 +2887,7 @@
       </p:sp>
       <p:sp>
         <p:nvSpPr>
-          <p:cNvPr id="8" name="Text 4"/>
+          <p:cNvPr id="9" name="Text 4"/>
           <p:cNvSpPr/>
           <p:nvPr/>
         </p:nvSpPr>
@@ -2902,7 +2926,7 @@
       </p:sp>
       <p:sp>
         <p:nvSpPr>
-          <p:cNvPr id="9" name="Text 5"/>
+          <p:cNvPr id="10" name="Text 5"/>
           <p:cNvSpPr/>
           <p:nvPr/>
         </p:nvSpPr>
@@ -2983,7 +3007,7 @@
       </p:sp>
       <p:sp>
         <p:nvSpPr>
-          <p:cNvPr id="10" name="Text 6"/>
+          <p:cNvPr id="11" name="Text 6"/>
           <p:cNvSpPr/>
           <p:nvPr/>
         </p:nvSpPr>
@@ -3079,7 +3103,7 @@
       </p:sp>
       <p:sp>
         <p:nvSpPr>
-          <p:cNvPr id="11" name="Shape 7"/>
+          <p:cNvPr id="12" name="Shape 7"/>
           <p:cNvSpPr/>
           <p:nvPr/>
         </p:nvSpPr>
@@ -3099,7 +3123,7 @@
       </p:sp>
       <p:sp>
         <p:nvSpPr>
-          <p:cNvPr id="12" name="Text 8"/>
+          <p:cNvPr id="13" name="Text 8"/>
           <p:cNvSpPr/>
           <p:nvPr/>
         </p:nvSpPr>
@@ -3138,7 +3162,7 @@
       </p:sp>
       <p:sp>
         <p:nvSpPr>
-          <p:cNvPr id="13" name="Shape 9"/>
+          <p:cNvPr id="14" name="Shape 9"/>
           <p:cNvSpPr/>
           <p:nvPr/>
         </p:nvSpPr>
@@ -3158,7 +3182,7 @@
       </p:sp>
       <p:sp>
         <p:nvSpPr>
-          <p:cNvPr id="14" name="Text 10"/>
+          <p:cNvPr id="15" name="Text 10"/>
           <p:cNvSpPr/>
           <p:nvPr/>
         </p:nvSpPr>
@@ -3197,7 +3221,7 @@
       </p:sp>
       <p:sp>
         <p:nvSpPr>
-          <p:cNvPr id="15" name="Text 11"/>
+          <p:cNvPr id="16" name="Text 11"/>
           <p:cNvSpPr/>
           <p:nvPr/>
         </p:nvSpPr>
